--- a/ai101/slides/week-03.pptx
+++ b/ai101/slides/week-03.pptx
@@ -12,6 +12,8 @@
     <p:sldId id="260" r:id="rId11"/>
     <p:sldId id="261" r:id="rId12"/>
     <p:sldId id="262" r:id="rId13"/>
+    <p:sldId id="263" r:id="rId14"/>
+    <p:sldId id="264" r:id="rId15"/>
   </p:sldIdLst>
   <p:sldSz cx="12191695" cy="6858000" type="screen4x3"/>
   <p:notesSz cx="6858000" cy="9144000"/>
@@ -3296,6 +3298,14 @@
 <file path=ppt/slides/slide3.xml><?xml version="1.0" encoding="utf-8"?>
 <p:sld xmlns:a="http://schemas.openxmlformats.org/drawingml/2006/main" xmlns:p="http://schemas.openxmlformats.org/presentationml/2006/main" xmlns:r="http://schemas.openxmlformats.org/officeDocument/2006/relationships">
   <p:cSld>
+    <p:bg>
+      <p:bgPr>
+        <a:solidFill>
+          <a:srgbClr val="102127"/>
+        </a:solidFill>
+        <a:effectLst/>
+      </p:bgPr>
+    </p:bg>
     <p:spTree>
       <p:nvGrpSpPr>
         <p:cNvPr id="1" name=""/>
@@ -3305,40 +3315,14 @@
       <p:grpSpPr/>
       <p:sp>
         <p:nvSpPr>
-          <p:cNvPr id="2" name="Title 1"/>
-          <p:cNvSpPr>
-            <a:spLocks noGrp="1"/>
-          </p:cNvSpPr>
-          <p:nvPr>
-            <p:ph type="title"/>
-          </p:nvPr>
-        </p:nvSpPr>
-        <p:spPr/>
-        <p:txBody>
-          <a:bodyPr/>
-          <a:lstStyle/>
-          <a:p>
-            <a:r>
-              <a:rPr sz="3800" b="1">
-                <a:solidFill>
-                  <a:srgbClr val="1F2A37"/>
-                </a:solidFill>
-              </a:rPr>
-              <a:t>An API is a front desk</a:t>
-            </a:r>
-          </a:p>
-        </p:txBody>
-      </p:sp>
-      <p:sp>
-        <p:nvSpPr>
-          <p:cNvPr id="3" name="TextBox 2"/>
+          <p:cNvPr id="2" name="TextBox 1"/>
           <p:cNvSpPr txBox="1"/>
           <p:nvPr/>
         </p:nvSpPr>
         <p:spPr>
           <a:xfrm>
-            <a:off x="822960" y="1828800"/>
-            <a:ext cx="10515600" cy="4206240"/>
+            <a:off x="502920" y="274320"/>
+            <a:ext cx="11155680" cy="731520"/>
           </a:xfrm>
           <a:prstGeom prst="rect">
             <a:avLst/>
@@ -3346,53 +3330,166 @@
           <a:noFill/>
         </p:spPr>
         <p:txBody>
-          <a:bodyPr wrap="square">
+          <a:bodyPr wrap="none">
             <a:spAutoFit/>
           </a:bodyPr>
           <a:lstStyle/>
           <a:p>
+            <a:r>
+              <a:rPr sz="2600" b="1">
+                <a:solidFill>
+                  <a:srgbClr val="01AEFD"/>
+                </a:solidFill>
+              </a:rPr>
+              <a:t>Type this into script.js</a:t>
+            </a:r>
+          </a:p>
+        </p:txBody>
+      </p:sp>
+      <p:sp>
+        <p:nvSpPr>
+          <p:cNvPr id="3" name="TextBox 2"/>
+          <p:cNvSpPr txBox="1"/>
+          <p:nvPr/>
+        </p:nvSpPr>
+        <p:spPr>
+          <a:xfrm>
+            <a:off x="502920" y="1051560"/>
+            <a:ext cx="11155680" cy="5394960"/>
+          </a:xfrm>
+          <a:prstGeom prst="rect">
+            <a:avLst/>
+          </a:prstGeom>
+          <a:noFill/>
+        </p:spPr>
+        <p:txBody>
+          <a:bodyPr wrap="none">
+            <a:spAutoFit/>
+          </a:bodyPr>
+          <a:lstStyle/>
+          <a:p>
             <a:pPr>
               <a:spcAft>
-                <a:spcPts val="1400"/>
+                <a:spcPts val="0"/>
               </a:spcAft>
             </a:pPr>
             <a:r>
-              <a:rPr sz="2400">
-                <a:solidFill>
-                  <a:srgbClr val="1F2A37"/>
-                </a:solidFill>
-              </a:rPr>
-              <a:t>• You never go in the kitchen</a:t>
+              <a:rPr sz="1700">
+                <a:solidFill>
+                  <a:srgbClr val="6D8C97"/>
+                </a:solidFill>
+                <a:latin typeface="Consolas"/>
+              </a:rPr>
+              <a:t>   3  </a:t>
+            </a:r>
+            <a:r>
+              <a:rPr sz="1700">
+                <a:solidFill>
+                  <a:srgbClr val="7FE0A0"/>
+                </a:solidFill>
+                <a:latin typeface="Consolas"/>
+              </a:rPr>
+              <a:t> </a:t>
             </a:r>
           </a:p>
           <a:p>
             <a:pPr>
               <a:spcAft>
-                <a:spcPts val="1400"/>
+                <a:spcPts val="0"/>
               </a:spcAft>
             </a:pPr>
             <a:r>
-              <a:rPr sz="2400">
-                <a:solidFill>
-                  <a:srgbClr val="1F2A37"/>
-                </a:solidFill>
-              </a:rPr>
-              <a:t>• You ask in the way they expect</a:t>
+              <a:rPr sz="1700">
+                <a:solidFill>
+                  <a:srgbClr val="6D8C97"/>
+                </a:solidFill>
+                <a:latin typeface="Consolas"/>
+              </a:rPr>
+              <a:t>   4  </a:t>
+            </a:r>
+            <a:r>
+              <a:rPr sz="1700">
+                <a:solidFill>
+                  <a:srgbClr val="7FE0A0"/>
+                </a:solidFill>
+                <a:latin typeface="Consolas"/>
+              </a:rPr>
+              <a:t>// Week 3: where the AI lives, and who you are.</a:t>
             </a:r>
           </a:p>
           <a:p>
             <a:pPr>
               <a:spcAft>
-                <a:spcPts val="1400"/>
+                <a:spcPts val="0"/>
               </a:spcAft>
             </a:pPr>
             <a:r>
-              <a:rPr sz="2400">
-                <a:solidFill>
-                  <a:srgbClr val="1F2A37"/>
-                </a:solidFill>
-              </a:rPr>
-              <a:t>• The answer comes back in a shape you can rely on</a:t>
+              <a:rPr sz="1700">
+                <a:solidFill>
+                  <a:srgbClr val="6D8C97"/>
+                </a:solidFill>
+                <a:latin typeface="Consolas"/>
+              </a:rPr>
+              <a:t>   5  </a:t>
+            </a:r>
+            <a:r>
+              <a:rPr sz="1700">
+                <a:solidFill>
+                  <a:srgbClr val="7FE0A0"/>
+                </a:solidFill>
+                <a:latin typeface="Consolas"/>
+              </a:rPr>
+              <a:t>// The key identifies YOU. Two people using one key share one speed limit.</a:t>
+            </a:r>
+          </a:p>
+          <a:p>
+            <a:pPr>
+              <a:spcAft>
+                <a:spcPts val="0"/>
+              </a:spcAft>
+            </a:pPr>
+            <a:r>
+              <a:rPr sz="1700">
+                <a:solidFill>
+                  <a:srgbClr val="6D8C97"/>
+                </a:solidFill>
+                <a:latin typeface="Consolas"/>
+              </a:rPr>
+              <a:t>   6  </a:t>
+            </a:r>
+            <a:r>
+              <a:rPr sz="1700">
+                <a:solidFill>
+                  <a:srgbClr val="7FE0A0"/>
+                </a:solidFill>
+                <a:latin typeface="Consolas"/>
+              </a:rPr>
+              <a:t>const AI_BASE = 'https://ai.tail5091fc.ts.net';</a:t>
+            </a:r>
+          </a:p>
+          <a:p>
+            <a:pPr>
+              <a:spcAft>
+                <a:spcPts val="0"/>
+              </a:spcAft>
+            </a:pPr>
+            <a:r>
+              <a:rPr sz="1700">
+                <a:solidFill>
+                  <a:srgbClr val="6D8C97"/>
+                </a:solidFill>
+                <a:latin typeface="Consolas"/>
+              </a:rPr>
+              <a:t>   7  </a:t>
+            </a:r>
+            <a:r>
+              <a:rPr sz="1700">
+                <a:solidFill>
+                  <a:srgbClr val="7FE0A0"/>
+                </a:solidFill>
+                <a:latin typeface="Consolas"/>
+              </a:rPr>
+              <a:t>const API_KEY = 'sk-class-put-your-own-key-here';</a:t>
             </a:r>
           </a:p>
         </p:txBody>
@@ -3436,7 +3533,7 @@
                   <a:srgbClr val="1F2A37"/>
                 </a:solidFill>
               </a:rPr>
-              <a:t>A request has two parts</a:t>
+              <a:t>An API is a front desk</a:t>
             </a:r>
           </a:p>
         </p:txBody>
@@ -3474,7 +3571,7 @@
                   <a:srgbClr val="1F2A37"/>
                 </a:solidFill>
               </a:rPr>
-              <a:t>• The address: /v1/models</a:t>
+              <a:t>• You never go in the kitchen</a:t>
             </a:r>
           </a:p>
           <a:p>
@@ -3489,7 +3586,22 @@
                   <a:srgbClr val="1F2A37"/>
                 </a:solidFill>
               </a:rPr>
-              <a:t>• The name badge: Authorization: Bearer YOUR_KEY</a:t>
+              <a:t>• You ask in the way they expect</a:t>
+            </a:r>
+          </a:p>
+          <a:p>
+            <a:pPr>
+              <a:spcAft>
+                <a:spcPts val="1400"/>
+              </a:spcAft>
+            </a:pPr>
+            <a:r>
+              <a:rPr sz="2400">
+                <a:solidFill>
+                  <a:srgbClr val="1F2A37"/>
+                </a:solidFill>
+              </a:rPr>
+              <a:t>• The answer comes back in a shape you can rely on</a:t>
             </a:r>
           </a:p>
         </p:txBody>
@@ -3533,7 +3645,7 @@
                   <a:srgbClr val="1F2A37"/>
                 </a:solidFill>
               </a:rPr>
-              <a:t>The internet is slow</a:t>
+              <a:t>A request has two parts</a:t>
             </a:r>
           </a:p>
         </p:txBody>
@@ -3566,12 +3678,12 @@
               </a:spcAft>
             </a:pPr>
             <a:r>
-              <a:rPr sz="2800">
-                <a:solidFill>
-                  <a:srgbClr val="01AEFD"/>
-                </a:solidFill>
-              </a:rPr>
-              <a:t>await = wait here for the answer</a:t>
+              <a:rPr sz="2400">
+                <a:solidFill>
+                  <a:srgbClr val="1F2A37"/>
+                </a:solidFill>
+              </a:rPr>
+              <a:t>• The address: /v1/models</a:t>
             </a:r>
           </a:p>
           <a:p>
@@ -3586,22 +3698,7 @@
                   <a:srgbClr val="1F2A37"/>
                 </a:solidFill>
               </a:rPr>
-              <a:t>• Without await you carry on with nothing</a:t>
-            </a:r>
-          </a:p>
-          <a:p>
-            <a:pPr>
-              <a:spcAft>
-                <a:spcPts val="1400"/>
-              </a:spcAft>
-            </a:pPr>
-            <a:r>
-              <a:rPr sz="2400">
-                <a:solidFill>
-                  <a:srgbClr val="1F2A37"/>
-                </a:solidFill>
-              </a:rPr>
-              <a:t>• async marks a function that can be waited for</a:t>
+              <a:t>• The name badge: Authorization: Bearer YOUR_KEY</a:t>
             </a:r>
           </a:p>
         </p:txBody>
@@ -3617,6 +3714,14 @@
 <file path=ppt/slides/slide6.xml><?xml version="1.0" encoding="utf-8"?>
 <p:sld xmlns:a="http://schemas.openxmlformats.org/drawingml/2006/main" xmlns:p="http://schemas.openxmlformats.org/presentationml/2006/main" xmlns:r="http://schemas.openxmlformats.org/officeDocument/2006/relationships">
   <p:cSld>
+    <p:bg>
+      <p:bgPr>
+        <a:solidFill>
+          <a:srgbClr val="102127"/>
+        </a:solidFill>
+        <a:effectLst/>
+      </p:bgPr>
+    </p:bg>
     <p:spTree>
       <p:nvGrpSpPr>
         <p:cNvPr id="1" name=""/>
@@ -3626,6 +3731,380 @@
       <p:grpSpPr/>
       <p:sp>
         <p:nvSpPr>
+          <p:cNvPr id="2" name="TextBox 1"/>
+          <p:cNvSpPr txBox="1"/>
+          <p:nvPr/>
+        </p:nvSpPr>
+        <p:spPr>
+          <a:xfrm>
+            <a:off x="502920" y="274320"/>
+            <a:ext cx="11155680" cy="731520"/>
+          </a:xfrm>
+          <a:prstGeom prst="rect">
+            <a:avLst/>
+          </a:prstGeom>
+          <a:noFill/>
+        </p:spPr>
+        <p:txBody>
+          <a:bodyPr wrap="none">
+            <a:spAutoFit/>
+          </a:bodyPr>
+          <a:lstStyle/>
+          <a:p>
+            <a:r>
+              <a:rPr sz="2600" b="1">
+                <a:solidFill>
+                  <a:srgbClr val="01AEFD"/>
+                </a:solidFill>
+              </a:rPr>
+              <a:t>Type this into script.js</a:t>
+            </a:r>
+          </a:p>
+        </p:txBody>
+      </p:sp>
+      <p:sp>
+        <p:nvSpPr>
+          <p:cNvPr id="3" name="TextBox 2"/>
+          <p:cNvSpPr txBox="1"/>
+          <p:nvPr/>
+        </p:nvSpPr>
+        <p:spPr>
+          <a:xfrm>
+            <a:off x="502920" y="1051560"/>
+            <a:ext cx="11155680" cy="5394960"/>
+          </a:xfrm>
+          <a:prstGeom prst="rect">
+            <a:avLst/>
+          </a:prstGeom>
+          <a:noFill/>
+        </p:spPr>
+        <p:txBody>
+          <a:bodyPr wrap="none">
+            <a:spAutoFit/>
+          </a:bodyPr>
+          <a:lstStyle/>
+          <a:p>
+            <a:pPr>
+              <a:spcAft>
+                <a:spcPts val="0"/>
+              </a:spcAft>
+            </a:pPr>
+            <a:r>
+              <a:rPr sz="1400">
+                <a:solidFill>
+                  <a:srgbClr val="6D8C97"/>
+                </a:solidFill>
+                <a:latin typeface="Consolas"/>
+              </a:rPr>
+              <a:t>  21  </a:t>
+            </a:r>
+            <a:r>
+              <a:rPr sz="1400">
+                <a:solidFill>
+                  <a:srgbClr val="DCECEF"/>
+                </a:solidFill>
+                <a:latin typeface="Consolas"/>
+              </a:rPr>
+              <a:t> </a:t>
+            </a:r>
+          </a:p>
+          <a:p>
+            <a:pPr>
+              <a:spcAft>
+                <a:spcPts val="0"/>
+              </a:spcAft>
+            </a:pPr>
+            <a:r>
+              <a:rPr sz="1400">
+                <a:solidFill>
+                  <a:srgbClr val="6D8C97"/>
+                </a:solidFill>
+                <a:latin typeface="Consolas"/>
+              </a:rPr>
+              <a:t>  22  </a:t>
+            </a:r>
+            <a:r>
+              <a:rPr sz="1400">
+                <a:solidFill>
+                  <a:srgbClr val="7FE0A0"/>
+                </a:solidFill>
+                <a:latin typeface="Consolas"/>
+              </a:rPr>
+              <a:t>// The smallest useful request: what models does this server have?</a:t>
+            </a:r>
+          </a:p>
+          <a:p>
+            <a:pPr>
+              <a:spcAft>
+                <a:spcPts val="0"/>
+              </a:spcAft>
+            </a:pPr>
+            <a:r>
+              <a:rPr sz="1400">
+                <a:solidFill>
+                  <a:srgbClr val="6D8C97"/>
+                </a:solidFill>
+                <a:latin typeface="Consolas"/>
+              </a:rPr>
+              <a:t>  23  </a:t>
+            </a:r>
+            <a:r>
+              <a:rPr sz="1400">
+                <a:solidFill>
+                  <a:srgbClr val="7FE0A0"/>
+                </a:solidFill>
+                <a:latin typeface="Consolas"/>
+              </a:rPr>
+              <a:t>// 'async' means this function does something slow and can be waited for.</a:t>
+            </a:r>
+          </a:p>
+          <a:p>
+            <a:pPr>
+              <a:spcAft>
+                <a:spcPts val="0"/>
+              </a:spcAft>
+            </a:pPr>
+            <a:r>
+              <a:rPr sz="1400">
+                <a:solidFill>
+                  <a:srgbClr val="6D8C97"/>
+                </a:solidFill>
+                <a:latin typeface="Consolas"/>
+              </a:rPr>
+              <a:t>  24  </a:t>
+            </a:r>
+            <a:r>
+              <a:rPr sz="1400">
+                <a:solidFill>
+                  <a:srgbClr val="7FE0A0"/>
+                </a:solidFill>
+                <a:latin typeface="Consolas"/>
+              </a:rPr>
+              <a:t>async function listModels() {</a:t>
+            </a:r>
+          </a:p>
+          <a:p>
+            <a:pPr>
+              <a:spcAft>
+                <a:spcPts val="0"/>
+              </a:spcAft>
+            </a:pPr>
+            <a:r>
+              <a:rPr sz="1400">
+                <a:solidFill>
+                  <a:srgbClr val="6D8C97"/>
+                </a:solidFill>
+                <a:latin typeface="Consolas"/>
+              </a:rPr>
+              <a:t>  25  </a:t>
+            </a:r>
+            <a:r>
+              <a:rPr sz="1400">
+                <a:solidFill>
+                  <a:srgbClr val="7FE0A0"/>
+                </a:solidFill>
+                <a:latin typeface="Consolas"/>
+              </a:rPr>
+              <a:t>  const res = await fetch(AI_BASE + '/v1/models', {</a:t>
+            </a:r>
+          </a:p>
+          <a:p>
+            <a:pPr>
+              <a:spcAft>
+                <a:spcPts val="0"/>
+              </a:spcAft>
+            </a:pPr>
+            <a:r>
+              <a:rPr sz="1400">
+                <a:solidFill>
+                  <a:srgbClr val="6D8C97"/>
+                </a:solidFill>
+                <a:latin typeface="Consolas"/>
+              </a:rPr>
+              <a:t>  26  </a:t>
+            </a:r>
+            <a:r>
+              <a:rPr sz="1400">
+                <a:solidFill>
+                  <a:srgbClr val="7FE0A0"/>
+                </a:solidFill>
+                <a:latin typeface="Consolas"/>
+              </a:rPr>
+              <a:t>    headers: { 'Authorization': 'Bearer ' + API_KEY }</a:t>
+            </a:r>
+          </a:p>
+          <a:p>
+            <a:pPr>
+              <a:spcAft>
+                <a:spcPts val="0"/>
+              </a:spcAft>
+            </a:pPr>
+            <a:r>
+              <a:rPr sz="1400">
+                <a:solidFill>
+                  <a:srgbClr val="6D8C97"/>
+                </a:solidFill>
+                <a:latin typeface="Consolas"/>
+              </a:rPr>
+              <a:t>  27  </a:t>
+            </a:r>
+            <a:r>
+              <a:rPr sz="1400">
+                <a:solidFill>
+                  <a:srgbClr val="7FE0A0"/>
+                </a:solidFill>
+                <a:latin typeface="Consolas"/>
+              </a:rPr>
+              <a:t>  });</a:t>
+            </a:r>
+          </a:p>
+          <a:p>
+            <a:pPr>
+              <a:spcAft>
+                <a:spcPts val="0"/>
+              </a:spcAft>
+            </a:pPr>
+            <a:r>
+              <a:rPr sz="1400">
+                <a:solidFill>
+                  <a:srgbClr val="6D8C97"/>
+                </a:solidFill>
+                <a:latin typeface="Consolas"/>
+              </a:rPr>
+              <a:t>  28  </a:t>
+            </a:r>
+            <a:r>
+              <a:rPr sz="1400">
+                <a:solidFill>
+                  <a:srgbClr val="7FE0A0"/>
+                </a:solidFill>
+                <a:latin typeface="Consolas"/>
+              </a:rPr>
+              <a:t>  const data = await res.json();   // the answer arrives as text; this reads it</a:t>
+            </a:r>
+          </a:p>
+          <a:p>
+            <a:pPr>
+              <a:spcAft>
+                <a:spcPts val="0"/>
+              </a:spcAft>
+            </a:pPr>
+            <a:r>
+              <a:rPr sz="1400">
+                <a:solidFill>
+                  <a:srgbClr val="6D8C97"/>
+                </a:solidFill>
+                <a:latin typeface="Consolas"/>
+              </a:rPr>
+              <a:t>  29  </a:t>
+            </a:r>
+            <a:r>
+              <a:rPr sz="1400">
+                <a:solidFill>
+                  <a:srgbClr val="7FE0A0"/>
+                </a:solidFill>
+                <a:latin typeface="Consolas"/>
+              </a:rPr>
+              <a:t>  console.log('The server offers:', data.data);</a:t>
+            </a:r>
+          </a:p>
+          <a:p>
+            <a:pPr>
+              <a:spcAft>
+                <a:spcPts val="0"/>
+              </a:spcAft>
+            </a:pPr>
+            <a:r>
+              <a:rPr sz="1400">
+                <a:solidFill>
+                  <a:srgbClr val="6D8C97"/>
+                </a:solidFill>
+                <a:latin typeface="Consolas"/>
+              </a:rPr>
+              <a:t>  30  </a:t>
+            </a:r>
+            <a:r>
+              <a:rPr sz="1400">
+                <a:solidFill>
+                  <a:srgbClr val="7FE0A0"/>
+                </a:solidFill>
+                <a:latin typeface="Consolas"/>
+              </a:rPr>
+              <a:t>}</a:t>
+            </a:r>
+          </a:p>
+          <a:p>
+            <a:pPr>
+              <a:spcAft>
+                <a:spcPts val="0"/>
+              </a:spcAft>
+            </a:pPr>
+            <a:r>
+              <a:rPr sz="1400">
+                <a:solidFill>
+                  <a:srgbClr val="6D8C97"/>
+                </a:solidFill>
+                <a:latin typeface="Consolas"/>
+              </a:rPr>
+              <a:t>  31  </a:t>
+            </a:r>
+            <a:r>
+              <a:rPr sz="1400">
+                <a:solidFill>
+                  <a:srgbClr val="7FE0A0"/>
+                </a:solidFill>
+                <a:latin typeface="Consolas"/>
+              </a:rPr>
+              <a:t> </a:t>
+            </a:r>
+          </a:p>
+          <a:p>
+            <a:pPr>
+              <a:spcAft>
+                <a:spcPts val="0"/>
+              </a:spcAft>
+            </a:pPr>
+            <a:r>
+              <a:rPr sz="1400">
+                <a:solidFill>
+                  <a:srgbClr val="6D8C97"/>
+                </a:solidFill>
+                <a:latin typeface="Consolas"/>
+              </a:rPr>
+              <a:t>  32  </a:t>
+            </a:r>
+            <a:r>
+              <a:rPr sz="1400">
+                <a:solidFill>
+                  <a:srgbClr val="7FE0A0"/>
+                </a:solidFill>
+                <a:latin typeface="Consolas"/>
+              </a:rPr>
+              <a:t>listModels();</a:t>
+            </a:r>
+          </a:p>
+        </p:txBody>
+      </p:sp>
+    </p:spTree>
+  </p:cSld>
+  <p:clrMapOvr>
+    <a:masterClrMapping/>
+  </p:clrMapOvr>
+</p:sld>
+</file>
+
+<file path=ppt/slides/slide7.xml><?xml version="1.0" encoding="utf-8"?>
+<p:sld xmlns:a="http://schemas.openxmlformats.org/drawingml/2006/main" xmlns:p="http://schemas.openxmlformats.org/presentationml/2006/main" xmlns:r="http://schemas.openxmlformats.org/officeDocument/2006/relationships">
+  <p:cSld>
+    <p:spTree>
+      <p:nvGrpSpPr>
+        <p:cNvPr id="1" name=""/>
+        <p:cNvGrpSpPr/>
+        <p:nvPr/>
+      </p:nvGrpSpPr>
+      <p:grpSpPr/>
+      <p:sp>
+        <p:nvSpPr>
           <p:cNvPr id="2" name="Title 1"/>
           <p:cNvSpPr>
             <a:spLocks noGrp="1"/>
@@ -3645,7 +4124,7 @@
                   <a:srgbClr val="1F2A37"/>
                 </a:solidFill>
               </a:rPr>
-              <a:t>Status codes</a:t>
+              <a:t>The internet is slow</a:t>
             </a:r>
           </a:p>
         </p:txBody>
@@ -3678,12 +4157,12 @@
               </a:spcAft>
             </a:pPr>
             <a:r>
-              <a:rPr sz="2400">
-                <a:solidFill>
-                  <a:srgbClr val="1F2A37"/>
-                </a:solidFill>
-              </a:rPr>
-              <a:t>• 200 - fine, here you go</a:t>
+              <a:rPr sz="2800">
+                <a:solidFill>
+                  <a:srgbClr val="01AEFD"/>
+                </a:solidFill>
+              </a:rPr>
+              <a:t>await = wait here for the answer</a:t>
             </a:r>
           </a:p>
           <a:p>
@@ -3698,7 +4177,7 @@
                   <a:srgbClr val="1F2A37"/>
                 </a:solidFill>
               </a:rPr>
-              <a:t>• 401 - I do not believe who you say you are</a:t>
+              <a:t>• Without await you carry on with nothing</a:t>
             </a:r>
           </a:p>
           <a:p>
@@ -3713,7 +4192,7 @@
                   <a:srgbClr val="1F2A37"/>
                 </a:solidFill>
               </a:rPr>
-              <a:t>• 404 - no such thing here</a:t>
+              <a:t>• async marks a function that can be waited for</a:t>
             </a:r>
           </a:p>
         </p:txBody>
@@ -3726,7 +4205,119 @@
 </p:sld>
 </file>
 
-<file path=ppt/slides/slide7.xml><?xml version="1.0" encoding="utf-8"?>
+<file path=ppt/slides/slide8.xml><?xml version="1.0" encoding="utf-8"?>
+<p:sld xmlns:a="http://schemas.openxmlformats.org/drawingml/2006/main" xmlns:p="http://schemas.openxmlformats.org/presentationml/2006/main" xmlns:r="http://schemas.openxmlformats.org/officeDocument/2006/relationships">
+  <p:cSld>
+    <p:spTree>
+      <p:nvGrpSpPr>
+        <p:cNvPr id="1" name=""/>
+        <p:cNvGrpSpPr/>
+        <p:nvPr/>
+      </p:nvGrpSpPr>
+      <p:grpSpPr/>
+      <p:sp>
+        <p:nvSpPr>
+          <p:cNvPr id="2" name="Title 1"/>
+          <p:cNvSpPr>
+            <a:spLocks noGrp="1"/>
+          </p:cNvSpPr>
+          <p:nvPr>
+            <p:ph type="title"/>
+          </p:nvPr>
+        </p:nvSpPr>
+        <p:spPr/>
+        <p:txBody>
+          <a:bodyPr/>
+          <a:lstStyle/>
+          <a:p>
+            <a:r>
+              <a:rPr sz="3800" b="1">
+                <a:solidFill>
+                  <a:srgbClr val="1F2A37"/>
+                </a:solidFill>
+              </a:rPr>
+              <a:t>Status codes</a:t>
+            </a:r>
+          </a:p>
+        </p:txBody>
+      </p:sp>
+      <p:sp>
+        <p:nvSpPr>
+          <p:cNvPr id="3" name="TextBox 2"/>
+          <p:cNvSpPr txBox="1"/>
+          <p:nvPr/>
+        </p:nvSpPr>
+        <p:spPr>
+          <a:xfrm>
+            <a:off x="822960" y="1828800"/>
+            <a:ext cx="10515600" cy="4206240"/>
+          </a:xfrm>
+          <a:prstGeom prst="rect">
+            <a:avLst/>
+          </a:prstGeom>
+          <a:noFill/>
+        </p:spPr>
+        <p:txBody>
+          <a:bodyPr wrap="square">
+            <a:spAutoFit/>
+          </a:bodyPr>
+          <a:lstStyle/>
+          <a:p>
+            <a:pPr>
+              <a:spcAft>
+                <a:spcPts val="1400"/>
+              </a:spcAft>
+            </a:pPr>
+            <a:r>
+              <a:rPr sz="2400">
+                <a:solidFill>
+                  <a:srgbClr val="1F2A37"/>
+                </a:solidFill>
+              </a:rPr>
+              <a:t>• 200 - fine, here you go</a:t>
+            </a:r>
+          </a:p>
+          <a:p>
+            <a:pPr>
+              <a:spcAft>
+                <a:spcPts val="1400"/>
+              </a:spcAft>
+            </a:pPr>
+            <a:r>
+              <a:rPr sz="2400">
+                <a:solidFill>
+                  <a:srgbClr val="1F2A37"/>
+                </a:solidFill>
+              </a:rPr>
+              <a:t>• 401 - I do not believe who you say you are</a:t>
+            </a:r>
+          </a:p>
+          <a:p>
+            <a:pPr>
+              <a:spcAft>
+                <a:spcPts val="1400"/>
+              </a:spcAft>
+            </a:pPr>
+            <a:r>
+              <a:rPr sz="2400">
+                <a:solidFill>
+                  <a:srgbClr val="1F2A37"/>
+                </a:solidFill>
+              </a:rPr>
+              <a:t>• 404 - no such thing here</a:t>
+            </a:r>
+          </a:p>
+        </p:txBody>
+      </p:sp>
+    </p:spTree>
+  </p:cSld>
+  <p:clrMapOvr>
+    <a:masterClrMapping/>
+  </p:clrMapOvr>
+</p:sld>
+</file>
+
+<file path=ppt/slides/slide9.xml><?xml version="1.0" encoding="utf-8"?>
 <p:sld xmlns:a="http://schemas.openxmlformats.org/drawingml/2006/main" xmlns:p="http://schemas.openxmlformats.org/presentationml/2006/main" xmlns:r="http://schemas.openxmlformats.org/officeDocument/2006/relationships">
   <p:cSld>
     <p:spTree>

--- a/ai101/slides/week-03.pptx
+++ b/ai101/slides/week-03.pptx
@@ -14,6 +14,9 @@
     <p:sldId id="262" r:id="rId13"/>
     <p:sldId id="263" r:id="rId14"/>
     <p:sldId id="264" r:id="rId15"/>
+    <p:sldId id="265" r:id="rId16"/>
+    <p:sldId id="266" r:id="rId17"/>
+    <p:sldId id="267" r:id="rId18"/>
   </p:sldIdLst>
   <p:sldSz cx="12191695" cy="6858000" type="screen4x3"/>
   <p:notesSz cx="6858000" cy="9144000"/>
@@ -3168,6 +3171,357 @@
 </p:sld>
 </file>
 
+<file path=ppt/slides/slide10.xml><?xml version="1.0" encoding="utf-8"?>
+<p:sld xmlns:a="http://schemas.openxmlformats.org/drawingml/2006/main" xmlns:p="http://schemas.openxmlformats.org/presentationml/2006/main" xmlns:r="http://schemas.openxmlformats.org/officeDocument/2006/relationships">
+  <p:cSld>
+    <p:spTree>
+      <p:nvGrpSpPr>
+        <p:cNvPr id="1" name=""/>
+        <p:cNvGrpSpPr/>
+        <p:nvPr/>
+      </p:nvGrpSpPr>
+      <p:grpSpPr/>
+      <p:sp>
+        <p:nvSpPr>
+          <p:cNvPr id="2" name="Title 1"/>
+          <p:cNvSpPr>
+            <a:spLocks noGrp="1"/>
+          </p:cNvSpPr>
+          <p:nvPr>
+            <p:ph type="title"/>
+          </p:nvPr>
+        </p:nvSpPr>
+        <p:spPr/>
+        <p:txBody>
+          <a:bodyPr/>
+          <a:lstStyle/>
+          <a:p>
+            <a:r>
+              <a:rPr sz="3800" b="1">
+                <a:solidFill>
+                  <a:srgbClr val="1F2A37"/>
+                </a:solidFill>
+              </a:rPr>
+              <a:t>A key in a web page is public</a:t>
+            </a:r>
+          </a:p>
+        </p:txBody>
+      </p:sp>
+      <p:sp>
+        <p:nvSpPr>
+          <p:cNvPr id="3" name="TextBox 2"/>
+          <p:cNvSpPr txBox="1"/>
+          <p:nvPr/>
+        </p:nvSpPr>
+        <p:spPr>
+          <a:xfrm>
+            <a:off x="822960" y="1828800"/>
+            <a:ext cx="10515600" cy="4206240"/>
+          </a:xfrm>
+          <a:prstGeom prst="rect">
+            <a:avLst/>
+          </a:prstGeom>
+          <a:noFill/>
+        </p:spPr>
+        <p:txBody>
+          <a:bodyPr wrap="square">
+            <a:spAutoFit/>
+          </a:bodyPr>
+          <a:lstStyle/>
+          <a:p>
+            <a:pPr>
+              <a:spcAft>
+                <a:spcPts val="1400"/>
+              </a:spcAft>
+            </a:pPr>
+            <a:r>
+              <a:rPr sz="2400">
+                <a:solidFill>
+                  <a:srgbClr val="1F2A37"/>
+                </a:solidFill>
+              </a:rPr>
+              <a:t>• Anyone who opens the page can read it</a:t>
+            </a:r>
+          </a:p>
+          <a:p>
+            <a:pPr>
+              <a:spcAft>
+                <a:spcPts val="1400"/>
+              </a:spcAft>
+            </a:pPr>
+            <a:r>
+              <a:rPr sz="2400">
+                <a:solidFill>
+                  <a:srgbClr val="1F2A37"/>
+                </a:solidFill>
+              </a:rPr>
+              <a:t>• Fine for a class key: limited, no bill</a:t>
+            </a:r>
+          </a:p>
+          <a:p>
+            <a:pPr>
+              <a:spcAft>
+                <a:spcPts val="1400"/>
+              </a:spcAft>
+            </a:pPr>
+            <a:r>
+              <a:rPr sz="2400">
+                <a:solidFill>
+                  <a:srgbClr val="1F2A37"/>
+                </a:solidFill>
+              </a:rPr>
+              <a:t>• NOT fine for a personal paid key</a:t>
+            </a:r>
+          </a:p>
+          <a:p>
+            <a:pPr>
+              <a:spcAft>
+                <a:spcPts val="1400"/>
+              </a:spcAft>
+            </a:pPr>
+            <a:r>
+              <a:rPr sz="2400">
+                <a:solidFill>
+                  <a:srgbClr val="1F2A37"/>
+                </a:solidFill>
+              </a:rPr>
+              <a:t>• Real apps keep the key on a server</a:t>
+            </a:r>
+          </a:p>
+        </p:txBody>
+      </p:sp>
+    </p:spTree>
+  </p:cSld>
+  <p:clrMapOvr>
+    <a:masterClrMapping/>
+  </p:clrMapOvr>
+</p:sld>
+</file>
+
+<file path=ppt/slides/slide11.xml><?xml version="1.0" encoding="utf-8"?>
+<p:sld xmlns:a="http://schemas.openxmlformats.org/drawingml/2006/main" xmlns:p="http://schemas.openxmlformats.org/presentationml/2006/main" xmlns:r="http://schemas.openxmlformats.org/officeDocument/2006/relationships">
+  <p:cSld>
+    <p:spTree>
+      <p:nvGrpSpPr>
+        <p:cNvPr id="1" name=""/>
+        <p:cNvGrpSpPr/>
+        <p:nvPr/>
+      </p:nvGrpSpPr>
+      <p:grpSpPr/>
+      <p:sp>
+        <p:nvSpPr>
+          <p:cNvPr id="2" name="Title 1"/>
+          <p:cNvSpPr>
+            <a:spLocks noGrp="1"/>
+          </p:cNvSpPr>
+          <p:nvPr>
+            <p:ph type="title"/>
+          </p:nvPr>
+        </p:nvSpPr>
+        <p:spPr/>
+        <p:txBody>
+          <a:bodyPr/>
+          <a:lstStyle/>
+          <a:p>
+            <a:r>
+              <a:rPr sz="3800" b="1">
+                <a:solidFill>
+                  <a:srgbClr val="1F2A37"/>
+                </a:solidFill>
+              </a:rPr>
+              <a:t>Status codes</a:t>
+            </a:r>
+          </a:p>
+        </p:txBody>
+      </p:sp>
+      <p:sp>
+        <p:nvSpPr>
+          <p:cNvPr id="3" name="TextBox 2"/>
+          <p:cNvSpPr txBox="1"/>
+          <p:nvPr/>
+        </p:nvSpPr>
+        <p:spPr>
+          <a:xfrm>
+            <a:off x="822960" y="1828800"/>
+            <a:ext cx="10515600" cy="4206240"/>
+          </a:xfrm>
+          <a:prstGeom prst="rect">
+            <a:avLst/>
+          </a:prstGeom>
+          <a:noFill/>
+        </p:spPr>
+        <p:txBody>
+          <a:bodyPr wrap="square">
+            <a:spAutoFit/>
+          </a:bodyPr>
+          <a:lstStyle/>
+          <a:p>
+            <a:pPr>
+              <a:spcAft>
+                <a:spcPts val="1400"/>
+              </a:spcAft>
+            </a:pPr>
+            <a:r>
+              <a:rPr sz="2400">
+                <a:solidFill>
+                  <a:srgbClr val="1F2A37"/>
+                </a:solidFill>
+              </a:rPr>
+              <a:t>• 200 - fine, here you go</a:t>
+            </a:r>
+          </a:p>
+          <a:p>
+            <a:pPr>
+              <a:spcAft>
+                <a:spcPts val="1400"/>
+              </a:spcAft>
+            </a:pPr>
+            <a:r>
+              <a:rPr sz="2400">
+                <a:solidFill>
+                  <a:srgbClr val="1F2A37"/>
+                </a:solidFill>
+              </a:rPr>
+              <a:t>• 401 - I do not believe who you say you are</a:t>
+            </a:r>
+          </a:p>
+          <a:p>
+            <a:pPr>
+              <a:spcAft>
+                <a:spcPts val="1400"/>
+              </a:spcAft>
+            </a:pPr>
+            <a:r>
+              <a:rPr sz="2400">
+                <a:solidFill>
+                  <a:srgbClr val="1F2A37"/>
+                </a:solidFill>
+              </a:rPr>
+              <a:t>• 404 - no such thing here</a:t>
+            </a:r>
+          </a:p>
+        </p:txBody>
+      </p:sp>
+    </p:spTree>
+  </p:cSld>
+  <p:clrMapOvr>
+    <a:masterClrMapping/>
+  </p:clrMapOvr>
+</p:sld>
+</file>
+
+<file path=ppt/slides/slide12.xml><?xml version="1.0" encoding="utf-8"?>
+<p:sld xmlns:a="http://schemas.openxmlformats.org/drawingml/2006/main" xmlns:p="http://schemas.openxmlformats.org/presentationml/2006/main" xmlns:r="http://schemas.openxmlformats.org/officeDocument/2006/relationships">
+  <p:cSld>
+    <p:spTree>
+      <p:nvGrpSpPr>
+        <p:cNvPr id="1" name=""/>
+        <p:cNvGrpSpPr/>
+        <p:nvPr/>
+      </p:nvGrpSpPr>
+      <p:grpSpPr/>
+      <p:sp>
+        <p:nvSpPr>
+          <p:cNvPr id="2" name="Title 1"/>
+          <p:cNvSpPr>
+            <a:spLocks noGrp="1"/>
+          </p:cNvSpPr>
+          <p:nvPr>
+            <p:ph type="title"/>
+          </p:nvPr>
+        </p:nvSpPr>
+        <p:spPr/>
+        <p:txBody>
+          <a:bodyPr/>
+          <a:lstStyle/>
+          <a:p>
+            <a:r>
+              <a:rPr sz="3800" b="1">
+                <a:solidFill>
+                  <a:srgbClr val="1F2A37"/>
+                </a:solidFill>
+              </a:rPr>
+              <a:t>Watch the Console</a:t>
+            </a:r>
+          </a:p>
+        </p:txBody>
+      </p:sp>
+      <p:sp>
+        <p:nvSpPr>
+          <p:cNvPr id="3" name="TextBox 2"/>
+          <p:cNvSpPr txBox="1"/>
+          <p:nvPr/>
+        </p:nvSpPr>
+        <p:spPr>
+          <a:xfrm>
+            <a:off x="822960" y="1828800"/>
+            <a:ext cx="10515600" cy="4206240"/>
+          </a:xfrm>
+          <a:prstGeom prst="rect">
+            <a:avLst/>
+          </a:prstGeom>
+          <a:noFill/>
+        </p:spPr>
+        <p:txBody>
+          <a:bodyPr wrap="square">
+            <a:spAutoFit/>
+          </a:bodyPr>
+          <a:lstStyle/>
+          <a:p>
+            <a:pPr>
+              <a:spcAft>
+                <a:spcPts val="1400"/>
+              </a:spcAft>
+            </a:pPr>
+            <a:r>
+              <a:rPr sz="2400">
+                <a:solidFill>
+                  <a:srgbClr val="1F2A37"/>
+                </a:solidFill>
+              </a:rPr>
+              <a:t>• -&gt; GET /v1/models</a:t>
+            </a:r>
+          </a:p>
+          <a:p>
+            <a:pPr>
+              <a:spcAft>
+                <a:spcPts val="1400"/>
+              </a:spcAft>
+            </a:pPr>
+            <a:r>
+              <a:rPr sz="2400">
+                <a:solidFill>
+                  <a:srgbClr val="1F2A37"/>
+                </a:solidFill>
+              </a:rPr>
+              <a:t>• &lt;- 200 in 84 ms</a:t>
+            </a:r>
+          </a:p>
+          <a:p>
+            <a:pPr>
+              <a:spcAft>
+                <a:spcPts val="1400"/>
+              </a:spcAft>
+            </a:pPr>
+            <a:r>
+              <a:rPr sz="2400">
+                <a:solidFill>
+                  <a:srgbClr val="1F2A37"/>
+                </a:solidFill>
+              </a:rPr>
+              <a:t>• That is your request leaving and coming back</a:t>
+            </a:r>
+          </a:p>
+        </p:txBody>
+      </p:sp>
+    </p:spTree>
+  </p:cSld>
+  <p:clrMapOvr>
+    <a:masterClrMapping/>
+  </p:clrMapOvr>
+</p:sld>
+</file>
+
 <file path=ppt/slides/slide2.xml><?xml version="1.0" encoding="utf-8"?>
 <p:sld xmlns:a="http://schemas.openxmlformats.org/drawingml/2006/main" xmlns:p="http://schemas.openxmlformats.org/presentationml/2006/main" xmlns:r="http://schemas.openxmlformats.org/officeDocument/2006/relationships">
   <p:cSld>
@@ -3464,7 +3818,7 @@
                 </a:solidFill>
                 <a:latin typeface="Consolas"/>
               </a:rPr>
-              <a:t>const AI_BASE = 'https://ai.tail5091fc.ts.net';</a:t>
+              <a:t>//</a:t>
             </a:r>
           </a:p>
           <a:p>
@@ -3481,6 +3835,81 @@
                 <a:latin typeface="Consolas"/>
               </a:rPr>
               <a:t>   7  </a:t>
+            </a:r>
+            <a:r>
+              <a:rPr sz="1700">
+                <a:solidFill>
+                  <a:srgbClr val="7FE0A0"/>
+                </a:solidFill>
+                <a:latin typeface="Consolas"/>
+              </a:rPr>
+              <a:t>// This address only works on the school network. To run this at home you</a:t>
+            </a:r>
+          </a:p>
+          <a:p>
+            <a:pPr>
+              <a:spcAft>
+                <a:spcPts val="0"/>
+              </a:spcAft>
+            </a:pPr>
+            <a:r>
+              <a:rPr sz="1700">
+                <a:solidFill>
+                  <a:srgbClr val="6D8C97"/>
+                </a:solidFill>
+                <a:latin typeface="Consolas"/>
+              </a:rPr>
+              <a:t>   8  </a:t>
+            </a:r>
+            <a:r>
+              <a:rPr sz="1700">
+                <a:solidFill>
+                  <a:srgbClr val="7FE0A0"/>
+                </a:solidFill>
+                <a:latin typeface="Consolas"/>
+              </a:rPr>
+              <a:t>// change these two lines and the model names in index.html - nothing else.</a:t>
+            </a:r>
+          </a:p>
+          <a:p>
+            <a:pPr>
+              <a:spcAft>
+                <a:spcPts val="0"/>
+              </a:spcAft>
+            </a:pPr>
+            <a:r>
+              <a:rPr sz="1700">
+                <a:solidFill>
+                  <a:srgbClr val="6D8C97"/>
+                </a:solidFill>
+                <a:latin typeface="Consolas"/>
+              </a:rPr>
+              <a:t>   9  </a:t>
+            </a:r>
+            <a:r>
+              <a:rPr sz="1700">
+                <a:solidFill>
+                  <a:srgbClr val="7FE0A0"/>
+                </a:solidFill>
+                <a:latin typeface="Consolas"/>
+              </a:rPr>
+              <a:t>const AI_BASE = 'https://ai.tail5091fc.ts.net';</a:t>
+            </a:r>
+          </a:p>
+          <a:p>
+            <a:pPr>
+              <a:spcAft>
+                <a:spcPts val="0"/>
+              </a:spcAft>
+            </a:pPr>
+            <a:r>
+              <a:rPr sz="1700">
+                <a:solidFill>
+                  <a:srgbClr val="6D8C97"/>
+                </a:solidFill>
+                <a:latin typeface="Consolas"/>
+              </a:rPr>
+              <a:t>  10  </a:t>
             </a:r>
             <a:r>
               <a:rPr sz="1700">
@@ -3796,7 +4225,7 @@
                 </a:solidFill>
                 <a:latin typeface="Consolas"/>
               </a:rPr>
-              <a:t>  21  </a:t>
+              <a:t>  24  </a:t>
             </a:r>
             <a:r>
               <a:rPr sz="1400">
@@ -3821,7 +4250,7 @@
                 </a:solidFill>
                 <a:latin typeface="Consolas"/>
               </a:rPr>
-              <a:t>  22  </a:t>
+              <a:t>  25  </a:t>
             </a:r>
             <a:r>
               <a:rPr sz="1400">
@@ -3846,7 +4275,7 @@
                 </a:solidFill>
                 <a:latin typeface="Consolas"/>
               </a:rPr>
-              <a:t>  23  </a:t>
+              <a:t>  26  </a:t>
             </a:r>
             <a:r>
               <a:rPr sz="1400">
@@ -3871,7 +4300,7 @@
                 </a:solidFill>
                 <a:latin typeface="Consolas"/>
               </a:rPr>
-              <a:t>  24  </a:t>
+              <a:t>  27  </a:t>
             </a:r>
             <a:r>
               <a:rPr sz="1400">
@@ -3896,7 +4325,7 @@
                 </a:solidFill>
                 <a:latin typeface="Consolas"/>
               </a:rPr>
-              <a:t>  25  </a:t>
+              <a:t>  28  </a:t>
             </a:r>
             <a:r>
               <a:rPr sz="1400">
@@ -3921,7 +4350,7 @@
                 </a:solidFill>
                 <a:latin typeface="Consolas"/>
               </a:rPr>
-              <a:t>  26  </a:t>
+              <a:t>  29  </a:t>
             </a:r>
             <a:r>
               <a:rPr sz="1400">
@@ -3946,7 +4375,7 @@
                 </a:solidFill>
                 <a:latin typeface="Consolas"/>
               </a:rPr>
-              <a:t>  27  </a:t>
+              <a:t>  30  </a:t>
             </a:r>
             <a:r>
               <a:rPr sz="1400">
@@ -3971,7 +4400,7 @@
                 </a:solidFill>
                 <a:latin typeface="Consolas"/>
               </a:rPr>
-              <a:t>  28  </a:t>
+              <a:t>  31  </a:t>
             </a:r>
             <a:r>
               <a:rPr sz="1400">
@@ -3996,7 +4425,7 @@
                 </a:solidFill>
                 <a:latin typeface="Consolas"/>
               </a:rPr>
-              <a:t>  29  </a:t>
+              <a:t>  32  </a:t>
             </a:r>
             <a:r>
               <a:rPr sz="1400">
@@ -4021,7 +4450,7 @@
                 </a:solidFill>
                 <a:latin typeface="Consolas"/>
               </a:rPr>
-              <a:t>  30  </a:t>
+              <a:t>  33  </a:t>
             </a:r>
             <a:r>
               <a:rPr sz="1400">
@@ -4046,7 +4475,7 @@
                 </a:solidFill>
                 <a:latin typeface="Consolas"/>
               </a:rPr>
-              <a:t>  31  </a:t>
+              <a:t>  34  </a:t>
             </a:r>
             <a:r>
               <a:rPr sz="1400">
@@ -4071,7 +4500,7 @@
                 </a:solidFill>
                 <a:latin typeface="Consolas"/>
               </a:rPr>
-              <a:t>  32  </a:t>
+              <a:t>  35  </a:t>
             </a:r>
             <a:r>
               <a:rPr sz="1400">
@@ -4236,7 +4665,7 @@
                   <a:srgbClr val="1F2A37"/>
                 </a:solidFill>
               </a:rPr>
-              <a:t>Status codes</a:t>
+              <a:t>This address only works at school</a:t>
             </a:r>
           </a:p>
         </p:txBody>
@@ -4274,7 +4703,7 @@
                   <a:srgbClr val="1F2A37"/>
                 </a:solidFill>
               </a:rPr>
-              <a:t>• 200 - fine, here you go</a:t>
+              <a:t>• That machine is in this building</a:t>
             </a:r>
           </a:p>
           <a:p>
@@ -4289,7 +4718,7 @@
                   <a:srgbClr val="1F2A37"/>
                 </a:solidFill>
               </a:rPr>
-              <a:t>• 401 - I do not believe who you say you are</a:t>
+              <a:t>• At home it will not connect - that is expected</a:t>
             </a:r>
           </a:p>
           <a:p>
@@ -4304,7 +4733,7 @@
                   <a:srgbClr val="1F2A37"/>
                 </a:solidFill>
               </a:rPr>
-              <a:t>• 404 - no such thing here</a:t>
+              <a:t>• But the code is not throwaway</a:t>
             </a:r>
           </a:p>
         </p:txBody>
@@ -4348,7 +4777,7 @@
                   <a:srgbClr val="1F2A37"/>
                 </a:solidFill>
               </a:rPr>
-              <a:t>Watch the Console</a:t>
+              <a:t>Same format as OpenAI</a:t>
             </a:r>
           </a:p>
         </p:txBody>
@@ -4381,12 +4810,12 @@
               </a:spcAft>
             </a:pPr>
             <a:r>
-              <a:rPr sz="2400">
-                <a:solidFill>
-                  <a:srgbClr val="1F2A37"/>
-                </a:solidFill>
-              </a:rPr>
-              <a:t>• -&gt; GET /v1/models</a:t>
+              <a:rPr sz="2800">
+                <a:solidFill>
+                  <a:srgbClr val="01AEFD"/>
+                </a:solidFill>
+              </a:rPr>
+              <a:t>On purpose</a:t>
             </a:r>
           </a:p>
           <a:p>
@@ -4401,7 +4830,7 @@
                   <a:srgbClr val="1F2A37"/>
                 </a:solidFill>
               </a:rPr>
-              <a:t>• &lt;- 200 in 84 ms</a:t>
+              <a:t>• Got your own OpenAI key? Change AI_BASE</a:t>
             </a:r>
           </a:p>
           <a:p>
@@ -4416,7 +4845,37 @@
                   <a:srgbClr val="1F2A37"/>
                 </a:solidFill>
               </a:rPr>
-              <a:t>• That is your request leaving and coming back</a:t>
+              <a:t>• Change API_KEY</a:t>
+            </a:r>
+          </a:p>
+          <a:p>
+            <a:pPr>
+              <a:spcAft>
+                <a:spcPts val="1400"/>
+              </a:spcAft>
+            </a:pPr>
+            <a:r>
+              <a:rPr sz="2400">
+                <a:solidFill>
+                  <a:srgbClr val="1F2A37"/>
+                </a:solidFill>
+              </a:rPr>
+              <a:t>• Change the two model names in index.html</a:t>
+            </a:r>
+          </a:p>
+          <a:p>
+            <a:pPr>
+              <a:spcAft>
+                <a:spcPts val="1400"/>
+              </a:spcAft>
+            </a:pPr>
+            <a:r>
+              <a:rPr sz="2400">
+                <a:solidFill>
+                  <a:srgbClr val="1F2A37"/>
+                </a:solidFill>
+              </a:rPr>
+              <a:t>• Nothing else moves</a:t>
             </a:r>
           </a:p>
         </p:txBody>

--- a/ai101/slides/week-03.pptx
+++ b/ai101/slides/week-03.pptx
@@ -3734,7 +3734,7 @@
                 </a:solidFill>
                 <a:latin typeface="Consolas"/>
               </a:rPr>
-              <a:t>   3  </a:t>
+              <a:t>   8  </a:t>
             </a:r>
             <a:r>
               <a:rPr sz="1700">
@@ -3759,7 +3759,7 @@
                 </a:solidFill>
                 <a:latin typeface="Consolas"/>
               </a:rPr>
-              <a:t>   4  </a:t>
+              <a:t>   9  </a:t>
             </a:r>
             <a:r>
               <a:rPr sz="1700">
@@ -3784,7 +3784,7 @@
                 </a:solidFill>
                 <a:latin typeface="Consolas"/>
               </a:rPr>
-              <a:t>   5  </a:t>
+              <a:t>  10  </a:t>
             </a:r>
             <a:r>
               <a:rPr sz="1700">
@@ -3809,7 +3809,7 @@
                 </a:solidFill>
                 <a:latin typeface="Consolas"/>
               </a:rPr>
-              <a:t>   6  </a:t>
+              <a:t>  11  </a:t>
             </a:r>
             <a:r>
               <a:rPr sz="1700">
@@ -3834,7 +3834,7 @@
                 </a:solidFill>
                 <a:latin typeface="Consolas"/>
               </a:rPr>
-              <a:t>   7  </a:t>
+              <a:t>  12  </a:t>
             </a:r>
             <a:r>
               <a:rPr sz="1700">
@@ -3859,7 +3859,7 @@
                 </a:solidFill>
                 <a:latin typeface="Consolas"/>
               </a:rPr>
-              <a:t>   8  </a:t>
+              <a:t>  13  </a:t>
             </a:r>
             <a:r>
               <a:rPr sz="1700">
@@ -3884,7 +3884,7 @@
                 </a:solidFill>
                 <a:latin typeface="Consolas"/>
               </a:rPr>
-              <a:t>   9  </a:t>
+              <a:t>  14  </a:t>
             </a:r>
             <a:r>
               <a:rPr sz="1700">
@@ -3909,7 +3909,7 @@
                 </a:solidFill>
                 <a:latin typeface="Consolas"/>
               </a:rPr>
-              <a:t>  10  </a:t>
+              <a:t>  15  </a:t>
             </a:r>
             <a:r>
               <a:rPr sz="1700">
@@ -4225,7 +4225,7 @@
                 </a:solidFill>
                 <a:latin typeface="Consolas"/>
               </a:rPr>
-              <a:t>  24  </a:t>
+              <a:t>  29  </a:t>
             </a:r>
             <a:r>
               <a:rPr sz="1400">
@@ -4250,7 +4250,7 @@
                 </a:solidFill>
                 <a:latin typeface="Consolas"/>
               </a:rPr>
-              <a:t>  25  </a:t>
+              <a:t>  30  </a:t>
             </a:r>
             <a:r>
               <a:rPr sz="1400">
@@ -4275,7 +4275,7 @@
                 </a:solidFill>
                 <a:latin typeface="Consolas"/>
               </a:rPr>
-              <a:t>  26  </a:t>
+              <a:t>  31  </a:t>
             </a:r>
             <a:r>
               <a:rPr sz="1400">
@@ -4300,7 +4300,7 @@
                 </a:solidFill>
                 <a:latin typeface="Consolas"/>
               </a:rPr>
-              <a:t>  27  </a:t>
+              <a:t>  32  </a:t>
             </a:r>
             <a:r>
               <a:rPr sz="1400">
@@ -4325,7 +4325,7 @@
                 </a:solidFill>
                 <a:latin typeface="Consolas"/>
               </a:rPr>
-              <a:t>  28  </a:t>
+              <a:t>  33  </a:t>
             </a:r>
             <a:r>
               <a:rPr sz="1400">
@@ -4350,7 +4350,7 @@
                 </a:solidFill>
                 <a:latin typeface="Consolas"/>
               </a:rPr>
-              <a:t>  29  </a:t>
+              <a:t>  34  </a:t>
             </a:r>
             <a:r>
               <a:rPr sz="1400">
@@ -4375,7 +4375,7 @@
                 </a:solidFill>
                 <a:latin typeface="Consolas"/>
               </a:rPr>
-              <a:t>  30  </a:t>
+              <a:t>  35  </a:t>
             </a:r>
             <a:r>
               <a:rPr sz="1400">
@@ -4400,7 +4400,7 @@
                 </a:solidFill>
                 <a:latin typeface="Consolas"/>
               </a:rPr>
-              <a:t>  31  </a:t>
+              <a:t>  36  </a:t>
             </a:r>
             <a:r>
               <a:rPr sz="1400">
@@ -4425,7 +4425,7 @@
                 </a:solidFill>
                 <a:latin typeface="Consolas"/>
               </a:rPr>
-              <a:t>  32  </a:t>
+              <a:t>  37  </a:t>
             </a:r>
             <a:r>
               <a:rPr sz="1400">
@@ -4450,7 +4450,7 @@
                 </a:solidFill>
                 <a:latin typeface="Consolas"/>
               </a:rPr>
-              <a:t>  33  </a:t>
+              <a:t>  38  </a:t>
             </a:r>
             <a:r>
               <a:rPr sz="1400">
@@ -4475,7 +4475,7 @@
                 </a:solidFill>
                 <a:latin typeface="Consolas"/>
               </a:rPr>
-              <a:t>  34  </a:t>
+              <a:t>  39  </a:t>
             </a:r>
             <a:r>
               <a:rPr sz="1400">
@@ -4500,7 +4500,7 @@
                 </a:solidFill>
                 <a:latin typeface="Consolas"/>
               </a:rPr>
-              <a:t>  35  </a:t>
+              <a:t>  40  </a:t>
             </a:r>
             <a:r>
               <a:rPr sz="1400">

--- a/ai101/slides/week-03.pptx
+++ b/ai101/slides/week-03.pptx
@@ -17,6 +17,24 @@
     <p:sldId id="265" r:id="rId16"/>
     <p:sldId id="266" r:id="rId17"/>
     <p:sldId id="267" r:id="rId18"/>
+    <p:sldId id="268" r:id="rId19"/>
+    <p:sldId id="269" r:id="rId20"/>
+    <p:sldId id="270" r:id="rId21"/>
+    <p:sldId id="271" r:id="rId22"/>
+    <p:sldId id="272" r:id="rId23"/>
+    <p:sldId id="273" r:id="rId24"/>
+    <p:sldId id="274" r:id="rId25"/>
+    <p:sldId id="275" r:id="rId26"/>
+    <p:sldId id="276" r:id="rId27"/>
+    <p:sldId id="277" r:id="rId28"/>
+    <p:sldId id="278" r:id="rId29"/>
+    <p:sldId id="279" r:id="rId30"/>
+    <p:sldId id="280" r:id="rId31"/>
+    <p:sldId id="281" r:id="rId32"/>
+    <p:sldId id="282" r:id="rId33"/>
+    <p:sldId id="283" r:id="rId34"/>
+    <p:sldId id="284" r:id="rId35"/>
+    <p:sldId id="285" r:id="rId36"/>
   </p:sldIdLst>
   <p:sldSz cx="12191695" cy="6858000" type="screen4x3"/>
   <p:notesSz cx="6858000" cy="9144000"/>
@@ -3202,7 +3220,7 @@
                   <a:srgbClr val="1F2A37"/>
                 </a:solidFill>
               </a:rPr>
-              <a:t>A key in a web page is public</a:t>
+              <a:t>A request has two parts</a:t>
             </a:r>
           </a:p>
         </p:txBody>
@@ -3240,7 +3258,7 @@
                   <a:srgbClr val="1F2A37"/>
                 </a:solidFill>
               </a:rPr>
-              <a:t>• Anyone who opens the page can read it</a:t>
+              <a:t>• The address: /v1/models</a:t>
             </a:r>
           </a:p>
           <a:p>
@@ -3255,37 +3273,7 @@
                   <a:srgbClr val="1F2A37"/>
                 </a:solidFill>
               </a:rPr>
-              <a:t>• Fine for a class key: limited, no bill</a:t>
-            </a:r>
-          </a:p>
-          <a:p>
-            <a:pPr>
-              <a:spcAft>
-                <a:spcPts val="1400"/>
-              </a:spcAft>
-            </a:pPr>
-            <a:r>
-              <a:rPr sz="2400">
-                <a:solidFill>
-                  <a:srgbClr val="1F2A37"/>
-                </a:solidFill>
-              </a:rPr>
-              <a:t>• NOT fine for a personal paid key</a:t>
-            </a:r>
-          </a:p>
-          <a:p>
-            <a:pPr>
-              <a:spcAft>
-                <a:spcPts val="1400"/>
-              </a:spcAft>
-            </a:pPr>
-            <a:r>
-              <a:rPr sz="2400">
-                <a:solidFill>
-                  <a:srgbClr val="1F2A37"/>
-                </a:solidFill>
-              </a:rPr>
-              <a:t>• Real apps keep the key on a server</a:t>
+              <a:t>• The name badge: Authorization: Bearer YOUR_KEY</a:t>
             </a:r>
           </a:p>
         </p:txBody>
@@ -3301,6 +3289,14 @@
 <file path=ppt/slides/slide11.xml><?xml version="1.0" encoding="utf-8"?>
 <p:sld xmlns:a="http://schemas.openxmlformats.org/drawingml/2006/main" xmlns:p="http://schemas.openxmlformats.org/presentationml/2006/main" xmlns:r="http://schemas.openxmlformats.org/officeDocument/2006/relationships">
   <p:cSld>
+    <p:bg>
+      <p:bgPr>
+        <a:solidFill>
+          <a:srgbClr val="102127"/>
+        </a:solidFill>
+        <a:effectLst/>
+      </p:bgPr>
+    </p:bg>
     <p:spTree>
       <p:nvGrpSpPr>
         <p:cNvPr id="1" name=""/>
@@ -3310,40 +3306,14 @@
       <p:grpSpPr/>
       <p:sp>
         <p:nvSpPr>
-          <p:cNvPr id="2" name="Title 1"/>
-          <p:cNvSpPr>
-            <a:spLocks noGrp="1"/>
-          </p:cNvSpPr>
-          <p:nvPr>
-            <p:ph type="title"/>
-          </p:nvPr>
-        </p:nvSpPr>
-        <p:spPr/>
-        <p:txBody>
-          <a:bodyPr/>
-          <a:lstStyle/>
-          <a:p>
-            <a:r>
-              <a:rPr sz="3800" b="1">
-                <a:solidFill>
-                  <a:srgbClr val="1F2A37"/>
-                </a:solidFill>
-              </a:rPr>
-              <a:t>Status codes</a:t>
-            </a:r>
-          </a:p>
-        </p:txBody>
-      </p:sp>
-      <p:sp>
-        <p:nvSpPr>
-          <p:cNvPr id="3" name="TextBox 2"/>
+          <p:cNvPr id="2" name="TextBox 1"/>
           <p:cNvSpPr txBox="1"/>
           <p:nvPr/>
         </p:nvSpPr>
         <p:spPr>
           <a:xfrm>
-            <a:off x="822960" y="1828800"/>
-            <a:ext cx="10515600" cy="4206240"/>
+            <a:off x="502920" y="274320"/>
+            <a:ext cx="11155680" cy="548640"/>
           </a:xfrm>
           <a:prstGeom prst="rect">
             <a:avLst/>
@@ -3351,53 +3321,124 @@
           <a:noFill/>
         </p:spPr>
         <p:txBody>
+          <a:bodyPr wrap="none">
+            <a:spAutoFit/>
+          </a:bodyPr>
+          <a:lstStyle/>
+          <a:p>
+            <a:r>
+              <a:rPr sz="2200" b="1">
+                <a:solidFill>
+                  <a:srgbClr val="01AEFD"/>
+                </a:solidFill>
+              </a:rPr>
+              <a:t>Type this into script.js   -   line 30</a:t>
+            </a:r>
+          </a:p>
+        </p:txBody>
+      </p:sp>
+      <p:sp>
+        <p:nvSpPr>
+          <p:cNvPr id="3" name="TextBox 2"/>
+          <p:cNvSpPr txBox="1"/>
+          <p:nvPr/>
+        </p:nvSpPr>
+        <p:spPr>
+          <a:xfrm>
+            <a:off x="502920" y="960120"/>
+            <a:ext cx="11155680" cy="4297680"/>
+          </a:xfrm>
+          <a:prstGeom prst="rect">
+            <a:avLst/>
+          </a:prstGeom>
+          <a:noFill/>
+        </p:spPr>
+        <p:txBody>
+          <a:bodyPr wrap="none">
+            <a:spAutoFit/>
+          </a:bodyPr>
+          <a:lstStyle/>
+          <a:p>
+            <a:pPr>
+              <a:spcAft>
+                <a:spcPts val="0"/>
+              </a:spcAft>
+            </a:pPr>
+            <a:r>
+              <a:rPr sz="1800">
+                <a:solidFill>
+                  <a:srgbClr val="6D8C97"/>
+                </a:solidFill>
+                <a:latin typeface="Consolas"/>
+              </a:rPr>
+              <a:t>  29  </a:t>
+            </a:r>
+            <a:r>
+              <a:rPr sz="1800">
+                <a:solidFill>
+                  <a:srgbClr val="6D8C97"/>
+                </a:solidFill>
+                <a:latin typeface="Consolas"/>
+              </a:rPr>
+              <a:t> </a:t>
+            </a:r>
+          </a:p>
+          <a:p>
+            <a:pPr>
+              <a:spcAft>
+                <a:spcPts val="0"/>
+              </a:spcAft>
+            </a:pPr>
+            <a:r>
+              <a:rPr sz="1800">
+                <a:solidFill>
+                  <a:srgbClr val="6D8C97"/>
+                </a:solidFill>
+                <a:latin typeface="Consolas"/>
+              </a:rPr>
+              <a:t>  30  </a:t>
+            </a:r>
+            <a:r>
+              <a:rPr sz="1800">
+                <a:solidFill>
+                  <a:srgbClr val="7FE0A0"/>
+                </a:solidFill>
+                <a:latin typeface="Consolas"/>
+              </a:rPr>
+              <a:t>// The smallest useful request: what models does this server have?</a:t>
+            </a:r>
+          </a:p>
+        </p:txBody>
+      </p:sp>
+      <p:sp>
+        <p:nvSpPr>
+          <p:cNvPr id="4" name="TextBox 3"/>
+          <p:cNvSpPr txBox="1"/>
+          <p:nvPr/>
+        </p:nvSpPr>
+        <p:spPr>
+          <a:xfrm>
+            <a:off x="548640" y="5623560"/>
+            <a:ext cx="11064240" cy="1051560"/>
+          </a:xfrm>
+          <a:prstGeom prst="rect">
+            <a:avLst/>
+          </a:prstGeom>
+          <a:noFill/>
+        </p:spPr>
+        <p:txBody>
           <a:bodyPr wrap="square">
             <a:spAutoFit/>
           </a:bodyPr>
           <a:lstStyle/>
           <a:p>
-            <a:pPr>
-              <a:spcAft>
-                <a:spcPts val="1400"/>
-              </a:spcAft>
-            </a:pPr>
-            <a:r>
-              <a:rPr sz="2400">
-                <a:solidFill>
-                  <a:srgbClr val="1F2A37"/>
-                </a:solidFill>
-              </a:rPr>
-              <a:t>• 200 - fine, here you go</a:t>
-            </a:r>
-          </a:p>
-          <a:p>
-            <a:pPr>
-              <a:spcAft>
-                <a:spcPts val="1400"/>
-              </a:spcAft>
-            </a:pPr>
-            <a:r>
-              <a:rPr sz="2400">
-                <a:solidFill>
-                  <a:srgbClr val="1F2A37"/>
-                </a:solidFill>
-              </a:rPr>
-              <a:t>• 401 - I do not believe who you say you are</a:t>
-            </a:r>
-          </a:p>
-          <a:p>
-            <a:pPr>
-              <a:spcAft>
-                <a:spcPts val="1400"/>
-              </a:spcAft>
-            </a:pPr>
-            <a:r>
-              <a:rPr sz="2400">
-                <a:solidFill>
-                  <a:srgbClr val="1F2A37"/>
-                </a:solidFill>
-              </a:rPr>
-              <a:t>• 404 - no such thing here</a:t>
+            <a:r>
+              <a:rPr sz="2000">
+                <a:solidFill>
+                  <a:srgbClr val="DCECEF"/>
+                </a:solidFill>
+              </a:rPr>
+              <a:t>A comment: the smallest useful request - ask the server which models it has.</a:t>
             </a:r>
           </a:p>
         </p:txBody>
@@ -3441,7 +3482,7 @@
                   <a:srgbClr val="1F2A37"/>
                 </a:solidFill>
               </a:rPr>
-              <a:t>Watch the Console</a:t>
+              <a:t>async</a:t>
             </a:r>
           </a:p>
         </p:txBody>
@@ -3449,6 +3490,39 @@
       <p:sp>
         <p:nvSpPr>
           <p:cNvPr id="3" name="TextBox 2"/>
+          <p:cNvSpPr txBox="1"/>
+          <p:nvPr/>
+        </p:nvSpPr>
+        <p:spPr>
+          <a:xfrm>
+            <a:off x="868680" y="502920"/>
+            <a:ext cx="5486400" cy="457200"/>
+          </a:xfrm>
+          <a:prstGeom prst="rect">
+            <a:avLst/>
+          </a:prstGeom>
+          <a:noFill/>
+        </p:spPr>
+        <p:txBody>
+          <a:bodyPr wrap="none">
+            <a:spAutoFit/>
+          </a:bodyPr>
+          <a:lstStyle/>
+          <a:p>
+            <a:r>
+              <a:rPr sz="1500" b="1">
+                <a:solidFill>
+                  <a:srgbClr val="01AEFD"/>
+                </a:solidFill>
+              </a:rPr>
+              <a:t>JAVASCRIPT</a:t>
+            </a:r>
+          </a:p>
+        </p:txBody>
+      </p:sp>
+      <p:sp>
+        <p:nvSpPr>
+          <p:cNvPr id="4" name="TextBox 3"/>
           <p:cNvSpPr txBox="1"/>
           <p:nvPr/>
         </p:nvSpPr>
@@ -3479,7 +3553,7 @@
                   <a:srgbClr val="1F2A37"/>
                 </a:solidFill>
               </a:rPr>
-              <a:t>• -&gt; GET /v1/models</a:t>
+              <a:t>• Marks a function that does something SLOW, like talking to a server.</a:t>
             </a:r>
           </a:p>
           <a:p>
@@ -3494,9 +3568,324 @@
                   <a:srgbClr val="1F2A37"/>
                 </a:solidFill>
               </a:rPr>
-              <a:t>• &lt;- 200 in 84 ms</a:t>
-            </a:r>
-          </a:p>
+              <a:t>• It lets you 'await' the slow part without freezing the page.</a:t>
+            </a:r>
+          </a:p>
+        </p:txBody>
+      </p:sp>
+    </p:spTree>
+  </p:cSld>
+  <p:clrMapOvr>
+    <a:masterClrMapping/>
+  </p:clrMapOvr>
+</p:sld>
+</file>
+
+<file path=ppt/slides/slide13.xml><?xml version="1.0" encoding="utf-8"?>
+<p:sld xmlns:a="http://schemas.openxmlformats.org/drawingml/2006/main" xmlns:p="http://schemas.openxmlformats.org/presentationml/2006/main" xmlns:r="http://schemas.openxmlformats.org/officeDocument/2006/relationships">
+  <p:cSld>
+    <p:bg>
+      <p:bgPr>
+        <a:solidFill>
+          <a:srgbClr val="102127"/>
+        </a:solidFill>
+        <a:effectLst/>
+      </p:bgPr>
+    </p:bg>
+    <p:spTree>
+      <p:nvGrpSpPr>
+        <p:cNvPr id="1" name=""/>
+        <p:cNvGrpSpPr/>
+        <p:nvPr/>
+      </p:nvGrpSpPr>
+      <p:grpSpPr/>
+      <p:sp>
+        <p:nvSpPr>
+          <p:cNvPr id="2" name="TextBox 1"/>
+          <p:cNvSpPr txBox="1"/>
+          <p:nvPr/>
+        </p:nvSpPr>
+        <p:spPr>
+          <a:xfrm>
+            <a:off x="502920" y="274320"/>
+            <a:ext cx="11155680" cy="548640"/>
+          </a:xfrm>
+          <a:prstGeom prst="rect">
+            <a:avLst/>
+          </a:prstGeom>
+          <a:noFill/>
+        </p:spPr>
+        <p:txBody>
+          <a:bodyPr wrap="none">
+            <a:spAutoFit/>
+          </a:bodyPr>
+          <a:lstStyle/>
+          <a:p>
+            <a:r>
+              <a:rPr sz="2200" b="1">
+                <a:solidFill>
+                  <a:srgbClr val="01AEFD"/>
+                </a:solidFill>
+              </a:rPr>
+              <a:t>Type this into script.js   -   line 32</a:t>
+            </a:r>
+          </a:p>
+        </p:txBody>
+      </p:sp>
+      <p:sp>
+        <p:nvSpPr>
+          <p:cNvPr id="3" name="TextBox 2"/>
+          <p:cNvSpPr txBox="1"/>
+          <p:nvPr/>
+        </p:nvSpPr>
+        <p:spPr>
+          <a:xfrm>
+            <a:off x="502920" y="960120"/>
+            <a:ext cx="11155680" cy="4297680"/>
+          </a:xfrm>
+          <a:prstGeom prst="rect">
+            <a:avLst/>
+          </a:prstGeom>
+          <a:noFill/>
+        </p:spPr>
+        <p:txBody>
+          <a:bodyPr wrap="none">
+            <a:spAutoFit/>
+          </a:bodyPr>
+          <a:lstStyle/>
+          <a:p>
+            <a:pPr>
+              <a:spcAft>
+                <a:spcPts val="0"/>
+              </a:spcAft>
+            </a:pPr>
+            <a:r>
+              <a:rPr sz="1800">
+                <a:solidFill>
+                  <a:srgbClr val="6D8C97"/>
+                </a:solidFill>
+                <a:latin typeface="Consolas"/>
+              </a:rPr>
+              <a:t>  29  </a:t>
+            </a:r>
+            <a:r>
+              <a:rPr sz="1800">
+                <a:solidFill>
+                  <a:srgbClr val="6D8C97"/>
+                </a:solidFill>
+                <a:latin typeface="Consolas"/>
+              </a:rPr>
+              <a:t> </a:t>
+            </a:r>
+          </a:p>
+          <a:p>
+            <a:pPr>
+              <a:spcAft>
+                <a:spcPts val="0"/>
+              </a:spcAft>
+            </a:pPr>
+            <a:r>
+              <a:rPr sz="1800">
+                <a:solidFill>
+                  <a:srgbClr val="6D8C97"/>
+                </a:solidFill>
+                <a:latin typeface="Consolas"/>
+              </a:rPr>
+              <a:t>  30  </a:t>
+            </a:r>
+            <a:r>
+              <a:rPr sz="1800">
+                <a:solidFill>
+                  <a:srgbClr val="6D8C97"/>
+                </a:solidFill>
+                <a:latin typeface="Consolas"/>
+              </a:rPr>
+              <a:t>// The smallest useful request: what models does this server have?</a:t>
+            </a:r>
+          </a:p>
+          <a:p>
+            <a:pPr>
+              <a:spcAft>
+                <a:spcPts val="0"/>
+              </a:spcAft>
+            </a:pPr>
+            <a:r>
+              <a:rPr sz="1800">
+                <a:solidFill>
+                  <a:srgbClr val="6D8C97"/>
+                </a:solidFill>
+                <a:latin typeface="Consolas"/>
+              </a:rPr>
+              <a:t>  31  </a:t>
+            </a:r>
+            <a:r>
+              <a:rPr sz="1800">
+                <a:solidFill>
+                  <a:srgbClr val="6D8C97"/>
+                </a:solidFill>
+                <a:latin typeface="Consolas"/>
+              </a:rPr>
+              <a:t>// 'async' means this function does something slow and can be waited for.</a:t>
+            </a:r>
+          </a:p>
+          <a:p>
+            <a:pPr>
+              <a:spcAft>
+                <a:spcPts val="0"/>
+              </a:spcAft>
+            </a:pPr>
+            <a:r>
+              <a:rPr sz="1800">
+                <a:solidFill>
+                  <a:srgbClr val="6D8C97"/>
+                </a:solidFill>
+                <a:latin typeface="Consolas"/>
+              </a:rPr>
+              <a:t>  32  </a:t>
+            </a:r>
+            <a:r>
+              <a:rPr sz="1800">
+                <a:solidFill>
+                  <a:srgbClr val="7FE0A0"/>
+                </a:solidFill>
+                <a:latin typeface="Consolas"/>
+              </a:rPr>
+              <a:t>async function listModels() {</a:t>
+            </a:r>
+          </a:p>
+        </p:txBody>
+      </p:sp>
+      <p:sp>
+        <p:nvSpPr>
+          <p:cNvPr id="4" name="TextBox 3"/>
+          <p:cNvSpPr txBox="1"/>
+          <p:nvPr/>
+        </p:nvSpPr>
+        <p:spPr>
+          <a:xfrm>
+            <a:off x="548640" y="5623560"/>
+            <a:ext cx="11064240" cy="1051560"/>
+          </a:xfrm>
+          <a:prstGeom prst="rect">
+            <a:avLst/>
+          </a:prstGeom>
+          <a:noFill/>
+        </p:spPr>
+        <p:txBody>
+          <a:bodyPr wrap="square">
+            <a:spAutoFit/>
+          </a:bodyPr>
+          <a:lstStyle/>
+          <a:p>
+            <a:r>
+              <a:rPr sz="2000">
+                <a:solidFill>
+                  <a:srgbClr val="DCECEF"/>
+                </a:solidFill>
+              </a:rPr>
+              <a:t>An async function: it does something slow (talking to the server) and can be awaited.</a:t>
+            </a:r>
+          </a:p>
+        </p:txBody>
+      </p:sp>
+    </p:spTree>
+  </p:cSld>
+  <p:clrMapOvr>
+    <a:masterClrMapping/>
+  </p:clrMapOvr>
+</p:sld>
+</file>
+
+<file path=ppt/slides/slide14.xml><?xml version="1.0" encoding="utf-8"?>
+<p:sld xmlns:a="http://schemas.openxmlformats.org/drawingml/2006/main" xmlns:p="http://schemas.openxmlformats.org/presentationml/2006/main" xmlns:r="http://schemas.openxmlformats.org/officeDocument/2006/relationships">
+  <p:cSld>
+    <p:spTree>
+      <p:nvGrpSpPr>
+        <p:cNvPr id="1" name=""/>
+        <p:cNvGrpSpPr/>
+        <p:nvPr/>
+      </p:nvGrpSpPr>
+      <p:grpSpPr/>
+      <p:sp>
+        <p:nvSpPr>
+          <p:cNvPr id="2" name="Title 1"/>
+          <p:cNvSpPr>
+            <a:spLocks noGrp="1"/>
+          </p:cNvSpPr>
+          <p:nvPr>
+            <p:ph type="title"/>
+          </p:nvPr>
+        </p:nvSpPr>
+        <p:spPr/>
+        <p:txBody>
+          <a:bodyPr/>
+          <a:lstStyle/>
+          <a:p>
+            <a:r>
+              <a:rPr sz="3800" b="1">
+                <a:solidFill>
+                  <a:srgbClr val="1F2A37"/>
+                </a:solidFill>
+              </a:rPr>
+              <a:t>await</a:t>
+            </a:r>
+          </a:p>
+        </p:txBody>
+      </p:sp>
+      <p:sp>
+        <p:nvSpPr>
+          <p:cNvPr id="3" name="TextBox 2"/>
+          <p:cNvSpPr txBox="1"/>
+          <p:nvPr/>
+        </p:nvSpPr>
+        <p:spPr>
+          <a:xfrm>
+            <a:off x="868680" y="502920"/>
+            <a:ext cx="5486400" cy="457200"/>
+          </a:xfrm>
+          <a:prstGeom prst="rect">
+            <a:avLst/>
+          </a:prstGeom>
+          <a:noFill/>
+        </p:spPr>
+        <p:txBody>
+          <a:bodyPr wrap="none">
+            <a:spAutoFit/>
+          </a:bodyPr>
+          <a:lstStyle/>
+          <a:p>
+            <a:r>
+              <a:rPr sz="1500" b="1">
+                <a:solidFill>
+                  <a:srgbClr val="01AEFD"/>
+                </a:solidFill>
+              </a:rPr>
+              <a:t>JAVASCRIPT</a:t>
+            </a:r>
+          </a:p>
+        </p:txBody>
+      </p:sp>
+      <p:sp>
+        <p:nvSpPr>
+          <p:cNvPr id="4" name="TextBox 3"/>
+          <p:cNvSpPr txBox="1"/>
+          <p:nvPr/>
+        </p:nvSpPr>
+        <p:spPr>
+          <a:xfrm>
+            <a:off x="822960" y="1828800"/>
+            <a:ext cx="10515600" cy="4206240"/>
+          </a:xfrm>
+          <a:prstGeom prst="rect">
+            <a:avLst/>
+          </a:prstGeom>
+          <a:noFill/>
+        </p:spPr>
+        <p:txBody>
+          <a:bodyPr wrap="square">
+            <a:spAutoFit/>
+          </a:bodyPr>
+          <a:lstStyle/>
           <a:p>
             <a:pPr>
               <a:spcAft>
@@ -3509,7 +3898,1062 @@
                   <a:srgbClr val="1F2A37"/>
                 </a:solidFill>
               </a:rPr>
-              <a:t>• That is your request leaving and coming back</a:t>
+              <a:t>• Waits for a slow thing to finish and hands you the result.</a:t>
+            </a:r>
+          </a:p>
+          <a:p>
+            <a:pPr>
+              <a:spcAft>
+                <a:spcPts val="1400"/>
+              </a:spcAft>
+            </a:pPr>
+            <a:r>
+              <a:rPr sz="2400">
+                <a:solidFill>
+                  <a:srgbClr val="1F2A37"/>
+                </a:solidFill>
+              </a:rPr>
+              <a:t>• Only works inside an async function.</a:t>
+            </a:r>
+          </a:p>
+        </p:txBody>
+      </p:sp>
+    </p:spTree>
+  </p:cSld>
+  <p:clrMapOvr>
+    <a:masterClrMapping/>
+  </p:clrMapOvr>
+</p:sld>
+</file>
+
+<file path=ppt/slides/slide15.xml><?xml version="1.0" encoding="utf-8"?>
+<p:sld xmlns:a="http://schemas.openxmlformats.org/drawingml/2006/main" xmlns:p="http://schemas.openxmlformats.org/presentationml/2006/main" xmlns:r="http://schemas.openxmlformats.org/officeDocument/2006/relationships">
+  <p:cSld>
+    <p:spTree>
+      <p:nvGrpSpPr>
+        <p:cNvPr id="1" name=""/>
+        <p:cNvGrpSpPr/>
+        <p:nvPr/>
+      </p:nvGrpSpPr>
+      <p:grpSpPr/>
+      <p:sp>
+        <p:nvSpPr>
+          <p:cNvPr id="2" name="Title 1"/>
+          <p:cNvSpPr>
+            <a:spLocks noGrp="1"/>
+          </p:cNvSpPr>
+          <p:nvPr>
+            <p:ph type="title"/>
+          </p:nvPr>
+        </p:nvSpPr>
+        <p:spPr/>
+        <p:txBody>
+          <a:bodyPr/>
+          <a:lstStyle/>
+          <a:p>
+            <a:r>
+              <a:rPr sz="3800" b="1">
+                <a:solidFill>
+                  <a:srgbClr val="1F2A37"/>
+                </a:solidFill>
+              </a:rPr>
+              <a:t>fetch()</a:t>
+            </a:r>
+          </a:p>
+        </p:txBody>
+      </p:sp>
+      <p:sp>
+        <p:nvSpPr>
+          <p:cNvPr id="3" name="TextBox 2"/>
+          <p:cNvSpPr txBox="1"/>
+          <p:nvPr/>
+        </p:nvSpPr>
+        <p:spPr>
+          <a:xfrm>
+            <a:off x="868680" y="502920"/>
+            <a:ext cx="5486400" cy="457200"/>
+          </a:xfrm>
+          <a:prstGeom prst="rect">
+            <a:avLst/>
+          </a:prstGeom>
+          <a:noFill/>
+        </p:spPr>
+        <p:txBody>
+          <a:bodyPr wrap="none">
+            <a:spAutoFit/>
+          </a:bodyPr>
+          <a:lstStyle/>
+          <a:p>
+            <a:r>
+              <a:rPr sz="1500" b="1">
+                <a:solidFill>
+                  <a:srgbClr val="01AEFD"/>
+                </a:solidFill>
+              </a:rPr>
+              <a:t>JAVASCRIPT</a:t>
+            </a:r>
+          </a:p>
+        </p:txBody>
+      </p:sp>
+      <p:sp>
+        <p:nvSpPr>
+          <p:cNvPr id="4" name="TextBox 3"/>
+          <p:cNvSpPr txBox="1"/>
+          <p:nvPr/>
+        </p:nvSpPr>
+        <p:spPr>
+          <a:xfrm>
+            <a:off x="822960" y="1828800"/>
+            <a:ext cx="10515600" cy="4206240"/>
+          </a:xfrm>
+          <a:prstGeom prst="rect">
+            <a:avLst/>
+          </a:prstGeom>
+          <a:noFill/>
+        </p:spPr>
+        <p:txBody>
+          <a:bodyPr wrap="square">
+            <a:spAutoFit/>
+          </a:bodyPr>
+          <a:lstStyle/>
+          <a:p>
+            <a:pPr>
+              <a:spcAft>
+                <a:spcPts val="1400"/>
+              </a:spcAft>
+            </a:pPr>
+            <a:r>
+              <a:rPr sz="2400">
+                <a:solidFill>
+                  <a:srgbClr val="1F2A37"/>
+                </a:solidFill>
+              </a:rPr>
+              <a:t>• JavaScript's built-in way to ask another computer for something over the network.</a:t>
+            </a:r>
+          </a:p>
+        </p:txBody>
+      </p:sp>
+    </p:spTree>
+  </p:cSld>
+  <p:clrMapOvr>
+    <a:masterClrMapping/>
+  </p:clrMapOvr>
+</p:sld>
+</file>
+
+<file path=ppt/slides/slide16.xml><?xml version="1.0" encoding="utf-8"?>
+<p:sld xmlns:a="http://schemas.openxmlformats.org/drawingml/2006/main" xmlns:p="http://schemas.openxmlformats.org/presentationml/2006/main" xmlns:r="http://schemas.openxmlformats.org/officeDocument/2006/relationships">
+  <p:cSld>
+    <p:bg>
+      <p:bgPr>
+        <a:solidFill>
+          <a:srgbClr val="102127"/>
+        </a:solidFill>
+        <a:effectLst/>
+      </p:bgPr>
+    </p:bg>
+    <p:spTree>
+      <p:nvGrpSpPr>
+        <p:cNvPr id="1" name=""/>
+        <p:cNvGrpSpPr/>
+        <p:nvPr/>
+      </p:nvGrpSpPr>
+      <p:grpSpPr/>
+      <p:sp>
+        <p:nvSpPr>
+          <p:cNvPr id="2" name="TextBox 1"/>
+          <p:cNvSpPr txBox="1"/>
+          <p:nvPr/>
+        </p:nvSpPr>
+        <p:spPr>
+          <a:xfrm>
+            <a:off x="502920" y="274320"/>
+            <a:ext cx="11155680" cy="548640"/>
+          </a:xfrm>
+          <a:prstGeom prst="rect">
+            <a:avLst/>
+          </a:prstGeom>
+          <a:noFill/>
+        </p:spPr>
+        <p:txBody>
+          <a:bodyPr wrap="none">
+            <a:spAutoFit/>
+          </a:bodyPr>
+          <a:lstStyle/>
+          <a:p>
+            <a:r>
+              <a:rPr sz="2200" b="1">
+                <a:solidFill>
+                  <a:srgbClr val="01AEFD"/>
+                </a:solidFill>
+              </a:rPr>
+              <a:t>Type this into script.js   -   line 33</a:t>
+            </a:r>
+          </a:p>
+        </p:txBody>
+      </p:sp>
+      <p:sp>
+        <p:nvSpPr>
+          <p:cNvPr id="3" name="TextBox 2"/>
+          <p:cNvSpPr txBox="1"/>
+          <p:nvPr/>
+        </p:nvSpPr>
+        <p:spPr>
+          <a:xfrm>
+            <a:off x="502920" y="960120"/>
+            <a:ext cx="11155680" cy="4297680"/>
+          </a:xfrm>
+          <a:prstGeom prst="rect">
+            <a:avLst/>
+          </a:prstGeom>
+          <a:noFill/>
+        </p:spPr>
+        <p:txBody>
+          <a:bodyPr wrap="none">
+            <a:spAutoFit/>
+          </a:bodyPr>
+          <a:lstStyle/>
+          <a:p>
+            <a:pPr>
+              <a:spcAft>
+                <a:spcPts val="0"/>
+              </a:spcAft>
+            </a:pPr>
+            <a:r>
+              <a:rPr sz="1800">
+                <a:solidFill>
+                  <a:srgbClr val="6D8C97"/>
+                </a:solidFill>
+                <a:latin typeface="Consolas"/>
+              </a:rPr>
+              <a:t>  29  </a:t>
+            </a:r>
+            <a:r>
+              <a:rPr sz="1800">
+                <a:solidFill>
+                  <a:srgbClr val="6D8C97"/>
+                </a:solidFill>
+                <a:latin typeface="Consolas"/>
+              </a:rPr>
+              <a:t> </a:t>
+            </a:r>
+          </a:p>
+          <a:p>
+            <a:pPr>
+              <a:spcAft>
+                <a:spcPts val="0"/>
+              </a:spcAft>
+            </a:pPr>
+            <a:r>
+              <a:rPr sz="1800">
+                <a:solidFill>
+                  <a:srgbClr val="6D8C97"/>
+                </a:solidFill>
+                <a:latin typeface="Consolas"/>
+              </a:rPr>
+              <a:t>  30  </a:t>
+            </a:r>
+            <a:r>
+              <a:rPr sz="1800">
+                <a:solidFill>
+                  <a:srgbClr val="6D8C97"/>
+                </a:solidFill>
+                <a:latin typeface="Consolas"/>
+              </a:rPr>
+              <a:t>// The smallest useful request: what models does this server have?</a:t>
+            </a:r>
+          </a:p>
+          <a:p>
+            <a:pPr>
+              <a:spcAft>
+                <a:spcPts val="0"/>
+              </a:spcAft>
+            </a:pPr>
+            <a:r>
+              <a:rPr sz="1800">
+                <a:solidFill>
+                  <a:srgbClr val="6D8C97"/>
+                </a:solidFill>
+                <a:latin typeface="Consolas"/>
+              </a:rPr>
+              <a:t>  31  </a:t>
+            </a:r>
+            <a:r>
+              <a:rPr sz="1800">
+                <a:solidFill>
+                  <a:srgbClr val="6D8C97"/>
+                </a:solidFill>
+                <a:latin typeface="Consolas"/>
+              </a:rPr>
+              <a:t>// 'async' means this function does something slow and can be waited for.</a:t>
+            </a:r>
+          </a:p>
+          <a:p>
+            <a:pPr>
+              <a:spcAft>
+                <a:spcPts val="0"/>
+              </a:spcAft>
+            </a:pPr>
+            <a:r>
+              <a:rPr sz="1800">
+                <a:solidFill>
+                  <a:srgbClr val="6D8C97"/>
+                </a:solidFill>
+                <a:latin typeface="Consolas"/>
+              </a:rPr>
+              <a:t>  32  </a:t>
+            </a:r>
+            <a:r>
+              <a:rPr sz="1800">
+                <a:solidFill>
+                  <a:srgbClr val="6D8C97"/>
+                </a:solidFill>
+                <a:latin typeface="Consolas"/>
+              </a:rPr>
+              <a:t>async function listModels() {</a:t>
+            </a:r>
+          </a:p>
+          <a:p>
+            <a:pPr>
+              <a:spcAft>
+                <a:spcPts val="0"/>
+              </a:spcAft>
+            </a:pPr>
+            <a:r>
+              <a:rPr sz="1800">
+                <a:solidFill>
+                  <a:srgbClr val="6D8C97"/>
+                </a:solidFill>
+                <a:latin typeface="Consolas"/>
+              </a:rPr>
+              <a:t>  33  </a:t>
+            </a:r>
+            <a:r>
+              <a:rPr sz="1800">
+                <a:solidFill>
+                  <a:srgbClr val="7FE0A0"/>
+                </a:solidFill>
+                <a:latin typeface="Consolas"/>
+              </a:rPr>
+              <a:t>  const res = await fetch(AI_BASE + '/v1/models', {</a:t>
+            </a:r>
+          </a:p>
+        </p:txBody>
+      </p:sp>
+      <p:sp>
+        <p:nvSpPr>
+          <p:cNvPr id="4" name="TextBox 3"/>
+          <p:cNvSpPr txBox="1"/>
+          <p:nvPr/>
+        </p:nvSpPr>
+        <p:spPr>
+          <a:xfrm>
+            <a:off x="548640" y="5623560"/>
+            <a:ext cx="11064240" cy="1051560"/>
+          </a:xfrm>
+          <a:prstGeom prst="rect">
+            <a:avLst/>
+          </a:prstGeom>
+          <a:noFill/>
+        </p:spPr>
+        <p:txBody>
+          <a:bodyPr wrap="square">
+            <a:spAutoFit/>
+          </a:bodyPr>
+          <a:lstStyle/>
+          <a:p>
+            <a:r>
+              <a:rPr sz="2000">
+                <a:solidFill>
+                  <a:srgbClr val="DCECEF"/>
+                </a:solidFill>
+              </a:rPr>
+              <a:t>await fetch(...) asks the server for the list at /v1/models and waits for the reply.</a:t>
+            </a:r>
+          </a:p>
+        </p:txBody>
+      </p:sp>
+    </p:spTree>
+  </p:cSld>
+  <p:clrMapOvr>
+    <a:masterClrMapping/>
+  </p:clrMapOvr>
+</p:sld>
+</file>
+
+<file path=ppt/slides/slide17.xml><?xml version="1.0" encoding="utf-8"?>
+<p:sld xmlns:a="http://schemas.openxmlformats.org/drawingml/2006/main" xmlns:p="http://schemas.openxmlformats.org/presentationml/2006/main" xmlns:r="http://schemas.openxmlformats.org/officeDocument/2006/relationships">
+  <p:cSld>
+    <p:bg>
+      <p:bgPr>
+        <a:solidFill>
+          <a:srgbClr val="102127"/>
+        </a:solidFill>
+        <a:effectLst/>
+      </p:bgPr>
+    </p:bg>
+    <p:spTree>
+      <p:nvGrpSpPr>
+        <p:cNvPr id="1" name=""/>
+        <p:cNvGrpSpPr/>
+        <p:nvPr/>
+      </p:nvGrpSpPr>
+      <p:grpSpPr/>
+      <p:sp>
+        <p:nvSpPr>
+          <p:cNvPr id="2" name="TextBox 1"/>
+          <p:cNvSpPr txBox="1"/>
+          <p:nvPr/>
+        </p:nvSpPr>
+        <p:spPr>
+          <a:xfrm>
+            <a:off x="502920" y="274320"/>
+            <a:ext cx="11155680" cy="548640"/>
+          </a:xfrm>
+          <a:prstGeom prst="rect">
+            <a:avLst/>
+          </a:prstGeom>
+          <a:noFill/>
+        </p:spPr>
+        <p:txBody>
+          <a:bodyPr wrap="none">
+            <a:spAutoFit/>
+          </a:bodyPr>
+          <a:lstStyle/>
+          <a:p>
+            <a:r>
+              <a:rPr sz="2200" b="1">
+                <a:solidFill>
+                  <a:srgbClr val="01AEFD"/>
+                </a:solidFill>
+              </a:rPr>
+              <a:t>Type this into script.js   -   line 34</a:t>
+            </a:r>
+          </a:p>
+        </p:txBody>
+      </p:sp>
+      <p:sp>
+        <p:nvSpPr>
+          <p:cNvPr id="3" name="TextBox 2"/>
+          <p:cNvSpPr txBox="1"/>
+          <p:nvPr/>
+        </p:nvSpPr>
+        <p:spPr>
+          <a:xfrm>
+            <a:off x="502920" y="960120"/>
+            <a:ext cx="11155680" cy="4297680"/>
+          </a:xfrm>
+          <a:prstGeom prst="rect">
+            <a:avLst/>
+          </a:prstGeom>
+          <a:noFill/>
+        </p:spPr>
+        <p:txBody>
+          <a:bodyPr wrap="none">
+            <a:spAutoFit/>
+          </a:bodyPr>
+          <a:lstStyle/>
+          <a:p>
+            <a:pPr>
+              <a:spcAft>
+                <a:spcPts val="0"/>
+              </a:spcAft>
+            </a:pPr>
+            <a:r>
+              <a:rPr sz="1800">
+                <a:solidFill>
+                  <a:srgbClr val="6D8C97"/>
+                </a:solidFill>
+                <a:latin typeface="Consolas"/>
+              </a:rPr>
+              <a:t>  29  </a:t>
+            </a:r>
+            <a:r>
+              <a:rPr sz="1800">
+                <a:solidFill>
+                  <a:srgbClr val="6D8C97"/>
+                </a:solidFill>
+                <a:latin typeface="Consolas"/>
+              </a:rPr>
+              <a:t> </a:t>
+            </a:r>
+          </a:p>
+          <a:p>
+            <a:pPr>
+              <a:spcAft>
+                <a:spcPts val="0"/>
+              </a:spcAft>
+            </a:pPr>
+            <a:r>
+              <a:rPr sz="1800">
+                <a:solidFill>
+                  <a:srgbClr val="6D8C97"/>
+                </a:solidFill>
+                <a:latin typeface="Consolas"/>
+              </a:rPr>
+              <a:t>  30  </a:t>
+            </a:r>
+            <a:r>
+              <a:rPr sz="1800">
+                <a:solidFill>
+                  <a:srgbClr val="6D8C97"/>
+                </a:solidFill>
+                <a:latin typeface="Consolas"/>
+              </a:rPr>
+              <a:t>// The smallest useful request: what models does this server have?</a:t>
+            </a:r>
+          </a:p>
+          <a:p>
+            <a:pPr>
+              <a:spcAft>
+                <a:spcPts val="0"/>
+              </a:spcAft>
+            </a:pPr>
+            <a:r>
+              <a:rPr sz="1800">
+                <a:solidFill>
+                  <a:srgbClr val="6D8C97"/>
+                </a:solidFill>
+                <a:latin typeface="Consolas"/>
+              </a:rPr>
+              <a:t>  31  </a:t>
+            </a:r>
+            <a:r>
+              <a:rPr sz="1800">
+                <a:solidFill>
+                  <a:srgbClr val="6D8C97"/>
+                </a:solidFill>
+                <a:latin typeface="Consolas"/>
+              </a:rPr>
+              <a:t>// 'async' means this function does something slow and can be waited for.</a:t>
+            </a:r>
+          </a:p>
+          <a:p>
+            <a:pPr>
+              <a:spcAft>
+                <a:spcPts val="0"/>
+              </a:spcAft>
+            </a:pPr>
+            <a:r>
+              <a:rPr sz="1800">
+                <a:solidFill>
+                  <a:srgbClr val="6D8C97"/>
+                </a:solidFill>
+                <a:latin typeface="Consolas"/>
+              </a:rPr>
+              <a:t>  32  </a:t>
+            </a:r>
+            <a:r>
+              <a:rPr sz="1800">
+                <a:solidFill>
+                  <a:srgbClr val="6D8C97"/>
+                </a:solidFill>
+                <a:latin typeface="Consolas"/>
+              </a:rPr>
+              <a:t>async function listModels() {</a:t>
+            </a:r>
+          </a:p>
+          <a:p>
+            <a:pPr>
+              <a:spcAft>
+                <a:spcPts val="0"/>
+              </a:spcAft>
+            </a:pPr>
+            <a:r>
+              <a:rPr sz="1800">
+                <a:solidFill>
+                  <a:srgbClr val="6D8C97"/>
+                </a:solidFill>
+                <a:latin typeface="Consolas"/>
+              </a:rPr>
+              <a:t>  33  </a:t>
+            </a:r>
+            <a:r>
+              <a:rPr sz="1800">
+                <a:solidFill>
+                  <a:srgbClr val="6D8C97"/>
+                </a:solidFill>
+                <a:latin typeface="Consolas"/>
+              </a:rPr>
+              <a:t>  const res = await fetch(AI_BASE + '/v1/models', {</a:t>
+            </a:r>
+          </a:p>
+          <a:p>
+            <a:pPr>
+              <a:spcAft>
+                <a:spcPts val="0"/>
+              </a:spcAft>
+            </a:pPr>
+            <a:r>
+              <a:rPr sz="1800">
+                <a:solidFill>
+                  <a:srgbClr val="6D8C97"/>
+                </a:solidFill>
+                <a:latin typeface="Consolas"/>
+              </a:rPr>
+              <a:t>  34  </a:t>
+            </a:r>
+            <a:r>
+              <a:rPr sz="1800">
+                <a:solidFill>
+                  <a:srgbClr val="7FE0A0"/>
+                </a:solidFill>
+                <a:latin typeface="Consolas"/>
+              </a:rPr>
+              <a:t>    headers: { 'Authorization': 'Bearer ' + API_KEY }</a:t>
+            </a:r>
+          </a:p>
+        </p:txBody>
+      </p:sp>
+      <p:sp>
+        <p:nvSpPr>
+          <p:cNvPr id="4" name="TextBox 3"/>
+          <p:cNvSpPr txBox="1"/>
+          <p:nvPr/>
+        </p:nvSpPr>
+        <p:spPr>
+          <a:xfrm>
+            <a:off x="548640" y="5623560"/>
+            <a:ext cx="11064240" cy="1051560"/>
+          </a:xfrm>
+          <a:prstGeom prst="rect">
+            <a:avLst/>
+          </a:prstGeom>
+          <a:noFill/>
+        </p:spPr>
+        <p:txBody>
+          <a:bodyPr wrap="square">
+            <a:spAutoFit/>
+          </a:bodyPr>
+          <a:lstStyle/>
+          <a:p>
+            <a:r>
+              <a:rPr sz="2000">
+                <a:solidFill>
+                  <a:srgbClr val="DCECEF"/>
+                </a:solidFill>
+              </a:rPr>
+              <a:t>The header proves who you are by sending your key as a Bearer token.</a:t>
+            </a:r>
+          </a:p>
+        </p:txBody>
+      </p:sp>
+    </p:spTree>
+  </p:cSld>
+  <p:clrMapOvr>
+    <a:masterClrMapping/>
+  </p:clrMapOvr>
+</p:sld>
+</file>
+
+<file path=ppt/slides/slide18.xml><?xml version="1.0" encoding="utf-8"?>
+<p:sld xmlns:a="http://schemas.openxmlformats.org/drawingml/2006/main" xmlns:p="http://schemas.openxmlformats.org/presentationml/2006/main" xmlns:r="http://schemas.openxmlformats.org/officeDocument/2006/relationships">
+  <p:cSld>
+    <p:bg>
+      <p:bgPr>
+        <a:solidFill>
+          <a:srgbClr val="102127"/>
+        </a:solidFill>
+        <a:effectLst/>
+      </p:bgPr>
+    </p:bg>
+    <p:spTree>
+      <p:nvGrpSpPr>
+        <p:cNvPr id="1" name=""/>
+        <p:cNvGrpSpPr/>
+        <p:nvPr/>
+      </p:nvGrpSpPr>
+      <p:grpSpPr/>
+      <p:sp>
+        <p:nvSpPr>
+          <p:cNvPr id="2" name="TextBox 1"/>
+          <p:cNvSpPr txBox="1"/>
+          <p:nvPr/>
+        </p:nvSpPr>
+        <p:spPr>
+          <a:xfrm>
+            <a:off x="502920" y="274320"/>
+            <a:ext cx="11155680" cy="548640"/>
+          </a:xfrm>
+          <a:prstGeom prst="rect">
+            <a:avLst/>
+          </a:prstGeom>
+          <a:noFill/>
+        </p:spPr>
+        <p:txBody>
+          <a:bodyPr wrap="none">
+            <a:spAutoFit/>
+          </a:bodyPr>
+          <a:lstStyle/>
+          <a:p>
+            <a:r>
+              <a:rPr sz="2200" b="1">
+                <a:solidFill>
+                  <a:srgbClr val="01AEFD"/>
+                </a:solidFill>
+              </a:rPr>
+              <a:t>Type this into script.js   -   line 35</a:t>
+            </a:r>
+          </a:p>
+        </p:txBody>
+      </p:sp>
+      <p:sp>
+        <p:nvSpPr>
+          <p:cNvPr id="3" name="TextBox 2"/>
+          <p:cNvSpPr txBox="1"/>
+          <p:nvPr/>
+        </p:nvSpPr>
+        <p:spPr>
+          <a:xfrm>
+            <a:off x="502920" y="960120"/>
+            <a:ext cx="11155680" cy="4297680"/>
+          </a:xfrm>
+          <a:prstGeom prst="rect">
+            <a:avLst/>
+          </a:prstGeom>
+          <a:noFill/>
+        </p:spPr>
+        <p:txBody>
+          <a:bodyPr wrap="none">
+            <a:spAutoFit/>
+          </a:bodyPr>
+          <a:lstStyle/>
+          <a:p>
+            <a:pPr>
+              <a:spcAft>
+                <a:spcPts val="0"/>
+              </a:spcAft>
+            </a:pPr>
+            <a:r>
+              <a:rPr sz="1800">
+                <a:solidFill>
+                  <a:srgbClr val="6D8C97"/>
+                </a:solidFill>
+                <a:latin typeface="Consolas"/>
+              </a:rPr>
+              <a:t>  29  </a:t>
+            </a:r>
+            <a:r>
+              <a:rPr sz="1800">
+                <a:solidFill>
+                  <a:srgbClr val="6D8C97"/>
+                </a:solidFill>
+                <a:latin typeface="Consolas"/>
+              </a:rPr>
+              <a:t> </a:t>
+            </a:r>
+          </a:p>
+          <a:p>
+            <a:pPr>
+              <a:spcAft>
+                <a:spcPts val="0"/>
+              </a:spcAft>
+            </a:pPr>
+            <a:r>
+              <a:rPr sz="1800">
+                <a:solidFill>
+                  <a:srgbClr val="6D8C97"/>
+                </a:solidFill>
+                <a:latin typeface="Consolas"/>
+              </a:rPr>
+              <a:t>  30  </a:t>
+            </a:r>
+            <a:r>
+              <a:rPr sz="1800">
+                <a:solidFill>
+                  <a:srgbClr val="6D8C97"/>
+                </a:solidFill>
+                <a:latin typeface="Consolas"/>
+              </a:rPr>
+              <a:t>// The smallest useful request: what models does this server have?</a:t>
+            </a:r>
+          </a:p>
+          <a:p>
+            <a:pPr>
+              <a:spcAft>
+                <a:spcPts val="0"/>
+              </a:spcAft>
+            </a:pPr>
+            <a:r>
+              <a:rPr sz="1800">
+                <a:solidFill>
+                  <a:srgbClr val="6D8C97"/>
+                </a:solidFill>
+                <a:latin typeface="Consolas"/>
+              </a:rPr>
+              <a:t>  31  </a:t>
+            </a:r>
+            <a:r>
+              <a:rPr sz="1800">
+                <a:solidFill>
+                  <a:srgbClr val="6D8C97"/>
+                </a:solidFill>
+                <a:latin typeface="Consolas"/>
+              </a:rPr>
+              <a:t>// 'async' means this function does something slow and can be waited for.</a:t>
+            </a:r>
+          </a:p>
+          <a:p>
+            <a:pPr>
+              <a:spcAft>
+                <a:spcPts val="0"/>
+              </a:spcAft>
+            </a:pPr>
+            <a:r>
+              <a:rPr sz="1800">
+                <a:solidFill>
+                  <a:srgbClr val="6D8C97"/>
+                </a:solidFill>
+                <a:latin typeface="Consolas"/>
+              </a:rPr>
+              <a:t>  32  </a:t>
+            </a:r>
+            <a:r>
+              <a:rPr sz="1800">
+                <a:solidFill>
+                  <a:srgbClr val="6D8C97"/>
+                </a:solidFill>
+                <a:latin typeface="Consolas"/>
+              </a:rPr>
+              <a:t>async function listModels() {</a:t>
+            </a:r>
+          </a:p>
+          <a:p>
+            <a:pPr>
+              <a:spcAft>
+                <a:spcPts val="0"/>
+              </a:spcAft>
+            </a:pPr>
+            <a:r>
+              <a:rPr sz="1800">
+                <a:solidFill>
+                  <a:srgbClr val="6D8C97"/>
+                </a:solidFill>
+                <a:latin typeface="Consolas"/>
+              </a:rPr>
+              <a:t>  33  </a:t>
+            </a:r>
+            <a:r>
+              <a:rPr sz="1800">
+                <a:solidFill>
+                  <a:srgbClr val="6D8C97"/>
+                </a:solidFill>
+                <a:latin typeface="Consolas"/>
+              </a:rPr>
+              <a:t>  const res = await fetch(AI_BASE + '/v1/models', {</a:t>
+            </a:r>
+          </a:p>
+          <a:p>
+            <a:pPr>
+              <a:spcAft>
+                <a:spcPts val="0"/>
+              </a:spcAft>
+            </a:pPr>
+            <a:r>
+              <a:rPr sz="1800">
+                <a:solidFill>
+                  <a:srgbClr val="6D8C97"/>
+                </a:solidFill>
+                <a:latin typeface="Consolas"/>
+              </a:rPr>
+              <a:t>  34  </a:t>
+            </a:r>
+            <a:r>
+              <a:rPr sz="1800">
+                <a:solidFill>
+                  <a:srgbClr val="6D8C97"/>
+                </a:solidFill>
+                <a:latin typeface="Consolas"/>
+              </a:rPr>
+              <a:t>    headers: { 'Authorization': 'Bearer ' + API_KEY }</a:t>
+            </a:r>
+          </a:p>
+          <a:p>
+            <a:pPr>
+              <a:spcAft>
+                <a:spcPts val="0"/>
+              </a:spcAft>
+            </a:pPr>
+            <a:r>
+              <a:rPr sz="1800">
+                <a:solidFill>
+                  <a:srgbClr val="6D8C97"/>
+                </a:solidFill>
+                <a:latin typeface="Consolas"/>
+              </a:rPr>
+              <a:t>  35  </a:t>
+            </a:r>
+            <a:r>
+              <a:rPr sz="1800">
+                <a:solidFill>
+                  <a:srgbClr val="7FE0A0"/>
+                </a:solidFill>
+                <a:latin typeface="Consolas"/>
+              </a:rPr>
+              <a:t>  });</a:t>
+            </a:r>
+          </a:p>
+        </p:txBody>
+      </p:sp>
+      <p:sp>
+        <p:nvSpPr>
+          <p:cNvPr id="4" name="TextBox 3"/>
+          <p:cNvSpPr txBox="1"/>
+          <p:nvPr/>
+        </p:nvSpPr>
+        <p:spPr>
+          <a:xfrm>
+            <a:off x="548640" y="5623560"/>
+            <a:ext cx="11064240" cy="1051560"/>
+          </a:xfrm>
+          <a:prstGeom prst="rect">
+            <a:avLst/>
+          </a:prstGeom>
+          <a:noFill/>
+        </p:spPr>
+        <p:txBody>
+          <a:bodyPr wrap="square">
+            <a:spAutoFit/>
+          </a:bodyPr>
+          <a:lstStyle/>
+          <a:p>
+            <a:r>
+              <a:rPr sz="2000">
+                <a:solidFill>
+                  <a:srgbClr val="DCECEF"/>
+                </a:solidFill>
+              </a:rPr>
+              <a:t>Closes the fetch call.</a:t>
+            </a:r>
+          </a:p>
+        </p:txBody>
+      </p:sp>
+    </p:spTree>
+  </p:cSld>
+  <p:clrMapOvr>
+    <a:masterClrMapping/>
+  </p:clrMapOvr>
+</p:sld>
+</file>
+
+<file path=ppt/slides/slide19.xml><?xml version="1.0" encoding="utf-8"?>
+<p:sld xmlns:a="http://schemas.openxmlformats.org/drawingml/2006/main" xmlns:p="http://schemas.openxmlformats.org/presentationml/2006/main" xmlns:r="http://schemas.openxmlformats.org/officeDocument/2006/relationships">
+  <p:cSld>
+    <p:spTree>
+      <p:nvGrpSpPr>
+        <p:cNvPr id="1" name=""/>
+        <p:cNvGrpSpPr/>
+        <p:nvPr/>
+      </p:nvGrpSpPr>
+      <p:grpSpPr/>
+      <p:sp>
+        <p:nvSpPr>
+          <p:cNvPr id="2" name="Title 1"/>
+          <p:cNvSpPr>
+            <a:spLocks noGrp="1"/>
+          </p:cNvSpPr>
+          <p:nvPr>
+            <p:ph type="title"/>
+          </p:nvPr>
+        </p:nvSpPr>
+        <p:spPr/>
+        <p:txBody>
+          <a:bodyPr/>
+          <a:lstStyle/>
+          <a:p>
+            <a:r>
+              <a:rPr sz="3800" b="1">
+                <a:solidFill>
+                  <a:srgbClr val="1F2A37"/>
+                </a:solidFill>
+              </a:rPr>
+              <a:t>res.json()</a:t>
+            </a:r>
+          </a:p>
+        </p:txBody>
+      </p:sp>
+      <p:sp>
+        <p:nvSpPr>
+          <p:cNvPr id="3" name="TextBox 2"/>
+          <p:cNvSpPr txBox="1"/>
+          <p:nvPr/>
+        </p:nvSpPr>
+        <p:spPr>
+          <a:xfrm>
+            <a:off x="868680" y="502920"/>
+            <a:ext cx="5486400" cy="457200"/>
+          </a:xfrm>
+          <a:prstGeom prst="rect">
+            <a:avLst/>
+          </a:prstGeom>
+          <a:noFill/>
+        </p:spPr>
+        <p:txBody>
+          <a:bodyPr wrap="none">
+            <a:spAutoFit/>
+          </a:bodyPr>
+          <a:lstStyle/>
+          <a:p>
+            <a:r>
+              <a:rPr sz="1500" b="1">
+                <a:solidFill>
+                  <a:srgbClr val="01AEFD"/>
+                </a:solidFill>
+              </a:rPr>
+              <a:t>JAVASCRIPT</a:t>
+            </a:r>
+          </a:p>
+        </p:txBody>
+      </p:sp>
+      <p:sp>
+        <p:nvSpPr>
+          <p:cNvPr id="4" name="TextBox 3"/>
+          <p:cNvSpPr txBox="1"/>
+          <p:nvPr/>
+        </p:nvSpPr>
+        <p:spPr>
+          <a:xfrm>
+            <a:off x="822960" y="1828800"/>
+            <a:ext cx="10515600" cy="4206240"/>
+          </a:xfrm>
+          <a:prstGeom prst="rect">
+            <a:avLst/>
+          </a:prstGeom>
+          <a:noFill/>
+        </p:spPr>
+        <p:txBody>
+          <a:bodyPr wrap="square">
+            <a:spAutoFit/>
+          </a:bodyPr>
+          <a:lstStyle/>
+          <a:p>
+            <a:pPr>
+              <a:spcAft>
+                <a:spcPts val="1400"/>
+              </a:spcAft>
+            </a:pPr>
+            <a:r>
+              <a:rPr sz="2400">
+                <a:solidFill>
+                  <a:srgbClr val="1F2A37"/>
+                </a:solidFill>
+              </a:rPr>
+              <a:t>• The reply arrives as text; .json() turns it into data your code can use.</a:t>
+            </a:r>
+          </a:p>
+          <a:p>
+            <a:pPr>
+              <a:spcAft>
+                <a:spcPts val="1400"/>
+              </a:spcAft>
+            </a:pPr>
+            <a:r>
+              <a:rPr sz="2400">
+                <a:solidFill>
+                  <a:srgbClr val="1F2A37"/>
+                </a:solidFill>
+              </a:rPr>
+              <a:t>• Also slow, so it needs await.</a:t>
             </a:r>
           </a:p>
         </p:txBody>
@@ -3637,6 +5081,2461 @@
                 </a:solidFill>
               </a:rPr>
               <a:t>• Do not put it in anything you share</a:t>
+            </a:r>
+          </a:p>
+        </p:txBody>
+      </p:sp>
+    </p:spTree>
+  </p:cSld>
+  <p:clrMapOvr>
+    <a:masterClrMapping/>
+  </p:clrMapOvr>
+</p:sld>
+</file>
+
+<file path=ppt/slides/slide20.xml><?xml version="1.0" encoding="utf-8"?>
+<p:sld xmlns:a="http://schemas.openxmlformats.org/drawingml/2006/main" xmlns:p="http://schemas.openxmlformats.org/presentationml/2006/main" xmlns:r="http://schemas.openxmlformats.org/officeDocument/2006/relationships">
+  <p:cSld>
+    <p:bg>
+      <p:bgPr>
+        <a:solidFill>
+          <a:srgbClr val="102127"/>
+        </a:solidFill>
+        <a:effectLst/>
+      </p:bgPr>
+    </p:bg>
+    <p:spTree>
+      <p:nvGrpSpPr>
+        <p:cNvPr id="1" name=""/>
+        <p:cNvGrpSpPr/>
+        <p:nvPr/>
+      </p:nvGrpSpPr>
+      <p:grpSpPr/>
+      <p:sp>
+        <p:nvSpPr>
+          <p:cNvPr id="2" name="TextBox 1"/>
+          <p:cNvSpPr txBox="1"/>
+          <p:nvPr/>
+        </p:nvSpPr>
+        <p:spPr>
+          <a:xfrm>
+            <a:off x="502920" y="274320"/>
+            <a:ext cx="11155680" cy="548640"/>
+          </a:xfrm>
+          <a:prstGeom prst="rect">
+            <a:avLst/>
+          </a:prstGeom>
+          <a:noFill/>
+        </p:spPr>
+        <p:txBody>
+          <a:bodyPr wrap="none">
+            <a:spAutoFit/>
+          </a:bodyPr>
+          <a:lstStyle/>
+          <a:p>
+            <a:r>
+              <a:rPr sz="2200" b="1">
+                <a:solidFill>
+                  <a:srgbClr val="01AEFD"/>
+                </a:solidFill>
+              </a:rPr>
+              <a:t>Type this into script.js   -   line 36</a:t>
+            </a:r>
+          </a:p>
+        </p:txBody>
+      </p:sp>
+      <p:sp>
+        <p:nvSpPr>
+          <p:cNvPr id="3" name="TextBox 2"/>
+          <p:cNvSpPr txBox="1"/>
+          <p:nvPr/>
+        </p:nvSpPr>
+        <p:spPr>
+          <a:xfrm>
+            <a:off x="502920" y="960120"/>
+            <a:ext cx="11155680" cy="4297680"/>
+          </a:xfrm>
+          <a:prstGeom prst="rect">
+            <a:avLst/>
+          </a:prstGeom>
+          <a:noFill/>
+        </p:spPr>
+        <p:txBody>
+          <a:bodyPr wrap="none">
+            <a:spAutoFit/>
+          </a:bodyPr>
+          <a:lstStyle/>
+          <a:p>
+            <a:pPr>
+              <a:spcAft>
+                <a:spcPts val="0"/>
+              </a:spcAft>
+            </a:pPr>
+            <a:r>
+              <a:rPr sz="1800">
+                <a:solidFill>
+                  <a:srgbClr val="6D8C97"/>
+                </a:solidFill>
+                <a:latin typeface="Consolas"/>
+              </a:rPr>
+              <a:t>  29  </a:t>
+            </a:r>
+            <a:r>
+              <a:rPr sz="1800">
+                <a:solidFill>
+                  <a:srgbClr val="6D8C97"/>
+                </a:solidFill>
+                <a:latin typeface="Consolas"/>
+              </a:rPr>
+              <a:t> </a:t>
+            </a:r>
+          </a:p>
+          <a:p>
+            <a:pPr>
+              <a:spcAft>
+                <a:spcPts val="0"/>
+              </a:spcAft>
+            </a:pPr>
+            <a:r>
+              <a:rPr sz="1800">
+                <a:solidFill>
+                  <a:srgbClr val="6D8C97"/>
+                </a:solidFill>
+                <a:latin typeface="Consolas"/>
+              </a:rPr>
+              <a:t>  30  </a:t>
+            </a:r>
+            <a:r>
+              <a:rPr sz="1800">
+                <a:solidFill>
+                  <a:srgbClr val="6D8C97"/>
+                </a:solidFill>
+                <a:latin typeface="Consolas"/>
+              </a:rPr>
+              <a:t>// The smallest useful request: what models does this server have?</a:t>
+            </a:r>
+          </a:p>
+          <a:p>
+            <a:pPr>
+              <a:spcAft>
+                <a:spcPts val="0"/>
+              </a:spcAft>
+            </a:pPr>
+            <a:r>
+              <a:rPr sz="1800">
+                <a:solidFill>
+                  <a:srgbClr val="6D8C97"/>
+                </a:solidFill>
+                <a:latin typeface="Consolas"/>
+              </a:rPr>
+              <a:t>  31  </a:t>
+            </a:r>
+            <a:r>
+              <a:rPr sz="1800">
+                <a:solidFill>
+                  <a:srgbClr val="6D8C97"/>
+                </a:solidFill>
+                <a:latin typeface="Consolas"/>
+              </a:rPr>
+              <a:t>// 'async' means this function does something slow and can be waited for.</a:t>
+            </a:r>
+          </a:p>
+          <a:p>
+            <a:pPr>
+              <a:spcAft>
+                <a:spcPts val="0"/>
+              </a:spcAft>
+            </a:pPr>
+            <a:r>
+              <a:rPr sz="1800">
+                <a:solidFill>
+                  <a:srgbClr val="6D8C97"/>
+                </a:solidFill>
+                <a:latin typeface="Consolas"/>
+              </a:rPr>
+              <a:t>  32  </a:t>
+            </a:r>
+            <a:r>
+              <a:rPr sz="1800">
+                <a:solidFill>
+                  <a:srgbClr val="6D8C97"/>
+                </a:solidFill>
+                <a:latin typeface="Consolas"/>
+              </a:rPr>
+              <a:t>async function listModels() {</a:t>
+            </a:r>
+          </a:p>
+          <a:p>
+            <a:pPr>
+              <a:spcAft>
+                <a:spcPts val="0"/>
+              </a:spcAft>
+            </a:pPr>
+            <a:r>
+              <a:rPr sz="1800">
+                <a:solidFill>
+                  <a:srgbClr val="6D8C97"/>
+                </a:solidFill>
+                <a:latin typeface="Consolas"/>
+              </a:rPr>
+              <a:t>  33  </a:t>
+            </a:r>
+            <a:r>
+              <a:rPr sz="1800">
+                <a:solidFill>
+                  <a:srgbClr val="6D8C97"/>
+                </a:solidFill>
+                <a:latin typeface="Consolas"/>
+              </a:rPr>
+              <a:t>  const res = await fetch(AI_BASE + '/v1/models', {</a:t>
+            </a:r>
+          </a:p>
+          <a:p>
+            <a:pPr>
+              <a:spcAft>
+                <a:spcPts val="0"/>
+              </a:spcAft>
+            </a:pPr>
+            <a:r>
+              <a:rPr sz="1800">
+                <a:solidFill>
+                  <a:srgbClr val="6D8C97"/>
+                </a:solidFill>
+                <a:latin typeface="Consolas"/>
+              </a:rPr>
+              <a:t>  34  </a:t>
+            </a:r>
+            <a:r>
+              <a:rPr sz="1800">
+                <a:solidFill>
+                  <a:srgbClr val="6D8C97"/>
+                </a:solidFill>
+                <a:latin typeface="Consolas"/>
+              </a:rPr>
+              <a:t>    headers: { 'Authorization': 'Bearer ' + API_KEY }</a:t>
+            </a:r>
+          </a:p>
+          <a:p>
+            <a:pPr>
+              <a:spcAft>
+                <a:spcPts val="0"/>
+              </a:spcAft>
+            </a:pPr>
+            <a:r>
+              <a:rPr sz="1800">
+                <a:solidFill>
+                  <a:srgbClr val="6D8C97"/>
+                </a:solidFill>
+                <a:latin typeface="Consolas"/>
+              </a:rPr>
+              <a:t>  35  </a:t>
+            </a:r>
+            <a:r>
+              <a:rPr sz="1800">
+                <a:solidFill>
+                  <a:srgbClr val="6D8C97"/>
+                </a:solidFill>
+                <a:latin typeface="Consolas"/>
+              </a:rPr>
+              <a:t>  });</a:t>
+            </a:r>
+          </a:p>
+          <a:p>
+            <a:pPr>
+              <a:spcAft>
+                <a:spcPts val="0"/>
+              </a:spcAft>
+            </a:pPr>
+            <a:r>
+              <a:rPr sz="1800">
+                <a:solidFill>
+                  <a:srgbClr val="6D8C97"/>
+                </a:solidFill>
+                <a:latin typeface="Consolas"/>
+              </a:rPr>
+              <a:t>  36  </a:t>
+            </a:r>
+            <a:r>
+              <a:rPr sz="1800">
+                <a:solidFill>
+                  <a:srgbClr val="7FE0A0"/>
+                </a:solidFill>
+                <a:latin typeface="Consolas"/>
+              </a:rPr>
+              <a:t>  const data = await res.json();   // the answer arrives as text; this reads it</a:t>
+            </a:r>
+          </a:p>
+        </p:txBody>
+      </p:sp>
+      <p:sp>
+        <p:nvSpPr>
+          <p:cNvPr id="4" name="TextBox 3"/>
+          <p:cNvSpPr txBox="1"/>
+          <p:nvPr/>
+        </p:nvSpPr>
+        <p:spPr>
+          <a:xfrm>
+            <a:off x="548640" y="5623560"/>
+            <a:ext cx="11064240" cy="1051560"/>
+          </a:xfrm>
+          <a:prstGeom prst="rect">
+            <a:avLst/>
+          </a:prstGeom>
+          <a:noFill/>
+        </p:spPr>
+        <p:txBody>
+          <a:bodyPr wrap="square">
+            <a:spAutoFit/>
+          </a:bodyPr>
+          <a:lstStyle/>
+          <a:p>
+            <a:r>
+              <a:rPr sz="2000">
+                <a:solidFill>
+                  <a:srgbClr val="DCECEF"/>
+                </a:solidFill>
+              </a:rPr>
+              <a:t>The reply is text; await res.json() turns it into data you can use.</a:t>
+            </a:r>
+          </a:p>
+        </p:txBody>
+      </p:sp>
+    </p:spTree>
+  </p:cSld>
+  <p:clrMapOvr>
+    <a:masterClrMapping/>
+  </p:clrMapOvr>
+</p:sld>
+</file>
+
+<file path=ppt/slides/slide21.xml><?xml version="1.0" encoding="utf-8"?>
+<p:sld xmlns:a="http://schemas.openxmlformats.org/drawingml/2006/main" xmlns:p="http://schemas.openxmlformats.org/presentationml/2006/main" xmlns:r="http://schemas.openxmlformats.org/officeDocument/2006/relationships">
+  <p:cSld>
+    <p:bg>
+      <p:bgPr>
+        <a:solidFill>
+          <a:srgbClr val="102127"/>
+        </a:solidFill>
+        <a:effectLst/>
+      </p:bgPr>
+    </p:bg>
+    <p:spTree>
+      <p:nvGrpSpPr>
+        <p:cNvPr id="1" name=""/>
+        <p:cNvGrpSpPr/>
+        <p:nvPr/>
+      </p:nvGrpSpPr>
+      <p:grpSpPr/>
+      <p:sp>
+        <p:nvSpPr>
+          <p:cNvPr id="2" name="TextBox 1"/>
+          <p:cNvSpPr txBox="1"/>
+          <p:nvPr/>
+        </p:nvSpPr>
+        <p:spPr>
+          <a:xfrm>
+            <a:off x="502920" y="274320"/>
+            <a:ext cx="11155680" cy="548640"/>
+          </a:xfrm>
+          <a:prstGeom prst="rect">
+            <a:avLst/>
+          </a:prstGeom>
+          <a:noFill/>
+        </p:spPr>
+        <p:txBody>
+          <a:bodyPr wrap="none">
+            <a:spAutoFit/>
+          </a:bodyPr>
+          <a:lstStyle/>
+          <a:p>
+            <a:r>
+              <a:rPr sz="2200" b="1">
+                <a:solidFill>
+                  <a:srgbClr val="01AEFD"/>
+                </a:solidFill>
+              </a:rPr>
+              <a:t>Type this into script.js   -   line 37</a:t>
+            </a:r>
+          </a:p>
+        </p:txBody>
+      </p:sp>
+      <p:sp>
+        <p:nvSpPr>
+          <p:cNvPr id="3" name="TextBox 2"/>
+          <p:cNvSpPr txBox="1"/>
+          <p:nvPr/>
+        </p:nvSpPr>
+        <p:spPr>
+          <a:xfrm>
+            <a:off x="502920" y="960120"/>
+            <a:ext cx="11155680" cy="4297680"/>
+          </a:xfrm>
+          <a:prstGeom prst="rect">
+            <a:avLst/>
+          </a:prstGeom>
+          <a:noFill/>
+        </p:spPr>
+        <p:txBody>
+          <a:bodyPr wrap="none">
+            <a:spAutoFit/>
+          </a:bodyPr>
+          <a:lstStyle/>
+          <a:p>
+            <a:pPr>
+              <a:spcAft>
+                <a:spcPts val="0"/>
+              </a:spcAft>
+            </a:pPr>
+            <a:r>
+              <a:rPr sz="1800">
+                <a:solidFill>
+                  <a:srgbClr val="6D8C97"/>
+                </a:solidFill>
+                <a:latin typeface="Consolas"/>
+              </a:rPr>
+              <a:t>  29  </a:t>
+            </a:r>
+            <a:r>
+              <a:rPr sz="1800">
+                <a:solidFill>
+                  <a:srgbClr val="6D8C97"/>
+                </a:solidFill>
+                <a:latin typeface="Consolas"/>
+              </a:rPr>
+              <a:t> </a:t>
+            </a:r>
+          </a:p>
+          <a:p>
+            <a:pPr>
+              <a:spcAft>
+                <a:spcPts val="0"/>
+              </a:spcAft>
+            </a:pPr>
+            <a:r>
+              <a:rPr sz="1800">
+                <a:solidFill>
+                  <a:srgbClr val="6D8C97"/>
+                </a:solidFill>
+                <a:latin typeface="Consolas"/>
+              </a:rPr>
+              <a:t>  30  </a:t>
+            </a:r>
+            <a:r>
+              <a:rPr sz="1800">
+                <a:solidFill>
+                  <a:srgbClr val="6D8C97"/>
+                </a:solidFill>
+                <a:latin typeface="Consolas"/>
+              </a:rPr>
+              <a:t>// The smallest useful request: what models does this server have?</a:t>
+            </a:r>
+          </a:p>
+          <a:p>
+            <a:pPr>
+              <a:spcAft>
+                <a:spcPts val="0"/>
+              </a:spcAft>
+            </a:pPr>
+            <a:r>
+              <a:rPr sz="1800">
+                <a:solidFill>
+                  <a:srgbClr val="6D8C97"/>
+                </a:solidFill>
+                <a:latin typeface="Consolas"/>
+              </a:rPr>
+              <a:t>  31  </a:t>
+            </a:r>
+            <a:r>
+              <a:rPr sz="1800">
+                <a:solidFill>
+                  <a:srgbClr val="6D8C97"/>
+                </a:solidFill>
+                <a:latin typeface="Consolas"/>
+              </a:rPr>
+              <a:t>// 'async' means this function does something slow and can be waited for.</a:t>
+            </a:r>
+          </a:p>
+          <a:p>
+            <a:pPr>
+              <a:spcAft>
+                <a:spcPts val="0"/>
+              </a:spcAft>
+            </a:pPr>
+            <a:r>
+              <a:rPr sz="1800">
+                <a:solidFill>
+                  <a:srgbClr val="6D8C97"/>
+                </a:solidFill>
+                <a:latin typeface="Consolas"/>
+              </a:rPr>
+              <a:t>  32  </a:t>
+            </a:r>
+            <a:r>
+              <a:rPr sz="1800">
+                <a:solidFill>
+                  <a:srgbClr val="6D8C97"/>
+                </a:solidFill>
+                <a:latin typeface="Consolas"/>
+              </a:rPr>
+              <a:t>async function listModels() {</a:t>
+            </a:r>
+          </a:p>
+          <a:p>
+            <a:pPr>
+              <a:spcAft>
+                <a:spcPts val="0"/>
+              </a:spcAft>
+            </a:pPr>
+            <a:r>
+              <a:rPr sz="1800">
+                <a:solidFill>
+                  <a:srgbClr val="6D8C97"/>
+                </a:solidFill>
+                <a:latin typeface="Consolas"/>
+              </a:rPr>
+              <a:t>  33  </a:t>
+            </a:r>
+            <a:r>
+              <a:rPr sz="1800">
+                <a:solidFill>
+                  <a:srgbClr val="6D8C97"/>
+                </a:solidFill>
+                <a:latin typeface="Consolas"/>
+              </a:rPr>
+              <a:t>  const res = await fetch(AI_BASE + '/v1/models', {</a:t>
+            </a:r>
+          </a:p>
+          <a:p>
+            <a:pPr>
+              <a:spcAft>
+                <a:spcPts val="0"/>
+              </a:spcAft>
+            </a:pPr>
+            <a:r>
+              <a:rPr sz="1800">
+                <a:solidFill>
+                  <a:srgbClr val="6D8C97"/>
+                </a:solidFill>
+                <a:latin typeface="Consolas"/>
+              </a:rPr>
+              <a:t>  34  </a:t>
+            </a:r>
+            <a:r>
+              <a:rPr sz="1800">
+                <a:solidFill>
+                  <a:srgbClr val="6D8C97"/>
+                </a:solidFill>
+                <a:latin typeface="Consolas"/>
+              </a:rPr>
+              <a:t>    headers: { 'Authorization': 'Bearer ' + API_KEY }</a:t>
+            </a:r>
+          </a:p>
+          <a:p>
+            <a:pPr>
+              <a:spcAft>
+                <a:spcPts val="0"/>
+              </a:spcAft>
+            </a:pPr>
+            <a:r>
+              <a:rPr sz="1800">
+                <a:solidFill>
+                  <a:srgbClr val="6D8C97"/>
+                </a:solidFill>
+                <a:latin typeface="Consolas"/>
+              </a:rPr>
+              <a:t>  35  </a:t>
+            </a:r>
+            <a:r>
+              <a:rPr sz="1800">
+                <a:solidFill>
+                  <a:srgbClr val="6D8C97"/>
+                </a:solidFill>
+                <a:latin typeface="Consolas"/>
+              </a:rPr>
+              <a:t>  });</a:t>
+            </a:r>
+          </a:p>
+          <a:p>
+            <a:pPr>
+              <a:spcAft>
+                <a:spcPts val="0"/>
+              </a:spcAft>
+            </a:pPr>
+            <a:r>
+              <a:rPr sz="1800">
+                <a:solidFill>
+                  <a:srgbClr val="6D8C97"/>
+                </a:solidFill>
+                <a:latin typeface="Consolas"/>
+              </a:rPr>
+              <a:t>  36  </a:t>
+            </a:r>
+            <a:r>
+              <a:rPr sz="1800">
+                <a:solidFill>
+                  <a:srgbClr val="6D8C97"/>
+                </a:solidFill>
+                <a:latin typeface="Consolas"/>
+              </a:rPr>
+              <a:t>  const data = await res.json();   // the answer arrives as text; this reads it</a:t>
+            </a:r>
+          </a:p>
+          <a:p>
+            <a:pPr>
+              <a:spcAft>
+                <a:spcPts val="0"/>
+              </a:spcAft>
+            </a:pPr>
+            <a:r>
+              <a:rPr sz="1800">
+                <a:solidFill>
+                  <a:srgbClr val="6D8C97"/>
+                </a:solidFill>
+                <a:latin typeface="Consolas"/>
+              </a:rPr>
+              <a:t>  37  </a:t>
+            </a:r>
+            <a:r>
+              <a:rPr sz="1800">
+                <a:solidFill>
+                  <a:srgbClr val="7FE0A0"/>
+                </a:solidFill>
+                <a:latin typeface="Consolas"/>
+              </a:rPr>
+              <a:t>  console.log('The server offers:', data.data);</a:t>
+            </a:r>
+          </a:p>
+        </p:txBody>
+      </p:sp>
+      <p:sp>
+        <p:nvSpPr>
+          <p:cNvPr id="4" name="TextBox 3"/>
+          <p:cNvSpPr txBox="1"/>
+          <p:nvPr/>
+        </p:nvSpPr>
+        <p:spPr>
+          <a:xfrm>
+            <a:off x="548640" y="5623560"/>
+            <a:ext cx="11064240" cy="1051560"/>
+          </a:xfrm>
+          <a:prstGeom prst="rect">
+            <a:avLst/>
+          </a:prstGeom>
+          <a:noFill/>
+        </p:spPr>
+        <p:txBody>
+          <a:bodyPr wrap="square">
+            <a:spAutoFit/>
+          </a:bodyPr>
+          <a:lstStyle/>
+          <a:p>
+            <a:r>
+              <a:rPr sz="2000">
+                <a:solidFill>
+                  <a:srgbClr val="DCECEF"/>
+                </a:solidFill>
+              </a:rPr>
+              <a:t>Prints the list of models to the console so you can see them.</a:t>
+            </a:r>
+          </a:p>
+        </p:txBody>
+      </p:sp>
+    </p:spTree>
+  </p:cSld>
+  <p:clrMapOvr>
+    <a:masterClrMapping/>
+  </p:clrMapOvr>
+</p:sld>
+</file>
+
+<file path=ppt/slides/slide22.xml><?xml version="1.0" encoding="utf-8"?>
+<p:sld xmlns:a="http://schemas.openxmlformats.org/drawingml/2006/main" xmlns:p="http://schemas.openxmlformats.org/presentationml/2006/main" xmlns:r="http://schemas.openxmlformats.org/officeDocument/2006/relationships">
+  <p:cSld>
+    <p:bg>
+      <p:bgPr>
+        <a:solidFill>
+          <a:srgbClr val="102127"/>
+        </a:solidFill>
+        <a:effectLst/>
+      </p:bgPr>
+    </p:bg>
+    <p:spTree>
+      <p:nvGrpSpPr>
+        <p:cNvPr id="1" name=""/>
+        <p:cNvGrpSpPr/>
+        <p:nvPr/>
+      </p:nvGrpSpPr>
+      <p:grpSpPr/>
+      <p:sp>
+        <p:nvSpPr>
+          <p:cNvPr id="2" name="TextBox 1"/>
+          <p:cNvSpPr txBox="1"/>
+          <p:nvPr/>
+        </p:nvSpPr>
+        <p:spPr>
+          <a:xfrm>
+            <a:off x="502920" y="274320"/>
+            <a:ext cx="11155680" cy="548640"/>
+          </a:xfrm>
+          <a:prstGeom prst="rect">
+            <a:avLst/>
+          </a:prstGeom>
+          <a:noFill/>
+        </p:spPr>
+        <p:txBody>
+          <a:bodyPr wrap="none">
+            <a:spAutoFit/>
+          </a:bodyPr>
+          <a:lstStyle/>
+          <a:p>
+            <a:r>
+              <a:rPr sz="2200" b="1">
+                <a:solidFill>
+                  <a:srgbClr val="01AEFD"/>
+                </a:solidFill>
+              </a:rPr>
+              <a:t>Type this into script.js   -   line 38</a:t>
+            </a:r>
+          </a:p>
+        </p:txBody>
+      </p:sp>
+      <p:sp>
+        <p:nvSpPr>
+          <p:cNvPr id="3" name="TextBox 2"/>
+          <p:cNvSpPr txBox="1"/>
+          <p:nvPr/>
+        </p:nvSpPr>
+        <p:spPr>
+          <a:xfrm>
+            <a:off x="502920" y="960120"/>
+            <a:ext cx="11155680" cy="4297680"/>
+          </a:xfrm>
+          <a:prstGeom prst="rect">
+            <a:avLst/>
+          </a:prstGeom>
+          <a:noFill/>
+        </p:spPr>
+        <p:txBody>
+          <a:bodyPr wrap="none">
+            <a:spAutoFit/>
+          </a:bodyPr>
+          <a:lstStyle/>
+          <a:p>
+            <a:pPr>
+              <a:spcAft>
+                <a:spcPts val="0"/>
+              </a:spcAft>
+            </a:pPr>
+            <a:r>
+              <a:rPr sz="1800">
+                <a:solidFill>
+                  <a:srgbClr val="6D8C97"/>
+                </a:solidFill>
+                <a:latin typeface="Consolas"/>
+              </a:rPr>
+              <a:t>  29  </a:t>
+            </a:r>
+            <a:r>
+              <a:rPr sz="1800">
+                <a:solidFill>
+                  <a:srgbClr val="6D8C97"/>
+                </a:solidFill>
+                <a:latin typeface="Consolas"/>
+              </a:rPr>
+              <a:t> </a:t>
+            </a:r>
+          </a:p>
+          <a:p>
+            <a:pPr>
+              <a:spcAft>
+                <a:spcPts val="0"/>
+              </a:spcAft>
+            </a:pPr>
+            <a:r>
+              <a:rPr sz="1800">
+                <a:solidFill>
+                  <a:srgbClr val="6D8C97"/>
+                </a:solidFill>
+                <a:latin typeface="Consolas"/>
+              </a:rPr>
+              <a:t>  30  </a:t>
+            </a:r>
+            <a:r>
+              <a:rPr sz="1800">
+                <a:solidFill>
+                  <a:srgbClr val="6D8C97"/>
+                </a:solidFill>
+                <a:latin typeface="Consolas"/>
+              </a:rPr>
+              <a:t>// The smallest useful request: what models does this server have?</a:t>
+            </a:r>
+          </a:p>
+          <a:p>
+            <a:pPr>
+              <a:spcAft>
+                <a:spcPts val="0"/>
+              </a:spcAft>
+            </a:pPr>
+            <a:r>
+              <a:rPr sz="1800">
+                <a:solidFill>
+                  <a:srgbClr val="6D8C97"/>
+                </a:solidFill>
+                <a:latin typeface="Consolas"/>
+              </a:rPr>
+              <a:t>  31  </a:t>
+            </a:r>
+            <a:r>
+              <a:rPr sz="1800">
+                <a:solidFill>
+                  <a:srgbClr val="6D8C97"/>
+                </a:solidFill>
+                <a:latin typeface="Consolas"/>
+              </a:rPr>
+              <a:t>// 'async' means this function does something slow and can be waited for.</a:t>
+            </a:r>
+          </a:p>
+          <a:p>
+            <a:pPr>
+              <a:spcAft>
+                <a:spcPts val="0"/>
+              </a:spcAft>
+            </a:pPr>
+            <a:r>
+              <a:rPr sz="1800">
+                <a:solidFill>
+                  <a:srgbClr val="6D8C97"/>
+                </a:solidFill>
+                <a:latin typeface="Consolas"/>
+              </a:rPr>
+              <a:t>  32  </a:t>
+            </a:r>
+            <a:r>
+              <a:rPr sz="1800">
+                <a:solidFill>
+                  <a:srgbClr val="6D8C97"/>
+                </a:solidFill>
+                <a:latin typeface="Consolas"/>
+              </a:rPr>
+              <a:t>async function listModels() {</a:t>
+            </a:r>
+          </a:p>
+          <a:p>
+            <a:pPr>
+              <a:spcAft>
+                <a:spcPts val="0"/>
+              </a:spcAft>
+            </a:pPr>
+            <a:r>
+              <a:rPr sz="1800">
+                <a:solidFill>
+                  <a:srgbClr val="6D8C97"/>
+                </a:solidFill>
+                <a:latin typeface="Consolas"/>
+              </a:rPr>
+              <a:t>  33  </a:t>
+            </a:r>
+            <a:r>
+              <a:rPr sz="1800">
+                <a:solidFill>
+                  <a:srgbClr val="6D8C97"/>
+                </a:solidFill>
+                <a:latin typeface="Consolas"/>
+              </a:rPr>
+              <a:t>  const res = await fetch(AI_BASE + '/v1/models', {</a:t>
+            </a:r>
+          </a:p>
+          <a:p>
+            <a:pPr>
+              <a:spcAft>
+                <a:spcPts val="0"/>
+              </a:spcAft>
+            </a:pPr>
+            <a:r>
+              <a:rPr sz="1800">
+                <a:solidFill>
+                  <a:srgbClr val="6D8C97"/>
+                </a:solidFill>
+                <a:latin typeface="Consolas"/>
+              </a:rPr>
+              <a:t>  34  </a:t>
+            </a:r>
+            <a:r>
+              <a:rPr sz="1800">
+                <a:solidFill>
+                  <a:srgbClr val="6D8C97"/>
+                </a:solidFill>
+                <a:latin typeface="Consolas"/>
+              </a:rPr>
+              <a:t>    headers: { 'Authorization': 'Bearer ' + API_KEY }</a:t>
+            </a:r>
+          </a:p>
+          <a:p>
+            <a:pPr>
+              <a:spcAft>
+                <a:spcPts val="0"/>
+              </a:spcAft>
+            </a:pPr>
+            <a:r>
+              <a:rPr sz="1800">
+                <a:solidFill>
+                  <a:srgbClr val="6D8C97"/>
+                </a:solidFill>
+                <a:latin typeface="Consolas"/>
+              </a:rPr>
+              <a:t>  35  </a:t>
+            </a:r>
+            <a:r>
+              <a:rPr sz="1800">
+                <a:solidFill>
+                  <a:srgbClr val="6D8C97"/>
+                </a:solidFill>
+                <a:latin typeface="Consolas"/>
+              </a:rPr>
+              <a:t>  });</a:t>
+            </a:r>
+          </a:p>
+          <a:p>
+            <a:pPr>
+              <a:spcAft>
+                <a:spcPts val="0"/>
+              </a:spcAft>
+            </a:pPr>
+            <a:r>
+              <a:rPr sz="1800">
+                <a:solidFill>
+                  <a:srgbClr val="6D8C97"/>
+                </a:solidFill>
+                <a:latin typeface="Consolas"/>
+              </a:rPr>
+              <a:t>  36  </a:t>
+            </a:r>
+            <a:r>
+              <a:rPr sz="1800">
+                <a:solidFill>
+                  <a:srgbClr val="6D8C97"/>
+                </a:solidFill>
+                <a:latin typeface="Consolas"/>
+              </a:rPr>
+              <a:t>  const data = await res.json();   // the answer arrives as text; this reads it</a:t>
+            </a:r>
+          </a:p>
+          <a:p>
+            <a:pPr>
+              <a:spcAft>
+                <a:spcPts val="0"/>
+              </a:spcAft>
+            </a:pPr>
+            <a:r>
+              <a:rPr sz="1800">
+                <a:solidFill>
+                  <a:srgbClr val="6D8C97"/>
+                </a:solidFill>
+                <a:latin typeface="Consolas"/>
+              </a:rPr>
+              <a:t>  37  </a:t>
+            </a:r>
+            <a:r>
+              <a:rPr sz="1800">
+                <a:solidFill>
+                  <a:srgbClr val="6D8C97"/>
+                </a:solidFill>
+                <a:latin typeface="Consolas"/>
+              </a:rPr>
+              <a:t>  console.log('The server offers:', data.data);</a:t>
+            </a:r>
+          </a:p>
+          <a:p>
+            <a:pPr>
+              <a:spcAft>
+                <a:spcPts val="0"/>
+              </a:spcAft>
+            </a:pPr>
+            <a:r>
+              <a:rPr sz="1800">
+                <a:solidFill>
+                  <a:srgbClr val="6D8C97"/>
+                </a:solidFill>
+                <a:latin typeface="Consolas"/>
+              </a:rPr>
+              <a:t>  38  </a:t>
+            </a:r>
+            <a:r>
+              <a:rPr sz="1800">
+                <a:solidFill>
+                  <a:srgbClr val="7FE0A0"/>
+                </a:solidFill>
+                <a:latin typeface="Consolas"/>
+              </a:rPr>
+              <a:t>}</a:t>
+            </a:r>
+          </a:p>
+        </p:txBody>
+      </p:sp>
+      <p:sp>
+        <p:nvSpPr>
+          <p:cNvPr id="4" name="TextBox 3"/>
+          <p:cNvSpPr txBox="1"/>
+          <p:nvPr/>
+        </p:nvSpPr>
+        <p:spPr>
+          <a:xfrm>
+            <a:off x="548640" y="5623560"/>
+            <a:ext cx="11064240" cy="1051560"/>
+          </a:xfrm>
+          <a:prstGeom prst="rect">
+            <a:avLst/>
+          </a:prstGeom>
+          <a:noFill/>
+        </p:spPr>
+        <p:txBody>
+          <a:bodyPr wrap="square">
+            <a:spAutoFit/>
+          </a:bodyPr>
+          <a:lstStyle/>
+          <a:p>
+            <a:r>
+              <a:rPr sz="2000">
+                <a:solidFill>
+                  <a:srgbClr val="DCECEF"/>
+                </a:solidFill>
+              </a:rPr>
+              <a:t>Closes the function.</a:t>
+            </a:r>
+          </a:p>
+        </p:txBody>
+      </p:sp>
+    </p:spTree>
+  </p:cSld>
+  <p:clrMapOvr>
+    <a:masterClrMapping/>
+  </p:clrMapOvr>
+</p:sld>
+</file>
+
+<file path=ppt/slides/slide23.xml><?xml version="1.0" encoding="utf-8"?>
+<p:sld xmlns:a="http://schemas.openxmlformats.org/drawingml/2006/main" xmlns:p="http://schemas.openxmlformats.org/presentationml/2006/main" xmlns:r="http://schemas.openxmlformats.org/officeDocument/2006/relationships">
+  <p:cSld>
+    <p:bg>
+      <p:bgPr>
+        <a:solidFill>
+          <a:srgbClr val="102127"/>
+        </a:solidFill>
+        <a:effectLst/>
+      </p:bgPr>
+    </p:bg>
+    <p:spTree>
+      <p:nvGrpSpPr>
+        <p:cNvPr id="1" name=""/>
+        <p:cNvGrpSpPr/>
+        <p:nvPr/>
+      </p:nvGrpSpPr>
+      <p:grpSpPr/>
+      <p:sp>
+        <p:nvSpPr>
+          <p:cNvPr id="2" name="TextBox 1"/>
+          <p:cNvSpPr txBox="1"/>
+          <p:nvPr/>
+        </p:nvSpPr>
+        <p:spPr>
+          <a:xfrm>
+            <a:off x="502920" y="274320"/>
+            <a:ext cx="11155680" cy="548640"/>
+          </a:xfrm>
+          <a:prstGeom prst="rect">
+            <a:avLst/>
+          </a:prstGeom>
+          <a:noFill/>
+        </p:spPr>
+        <p:txBody>
+          <a:bodyPr wrap="none">
+            <a:spAutoFit/>
+          </a:bodyPr>
+          <a:lstStyle/>
+          <a:p>
+            <a:r>
+              <a:rPr sz="2200" b="1">
+                <a:solidFill>
+                  <a:srgbClr val="01AEFD"/>
+                </a:solidFill>
+              </a:rPr>
+              <a:t>Type this into script.js   -   line 40</a:t>
+            </a:r>
+          </a:p>
+        </p:txBody>
+      </p:sp>
+      <p:sp>
+        <p:nvSpPr>
+          <p:cNvPr id="3" name="TextBox 2"/>
+          <p:cNvSpPr txBox="1"/>
+          <p:nvPr/>
+        </p:nvSpPr>
+        <p:spPr>
+          <a:xfrm>
+            <a:off x="502920" y="960120"/>
+            <a:ext cx="11155680" cy="4297680"/>
+          </a:xfrm>
+          <a:prstGeom prst="rect">
+            <a:avLst/>
+          </a:prstGeom>
+          <a:noFill/>
+        </p:spPr>
+        <p:txBody>
+          <a:bodyPr wrap="none">
+            <a:spAutoFit/>
+          </a:bodyPr>
+          <a:lstStyle/>
+          <a:p>
+            <a:pPr>
+              <a:spcAft>
+                <a:spcPts val="0"/>
+              </a:spcAft>
+            </a:pPr>
+            <a:r>
+              <a:rPr sz="1300">
+                <a:solidFill>
+                  <a:srgbClr val="6D8C97"/>
+                </a:solidFill>
+                <a:latin typeface="Consolas"/>
+              </a:rPr>
+              <a:t>  29  </a:t>
+            </a:r>
+            <a:r>
+              <a:rPr sz="1300">
+                <a:solidFill>
+                  <a:srgbClr val="6D8C97"/>
+                </a:solidFill>
+                <a:latin typeface="Consolas"/>
+              </a:rPr>
+              <a:t> </a:t>
+            </a:r>
+          </a:p>
+          <a:p>
+            <a:pPr>
+              <a:spcAft>
+                <a:spcPts val="0"/>
+              </a:spcAft>
+            </a:pPr>
+            <a:r>
+              <a:rPr sz="1300">
+                <a:solidFill>
+                  <a:srgbClr val="6D8C97"/>
+                </a:solidFill>
+                <a:latin typeface="Consolas"/>
+              </a:rPr>
+              <a:t>  30  </a:t>
+            </a:r>
+            <a:r>
+              <a:rPr sz="1300">
+                <a:solidFill>
+                  <a:srgbClr val="6D8C97"/>
+                </a:solidFill>
+                <a:latin typeface="Consolas"/>
+              </a:rPr>
+              <a:t>// The smallest useful request: what models does this server have?</a:t>
+            </a:r>
+          </a:p>
+          <a:p>
+            <a:pPr>
+              <a:spcAft>
+                <a:spcPts val="0"/>
+              </a:spcAft>
+            </a:pPr>
+            <a:r>
+              <a:rPr sz="1300">
+                <a:solidFill>
+                  <a:srgbClr val="6D8C97"/>
+                </a:solidFill>
+                <a:latin typeface="Consolas"/>
+              </a:rPr>
+              <a:t>  31  </a:t>
+            </a:r>
+            <a:r>
+              <a:rPr sz="1300">
+                <a:solidFill>
+                  <a:srgbClr val="6D8C97"/>
+                </a:solidFill>
+                <a:latin typeface="Consolas"/>
+              </a:rPr>
+              <a:t>// 'async' means this function does something slow and can be waited for.</a:t>
+            </a:r>
+          </a:p>
+          <a:p>
+            <a:pPr>
+              <a:spcAft>
+                <a:spcPts val="0"/>
+              </a:spcAft>
+            </a:pPr>
+            <a:r>
+              <a:rPr sz="1300">
+                <a:solidFill>
+                  <a:srgbClr val="6D8C97"/>
+                </a:solidFill>
+                <a:latin typeface="Consolas"/>
+              </a:rPr>
+              <a:t>  32  </a:t>
+            </a:r>
+            <a:r>
+              <a:rPr sz="1300">
+                <a:solidFill>
+                  <a:srgbClr val="6D8C97"/>
+                </a:solidFill>
+                <a:latin typeface="Consolas"/>
+              </a:rPr>
+              <a:t>async function listModels() {</a:t>
+            </a:r>
+          </a:p>
+          <a:p>
+            <a:pPr>
+              <a:spcAft>
+                <a:spcPts val="0"/>
+              </a:spcAft>
+            </a:pPr>
+            <a:r>
+              <a:rPr sz="1300">
+                <a:solidFill>
+                  <a:srgbClr val="6D8C97"/>
+                </a:solidFill>
+                <a:latin typeface="Consolas"/>
+              </a:rPr>
+              <a:t>  33  </a:t>
+            </a:r>
+            <a:r>
+              <a:rPr sz="1300">
+                <a:solidFill>
+                  <a:srgbClr val="6D8C97"/>
+                </a:solidFill>
+                <a:latin typeface="Consolas"/>
+              </a:rPr>
+              <a:t>  const res = await fetch(AI_BASE + '/v1/models', {</a:t>
+            </a:r>
+          </a:p>
+          <a:p>
+            <a:pPr>
+              <a:spcAft>
+                <a:spcPts val="0"/>
+              </a:spcAft>
+            </a:pPr>
+            <a:r>
+              <a:rPr sz="1300">
+                <a:solidFill>
+                  <a:srgbClr val="6D8C97"/>
+                </a:solidFill>
+                <a:latin typeface="Consolas"/>
+              </a:rPr>
+              <a:t>  34  </a:t>
+            </a:r>
+            <a:r>
+              <a:rPr sz="1300">
+                <a:solidFill>
+                  <a:srgbClr val="6D8C97"/>
+                </a:solidFill>
+                <a:latin typeface="Consolas"/>
+              </a:rPr>
+              <a:t>    headers: { 'Authorization': 'Bearer ' + API_KEY }</a:t>
+            </a:r>
+          </a:p>
+          <a:p>
+            <a:pPr>
+              <a:spcAft>
+                <a:spcPts val="0"/>
+              </a:spcAft>
+            </a:pPr>
+            <a:r>
+              <a:rPr sz="1300">
+                <a:solidFill>
+                  <a:srgbClr val="6D8C97"/>
+                </a:solidFill>
+                <a:latin typeface="Consolas"/>
+              </a:rPr>
+              <a:t>  35  </a:t>
+            </a:r>
+            <a:r>
+              <a:rPr sz="1300">
+                <a:solidFill>
+                  <a:srgbClr val="6D8C97"/>
+                </a:solidFill>
+                <a:latin typeface="Consolas"/>
+              </a:rPr>
+              <a:t>  });</a:t>
+            </a:r>
+          </a:p>
+          <a:p>
+            <a:pPr>
+              <a:spcAft>
+                <a:spcPts val="0"/>
+              </a:spcAft>
+            </a:pPr>
+            <a:r>
+              <a:rPr sz="1300">
+                <a:solidFill>
+                  <a:srgbClr val="6D8C97"/>
+                </a:solidFill>
+                <a:latin typeface="Consolas"/>
+              </a:rPr>
+              <a:t>  36  </a:t>
+            </a:r>
+            <a:r>
+              <a:rPr sz="1300">
+                <a:solidFill>
+                  <a:srgbClr val="6D8C97"/>
+                </a:solidFill>
+                <a:latin typeface="Consolas"/>
+              </a:rPr>
+              <a:t>  const data = await res.json();   // the answer arrives as text; this reads it</a:t>
+            </a:r>
+          </a:p>
+          <a:p>
+            <a:pPr>
+              <a:spcAft>
+                <a:spcPts val="0"/>
+              </a:spcAft>
+            </a:pPr>
+            <a:r>
+              <a:rPr sz="1300">
+                <a:solidFill>
+                  <a:srgbClr val="6D8C97"/>
+                </a:solidFill>
+                <a:latin typeface="Consolas"/>
+              </a:rPr>
+              <a:t>  37  </a:t>
+            </a:r>
+            <a:r>
+              <a:rPr sz="1300">
+                <a:solidFill>
+                  <a:srgbClr val="6D8C97"/>
+                </a:solidFill>
+                <a:latin typeface="Consolas"/>
+              </a:rPr>
+              <a:t>  console.log('The server offers:', data.data);</a:t>
+            </a:r>
+          </a:p>
+          <a:p>
+            <a:pPr>
+              <a:spcAft>
+                <a:spcPts val="0"/>
+              </a:spcAft>
+            </a:pPr>
+            <a:r>
+              <a:rPr sz="1300">
+                <a:solidFill>
+                  <a:srgbClr val="6D8C97"/>
+                </a:solidFill>
+                <a:latin typeface="Consolas"/>
+              </a:rPr>
+              <a:t>  38  </a:t>
+            </a:r>
+            <a:r>
+              <a:rPr sz="1300">
+                <a:solidFill>
+                  <a:srgbClr val="6D8C97"/>
+                </a:solidFill>
+                <a:latin typeface="Consolas"/>
+              </a:rPr>
+              <a:t>}</a:t>
+            </a:r>
+          </a:p>
+          <a:p>
+            <a:pPr>
+              <a:spcAft>
+                <a:spcPts val="0"/>
+              </a:spcAft>
+            </a:pPr>
+            <a:r>
+              <a:rPr sz="1300">
+                <a:solidFill>
+                  <a:srgbClr val="6D8C97"/>
+                </a:solidFill>
+                <a:latin typeface="Consolas"/>
+              </a:rPr>
+              <a:t>  39  </a:t>
+            </a:r>
+            <a:r>
+              <a:rPr sz="1300">
+                <a:solidFill>
+                  <a:srgbClr val="6D8C97"/>
+                </a:solidFill>
+                <a:latin typeface="Consolas"/>
+              </a:rPr>
+              <a:t> </a:t>
+            </a:r>
+          </a:p>
+          <a:p>
+            <a:pPr>
+              <a:spcAft>
+                <a:spcPts val="0"/>
+              </a:spcAft>
+            </a:pPr>
+            <a:r>
+              <a:rPr sz="1300">
+                <a:solidFill>
+                  <a:srgbClr val="6D8C97"/>
+                </a:solidFill>
+                <a:latin typeface="Consolas"/>
+              </a:rPr>
+              <a:t>  40  </a:t>
+            </a:r>
+            <a:r>
+              <a:rPr sz="1300">
+                <a:solidFill>
+                  <a:srgbClr val="7FE0A0"/>
+                </a:solidFill>
+                <a:latin typeface="Consolas"/>
+              </a:rPr>
+              <a:t>listModels();</a:t>
+            </a:r>
+          </a:p>
+        </p:txBody>
+      </p:sp>
+      <p:sp>
+        <p:nvSpPr>
+          <p:cNvPr id="4" name="TextBox 3"/>
+          <p:cNvSpPr txBox="1"/>
+          <p:nvPr/>
+        </p:nvSpPr>
+        <p:spPr>
+          <a:xfrm>
+            <a:off x="548640" y="5623560"/>
+            <a:ext cx="11064240" cy="1051560"/>
+          </a:xfrm>
+          <a:prstGeom prst="rect">
+            <a:avLst/>
+          </a:prstGeom>
+          <a:noFill/>
+        </p:spPr>
+        <p:txBody>
+          <a:bodyPr wrap="square">
+            <a:spAutoFit/>
+          </a:bodyPr>
+          <a:lstStyle/>
+          <a:p>
+            <a:r>
+              <a:rPr sz="2000">
+                <a:solidFill>
+                  <a:srgbClr val="DCECEF"/>
+                </a:solidFill>
+              </a:rPr>
+              <a:t>Calls the function so it actually runs when the page loads.</a:t>
+            </a:r>
+          </a:p>
+        </p:txBody>
+      </p:sp>
+    </p:spTree>
+  </p:cSld>
+  <p:clrMapOvr>
+    <a:masterClrMapping/>
+  </p:clrMapOvr>
+</p:sld>
+</file>
+
+<file path=ppt/slides/slide24.xml><?xml version="1.0" encoding="utf-8"?>
+<p:sld xmlns:a="http://schemas.openxmlformats.org/drawingml/2006/main" xmlns:p="http://schemas.openxmlformats.org/presentationml/2006/main" xmlns:r="http://schemas.openxmlformats.org/officeDocument/2006/relationships">
+  <p:cSld>
+    <p:bg>
+      <p:bgPr>
+        <a:solidFill>
+          <a:srgbClr val="102127"/>
+        </a:solidFill>
+        <a:effectLst/>
+      </p:bgPr>
+    </p:bg>
+    <p:spTree>
+      <p:nvGrpSpPr>
+        <p:cNvPr id="1" name=""/>
+        <p:cNvGrpSpPr/>
+        <p:nvPr/>
+      </p:nvGrpSpPr>
+      <p:grpSpPr/>
+      <p:sp>
+        <p:nvSpPr>
+          <p:cNvPr id="2" name="TextBox 1"/>
+          <p:cNvSpPr txBox="1"/>
+          <p:nvPr/>
+        </p:nvSpPr>
+        <p:spPr>
+          <a:xfrm>
+            <a:off x="502920" y="274320"/>
+            <a:ext cx="11155680" cy="548640"/>
+          </a:xfrm>
+          <a:prstGeom prst="rect">
+            <a:avLst/>
+          </a:prstGeom>
+          <a:noFill/>
+        </p:spPr>
+        <p:txBody>
+          <a:bodyPr wrap="none">
+            <a:spAutoFit/>
+          </a:bodyPr>
+          <a:lstStyle/>
+          <a:p>
+            <a:r>
+              <a:rPr sz="2200" b="1">
+                <a:solidFill>
+                  <a:srgbClr val="01AEFD"/>
+                </a:solidFill>
+              </a:rPr>
+              <a:t>All together in script.js</a:t>
+            </a:r>
+          </a:p>
+        </p:txBody>
+      </p:sp>
+      <p:sp>
+        <p:nvSpPr>
+          <p:cNvPr id="3" name="TextBox 2"/>
+          <p:cNvSpPr txBox="1"/>
+          <p:nvPr/>
+        </p:nvSpPr>
+        <p:spPr>
+          <a:xfrm>
+            <a:off x="502920" y="960120"/>
+            <a:ext cx="11155680" cy="4297680"/>
+          </a:xfrm>
+          <a:prstGeom prst="rect">
+            <a:avLst/>
+          </a:prstGeom>
+          <a:noFill/>
+        </p:spPr>
+        <p:txBody>
+          <a:bodyPr wrap="none">
+            <a:spAutoFit/>
+          </a:bodyPr>
+          <a:lstStyle/>
+          <a:p>
+            <a:pPr>
+              <a:spcAft>
+                <a:spcPts val="0"/>
+              </a:spcAft>
+            </a:pPr>
+            <a:r>
+              <a:rPr sz="1300">
+                <a:solidFill>
+                  <a:srgbClr val="6D8C97"/>
+                </a:solidFill>
+                <a:latin typeface="Consolas"/>
+              </a:rPr>
+              <a:t>  29  </a:t>
+            </a:r>
+            <a:r>
+              <a:rPr sz="1300">
+                <a:solidFill>
+                  <a:srgbClr val="7FE0A0"/>
+                </a:solidFill>
+                <a:latin typeface="Consolas"/>
+              </a:rPr>
+              <a:t> </a:t>
+            </a:r>
+          </a:p>
+          <a:p>
+            <a:pPr>
+              <a:spcAft>
+                <a:spcPts val="0"/>
+              </a:spcAft>
+            </a:pPr>
+            <a:r>
+              <a:rPr sz="1300">
+                <a:solidFill>
+                  <a:srgbClr val="6D8C97"/>
+                </a:solidFill>
+                <a:latin typeface="Consolas"/>
+              </a:rPr>
+              <a:t>  30  </a:t>
+            </a:r>
+            <a:r>
+              <a:rPr sz="1300">
+                <a:solidFill>
+                  <a:srgbClr val="7FE0A0"/>
+                </a:solidFill>
+                <a:latin typeface="Consolas"/>
+              </a:rPr>
+              <a:t>// The smallest useful request: what models does this server have?</a:t>
+            </a:r>
+          </a:p>
+          <a:p>
+            <a:pPr>
+              <a:spcAft>
+                <a:spcPts val="0"/>
+              </a:spcAft>
+            </a:pPr>
+            <a:r>
+              <a:rPr sz="1300">
+                <a:solidFill>
+                  <a:srgbClr val="6D8C97"/>
+                </a:solidFill>
+                <a:latin typeface="Consolas"/>
+              </a:rPr>
+              <a:t>  31  </a:t>
+            </a:r>
+            <a:r>
+              <a:rPr sz="1300">
+                <a:solidFill>
+                  <a:srgbClr val="7FE0A0"/>
+                </a:solidFill>
+                <a:latin typeface="Consolas"/>
+              </a:rPr>
+              <a:t>// 'async' means this function does something slow and can be waited for.</a:t>
+            </a:r>
+          </a:p>
+          <a:p>
+            <a:pPr>
+              <a:spcAft>
+                <a:spcPts val="0"/>
+              </a:spcAft>
+            </a:pPr>
+            <a:r>
+              <a:rPr sz="1300">
+                <a:solidFill>
+                  <a:srgbClr val="6D8C97"/>
+                </a:solidFill>
+                <a:latin typeface="Consolas"/>
+              </a:rPr>
+              <a:t>  32  </a:t>
+            </a:r>
+            <a:r>
+              <a:rPr sz="1300">
+                <a:solidFill>
+                  <a:srgbClr val="7FE0A0"/>
+                </a:solidFill>
+                <a:latin typeface="Consolas"/>
+              </a:rPr>
+              <a:t>async function listModels() {</a:t>
+            </a:r>
+          </a:p>
+          <a:p>
+            <a:pPr>
+              <a:spcAft>
+                <a:spcPts val="0"/>
+              </a:spcAft>
+            </a:pPr>
+            <a:r>
+              <a:rPr sz="1300">
+                <a:solidFill>
+                  <a:srgbClr val="6D8C97"/>
+                </a:solidFill>
+                <a:latin typeface="Consolas"/>
+              </a:rPr>
+              <a:t>  33  </a:t>
+            </a:r>
+            <a:r>
+              <a:rPr sz="1300">
+                <a:solidFill>
+                  <a:srgbClr val="7FE0A0"/>
+                </a:solidFill>
+                <a:latin typeface="Consolas"/>
+              </a:rPr>
+              <a:t>  const res = await fetch(AI_BASE + '/v1/models', {</a:t>
+            </a:r>
+          </a:p>
+          <a:p>
+            <a:pPr>
+              <a:spcAft>
+                <a:spcPts val="0"/>
+              </a:spcAft>
+            </a:pPr>
+            <a:r>
+              <a:rPr sz="1300">
+                <a:solidFill>
+                  <a:srgbClr val="6D8C97"/>
+                </a:solidFill>
+                <a:latin typeface="Consolas"/>
+              </a:rPr>
+              <a:t>  34  </a:t>
+            </a:r>
+            <a:r>
+              <a:rPr sz="1300">
+                <a:solidFill>
+                  <a:srgbClr val="7FE0A0"/>
+                </a:solidFill>
+                <a:latin typeface="Consolas"/>
+              </a:rPr>
+              <a:t>    headers: { 'Authorization': 'Bearer ' + API_KEY }</a:t>
+            </a:r>
+          </a:p>
+          <a:p>
+            <a:pPr>
+              <a:spcAft>
+                <a:spcPts val="0"/>
+              </a:spcAft>
+            </a:pPr>
+            <a:r>
+              <a:rPr sz="1300">
+                <a:solidFill>
+                  <a:srgbClr val="6D8C97"/>
+                </a:solidFill>
+                <a:latin typeface="Consolas"/>
+              </a:rPr>
+              <a:t>  35  </a:t>
+            </a:r>
+            <a:r>
+              <a:rPr sz="1300">
+                <a:solidFill>
+                  <a:srgbClr val="7FE0A0"/>
+                </a:solidFill>
+                <a:latin typeface="Consolas"/>
+              </a:rPr>
+              <a:t>  });</a:t>
+            </a:r>
+          </a:p>
+          <a:p>
+            <a:pPr>
+              <a:spcAft>
+                <a:spcPts val="0"/>
+              </a:spcAft>
+            </a:pPr>
+            <a:r>
+              <a:rPr sz="1300">
+                <a:solidFill>
+                  <a:srgbClr val="6D8C97"/>
+                </a:solidFill>
+                <a:latin typeface="Consolas"/>
+              </a:rPr>
+              <a:t>  36  </a:t>
+            </a:r>
+            <a:r>
+              <a:rPr sz="1300">
+                <a:solidFill>
+                  <a:srgbClr val="7FE0A0"/>
+                </a:solidFill>
+                <a:latin typeface="Consolas"/>
+              </a:rPr>
+              <a:t>  const data = await res.json();   // the answer arrives as text; this reads it</a:t>
+            </a:r>
+          </a:p>
+          <a:p>
+            <a:pPr>
+              <a:spcAft>
+                <a:spcPts val="0"/>
+              </a:spcAft>
+            </a:pPr>
+            <a:r>
+              <a:rPr sz="1300">
+                <a:solidFill>
+                  <a:srgbClr val="6D8C97"/>
+                </a:solidFill>
+                <a:latin typeface="Consolas"/>
+              </a:rPr>
+              <a:t>  37  </a:t>
+            </a:r>
+            <a:r>
+              <a:rPr sz="1300">
+                <a:solidFill>
+                  <a:srgbClr val="7FE0A0"/>
+                </a:solidFill>
+                <a:latin typeface="Consolas"/>
+              </a:rPr>
+              <a:t>  console.log('The server offers:', data.data);</a:t>
+            </a:r>
+          </a:p>
+          <a:p>
+            <a:pPr>
+              <a:spcAft>
+                <a:spcPts val="0"/>
+              </a:spcAft>
+            </a:pPr>
+            <a:r>
+              <a:rPr sz="1300">
+                <a:solidFill>
+                  <a:srgbClr val="6D8C97"/>
+                </a:solidFill>
+                <a:latin typeface="Consolas"/>
+              </a:rPr>
+              <a:t>  38  </a:t>
+            </a:r>
+            <a:r>
+              <a:rPr sz="1300">
+                <a:solidFill>
+                  <a:srgbClr val="7FE0A0"/>
+                </a:solidFill>
+                <a:latin typeface="Consolas"/>
+              </a:rPr>
+              <a:t>}</a:t>
+            </a:r>
+          </a:p>
+          <a:p>
+            <a:pPr>
+              <a:spcAft>
+                <a:spcPts val="0"/>
+              </a:spcAft>
+            </a:pPr>
+            <a:r>
+              <a:rPr sz="1300">
+                <a:solidFill>
+                  <a:srgbClr val="6D8C97"/>
+                </a:solidFill>
+                <a:latin typeface="Consolas"/>
+              </a:rPr>
+              <a:t>  39  </a:t>
+            </a:r>
+            <a:r>
+              <a:rPr sz="1300">
+                <a:solidFill>
+                  <a:srgbClr val="7FE0A0"/>
+                </a:solidFill>
+                <a:latin typeface="Consolas"/>
+              </a:rPr>
+              <a:t> </a:t>
+            </a:r>
+          </a:p>
+          <a:p>
+            <a:pPr>
+              <a:spcAft>
+                <a:spcPts val="0"/>
+              </a:spcAft>
+            </a:pPr>
+            <a:r>
+              <a:rPr sz="1300">
+                <a:solidFill>
+                  <a:srgbClr val="6D8C97"/>
+                </a:solidFill>
+                <a:latin typeface="Consolas"/>
+              </a:rPr>
+              <a:t>  40  </a:t>
+            </a:r>
+            <a:r>
+              <a:rPr sz="1300">
+                <a:solidFill>
+                  <a:srgbClr val="7FE0A0"/>
+                </a:solidFill>
+                <a:latin typeface="Consolas"/>
+              </a:rPr>
+              <a:t>listModels();</a:t>
+            </a:r>
+          </a:p>
+        </p:txBody>
+      </p:sp>
+      <p:sp>
+        <p:nvSpPr>
+          <p:cNvPr id="4" name="TextBox 3"/>
+          <p:cNvSpPr txBox="1"/>
+          <p:nvPr/>
+        </p:nvSpPr>
+        <p:spPr>
+          <a:xfrm>
+            <a:off x="548640" y="5623560"/>
+            <a:ext cx="11064240" cy="1051560"/>
+          </a:xfrm>
+          <a:prstGeom prst="rect">
+            <a:avLst/>
+          </a:prstGeom>
+          <a:noFill/>
+        </p:spPr>
+        <p:txBody>
+          <a:bodyPr wrap="square">
+            <a:spAutoFit/>
+          </a:bodyPr>
+          <a:lstStyle/>
+          <a:p>
+            <a:r>
+              <a:rPr sz="2000">
+                <a:solidFill>
+                  <a:srgbClr val="DCECEF"/>
+                </a:solidFill>
+              </a:rPr>
+              <a:t>That is the whole piece. Check yours looks the same before moving on.</a:t>
+            </a:r>
+          </a:p>
+        </p:txBody>
+      </p:sp>
+    </p:spTree>
+  </p:cSld>
+  <p:clrMapOvr>
+    <a:masterClrMapping/>
+  </p:clrMapOvr>
+</p:sld>
+</file>
+
+<file path=ppt/slides/slide25.xml><?xml version="1.0" encoding="utf-8"?>
+<p:sld xmlns:a="http://schemas.openxmlformats.org/drawingml/2006/main" xmlns:p="http://schemas.openxmlformats.org/presentationml/2006/main" xmlns:r="http://schemas.openxmlformats.org/officeDocument/2006/relationships">
+  <p:cSld>
+    <p:spTree>
+      <p:nvGrpSpPr>
+        <p:cNvPr id="1" name=""/>
+        <p:cNvGrpSpPr/>
+        <p:nvPr/>
+      </p:nvGrpSpPr>
+      <p:grpSpPr/>
+      <p:sp>
+        <p:nvSpPr>
+          <p:cNvPr id="2" name="Title 1"/>
+          <p:cNvSpPr>
+            <a:spLocks noGrp="1"/>
+          </p:cNvSpPr>
+          <p:nvPr>
+            <p:ph type="title"/>
+          </p:nvPr>
+        </p:nvSpPr>
+        <p:spPr/>
+        <p:txBody>
+          <a:bodyPr/>
+          <a:lstStyle/>
+          <a:p>
+            <a:r>
+              <a:rPr sz="3800" b="1">
+                <a:solidFill>
+                  <a:srgbClr val="1F2A37"/>
+                </a:solidFill>
+              </a:rPr>
+              <a:t>The internet is slow</a:t>
+            </a:r>
+          </a:p>
+        </p:txBody>
+      </p:sp>
+      <p:sp>
+        <p:nvSpPr>
+          <p:cNvPr id="3" name="TextBox 2"/>
+          <p:cNvSpPr txBox="1"/>
+          <p:nvPr/>
+        </p:nvSpPr>
+        <p:spPr>
+          <a:xfrm>
+            <a:off x="822960" y="1828800"/>
+            <a:ext cx="10515600" cy="4206240"/>
+          </a:xfrm>
+          <a:prstGeom prst="rect">
+            <a:avLst/>
+          </a:prstGeom>
+          <a:noFill/>
+        </p:spPr>
+        <p:txBody>
+          <a:bodyPr wrap="square">
+            <a:spAutoFit/>
+          </a:bodyPr>
+          <a:lstStyle/>
+          <a:p>
+            <a:pPr>
+              <a:spcAft>
+                <a:spcPts val="1400"/>
+              </a:spcAft>
+            </a:pPr>
+            <a:r>
+              <a:rPr sz="2800">
+                <a:solidFill>
+                  <a:srgbClr val="01AEFD"/>
+                </a:solidFill>
+              </a:rPr>
+              <a:t>await = wait here for the answer</a:t>
+            </a:r>
+          </a:p>
+          <a:p>
+            <a:pPr>
+              <a:spcAft>
+                <a:spcPts val="1400"/>
+              </a:spcAft>
+            </a:pPr>
+            <a:r>
+              <a:rPr sz="2400">
+                <a:solidFill>
+                  <a:srgbClr val="1F2A37"/>
+                </a:solidFill>
+              </a:rPr>
+              <a:t>• Without await you carry on with nothing</a:t>
+            </a:r>
+          </a:p>
+          <a:p>
+            <a:pPr>
+              <a:spcAft>
+                <a:spcPts val="1400"/>
+              </a:spcAft>
+            </a:pPr>
+            <a:r>
+              <a:rPr sz="2400">
+                <a:solidFill>
+                  <a:srgbClr val="1F2A37"/>
+                </a:solidFill>
+              </a:rPr>
+              <a:t>• async marks a function that can be waited for</a:t>
+            </a:r>
+          </a:p>
+        </p:txBody>
+      </p:sp>
+    </p:spTree>
+  </p:cSld>
+  <p:clrMapOvr>
+    <a:masterClrMapping/>
+  </p:clrMapOvr>
+</p:sld>
+</file>
+
+<file path=ppt/slides/slide26.xml><?xml version="1.0" encoding="utf-8"?>
+<p:sld xmlns:a="http://schemas.openxmlformats.org/drawingml/2006/main" xmlns:p="http://schemas.openxmlformats.org/presentationml/2006/main" xmlns:r="http://schemas.openxmlformats.org/officeDocument/2006/relationships">
+  <p:cSld>
+    <p:spTree>
+      <p:nvGrpSpPr>
+        <p:cNvPr id="1" name=""/>
+        <p:cNvGrpSpPr/>
+        <p:nvPr/>
+      </p:nvGrpSpPr>
+      <p:grpSpPr/>
+      <p:sp>
+        <p:nvSpPr>
+          <p:cNvPr id="2" name="Title 1"/>
+          <p:cNvSpPr>
+            <a:spLocks noGrp="1"/>
+          </p:cNvSpPr>
+          <p:nvPr>
+            <p:ph type="title"/>
+          </p:nvPr>
+        </p:nvSpPr>
+        <p:spPr/>
+        <p:txBody>
+          <a:bodyPr/>
+          <a:lstStyle/>
+          <a:p>
+            <a:r>
+              <a:rPr sz="3800" b="1">
+                <a:solidFill>
+                  <a:srgbClr val="1F2A37"/>
+                </a:solidFill>
+              </a:rPr>
+              <a:t>This address only works at school</a:t>
+            </a:r>
+          </a:p>
+        </p:txBody>
+      </p:sp>
+      <p:sp>
+        <p:nvSpPr>
+          <p:cNvPr id="3" name="TextBox 2"/>
+          <p:cNvSpPr txBox="1"/>
+          <p:nvPr/>
+        </p:nvSpPr>
+        <p:spPr>
+          <a:xfrm>
+            <a:off x="822960" y="1828800"/>
+            <a:ext cx="10515600" cy="4206240"/>
+          </a:xfrm>
+          <a:prstGeom prst="rect">
+            <a:avLst/>
+          </a:prstGeom>
+          <a:noFill/>
+        </p:spPr>
+        <p:txBody>
+          <a:bodyPr wrap="square">
+            <a:spAutoFit/>
+          </a:bodyPr>
+          <a:lstStyle/>
+          <a:p>
+            <a:pPr>
+              <a:spcAft>
+                <a:spcPts val="1400"/>
+              </a:spcAft>
+            </a:pPr>
+            <a:r>
+              <a:rPr sz="2400">
+                <a:solidFill>
+                  <a:srgbClr val="1F2A37"/>
+                </a:solidFill>
+              </a:rPr>
+              <a:t>• That machine is in this building</a:t>
+            </a:r>
+          </a:p>
+          <a:p>
+            <a:pPr>
+              <a:spcAft>
+                <a:spcPts val="1400"/>
+              </a:spcAft>
+            </a:pPr>
+            <a:r>
+              <a:rPr sz="2400">
+                <a:solidFill>
+                  <a:srgbClr val="1F2A37"/>
+                </a:solidFill>
+              </a:rPr>
+              <a:t>• At home it will not connect - that is expected</a:t>
+            </a:r>
+          </a:p>
+          <a:p>
+            <a:pPr>
+              <a:spcAft>
+                <a:spcPts val="1400"/>
+              </a:spcAft>
+            </a:pPr>
+            <a:r>
+              <a:rPr sz="2400">
+                <a:solidFill>
+                  <a:srgbClr val="1F2A37"/>
+                </a:solidFill>
+              </a:rPr>
+              <a:t>• But the code is not throwaway</a:t>
+            </a:r>
+          </a:p>
+        </p:txBody>
+      </p:sp>
+    </p:spTree>
+  </p:cSld>
+  <p:clrMapOvr>
+    <a:masterClrMapping/>
+  </p:clrMapOvr>
+</p:sld>
+</file>
+
+<file path=ppt/slides/slide27.xml><?xml version="1.0" encoding="utf-8"?>
+<p:sld xmlns:a="http://schemas.openxmlformats.org/drawingml/2006/main" xmlns:p="http://schemas.openxmlformats.org/presentationml/2006/main" xmlns:r="http://schemas.openxmlformats.org/officeDocument/2006/relationships">
+  <p:cSld>
+    <p:spTree>
+      <p:nvGrpSpPr>
+        <p:cNvPr id="1" name=""/>
+        <p:cNvGrpSpPr/>
+        <p:nvPr/>
+      </p:nvGrpSpPr>
+      <p:grpSpPr/>
+      <p:sp>
+        <p:nvSpPr>
+          <p:cNvPr id="2" name="Title 1"/>
+          <p:cNvSpPr>
+            <a:spLocks noGrp="1"/>
+          </p:cNvSpPr>
+          <p:nvPr>
+            <p:ph type="title"/>
+          </p:nvPr>
+        </p:nvSpPr>
+        <p:spPr/>
+        <p:txBody>
+          <a:bodyPr/>
+          <a:lstStyle/>
+          <a:p>
+            <a:r>
+              <a:rPr sz="3800" b="1">
+                <a:solidFill>
+                  <a:srgbClr val="1F2A37"/>
+                </a:solidFill>
+              </a:rPr>
+              <a:t>Same format as OpenAI</a:t>
+            </a:r>
+          </a:p>
+        </p:txBody>
+      </p:sp>
+      <p:sp>
+        <p:nvSpPr>
+          <p:cNvPr id="3" name="TextBox 2"/>
+          <p:cNvSpPr txBox="1"/>
+          <p:nvPr/>
+        </p:nvSpPr>
+        <p:spPr>
+          <a:xfrm>
+            <a:off x="822960" y="1828800"/>
+            <a:ext cx="10515600" cy="4206240"/>
+          </a:xfrm>
+          <a:prstGeom prst="rect">
+            <a:avLst/>
+          </a:prstGeom>
+          <a:noFill/>
+        </p:spPr>
+        <p:txBody>
+          <a:bodyPr wrap="square">
+            <a:spAutoFit/>
+          </a:bodyPr>
+          <a:lstStyle/>
+          <a:p>
+            <a:pPr>
+              <a:spcAft>
+                <a:spcPts val="1400"/>
+              </a:spcAft>
+            </a:pPr>
+            <a:r>
+              <a:rPr sz="2800">
+                <a:solidFill>
+                  <a:srgbClr val="01AEFD"/>
+                </a:solidFill>
+              </a:rPr>
+              <a:t>On purpose</a:t>
+            </a:r>
+          </a:p>
+          <a:p>
+            <a:pPr>
+              <a:spcAft>
+                <a:spcPts val="1400"/>
+              </a:spcAft>
+            </a:pPr>
+            <a:r>
+              <a:rPr sz="2400">
+                <a:solidFill>
+                  <a:srgbClr val="1F2A37"/>
+                </a:solidFill>
+              </a:rPr>
+              <a:t>• Got your own OpenAI key? Change AI_BASE</a:t>
+            </a:r>
+          </a:p>
+          <a:p>
+            <a:pPr>
+              <a:spcAft>
+                <a:spcPts val="1400"/>
+              </a:spcAft>
+            </a:pPr>
+            <a:r>
+              <a:rPr sz="2400">
+                <a:solidFill>
+                  <a:srgbClr val="1F2A37"/>
+                </a:solidFill>
+              </a:rPr>
+              <a:t>• Change API_KEY</a:t>
+            </a:r>
+          </a:p>
+          <a:p>
+            <a:pPr>
+              <a:spcAft>
+                <a:spcPts val="1400"/>
+              </a:spcAft>
+            </a:pPr>
+            <a:r>
+              <a:rPr sz="2400">
+                <a:solidFill>
+                  <a:srgbClr val="1F2A37"/>
+                </a:solidFill>
+              </a:rPr>
+              <a:t>• Change the two model names in index.html</a:t>
+            </a:r>
+          </a:p>
+          <a:p>
+            <a:pPr>
+              <a:spcAft>
+                <a:spcPts val="1400"/>
+              </a:spcAft>
+            </a:pPr>
+            <a:r>
+              <a:rPr sz="2400">
+                <a:solidFill>
+                  <a:srgbClr val="1F2A37"/>
+                </a:solidFill>
+              </a:rPr>
+              <a:t>• Nothing else moves</a:t>
+            </a:r>
+          </a:p>
+        </p:txBody>
+      </p:sp>
+    </p:spTree>
+  </p:cSld>
+  <p:clrMapOvr>
+    <a:masterClrMapping/>
+  </p:clrMapOvr>
+</p:sld>
+</file>
+
+<file path=ppt/slides/slide28.xml><?xml version="1.0" encoding="utf-8"?>
+<p:sld xmlns:a="http://schemas.openxmlformats.org/drawingml/2006/main" xmlns:p="http://schemas.openxmlformats.org/presentationml/2006/main" xmlns:r="http://schemas.openxmlformats.org/officeDocument/2006/relationships">
+  <p:cSld>
+    <p:spTree>
+      <p:nvGrpSpPr>
+        <p:cNvPr id="1" name=""/>
+        <p:cNvGrpSpPr/>
+        <p:nvPr/>
+      </p:nvGrpSpPr>
+      <p:grpSpPr/>
+      <p:sp>
+        <p:nvSpPr>
+          <p:cNvPr id="2" name="Title 1"/>
+          <p:cNvSpPr>
+            <a:spLocks noGrp="1"/>
+          </p:cNvSpPr>
+          <p:nvPr>
+            <p:ph type="title"/>
+          </p:nvPr>
+        </p:nvSpPr>
+        <p:spPr/>
+        <p:txBody>
+          <a:bodyPr/>
+          <a:lstStyle/>
+          <a:p>
+            <a:r>
+              <a:rPr sz="3800" b="1">
+                <a:solidFill>
+                  <a:srgbClr val="1F2A37"/>
+                </a:solidFill>
+              </a:rPr>
+              <a:t>A key in a web page is public</a:t>
+            </a:r>
+          </a:p>
+        </p:txBody>
+      </p:sp>
+      <p:sp>
+        <p:nvSpPr>
+          <p:cNvPr id="3" name="TextBox 2"/>
+          <p:cNvSpPr txBox="1"/>
+          <p:nvPr/>
+        </p:nvSpPr>
+        <p:spPr>
+          <a:xfrm>
+            <a:off x="822960" y="1828800"/>
+            <a:ext cx="10515600" cy="4206240"/>
+          </a:xfrm>
+          <a:prstGeom prst="rect">
+            <a:avLst/>
+          </a:prstGeom>
+          <a:noFill/>
+        </p:spPr>
+        <p:txBody>
+          <a:bodyPr wrap="square">
+            <a:spAutoFit/>
+          </a:bodyPr>
+          <a:lstStyle/>
+          <a:p>
+            <a:pPr>
+              <a:spcAft>
+                <a:spcPts val="1400"/>
+              </a:spcAft>
+            </a:pPr>
+            <a:r>
+              <a:rPr sz="2400">
+                <a:solidFill>
+                  <a:srgbClr val="1F2A37"/>
+                </a:solidFill>
+              </a:rPr>
+              <a:t>• Anyone who opens the page can read it</a:t>
+            </a:r>
+          </a:p>
+          <a:p>
+            <a:pPr>
+              <a:spcAft>
+                <a:spcPts val="1400"/>
+              </a:spcAft>
+            </a:pPr>
+            <a:r>
+              <a:rPr sz="2400">
+                <a:solidFill>
+                  <a:srgbClr val="1F2A37"/>
+                </a:solidFill>
+              </a:rPr>
+              <a:t>• Fine for a class key: limited, no bill</a:t>
+            </a:r>
+          </a:p>
+          <a:p>
+            <a:pPr>
+              <a:spcAft>
+                <a:spcPts val="1400"/>
+              </a:spcAft>
+            </a:pPr>
+            <a:r>
+              <a:rPr sz="2400">
+                <a:solidFill>
+                  <a:srgbClr val="1F2A37"/>
+                </a:solidFill>
+              </a:rPr>
+              <a:t>• NOT fine for a personal paid key</a:t>
+            </a:r>
+          </a:p>
+          <a:p>
+            <a:pPr>
+              <a:spcAft>
+                <a:spcPts val="1400"/>
+              </a:spcAft>
+            </a:pPr>
+            <a:r>
+              <a:rPr sz="2400">
+                <a:solidFill>
+                  <a:srgbClr val="1F2A37"/>
+                </a:solidFill>
+              </a:rPr>
+              <a:t>• Real apps keep the key on a server</a:t>
+            </a:r>
+          </a:p>
+        </p:txBody>
+      </p:sp>
+    </p:spTree>
+  </p:cSld>
+  <p:clrMapOvr>
+    <a:masterClrMapping/>
+  </p:clrMapOvr>
+</p:sld>
+</file>
+
+<file path=ppt/slides/slide29.xml><?xml version="1.0" encoding="utf-8"?>
+<p:sld xmlns:a="http://schemas.openxmlformats.org/drawingml/2006/main" xmlns:p="http://schemas.openxmlformats.org/presentationml/2006/main" xmlns:r="http://schemas.openxmlformats.org/officeDocument/2006/relationships">
+  <p:cSld>
+    <p:spTree>
+      <p:nvGrpSpPr>
+        <p:cNvPr id="1" name=""/>
+        <p:cNvGrpSpPr/>
+        <p:nvPr/>
+      </p:nvGrpSpPr>
+      <p:grpSpPr/>
+      <p:sp>
+        <p:nvSpPr>
+          <p:cNvPr id="2" name="Title 1"/>
+          <p:cNvSpPr>
+            <a:spLocks noGrp="1"/>
+          </p:cNvSpPr>
+          <p:nvPr>
+            <p:ph type="title"/>
+          </p:nvPr>
+        </p:nvSpPr>
+        <p:spPr/>
+        <p:txBody>
+          <a:bodyPr/>
+          <a:lstStyle/>
+          <a:p>
+            <a:r>
+              <a:rPr sz="3800" b="1">
+                <a:solidFill>
+                  <a:srgbClr val="1F2A37"/>
+                </a:solidFill>
+              </a:rPr>
+              <a:t>Status codes</a:t>
+            </a:r>
+          </a:p>
+        </p:txBody>
+      </p:sp>
+      <p:sp>
+        <p:nvSpPr>
+          <p:cNvPr id="3" name="TextBox 2"/>
+          <p:cNvSpPr txBox="1"/>
+          <p:nvPr/>
+        </p:nvSpPr>
+        <p:spPr>
+          <a:xfrm>
+            <a:off x="822960" y="1828800"/>
+            <a:ext cx="10515600" cy="4206240"/>
+          </a:xfrm>
+          <a:prstGeom prst="rect">
+            <a:avLst/>
+          </a:prstGeom>
+          <a:noFill/>
+        </p:spPr>
+        <p:txBody>
+          <a:bodyPr wrap="square">
+            <a:spAutoFit/>
+          </a:bodyPr>
+          <a:lstStyle/>
+          <a:p>
+            <a:pPr>
+              <a:spcAft>
+                <a:spcPts val="1400"/>
+              </a:spcAft>
+            </a:pPr>
+            <a:r>
+              <a:rPr sz="2400">
+                <a:solidFill>
+                  <a:srgbClr val="1F2A37"/>
+                </a:solidFill>
+              </a:rPr>
+              <a:t>• 200 - fine, here you go</a:t>
+            </a:r>
+          </a:p>
+          <a:p>
+            <a:pPr>
+              <a:spcAft>
+                <a:spcPts val="1400"/>
+              </a:spcAft>
+            </a:pPr>
+            <a:r>
+              <a:rPr sz="2400">
+                <a:solidFill>
+                  <a:srgbClr val="1F2A37"/>
+                </a:solidFill>
+              </a:rPr>
+              <a:t>• 401 - I do not believe who you say you are</a:t>
+            </a:r>
+          </a:p>
+          <a:p>
+            <a:pPr>
+              <a:spcAft>
+                <a:spcPts val="1400"/>
+              </a:spcAft>
+            </a:pPr>
+            <a:r>
+              <a:rPr sz="2400">
+                <a:solidFill>
+                  <a:srgbClr val="1F2A37"/>
+                </a:solidFill>
+              </a:rPr>
+              <a:t>• 404 - no such thing here</a:t>
             </a:r>
           </a:p>
         </p:txBody>
@@ -3676,7 +7575,7 @@
         <p:spPr>
           <a:xfrm>
             <a:off x="502920" y="274320"/>
-            <a:ext cx="11155680" cy="731520"/>
+            <a:ext cx="11155680" cy="548640"/>
           </a:xfrm>
           <a:prstGeom prst="rect">
             <a:avLst/>
@@ -3690,12 +7589,12 @@
           <a:lstStyle/>
           <a:p>
             <a:r>
-              <a:rPr sz="2600" b="1">
+              <a:rPr sz="2200" b="1">
                 <a:solidFill>
                   <a:srgbClr val="01AEFD"/>
                 </a:solidFill>
               </a:rPr>
-              <a:t>Type this into script.js</a:t>
+              <a:t>Type this into script.js   -   line 9</a:t>
             </a:r>
           </a:p>
         </p:txBody>
@@ -3708,8 +7607,8 @@
         </p:nvSpPr>
         <p:spPr>
           <a:xfrm>
-            <a:off x="502920" y="1051560"/>
-            <a:ext cx="11155680" cy="5394960"/>
+            <a:off x="502920" y="960120"/>
+            <a:ext cx="11155680" cy="4297680"/>
           </a:xfrm>
           <a:prstGeom prst="rect">
             <a:avLst/>
@@ -3728,7 +7627,7 @@
               </a:spcAft>
             </a:pPr>
             <a:r>
-              <a:rPr sz="1700">
+              <a:rPr sz="1800">
                 <a:solidFill>
                   <a:srgbClr val="6D8C97"/>
                 </a:solidFill>
@@ -3737,188 +7636,183 @@
               <a:t>   8  </a:t>
             </a:r>
             <a:r>
-              <a:rPr sz="1700">
+              <a:rPr sz="1800">
+                <a:solidFill>
+                  <a:srgbClr val="6D8C97"/>
+                </a:solidFill>
+                <a:latin typeface="Consolas"/>
+              </a:rPr>
+              <a:t> </a:t>
+            </a:r>
+          </a:p>
+          <a:p>
+            <a:pPr>
+              <a:spcAft>
+                <a:spcPts val="0"/>
+              </a:spcAft>
+            </a:pPr>
+            <a:r>
+              <a:rPr sz="1800">
+                <a:solidFill>
+                  <a:srgbClr val="6D8C97"/>
+                </a:solidFill>
+                <a:latin typeface="Consolas"/>
+              </a:rPr>
+              <a:t>   9  </a:t>
+            </a:r>
+            <a:r>
+              <a:rPr sz="1800">
                 <a:solidFill>
                   <a:srgbClr val="7FE0A0"/>
                 </a:solidFill>
                 <a:latin typeface="Consolas"/>
               </a:rPr>
-              <a:t> </a:t>
-            </a:r>
-          </a:p>
-          <a:p>
-            <a:pPr>
-              <a:spcAft>
-                <a:spcPts val="0"/>
-              </a:spcAft>
-            </a:pPr>
-            <a:r>
-              <a:rPr sz="1700">
-                <a:solidFill>
-                  <a:srgbClr val="6D8C97"/>
-                </a:solidFill>
-                <a:latin typeface="Consolas"/>
-              </a:rPr>
-              <a:t>   9  </a:t>
-            </a:r>
-            <a:r>
-              <a:rPr sz="1700">
-                <a:solidFill>
-                  <a:srgbClr val="7FE0A0"/>
-                </a:solidFill>
-                <a:latin typeface="Consolas"/>
-              </a:rPr>
               <a:t>// Week 3: where the AI lives, and who you are.</a:t>
             </a:r>
           </a:p>
-          <a:p>
-            <a:pPr>
-              <a:spcAft>
-                <a:spcPts val="0"/>
-              </a:spcAft>
-            </a:pPr>
-            <a:r>
-              <a:rPr sz="1700">
-                <a:solidFill>
-                  <a:srgbClr val="6D8C97"/>
-                </a:solidFill>
-                <a:latin typeface="Consolas"/>
-              </a:rPr>
-              <a:t>  10  </a:t>
-            </a:r>
-            <a:r>
-              <a:rPr sz="1700">
-                <a:solidFill>
-                  <a:srgbClr val="7FE0A0"/>
-                </a:solidFill>
-                <a:latin typeface="Consolas"/>
-              </a:rPr>
-              <a:t>// The key identifies YOU. Two people using one key share one speed limit.</a:t>
-            </a:r>
-          </a:p>
-          <a:p>
-            <a:pPr>
-              <a:spcAft>
-                <a:spcPts val="0"/>
-              </a:spcAft>
-            </a:pPr>
-            <a:r>
-              <a:rPr sz="1700">
-                <a:solidFill>
-                  <a:srgbClr val="6D8C97"/>
-                </a:solidFill>
-                <a:latin typeface="Consolas"/>
-              </a:rPr>
-              <a:t>  11  </a:t>
-            </a:r>
-            <a:r>
-              <a:rPr sz="1700">
-                <a:solidFill>
-                  <a:srgbClr val="7FE0A0"/>
-                </a:solidFill>
-                <a:latin typeface="Consolas"/>
-              </a:rPr>
-              <a:t>//</a:t>
-            </a:r>
-          </a:p>
-          <a:p>
-            <a:pPr>
-              <a:spcAft>
-                <a:spcPts val="0"/>
-              </a:spcAft>
-            </a:pPr>
-            <a:r>
-              <a:rPr sz="1700">
-                <a:solidFill>
-                  <a:srgbClr val="6D8C97"/>
-                </a:solidFill>
-                <a:latin typeface="Consolas"/>
-              </a:rPr>
-              <a:t>  12  </a:t>
-            </a:r>
-            <a:r>
-              <a:rPr sz="1700">
-                <a:solidFill>
-                  <a:srgbClr val="7FE0A0"/>
-                </a:solidFill>
-                <a:latin typeface="Consolas"/>
-              </a:rPr>
-              <a:t>// This address only works on the school network. To run this at home you</a:t>
-            </a:r>
-          </a:p>
-          <a:p>
-            <a:pPr>
-              <a:spcAft>
-                <a:spcPts val="0"/>
-              </a:spcAft>
-            </a:pPr>
-            <a:r>
-              <a:rPr sz="1700">
-                <a:solidFill>
-                  <a:srgbClr val="6D8C97"/>
-                </a:solidFill>
-                <a:latin typeface="Consolas"/>
-              </a:rPr>
-              <a:t>  13  </a:t>
-            </a:r>
-            <a:r>
-              <a:rPr sz="1700">
-                <a:solidFill>
-                  <a:srgbClr val="7FE0A0"/>
-                </a:solidFill>
-                <a:latin typeface="Consolas"/>
-              </a:rPr>
-              <a:t>// change these two lines and the model names in index.html - nothing else.</a:t>
-            </a:r>
-          </a:p>
-          <a:p>
-            <a:pPr>
-              <a:spcAft>
-                <a:spcPts val="0"/>
-              </a:spcAft>
-            </a:pPr>
-            <a:r>
-              <a:rPr sz="1700">
-                <a:solidFill>
-                  <a:srgbClr val="6D8C97"/>
-                </a:solidFill>
-                <a:latin typeface="Consolas"/>
-              </a:rPr>
-              <a:t>  14  </a:t>
-            </a:r>
-            <a:r>
-              <a:rPr sz="1700">
-                <a:solidFill>
-                  <a:srgbClr val="7FE0A0"/>
-                </a:solidFill>
-                <a:latin typeface="Consolas"/>
-              </a:rPr>
-              <a:t>const AI_BASE = 'https://ai.tail5091fc.ts.net';</a:t>
-            </a:r>
-          </a:p>
-          <a:p>
-            <a:pPr>
-              <a:spcAft>
-                <a:spcPts val="0"/>
-              </a:spcAft>
-            </a:pPr>
-            <a:r>
-              <a:rPr sz="1700">
-                <a:solidFill>
-                  <a:srgbClr val="6D8C97"/>
-                </a:solidFill>
-                <a:latin typeface="Consolas"/>
-              </a:rPr>
-              <a:t>  15  </a:t>
-            </a:r>
-            <a:r>
-              <a:rPr sz="1700">
-                <a:solidFill>
-                  <a:srgbClr val="7FE0A0"/>
-                </a:solidFill>
-                <a:latin typeface="Consolas"/>
-              </a:rPr>
-              <a:t>const API_KEY = 'sk-class-put-your-own-key-here';</a:t>
+        </p:txBody>
+      </p:sp>
+      <p:sp>
+        <p:nvSpPr>
+          <p:cNvPr id="4" name="TextBox 3"/>
+          <p:cNvSpPr txBox="1"/>
+          <p:nvPr/>
+        </p:nvSpPr>
+        <p:spPr>
+          <a:xfrm>
+            <a:off x="548640" y="5623560"/>
+            <a:ext cx="11064240" cy="1051560"/>
+          </a:xfrm>
+          <a:prstGeom prst="rect">
+            <a:avLst/>
+          </a:prstGeom>
+          <a:noFill/>
+        </p:spPr>
+        <p:txBody>
+          <a:bodyPr wrap="square">
+            <a:spAutoFit/>
+          </a:bodyPr>
+          <a:lstStyle/>
+          <a:p>
+            <a:r>
+              <a:rPr sz="2000">
+                <a:solidFill>
+                  <a:srgbClr val="DCECEF"/>
+                </a:solidFill>
+              </a:rPr>
+              <a:t>A comment: this chunk says WHERE the AI is and WHO you are.</a:t>
+            </a:r>
+          </a:p>
+        </p:txBody>
+      </p:sp>
+    </p:spTree>
+  </p:cSld>
+  <p:clrMapOvr>
+    <a:masterClrMapping/>
+  </p:clrMapOvr>
+</p:sld>
+</file>
+
+<file path=ppt/slides/slide30.xml><?xml version="1.0" encoding="utf-8"?>
+<p:sld xmlns:a="http://schemas.openxmlformats.org/drawingml/2006/main" xmlns:p="http://schemas.openxmlformats.org/presentationml/2006/main" xmlns:r="http://schemas.openxmlformats.org/officeDocument/2006/relationships">
+  <p:cSld>
+    <p:spTree>
+      <p:nvGrpSpPr>
+        <p:cNvPr id="1" name=""/>
+        <p:cNvGrpSpPr/>
+        <p:nvPr/>
+      </p:nvGrpSpPr>
+      <p:grpSpPr/>
+      <p:sp>
+        <p:nvSpPr>
+          <p:cNvPr id="2" name="Title 1"/>
+          <p:cNvSpPr>
+            <a:spLocks noGrp="1"/>
+          </p:cNvSpPr>
+          <p:nvPr>
+            <p:ph type="title"/>
+          </p:nvPr>
+        </p:nvSpPr>
+        <p:spPr/>
+        <p:txBody>
+          <a:bodyPr/>
+          <a:lstStyle/>
+          <a:p>
+            <a:r>
+              <a:rPr sz="3800" b="1">
+                <a:solidFill>
+                  <a:srgbClr val="1F2A37"/>
+                </a:solidFill>
+              </a:rPr>
+              <a:t>Watch the Console</a:t>
+            </a:r>
+          </a:p>
+        </p:txBody>
+      </p:sp>
+      <p:sp>
+        <p:nvSpPr>
+          <p:cNvPr id="3" name="TextBox 2"/>
+          <p:cNvSpPr txBox="1"/>
+          <p:nvPr/>
+        </p:nvSpPr>
+        <p:spPr>
+          <a:xfrm>
+            <a:off x="822960" y="1828800"/>
+            <a:ext cx="10515600" cy="4206240"/>
+          </a:xfrm>
+          <a:prstGeom prst="rect">
+            <a:avLst/>
+          </a:prstGeom>
+          <a:noFill/>
+        </p:spPr>
+        <p:txBody>
+          <a:bodyPr wrap="square">
+            <a:spAutoFit/>
+          </a:bodyPr>
+          <a:lstStyle/>
+          <a:p>
+            <a:pPr>
+              <a:spcAft>
+                <a:spcPts val="1400"/>
+              </a:spcAft>
+            </a:pPr>
+            <a:r>
+              <a:rPr sz="2400">
+                <a:solidFill>
+                  <a:srgbClr val="1F2A37"/>
+                </a:solidFill>
+              </a:rPr>
+              <a:t>• -&gt; GET /v1/models</a:t>
+            </a:r>
+          </a:p>
+          <a:p>
+            <a:pPr>
+              <a:spcAft>
+                <a:spcPts val="1400"/>
+              </a:spcAft>
+            </a:pPr>
+            <a:r>
+              <a:rPr sz="2400">
+                <a:solidFill>
+                  <a:srgbClr val="1F2A37"/>
+                </a:solidFill>
+              </a:rPr>
+              <a:t>• &lt;- 200 in 84 ms</a:t>
+            </a:r>
+          </a:p>
+          <a:p>
+            <a:pPr>
+              <a:spcAft>
+                <a:spcPts val="1400"/>
+              </a:spcAft>
+            </a:pPr>
+            <a:r>
+              <a:rPr sz="2400">
+                <a:solidFill>
+                  <a:srgbClr val="1F2A37"/>
+                </a:solidFill>
+              </a:rPr>
+              <a:t>• That is your request leaving and coming back</a:t>
             </a:r>
           </a:p>
         </p:txBody>
@@ -3934,6 +7828,14 @@
 <file path=ppt/slides/slide4.xml><?xml version="1.0" encoding="utf-8"?>
 <p:sld xmlns:a="http://schemas.openxmlformats.org/drawingml/2006/main" xmlns:p="http://schemas.openxmlformats.org/presentationml/2006/main" xmlns:r="http://schemas.openxmlformats.org/officeDocument/2006/relationships">
   <p:cSld>
+    <p:bg>
+      <p:bgPr>
+        <a:solidFill>
+          <a:srgbClr val="102127"/>
+        </a:solidFill>
+        <a:effectLst/>
+      </p:bgPr>
+    </p:bg>
     <p:spTree>
       <p:nvGrpSpPr>
         <p:cNvPr id="1" name=""/>
@@ -3943,40 +7845,14 @@
       <p:grpSpPr/>
       <p:sp>
         <p:nvSpPr>
-          <p:cNvPr id="2" name="Title 1"/>
-          <p:cNvSpPr>
-            <a:spLocks noGrp="1"/>
-          </p:cNvSpPr>
-          <p:nvPr>
-            <p:ph type="title"/>
-          </p:nvPr>
-        </p:nvSpPr>
-        <p:spPr/>
-        <p:txBody>
-          <a:bodyPr/>
-          <a:lstStyle/>
-          <a:p>
-            <a:r>
-              <a:rPr sz="3800" b="1">
-                <a:solidFill>
-                  <a:srgbClr val="1F2A37"/>
-                </a:solidFill>
-              </a:rPr>
-              <a:t>An API is a front desk</a:t>
-            </a:r>
-          </a:p>
-        </p:txBody>
-      </p:sp>
-      <p:sp>
-        <p:nvSpPr>
-          <p:cNvPr id="3" name="TextBox 2"/>
+          <p:cNvPr id="2" name="TextBox 1"/>
           <p:cNvSpPr txBox="1"/>
           <p:nvPr/>
         </p:nvSpPr>
         <p:spPr>
           <a:xfrm>
-            <a:off x="822960" y="1828800"/>
-            <a:ext cx="10515600" cy="4206240"/>
+            <a:off x="502920" y="274320"/>
+            <a:ext cx="11155680" cy="548640"/>
           </a:xfrm>
           <a:prstGeom prst="rect">
             <a:avLst/>
@@ -3984,53 +7860,149 @@
           <a:noFill/>
         </p:spPr>
         <p:txBody>
+          <a:bodyPr wrap="none">
+            <a:spAutoFit/>
+          </a:bodyPr>
+          <a:lstStyle/>
+          <a:p>
+            <a:r>
+              <a:rPr sz="2200" b="1">
+                <a:solidFill>
+                  <a:srgbClr val="01AEFD"/>
+                </a:solidFill>
+              </a:rPr>
+              <a:t>Type this into script.js   -   line 10</a:t>
+            </a:r>
+          </a:p>
+        </p:txBody>
+      </p:sp>
+      <p:sp>
+        <p:nvSpPr>
+          <p:cNvPr id="3" name="TextBox 2"/>
+          <p:cNvSpPr txBox="1"/>
+          <p:nvPr/>
+        </p:nvSpPr>
+        <p:spPr>
+          <a:xfrm>
+            <a:off x="502920" y="960120"/>
+            <a:ext cx="11155680" cy="4297680"/>
+          </a:xfrm>
+          <a:prstGeom prst="rect">
+            <a:avLst/>
+          </a:prstGeom>
+          <a:noFill/>
+        </p:spPr>
+        <p:txBody>
+          <a:bodyPr wrap="none">
+            <a:spAutoFit/>
+          </a:bodyPr>
+          <a:lstStyle/>
+          <a:p>
+            <a:pPr>
+              <a:spcAft>
+                <a:spcPts val="0"/>
+              </a:spcAft>
+            </a:pPr>
+            <a:r>
+              <a:rPr sz="1800">
+                <a:solidFill>
+                  <a:srgbClr val="6D8C97"/>
+                </a:solidFill>
+                <a:latin typeface="Consolas"/>
+              </a:rPr>
+              <a:t>   8  </a:t>
+            </a:r>
+            <a:r>
+              <a:rPr sz="1800">
+                <a:solidFill>
+                  <a:srgbClr val="6D8C97"/>
+                </a:solidFill>
+                <a:latin typeface="Consolas"/>
+              </a:rPr>
+              <a:t> </a:t>
+            </a:r>
+          </a:p>
+          <a:p>
+            <a:pPr>
+              <a:spcAft>
+                <a:spcPts val="0"/>
+              </a:spcAft>
+            </a:pPr>
+            <a:r>
+              <a:rPr sz="1800">
+                <a:solidFill>
+                  <a:srgbClr val="6D8C97"/>
+                </a:solidFill>
+                <a:latin typeface="Consolas"/>
+              </a:rPr>
+              <a:t>   9  </a:t>
+            </a:r>
+            <a:r>
+              <a:rPr sz="1800">
+                <a:solidFill>
+                  <a:srgbClr val="6D8C97"/>
+                </a:solidFill>
+                <a:latin typeface="Consolas"/>
+              </a:rPr>
+              <a:t>// Week 3: where the AI lives, and who you are.</a:t>
+            </a:r>
+          </a:p>
+          <a:p>
+            <a:pPr>
+              <a:spcAft>
+                <a:spcPts val="0"/>
+              </a:spcAft>
+            </a:pPr>
+            <a:r>
+              <a:rPr sz="1800">
+                <a:solidFill>
+                  <a:srgbClr val="6D8C97"/>
+                </a:solidFill>
+                <a:latin typeface="Consolas"/>
+              </a:rPr>
+              <a:t>  10  </a:t>
+            </a:r>
+            <a:r>
+              <a:rPr sz="1800">
+                <a:solidFill>
+                  <a:srgbClr val="7FE0A0"/>
+                </a:solidFill>
+                <a:latin typeface="Consolas"/>
+              </a:rPr>
+              <a:t>// The key identifies YOU. Two people using one key share one speed limit.</a:t>
+            </a:r>
+          </a:p>
+        </p:txBody>
+      </p:sp>
+      <p:sp>
+        <p:nvSpPr>
+          <p:cNvPr id="4" name="TextBox 3"/>
+          <p:cNvSpPr txBox="1"/>
+          <p:nvPr/>
+        </p:nvSpPr>
+        <p:spPr>
+          <a:xfrm>
+            <a:off x="548640" y="5623560"/>
+            <a:ext cx="11064240" cy="1051560"/>
+          </a:xfrm>
+          <a:prstGeom prst="rect">
+            <a:avLst/>
+          </a:prstGeom>
+          <a:noFill/>
+        </p:spPr>
+        <p:txBody>
           <a:bodyPr wrap="square">
             <a:spAutoFit/>
           </a:bodyPr>
           <a:lstStyle/>
           <a:p>
-            <a:pPr>
-              <a:spcAft>
-                <a:spcPts val="1400"/>
-              </a:spcAft>
-            </a:pPr>
-            <a:r>
-              <a:rPr sz="2400">
-                <a:solidFill>
-                  <a:srgbClr val="1F2A37"/>
-                </a:solidFill>
-              </a:rPr>
-              <a:t>• You never go in the kitchen</a:t>
-            </a:r>
-          </a:p>
-          <a:p>
-            <a:pPr>
-              <a:spcAft>
-                <a:spcPts val="1400"/>
-              </a:spcAft>
-            </a:pPr>
-            <a:r>
-              <a:rPr sz="2400">
-                <a:solidFill>
-                  <a:srgbClr val="1F2A37"/>
-                </a:solidFill>
-              </a:rPr>
-              <a:t>• You ask in the way they expect</a:t>
-            </a:r>
-          </a:p>
-          <a:p>
-            <a:pPr>
-              <a:spcAft>
-                <a:spcPts val="1400"/>
-              </a:spcAft>
-            </a:pPr>
-            <a:r>
-              <a:rPr sz="2400">
-                <a:solidFill>
-                  <a:srgbClr val="1F2A37"/>
-                </a:solidFill>
-              </a:rPr>
-              <a:t>• The answer comes back in a shape you can rely on</a:t>
+            <a:r>
+              <a:rPr sz="2000">
+                <a:solidFill>
+                  <a:srgbClr val="DCECEF"/>
+                </a:solidFill>
+              </a:rPr>
+              <a:t>Your key is your identity. Two people on one key share one speed limit.</a:t>
             </a:r>
           </a:p>
         </p:txBody>
@@ -4046,6 +8018,14 @@
 <file path=ppt/slides/slide5.xml><?xml version="1.0" encoding="utf-8"?>
 <p:sld xmlns:a="http://schemas.openxmlformats.org/drawingml/2006/main" xmlns:p="http://schemas.openxmlformats.org/presentationml/2006/main" xmlns:r="http://schemas.openxmlformats.org/officeDocument/2006/relationships">
   <p:cSld>
+    <p:bg>
+      <p:bgPr>
+        <a:solidFill>
+          <a:srgbClr val="102127"/>
+        </a:solidFill>
+        <a:effectLst/>
+      </p:bgPr>
+    </p:bg>
     <p:spTree>
       <p:nvGrpSpPr>
         <p:cNvPr id="1" name=""/>
@@ -4055,40 +8035,14 @@
       <p:grpSpPr/>
       <p:sp>
         <p:nvSpPr>
-          <p:cNvPr id="2" name="Title 1"/>
-          <p:cNvSpPr>
-            <a:spLocks noGrp="1"/>
-          </p:cNvSpPr>
-          <p:nvPr>
-            <p:ph type="title"/>
-          </p:nvPr>
-        </p:nvSpPr>
-        <p:spPr/>
-        <p:txBody>
-          <a:bodyPr/>
-          <a:lstStyle/>
-          <a:p>
-            <a:r>
-              <a:rPr sz="3800" b="1">
-                <a:solidFill>
-                  <a:srgbClr val="1F2A37"/>
-                </a:solidFill>
-              </a:rPr>
-              <a:t>A request has two parts</a:t>
-            </a:r>
-          </a:p>
-        </p:txBody>
-      </p:sp>
-      <p:sp>
-        <p:nvSpPr>
-          <p:cNvPr id="3" name="TextBox 2"/>
+          <p:cNvPr id="2" name="TextBox 1"/>
           <p:cNvSpPr txBox="1"/>
           <p:nvPr/>
         </p:nvSpPr>
         <p:spPr>
           <a:xfrm>
-            <a:off x="822960" y="1828800"/>
-            <a:ext cx="10515600" cy="4206240"/>
+            <a:off x="502920" y="274320"/>
+            <a:ext cx="11155680" cy="548640"/>
           </a:xfrm>
           <a:prstGeom prst="rect">
             <a:avLst/>
@@ -4096,38 +8050,199 @@
           <a:noFill/>
         </p:spPr>
         <p:txBody>
+          <a:bodyPr wrap="none">
+            <a:spAutoFit/>
+          </a:bodyPr>
+          <a:lstStyle/>
+          <a:p>
+            <a:r>
+              <a:rPr sz="2200" b="1">
+                <a:solidFill>
+                  <a:srgbClr val="01AEFD"/>
+                </a:solidFill>
+              </a:rPr>
+              <a:t>Type this into script.js   -   line 12</a:t>
+            </a:r>
+          </a:p>
+        </p:txBody>
+      </p:sp>
+      <p:sp>
+        <p:nvSpPr>
+          <p:cNvPr id="3" name="TextBox 2"/>
+          <p:cNvSpPr txBox="1"/>
+          <p:nvPr/>
+        </p:nvSpPr>
+        <p:spPr>
+          <a:xfrm>
+            <a:off x="502920" y="960120"/>
+            <a:ext cx="11155680" cy="4297680"/>
+          </a:xfrm>
+          <a:prstGeom prst="rect">
+            <a:avLst/>
+          </a:prstGeom>
+          <a:noFill/>
+        </p:spPr>
+        <p:txBody>
+          <a:bodyPr wrap="none">
+            <a:spAutoFit/>
+          </a:bodyPr>
+          <a:lstStyle/>
+          <a:p>
+            <a:pPr>
+              <a:spcAft>
+                <a:spcPts val="0"/>
+              </a:spcAft>
+            </a:pPr>
+            <a:r>
+              <a:rPr sz="1800">
+                <a:solidFill>
+                  <a:srgbClr val="6D8C97"/>
+                </a:solidFill>
+                <a:latin typeface="Consolas"/>
+              </a:rPr>
+              <a:t>   8  </a:t>
+            </a:r>
+            <a:r>
+              <a:rPr sz="1800">
+                <a:solidFill>
+                  <a:srgbClr val="6D8C97"/>
+                </a:solidFill>
+                <a:latin typeface="Consolas"/>
+              </a:rPr>
+              <a:t> </a:t>
+            </a:r>
+          </a:p>
+          <a:p>
+            <a:pPr>
+              <a:spcAft>
+                <a:spcPts val="0"/>
+              </a:spcAft>
+            </a:pPr>
+            <a:r>
+              <a:rPr sz="1800">
+                <a:solidFill>
+                  <a:srgbClr val="6D8C97"/>
+                </a:solidFill>
+                <a:latin typeface="Consolas"/>
+              </a:rPr>
+              <a:t>   9  </a:t>
+            </a:r>
+            <a:r>
+              <a:rPr sz="1800">
+                <a:solidFill>
+                  <a:srgbClr val="6D8C97"/>
+                </a:solidFill>
+                <a:latin typeface="Consolas"/>
+              </a:rPr>
+              <a:t>// Week 3: where the AI lives, and who you are.</a:t>
+            </a:r>
+          </a:p>
+          <a:p>
+            <a:pPr>
+              <a:spcAft>
+                <a:spcPts val="0"/>
+              </a:spcAft>
+            </a:pPr>
+            <a:r>
+              <a:rPr sz="1800">
+                <a:solidFill>
+                  <a:srgbClr val="6D8C97"/>
+                </a:solidFill>
+                <a:latin typeface="Consolas"/>
+              </a:rPr>
+              <a:t>  10  </a:t>
+            </a:r>
+            <a:r>
+              <a:rPr sz="1800">
+                <a:solidFill>
+                  <a:srgbClr val="6D8C97"/>
+                </a:solidFill>
+                <a:latin typeface="Consolas"/>
+              </a:rPr>
+              <a:t>// The key identifies YOU. Two people using one key share one speed limit.</a:t>
+            </a:r>
+          </a:p>
+          <a:p>
+            <a:pPr>
+              <a:spcAft>
+                <a:spcPts val="0"/>
+              </a:spcAft>
+            </a:pPr>
+            <a:r>
+              <a:rPr sz="1800">
+                <a:solidFill>
+                  <a:srgbClr val="6D8C97"/>
+                </a:solidFill>
+                <a:latin typeface="Consolas"/>
+              </a:rPr>
+              <a:t>  11  </a:t>
+            </a:r>
+            <a:r>
+              <a:rPr sz="1800">
+                <a:solidFill>
+                  <a:srgbClr val="6D8C97"/>
+                </a:solidFill>
+                <a:latin typeface="Consolas"/>
+              </a:rPr>
+              <a:t>//</a:t>
+            </a:r>
+          </a:p>
+          <a:p>
+            <a:pPr>
+              <a:spcAft>
+                <a:spcPts val="0"/>
+              </a:spcAft>
+            </a:pPr>
+            <a:r>
+              <a:rPr sz="1800">
+                <a:solidFill>
+                  <a:srgbClr val="6D8C97"/>
+                </a:solidFill>
+                <a:latin typeface="Consolas"/>
+              </a:rPr>
+              <a:t>  12  </a:t>
+            </a:r>
+            <a:r>
+              <a:rPr sz="1800">
+                <a:solidFill>
+                  <a:srgbClr val="7FE0A0"/>
+                </a:solidFill>
+                <a:latin typeface="Consolas"/>
+              </a:rPr>
+              <a:t>// This address only works on the school network. To run this at home you</a:t>
+            </a:r>
+          </a:p>
+        </p:txBody>
+      </p:sp>
+      <p:sp>
+        <p:nvSpPr>
+          <p:cNvPr id="4" name="TextBox 3"/>
+          <p:cNvSpPr txBox="1"/>
+          <p:nvPr/>
+        </p:nvSpPr>
+        <p:spPr>
+          <a:xfrm>
+            <a:off x="548640" y="5623560"/>
+            <a:ext cx="11064240" cy="1051560"/>
+          </a:xfrm>
+          <a:prstGeom prst="rect">
+            <a:avLst/>
+          </a:prstGeom>
+          <a:noFill/>
+        </p:spPr>
+        <p:txBody>
           <a:bodyPr wrap="square">
             <a:spAutoFit/>
           </a:bodyPr>
           <a:lstStyle/>
           <a:p>
-            <a:pPr>
-              <a:spcAft>
-                <a:spcPts val="1400"/>
-              </a:spcAft>
-            </a:pPr>
-            <a:r>
-              <a:rPr sz="2400">
-                <a:solidFill>
-                  <a:srgbClr val="1F2A37"/>
-                </a:solidFill>
-              </a:rPr>
-              <a:t>• The address: /v1/models</a:t>
-            </a:r>
-          </a:p>
-          <a:p>
-            <a:pPr>
-              <a:spcAft>
-                <a:spcPts val="1400"/>
-              </a:spcAft>
-            </a:pPr>
-            <a:r>
-              <a:rPr sz="2400">
-                <a:solidFill>
-                  <a:srgbClr val="1F2A37"/>
-                </a:solidFill>
-              </a:rPr>
-              <a:t>• The name badge: Authorization: Bearer YOUR_KEY</a:t>
+            <a:r>
+              <a:rPr sz="2000">
+                <a:solidFill>
+                  <a:srgbClr val="DCECEF"/>
+                </a:solidFill>
+              </a:rPr>
+              <a:t>A comment: this address only works on the school network - at home you swap these two lines.</a:t>
             </a:r>
           </a:p>
         </p:txBody>
@@ -4167,7 +8282,7 @@
         <p:spPr>
           <a:xfrm>
             <a:off x="502920" y="274320"/>
-            <a:ext cx="11155680" cy="731520"/>
+            <a:ext cx="11155680" cy="548640"/>
           </a:xfrm>
           <a:prstGeom prst="rect">
             <a:avLst/>
@@ -4181,12 +8296,12 @@
           <a:lstStyle/>
           <a:p>
             <a:r>
-              <a:rPr sz="2600" b="1">
+              <a:rPr sz="2200" b="1">
                 <a:solidFill>
                   <a:srgbClr val="01AEFD"/>
                 </a:solidFill>
               </a:rPr>
-              <a:t>Type this into script.js</a:t>
+              <a:t>Type this into script.js   -   line 14</a:t>
             </a:r>
           </a:p>
         </p:txBody>
@@ -4199,8 +8314,8 @@
         </p:nvSpPr>
         <p:spPr>
           <a:xfrm>
-            <a:off x="502920" y="1051560"/>
-            <a:ext cx="11155680" cy="5394960"/>
+            <a:off x="502920" y="960120"/>
+            <a:ext cx="11155680" cy="4297680"/>
           </a:xfrm>
           <a:prstGeom prst="rect">
             <a:avLst/>
@@ -4219,297 +8334,205 @@
               </a:spcAft>
             </a:pPr>
             <a:r>
-              <a:rPr sz="1400">
-                <a:solidFill>
-                  <a:srgbClr val="6D8C97"/>
-                </a:solidFill>
-                <a:latin typeface="Consolas"/>
-              </a:rPr>
-              <a:t>  29  </a:t>
-            </a:r>
-            <a:r>
-              <a:rPr sz="1400">
+              <a:rPr sz="1800">
+                <a:solidFill>
+                  <a:srgbClr val="6D8C97"/>
+                </a:solidFill>
+                <a:latin typeface="Consolas"/>
+              </a:rPr>
+              <a:t>   8  </a:t>
+            </a:r>
+            <a:r>
+              <a:rPr sz="1800">
+                <a:solidFill>
+                  <a:srgbClr val="6D8C97"/>
+                </a:solidFill>
+                <a:latin typeface="Consolas"/>
+              </a:rPr>
+              <a:t> </a:t>
+            </a:r>
+          </a:p>
+          <a:p>
+            <a:pPr>
+              <a:spcAft>
+                <a:spcPts val="0"/>
+              </a:spcAft>
+            </a:pPr>
+            <a:r>
+              <a:rPr sz="1800">
+                <a:solidFill>
+                  <a:srgbClr val="6D8C97"/>
+                </a:solidFill>
+                <a:latin typeface="Consolas"/>
+              </a:rPr>
+              <a:t>   9  </a:t>
+            </a:r>
+            <a:r>
+              <a:rPr sz="1800">
+                <a:solidFill>
+                  <a:srgbClr val="6D8C97"/>
+                </a:solidFill>
+                <a:latin typeface="Consolas"/>
+              </a:rPr>
+              <a:t>// Week 3: where the AI lives, and who you are.</a:t>
+            </a:r>
+          </a:p>
+          <a:p>
+            <a:pPr>
+              <a:spcAft>
+                <a:spcPts val="0"/>
+              </a:spcAft>
+            </a:pPr>
+            <a:r>
+              <a:rPr sz="1800">
+                <a:solidFill>
+                  <a:srgbClr val="6D8C97"/>
+                </a:solidFill>
+                <a:latin typeface="Consolas"/>
+              </a:rPr>
+              <a:t>  10  </a:t>
+            </a:r>
+            <a:r>
+              <a:rPr sz="1800">
+                <a:solidFill>
+                  <a:srgbClr val="6D8C97"/>
+                </a:solidFill>
+                <a:latin typeface="Consolas"/>
+              </a:rPr>
+              <a:t>// The key identifies YOU. Two people using one key share one speed limit.</a:t>
+            </a:r>
+          </a:p>
+          <a:p>
+            <a:pPr>
+              <a:spcAft>
+                <a:spcPts val="0"/>
+              </a:spcAft>
+            </a:pPr>
+            <a:r>
+              <a:rPr sz="1800">
+                <a:solidFill>
+                  <a:srgbClr val="6D8C97"/>
+                </a:solidFill>
+                <a:latin typeface="Consolas"/>
+              </a:rPr>
+              <a:t>  11  </a:t>
+            </a:r>
+            <a:r>
+              <a:rPr sz="1800">
+                <a:solidFill>
+                  <a:srgbClr val="6D8C97"/>
+                </a:solidFill>
+                <a:latin typeface="Consolas"/>
+              </a:rPr>
+              <a:t>//</a:t>
+            </a:r>
+          </a:p>
+          <a:p>
+            <a:pPr>
+              <a:spcAft>
+                <a:spcPts val="0"/>
+              </a:spcAft>
+            </a:pPr>
+            <a:r>
+              <a:rPr sz="1800">
+                <a:solidFill>
+                  <a:srgbClr val="6D8C97"/>
+                </a:solidFill>
+                <a:latin typeface="Consolas"/>
+              </a:rPr>
+              <a:t>  12  </a:t>
+            </a:r>
+            <a:r>
+              <a:rPr sz="1800">
+                <a:solidFill>
+                  <a:srgbClr val="6D8C97"/>
+                </a:solidFill>
+                <a:latin typeface="Consolas"/>
+              </a:rPr>
+              <a:t>// This address only works on the school network. To run this at home you</a:t>
+            </a:r>
+          </a:p>
+          <a:p>
+            <a:pPr>
+              <a:spcAft>
+                <a:spcPts val="0"/>
+              </a:spcAft>
+            </a:pPr>
+            <a:r>
+              <a:rPr sz="1800">
+                <a:solidFill>
+                  <a:srgbClr val="6D8C97"/>
+                </a:solidFill>
+                <a:latin typeface="Consolas"/>
+              </a:rPr>
+              <a:t>  13  </a:t>
+            </a:r>
+            <a:r>
+              <a:rPr sz="1800">
+                <a:solidFill>
+                  <a:srgbClr val="6D8C97"/>
+                </a:solidFill>
+                <a:latin typeface="Consolas"/>
+              </a:rPr>
+              <a:t>// change these two lines and the model names in index.html - nothing else.</a:t>
+            </a:r>
+          </a:p>
+          <a:p>
+            <a:pPr>
+              <a:spcAft>
+                <a:spcPts val="0"/>
+              </a:spcAft>
+            </a:pPr>
+            <a:r>
+              <a:rPr sz="1800">
+                <a:solidFill>
+                  <a:srgbClr val="6D8C97"/>
+                </a:solidFill>
+                <a:latin typeface="Consolas"/>
+              </a:rPr>
+              <a:t>  14  </a:t>
+            </a:r>
+            <a:r>
+              <a:rPr sz="1800">
+                <a:solidFill>
+                  <a:srgbClr val="7FE0A0"/>
+                </a:solidFill>
+                <a:latin typeface="Consolas"/>
+              </a:rPr>
+              <a:t>const AI_BASE = 'https://ai.tail5091fc.ts.net';</a:t>
+            </a:r>
+          </a:p>
+        </p:txBody>
+      </p:sp>
+      <p:sp>
+        <p:nvSpPr>
+          <p:cNvPr id="4" name="TextBox 3"/>
+          <p:cNvSpPr txBox="1"/>
+          <p:nvPr/>
+        </p:nvSpPr>
+        <p:spPr>
+          <a:xfrm>
+            <a:off x="548640" y="5623560"/>
+            <a:ext cx="11064240" cy="1051560"/>
+          </a:xfrm>
+          <a:prstGeom prst="rect">
+            <a:avLst/>
+          </a:prstGeom>
+          <a:noFill/>
+        </p:spPr>
+        <p:txBody>
+          <a:bodyPr wrap="square">
+            <a:spAutoFit/>
+          </a:bodyPr>
+          <a:lstStyle/>
+          <a:p>
+            <a:r>
+              <a:rPr sz="2000">
                 <a:solidFill>
                   <a:srgbClr val="DCECEF"/>
                 </a:solidFill>
-                <a:latin typeface="Consolas"/>
-              </a:rPr>
-              <a:t> </a:t>
-            </a:r>
-          </a:p>
-          <a:p>
-            <a:pPr>
-              <a:spcAft>
-                <a:spcPts val="0"/>
-              </a:spcAft>
-            </a:pPr>
-            <a:r>
-              <a:rPr sz="1400">
-                <a:solidFill>
-                  <a:srgbClr val="6D8C97"/>
-                </a:solidFill>
-                <a:latin typeface="Consolas"/>
-              </a:rPr>
-              <a:t>  30  </a:t>
-            </a:r>
-            <a:r>
-              <a:rPr sz="1400">
-                <a:solidFill>
-                  <a:srgbClr val="7FE0A0"/>
-                </a:solidFill>
-                <a:latin typeface="Consolas"/>
-              </a:rPr>
-              <a:t>// The smallest useful request: what models does this server have?</a:t>
-            </a:r>
-          </a:p>
-          <a:p>
-            <a:pPr>
-              <a:spcAft>
-                <a:spcPts val="0"/>
-              </a:spcAft>
-            </a:pPr>
-            <a:r>
-              <a:rPr sz="1400">
-                <a:solidFill>
-                  <a:srgbClr val="6D8C97"/>
-                </a:solidFill>
-                <a:latin typeface="Consolas"/>
-              </a:rPr>
-              <a:t>  31  </a:t>
-            </a:r>
-            <a:r>
-              <a:rPr sz="1400">
-                <a:solidFill>
-                  <a:srgbClr val="7FE0A0"/>
-                </a:solidFill>
-                <a:latin typeface="Consolas"/>
-              </a:rPr>
-              <a:t>// 'async' means this function does something slow and can be waited for.</a:t>
-            </a:r>
-          </a:p>
-          <a:p>
-            <a:pPr>
-              <a:spcAft>
-                <a:spcPts val="0"/>
-              </a:spcAft>
-            </a:pPr>
-            <a:r>
-              <a:rPr sz="1400">
-                <a:solidFill>
-                  <a:srgbClr val="6D8C97"/>
-                </a:solidFill>
-                <a:latin typeface="Consolas"/>
-              </a:rPr>
-              <a:t>  32  </a:t>
-            </a:r>
-            <a:r>
-              <a:rPr sz="1400">
-                <a:solidFill>
-                  <a:srgbClr val="7FE0A0"/>
-                </a:solidFill>
-                <a:latin typeface="Consolas"/>
-              </a:rPr>
-              <a:t>async function listModels() {</a:t>
-            </a:r>
-          </a:p>
-          <a:p>
-            <a:pPr>
-              <a:spcAft>
-                <a:spcPts val="0"/>
-              </a:spcAft>
-            </a:pPr>
-            <a:r>
-              <a:rPr sz="1400">
-                <a:solidFill>
-                  <a:srgbClr val="6D8C97"/>
-                </a:solidFill>
-                <a:latin typeface="Consolas"/>
-              </a:rPr>
-              <a:t>  33  </a:t>
-            </a:r>
-            <a:r>
-              <a:rPr sz="1400">
-                <a:solidFill>
-                  <a:srgbClr val="7FE0A0"/>
-                </a:solidFill>
-                <a:latin typeface="Consolas"/>
-              </a:rPr>
-              <a:t>  const res = await fetch(AI_BASE + '/v1/models', {</a:t>
-            </a:r>
-          </a:p>
-          <a:p>
-            <a:pPr>
-              <a:spcAft>
-                <a:spcPts val="0"/>
-              </a:spcAft>
-            </a:pPr>
-            <a:r>
-              <a:rPr sz="1400">
-                <a:solidFill>
-                  <a:srgbClr val="6D8C97"/>
-                </a:solidFill>
-                <a:latin typeface="Consolas"/>
-              </a:rPr>
-              <a:t>  34  </a:t>
-            </a:r>
-            <a:r>
-              <a:rPr sz="1400">
-                <a:solidFill>
-                  <a:srgbClr val="7FE0A0"/>
-                </a:solidFill>
-                <a:latin typeface="Consolas"/>
-              </a:rPr>
-              <a:t>    headers: { 'Authorization': 'Bearer ' + API_KEY }</a:t>
-            </a:r>
-          </a:p>
-          <a:p>
-            <a:pPr>
-              <a:spcAft>
-                <a:spcPts val="0"/>
-              </a:spcAft>
-            </a:pPr>
-            <a:r>
-              <a:rPr sz="1400">
-                <a:solidFill>
-                  <a:srgbClr val="6D8C97"/>
-                </a:solidFill>
-                <a:latin typeface="Consolas"/>
-              </a:rPr>
-              <a:t>  35  </a:t>
-            </a:r>
-            <a:r>
-              <a:rPr sz="1400">
-                <a:solidFill>
-                  <a:srgbClr val="7FE0A0"/>
-                </a:solidFill>
-                <a:latin typeface="Consolas"/>
-              </a:rPr>
-              <a:t>  });</a:t>
-            </a:r>
-          </a:p>
-          <a:p>
-            <a:pPr>
-              <a:spcAft>
-                <a:spcPts val="0"/>
-              </a:spcAft>
-            </a:pPr>
-            <a:r>
-              <a:rPr sz="1400">
-                <a:solidFill>
-                  <a:srgbClr val="6D8C97"/>
-                </a:solidFill>
-                <a:latin typeface="Consolas"/>
-              </a:rPr>
-              <a:t>  36  </a:t>
-            </a:r>
-            <a:r>
-              <a:rPr sz="1400">
-                <a:solidFill>
-                  <a:srgbClr val="7FE0A0"/>
-                </a:solidFill>
-                <a:latin typeface="Consolas"/>
-              </a:rPr>
-              <a:t>  const data = await res.json();   // the answer arrives as text; this reads it</a:t>
-            </a:r>
-          </a:p>
-          <a:p>
-            <a:pPr>
-              <a:spcAft>
-                <a:spcPts val="0"/>
-              </a:spcAft>
-            </a:pPr>
-            <a:r>
-              <a:rPr sz="1400">
-                <a:solidFill>
-                  <a:srgbClr val="6D8C97"/>
-                </a:solidFill>
-                <a:latin typeface="Consolas"/>
-              </a:rPr>
-              <a:t>  37  </a:t>
-            </a:r>
-            <a:r>
-              <a:rPr sz="1400">
-                <a:solidFill>
-                  <a:srgbClr val="7FE0A0"/>
-                </a:solidFill>
-                <a:latin typeface="Consolas"/>
-              </a:rPr>
-              <a:t>  console.log('The server offers:', data.data);</a:t>
-            </a:r>
-          </a:p>
-          <a:p>
-            <a:pPr>
-              <a:spcAft>
-                <a:spcPts val="0"/>
-              </a:spcAft>
-            </a:pPr>
-            <a:r>
-              <a:rPr sz="1400">
-                <a:solidFill>
-                  <a:srgbClr val="6D8C97"/>
-                </a:solidFill>
-                <a:latin typeface="Consolas"/>
-              </a:rPr>
-              <a:t>  38  </a:t>
-            </a:r>
-            <a:r>
-              <a:rPr sz="1400">
-                <a:solidFill>
-                  <a:srgbClr val="7FE0A0"/>
-                </a:solidFill>
-                <a:latin typeface="Consolas"/>
-              </a:rPr>
-              <a:t>}</a:t>
-            </a:r>
-          </a:p>
-          <a:p>
-            <a:pPr>
-              <a:spcAft>
-                <a:spcPts val="0"/>
-              </a:spcAft>
-            </a:pPr>
-            <a:r>
-              <a:rPr sz="1400">
-                <a:solidFill>
-                  <a:srgbClr val="6D8C97"/>
-                </a:solidFill>
-                <a:latin typeface="Consolas"/>
-              </a:rPr>
-              <a:t>  39  </a:t>
-            </a:r>
-            <a:r>
-              <a:rPr sz="1400">
-                <a:solidFill>
-                  <a:srgbClr val="7FE0A0"/>
-                </a:solidFill>
-                <a:latin typeface="Consolas"/>
-              </a:rPr>
-              <a:t> </a:t>
-            </a:r>
-          </a:p>
-          <a:p>
-            <a:pPr>
-              <a:spcAft>
-                <a:spcPts val="0"/>
-              </a:spcAft>
-            </a:pPr>
-            <a:r>
-              <a:rPr sz="1400">
-                <a:solidFill>
-                  <a:srgbClr val="6D8C97"/>
-                </a:solidFill>
-                <a:latin typeface="Consolas"/>
-              </a:rPr>
-              <a:t>  40  </a:t>
-            </a:r>
-            <a:r>
-              <a:rPr sz="1400">
-                <a:solidFill>
-                  <a:srgbClr val="7FE0A0"/>
-                </a:solidFill>
-                <a:latin typeface="Consolas"/>
-              </a:rPr>
-              <a:t>listModels();</a:t>
+              </a:rPr>
+              <a:t>The school AI server's address, stored in a variable so you write it once.</a:t>
             </a:r>
           </a:p>
         </p:txBody>
@@ -4525,6 +8548,14 @@
 <file path=ppt/slides/slide7.xml><?xml version="1.0" encoding="utf-8"?>
 <p:sld xmlns:a="http://schemas.openxmlformats.org/drawingml/2006/main" xmlns:p="http://schemas.openxmlformats.org/presentationml/2006/main" xmlns:r="http://schemas.openxmlformats.org/officeDocument/2006/relationships">
   <p:cSld>
+    <p:bg>
+      <p:bgPr>
+        <a:solidFill>
+          <a:srgbClr val="102127"/>
+        </a:solidFill>
+        <a:effectLst/>
+      </p:bgPr>
+    </p:bg>
     <p:spTree>
       <p:nvGrpSpPr>
         <p:cNvPr id="1" name=""/>
@@ -4534,40 +8565,14 @@
       <p:grpSpPr/>
       <p:sp>
         <p:nvSpPr>
-          <p:cNvPr id="2" name="Title 1"/>
-          <p:cNvSpPr>
-            <a:spLocks noGrp="1"/>
-          </p:cNvSpPr>
-          <p:nvPr>
-            <p:ph type="title"/>
-          </p:nvPr>
-        </p:nvSpPr>
-        <p:spPr/>
-        <p:txBody>
-          <a:bodyPr/>
-          <a:lstStyle/>
-          <a:p>
-            <a:r>
-              <a:rPr sz="3800" b="1">
-                <a:solidFill>
-                  <a:srgbClr val="1F2A37"/>
-                </a:solidFill>
-              </a:rPr>
-              <a:t>The internet is slow</a:t>
-            </a:r>
-          </a:p>
-        </p:txBody>
-      </p:sp>
-      <p:sp>
-        <p:nvSpPr>
-          <p:cNvPr id="3" name="TextBox 2"/>
+          <p:cNvPr id="2" name="TextBox 1"/>
           <p:cNvSpPr txBox="1"/>
           <p:nvPr/>
         </p:nvSpPr>
         <p:spPr>
           <a:xfrm>
-            <a:off x="822960" y="1828800"/>
-            <a:ext cx="10515600" cy="4206240"/>
+            <a:off x="502920" y="274320"/>
+            <a:ext cx="11155680" cy="548640"/>
           </a:xfrm>
           <a:prstGeom prst="rect">
             <a:avLst/>
@@ -4575,53 +8580,274 @@
           <a:noFill/>
         </p:spPr>
         <p:txBody>
+          <a:bodyPr wrap="none">
+            <a:spAutoFit/>
+          </a:bodyPr>
+          <a:lstStyle/>
+          <a:p>
+            <a:r>
+              <a:rPr sz="2200" b="1">
+                <a:solidFill>
+                  <a:srgbClr val="01AEFD"/>
+                </a:solidFill>
+              </a:rPr>
+              <a:t>Type this into script.js   -   line 15</a:t>
+            </a:r>
+          </a:p>
+        </p:txBody>
+      </p:sp>
+      <p:sp>
+        <p:nvSpPr>
+          <p:cNvPr id="3" name="TextBox 2"/>
+          <p:cNvSpPr txBox="1"/>
+          <p:nvPr/>
+        </p:nvSpPr>
+        <p:spPr>
+          <a:xfrm>
+            <a:off x="502920" y="960120"/>
+            <a:ext cx="11155680" cy="4297680"/>
+          </a:xfrm>
+          <a:prstGeom prst="rect">
+            <a:avLst/>
+          </a:prstGeom>
+          <a:noFill/>
+        </p:spPr>
+        <p:txBody>
+          <a:bodyPr wrap="none">
+            <a:spAutoFit/>
+          </a:bodyPr>
+          <a:lstStyle/>
+          <a:p>
+            <a:pPr>
+              <a:spcAft>
+                <a:spcPts val="0"/>
+              </a:spcAft>
+            </a:pPr>
+            <a:r>
+              <a:rPr sz="1800">
+                <a:solidFill>
+                  <a:srgbClr val="6D8C97"/>
+                </a:solidFill>
+                <a:latin typeface="Consolas"/>
+              </a:rPr>
+              <a:t>   8  </a:t>
+            </a:r>
+            <a:r>
+              <a:rPr sz="1800">
+                <a:solidFill>
+                  <a:srgbClr val="6D8C97"/>
+                </a:solidFill>
+                <a:latin typeface="Consolas"/>
+              </a:rPr>
+              <a:t> </a:t>
+            </a:r>
+          </a:p>
+          <a:p>
+            <a:pPr>
+              <a:spcAft>
+                <a:spcPts val="0"/>
+              </a:spcAft>
+            </a:pPr>
+            <a:r>
+              <a:rPr sz="1800">
+                <a:solidFill>
+                  <a:srgbClr val="6D8C97"/>
+                </a:solidFill>
+                <a:latin typeface="Consolas"/>
+              </a:rPr>
+              <a:t>   9  </a:t>
+            </a:r>
+            <a:r>
+              <a:rPr sz="1800">
+                <a:solidFill>
+                  <a:srgbClr val="6D8C97"/>
+                </a:solidFill>
+                <a:latin typeface="Consolas"/>
+              </a:rPr>
+              <a:t>// Week 3: where the AI lives, and who you are.</a:t>
+            </a:r>
+          </a:p>
+          <a:p>
+            <a:pPr>
+              <a:spcAft>
+                <a:spcPts val="0"/>
+              </a:spcAft>
+            </a:pPr>
+            <a:r>
+              <a:rPr sz="1800">
+                <a:solidFill>
+                  <a:srgbClr val="6D8C97"/>
+                </a:solidFill>
+                <a:latin typeface="Consolas"/>
+              </a:rPr>
+              <a:t>  10  </a:t>
+            </a:r>
+            <a:r>
+              <a:rPr sz="1800">
+                <a:solidFill>
+                  <a:srgbClr val="6D8C97"/>
+                </a:solidFill>
+                <a:latin typeface="Consolas"/>
+              </a:rPr>
+              <a:t>// The key identifies YOU. Two people using one key share one speed limit.</a:t>
+            </a:r>
+          </a:p>
+          <a:p>
+            <a:pPr>
+              <a:spcAft>
+                <a:spcPts val="0"/>
+              </a:spcAft>
+            </a:pPr>
+            <a:r>
+              <a:rPr sz="1800">
+                <a:solidFill>
+                  <a:srgbClr val="6D8C97"/>
+                </a:solidFill>
+                <a:latin typeface="Consolas"/>
+              </a:rPr>
+              <a:t>  11  </a:t>
+            </a:r>
+            <a:r>
+              <a:rPr sz="1800">
+                <a:solidFill>
+                  <a:srgbClr val="6D8C97"/>
+                </a:solidFill>
+                <a:latin typeface="Consolas"/>
+              </a:rPr>
+              <a:t>//</a:t>
+            </a:r>
+          </a:p>
+          <a:p>
+            <a:pPr>
+              <a:spcAft>
+                <a:spcPts val="0"/>
+              </a:spcAft>
+            </a:pPr>
+            <a:r>
+              <a:rPr sz="1800">
+                <a:solidFill>
+                  <a:srgbClr val="6D8C97"/>
+                </a:solidFill>
+                <a:latin typeface="Consolas"/>
+              </a:rPr>
+              <a:t>  12  </a:t>
+            </a:r>
+            <a:r>
+              <a:rPr sz="1800">
+                <a:solidFill>
+                  <a:srgbClr val="6D8C97"/>
+                </a:solidFill>
+                <a:latin typeface="Consolas"/>
+              </a:rPr>
+              <a:t>// This address only works on the school network. To run this at home you</a:t>
+            </a:r>
+          </a:p>
+          <a:p>
+            <a:pPr>
+              <a:spcAft>
+                <a:spcPts val="0"/>
+              </a:spcAft>
+            </a:pPr>
+            <a:r>
+              <a:rPr sz="1800">
+                <a:solidFill>
+                  <a:srgbClr val="6D8C97"/>
+                </a:solidFill>
+                <a:latin typeface="Consolas"/>
+              </a:rPr>
+              <a:t>  13  </a:t>
+            </a:r>
+            <a:r>
+              <a:rPr sz="1800">
+                <a:solidFill>
+                  <a:srgbClr val="6D8C97"/>
+                </a:solidFill>
+                <a:latin typeface="Consolas"/>
+              </a:rPr>
+              <a:t>// change these two lines and the model names in index.html - nothing else.</a:t>
+            </a:r>
+          </a:p>
+          <a:p>
+            <a:pPr>
+              <a:spcAft>
+                <a:spcPts val="0"/>
+              </a:spcAft>
+            </a:pPr>
+            <a:r>
+              <a:rPr sz="1800">
+                <a:solidFill>
+                  <a:srgbClr val="6D8C97"/>
+                </a:solidFill>
+                <a:latin typeface="Consolas"/>
+              </a:rPr>
+              <a:t>  14  </a:t>
+            </a:r>
+            <a:r>
+              <a:rPr sz="1800">
+                <a:solidFill>
+                  <a:srgbClr val="6D8C97"/>
+                </a:solidFill>
+                <a:latin typeface="Consolas"/>
+              </a:rPr>
+              <a:t>const AI_BASE = 'https://ai.tail5091fc.ts.net';</a:t>
+            </a:r>
+          </a:p>
+          <a:p>
+            <a:pPr>
+              <a:spcAft>
+                <a:spcPts val="0"/>
+              </a:spcAft>
+            </a:pPr>
+            <a:r>
+              <a:rPr sz="1800">
+                <a:solidFill>
+                  <a:srgbClr val="6D8C97"/>
+                </a:solidFill>
+                <a:latin typeface="Consolas"/>
+              </a:rPr>
+              <a:t>  15  </a:t>
+            </a:r>
+            <a:r>
+              <a:rPr sz="1800">
+                <a:solidFill>
+                  <a:srgbClr val="7FE0A0"/>
+                </a:solidFill>
+                <a:latin typeface="Consolas"/>
+              </a:rPr>
+              <a:t>const API_KEY = 'sk-class-put-your-own-key-here';</a:t>
+            </a:r>
+          </a:p>
+        </p:txBody>
+      </p:sp>
+      <p:sp>
+        <p:nvSpPr>
+          <p:cNvPr id="4" name="TextBox 3"/>
+          <p:cNvSpPr txBox="1"/>
+          <p:nvPr/>
+        </p:nvSpPr>
+        <p:spPr>
+          <a:xfrm>
+            <a:off x="548640" y="5623560"/>
+            <a:ext cx="11064240" cy="1051560"/>
+          </a:xfrm>
+          <a:prstGeom prst="rect">
+            <a:avLst/>
+          </a:prstGeom>
+          <a:noFill/>
+        </p:spPr>
+        <p:txBody>
           <a:bodyPr wrap="square">
             <a:spAutoFit/>
           </a:bodyPr>
           <a:lstStyle/>
           <a:p>
-            <a:pPr>
-              <a:spcAft>
-                <a:spcPts val="1400"/>
-              </a:spcAft>
-            </a:pPr>
-            <a:r>
-              <a:rPr sz="2800">
-                <a:solidFill>
-                  <a:srgbClr val="01AEFD"/>
-                </a:solidFill>
-              </a:rPr>
-              <a:t>await = wait here for the answer</a:t>
-            </a:r>
-          </a:p>
-          <a:p>
-            <a:pPr>
-              <a:spcAft>
-                <a:spcPts val="1400"/>
-              </a:spcAft>
-            </a:pPr>
-            <a:r>
-              <a:rPr sz="2400">
-                <a:solidFill>
-                  <a:srgbClr val="1F2A37"/>
-                </a:solidFill>
-              </a:rPr>
-              <a:t>• Without await you carry on with nothing</a:t>
-            </a:r>
-          </a:p>
-          <a:p>
-            <a:pPr>
-              <a:spcAft>
-                <a:spcPts val="1400"/>
-              </a:spcAft>
-            </a:pPr>
-            <a:r>
-              <a:rPr sz="2400">
-                <a:solidFill>
-                  <a:srgbClr val="1F2A37"/>
-                </a:solidFill>
-              </a:rPr>
-              <a:t>• async marks a function that can be waited for</a:t>
+            <a:r>
+              <a:rPr sz="2000">
+                <a:solidFill>
+                  <a:srgbClr val="DCECEF"/>
+                </a:solidFill>
+              </a:rPr>
+              <a:t>Your key. It is a placeholder now - later you paste your own real one here.</a:t>
             </a:r>
           </a:p>
         </p:txBody>
@@ -4637,6 +8863,14 @@
 <file path=ppt/slides/slide8.xml><?xml version="1.0" encoding="utf-8"?>
 <p:sld xmlns:a="http://schemas.openxmlformats.org/drawingml/2006/main" xmlns:p="http://schemas.openxmlformats.org/presentationml/2006/main" xmlns:r="http://schemas.openxmlformats.org/officeDocument/2006/relationships">
   <p:cSld>
+    <p:bg>
+      <p:bgPr>
+        <a:solidFill>
+          <a:srgbClr val="102127"/>
+        </a:solidFill>
+        <a:effectLst/>
+      </p:bgPr>
+    </p:bg>
     <p:spTree>
       <p:nvGrpSpPr>
         <p:cNvPr id="1" name=""/>
@@ -4646,40 +8880,14 @@
       <p:grpSpPr/>
       <p:sp>
         <p:nvSpPr>
-          <p:cNvPr id="2" name="Title 1"/>
-          <p:cNvSpPr>
-            <a:spLocks noGrp="1"/>
-          </p:cNvSpPr>
-          <p:nvPr>
-            <p:ph type="title"/>
-          </p:nvPr>
-        </p:nvSpPr>
-        <p:spPr/>
-        <p:txBody>
-          <a:bodyPr/>
-          <a:lstStyle/>
-          <a:p>
-            <a:r>
-              <a:rPr sz="3800" b="1">
-                <a:solidFill>
-                  <a:srgbClr val="1F2A37"/>
-                </a:solidFill>
-              </a:rPr>
-              <a:t>This address only works at school</a:t>
-            </a:r>
-          </a:p>
-        </p:txBody>
-      </p:sp>
-      <p:sp>
-        <p:nvSpPr>
-          <p:cNvPr id="3" name="TextBox 2"/>
+          <p:cNvPr id="2" name="TextBox 1"/>
           <p:cNvSpPr txBox="1"/>
           <p:nvPr/>
         </p:nvSpPr>
         <p:spPr>
           <a:xfrm>
-            <a:off x="822960" y="1828800"/>
-            <a:ext cx="10515600" cy="4206240"/>
+            <a:off x="502920" y="274320"/>
+            <a:ext cx="11155680" cy="548640"/>
           </a:xfrm>
           <a:prstGeom prst="rect">
             <a:avLst/>
@@ -4687,53 +8895,274 @@
           <a:noFill/>
         </p:spPr>
         <p:txBody>
+          <a:bodyPr wrap="none">
+            <a:spAutoFit/>
+          </a:bodyPr>
+          <a:lstStyle/>
+          <a:p>
+            <a:r>
+              <a:rPr sz="2200" b="1">
+                <a:solidFill>
+                  <a:srgbClr val="01AEFD"/>
+                </a:solidFill>
+              </a:rPr>
+              <a:t>All together in script.js</a:t>
+            </a:r>
+          </a:p>
+        </p:txBody>
+      </p:sp>
+      <p:sp>
+        <p:nvSpPr>
+          <p:cNvPr id="3" name="TextBox 2"/>
+          <p:cNvSpPr txBox="1"/>
+          <p:nvPr/>
+        </p:nvSpPr>
+        <p:spPr>
+          <a:xfrm>
+            <a:off x="502920" y="960120"/>
+            <a:ext cx="11155680" cy="4297680"/>
+          </a:xfrm>
+          <a:prstGeom prst="rect">
+            <a:avLst/>
+          </a:prstGeom>
+          <a:noFill/>
+        </p:spPr>
+        <p:txBody>
+          <a:bodyPr wrap="none">
+            <a:spAutoFit/>
+          </a:bodyPr>
+          <a:lstStyle/>
+          <a:p>
+            <a:pPr>
+              <a:spcAft>
+                <a:spcPts val="0"/>
+              </a:spcAft>
+            </a:pPr>
+            <a:r>
+              <a:rPr sz="1800">
+                <a:solidFill>
+                  <a:srgbClr val="6D8C97"/>
+                </a:solidFill>
+                <a:latin typeface="Consolas"/>
+              </a:rPr>
+              <a:t>   8  </a:t>
+            </a:r>
+            <a:r>
+              <a:rPr sz="1800">
+                <a:solidFill>
+                  <a:srgbClr val="7FE0A0"/>
+                </a:solidFill>
+                <a:latin typeface="Consolas"/>
+              </a:rPr>
+              <a:t> </a:t>
+            </a:r>
+          </a:p>
+          <a:p>
+            <a:pPr>
+              <a:spcAft>
+                <a:spcPts val="0"/>
+              </a:spcAft>
+            </a:pPr>
+            <a:r>
+              <a:rPr sz="1800">
+                <a:solidFill>
+                  <a:srgbClr val="6D8C97"/>
+                </a:solidFill>
+                <a:latin typeface="Consolas"/>
+              </a:rPr>
+              <a:t>   9  </a:t>
+            </a:r>
+            <a:r>
+              <a:rPr sz="1800">
+                <a:solidFill>
+                  <a:srgbClr val="7FE0A0"/>
+                </a:solidFill>
+                <a:latin typeface="Consolas"/>
+              </a:rPr>
+              <a:t>// Week 3: where the AI lives, and who you are.</a:t>
+            </a:r>
+          </a:p>
+          <a:p>
+            <a:pPr>
+              <a:spcAft>
+                <a:spcPts val="0"/>
+              </a:spcAft>
+            </a:pPr>
+            <a:r>
+              <a:rPr sz="1800">
+                <a:solidFill>
+                  <a:srgbClr val="6D8C97"/>
+                </a:solidFill>
+                <a:latin typeface="Consolas"/>
+              </a:rPr>
+              <a:t>  10  </a:t>
+            </a:r>
+            <a:r>
+              <a:rPr sz="1800">
+                <a:solidFill>
+                  <a:srgbClr val="7FE0A0"/>
+                </a:solidFill>
+                <a:latin typeface="Consolas"/>
+              </a:rPr>
+              <a:t>// The key identifies YOU. Two people using one key share one speed limit.</a:t>
+            </a:r>
+          </a:p>
+          <a:p>
+            <a:pPr>
+              <a:spcAft>
+                <a:spcPts val="0"/>
+              </a:spcAft>
+            </a:pPr>
+            <a:r>
+              <a:rPr sz="1800">
+                <a:solidFill>
+                  <a:srgbClr val="6D8C97"/>
+                </a:solidFill>
+                <a:latin typeface="Consolas"/>
+              </a:rPr>
+              <a:t>  11  </a:t>
+            </a:r>
+            <a:r>
+              <a:rPr sz="1800">
+                <a:solidFill>
+                  <a:srgbClr val="7FE0A0"/>
+                </a:solidFill>
+                <a:latin typeface="Consolas"/>
+              </a:rPr>
+              <a:t>//</a:t>
+            </a:r>
+          </a:p>
+          <a:p>
+            <a:pPr>
+              <a:spcAft>
+                <a:spcPts val="0"/>
+              </a:spcAft>
+            </a:pPr>
+            <a:r>
+              <a:rPr sz="1800">
+                <a:solidFill>
+                  <a:srgbClr val="6D8C97"/>
+                </a:solidFill>
+                <a:latin typeface="Consolas"/>
+              </a:rPr>
+              <a:t>  12  </a:t>
+            </a:r>
+            <a:r>
+              <a:rPr sz="1800">
+                <a:solidFill>
+                  <a:srgbClr val="7FE0A0"/>
+                </a:solidFill>
+                <a:latin typeface="Consolas"/>
+              </a:rPr>
+              <a:t>// This address only works on the school network. To run this at home you</a:t>
+            </a:r>
+          </a:p>
+          <a:p>
+            <a:pPr>
+              <a:spcAft>
+                <a:spcPts val="0"/>
+              </a:spcAft>
+            </a:pPr>
+            <a:r>
+              <a:rPr sz="1800">
+                <a:solidFill>
+                  <a:srgbClr val="6D8C97"/>
+                </a:solidFill>
+                <a:latin typeface="Consolas"/>
+              </a:rPr>
+              <a:t>  13  </a:t>
+            </a:r>
+            <a:r>
+              <a:rPr sz="1800">
+                <a:solidFill>
+                  <a:srgbClr val="7FE0A0"/>
+                </a:solidFill>
+                <a:latin typeface="Consolas"/>
+              </a:rPr>
+              <a:t>// change these two lines and the model names in index.html - nothing else.</a:t>
+            </a:r>
+          </a:p>
+          <a:p>
+            <a:pPr>
+              <a:spcAft>
+                <a:spcPts val="0"/>
+              </a:spcAft>
+            </a:pPr>
+            <a:r>
+              <a:rPr sz="1800">
+                <a:solidFill>
+                  <a:srgbClr val="6D8C97"/>
+                </a:solidFill>
+                <a:latin typeface="Consolas"/>
+              </a:rPr>
+              <a:t>  14  </a:t>
+            </a:r>
+            <a:r>
+              <a:rPr sz="1800">
+                <a:solidFill>
+                  <a:srgbClr val="7FE0A0"/>
+                </a:solidFill>
+                <a:latin typeface="Consolas"/>
+              </a:rPr>
+              <a:t>const AI_BASE = 'https://ai.tail5091fc.ts.net';</a:t>
+            </a:r>
+          </a:p>
+          <a:p>
+            <a:pPr>
+              <a:spcAft>
+                <a:spcPts val="0"/>
+              </a:spcAft>
+            </a:pPr>
+            <a:r>
+              <a:rPr sz="1800">
+                <a:solidFill>
+                  <a:srgbClr val="6D8C97"/>
+                </a:solidFill>
+                <a:latin typeface="Consolas"/>
+              </a:rPr>
+              <a:t>  15  </a:t>
+            </a:r>
+            <a:r>
+              <a:rPr sz="1800">
+                <a:solidFill>
+                  <a:srgbClr val="7FE0A0"/>
+                </a:solidFill>
+                <a:latin typeface="Consolas"/>
+              </a:rPr>
+              <a:t>const API_KEY = 'sk-class-put-your-own-key-here';</a:t>
+            </a:r>
+          </a:p>
+        </p:txBody>
+      </p:sp>
+      <p:sp>
+        <p:nvSpPr>
+          <p:cNvPr id="4" name="TextBox 3"/>
+          <p:cNvSpPr txBox="1"/>
+          <p:nvPr/>
+        </p:nvSpPr>
+        <p:spPr>
+          <a:xfrm>
+            <a:off x="548640" y="5623560"/>
+            <a:ext cx="11064240" cy="1051560"/>
+          </a:xfrm>
+          <a:prstGeom prst="rect">
+            <a:avLst/>
+          </a:prstGeom>
+          <a:noFill/>
+        </p:spPr>
+        <p:txBody>
           <a:bodyPr wrap="square">
             <a:spAutoFit/>
           </a:bodyPr>
           <a:lstStyle/>
           <a:p>
-            <a:pPr>
-              <a:spcAft>
-                <a:spcPts val="1400"/>
-              </a:spcAft>
-            </a:pPr>
-            <a:r>
-              <a:rPr sz="2400">
-                <a:solidFill>
-                  <a:srgbClr val="1F2A37"/>
-                </a:solidFill>
-              </a:rPr>
-              <a:t>• That machine is in this building</a:t>
-            </a:r>
-          </a:p>
-          <a:p>
-            <a:pPr>
-              <a:spcAft>
-                <a:spcPts val="1400"/>
-              </a:spcAft>
-            </a:pPr>
-            <a:r>
-              <a:rPr sz="2400">
-                <a:solidFill>
-                  <a:srgbClr val="1F2A37"/>
-                </a:solidFill>
-              </a:rPr>
-              <a:t>• At home it will not connect - that is expected</a:t>
-            </a:r>
-          </a:p>
-          <a:p>
-            <a:pPr>
-              <a:spcAft>
-                <a:spcPts val="1400"/>
-              </a:spcAft>
-            </a:pPr>
-            <a:r>
-              <a:rPr sz="2400">
-                <a:solidFill>
-                  <a:srgbClr val="1F2A37"/>
-                </a:solidFill>
-              </a:rPr>
-              <a:t>• But the code is not throwaway</a:t>
+            <a:r>
+              <a:rPr sz="2000">
+                <a:solidFill>
+                  <a:srgbClr val="DCECEF"/>
+                </a:solidFill>
+              </a:rPr>
+              <a:t>That is the whole piece. Check yours looks the same before moving on.</a:t>
             </a:r>
           </a:p>
         </p:txBody>
@@ -4777,7 +9206,7 @@
                   <a:srgbClr val="1F2A37"/>
                 </a:solidFill>
               </a:rPr>
-              <a:t>Same format as OpenAI</a:t>
+              <a:t>An API is a front desk</a:t>
             </a:r>
           </a:p>
         </p:txBody>
@@ -4810,12 +9239,12 @@
               </a:spcAft>
             </a:pPr>
             <a:r>
-              <a:rPr sz="2800">
-                <a:solidFill>
-                  <a:srgbClr val="01AEFD"/>
-                </a:solidFill>
-              </a:rPr>
-              <a:t>On purpose</a:t>
+              <a:rPr sz="2400">
+                <a:solidFill>
+                  <a:srgbClr val="1F2A37"/>
+                </a:solidFill>
+              </a:rPr>
+              <a:t>• You never go in the kitchen</a:t>
             </a:r>
           </a:p>
           <a:p>
@@ -4830,7 +9259,7 @@
                   <a:srgbClr val="1F2A37"/>
                 </a:solidFill>
               </a:rPr>
-              <a:t>• Got your own OpenAI key? Change AI_BASE</a:t>
+              <a:t>• You ask in the way they expect</a:t>
             </a:r>
           </a:p>
           <a:p>
@@ -4845,37 +9274,7 @@
                   <a:srgbClr val="1F2A37"/>
                 </a:solidFill>
               </a:rPr>
-              <a:t>• Change API_KEY</a:t>
-            </a:r>
-          </a:p>
-          <a:p>
-            <a:pPr>
-              <a:spcAft>
-                <a:spcPts val="1400"/>
-              </a:spcAft>
-            </a:pPr>
-            <a:r>
-              <a:rPr sz="2400">
-                <a:solidFill>
-                  <a:srgbClr val="1F2A37"/>
-                </a:solidFill>
-              </a:rPr>
-              <a:t>• Change the two model names in index.html</a:t>
-            </a:r>
-          </a:p>
-          <a:p>
-            <a:pPr>
-              <a:spcAft>
-                <a:spcPts val="1400"/>
-              </a:spcAft>
-            </a:pPr>
-            <a:r>
-              <a:rPr sz="2400">
-                <a:solidFill>
-                  <a:srgbClr val="1F2A37"/>
-                </a:solidFill>
-              </a:rPr>
-              <a:t>• Nothing else moves</a:t>
+              <a:t>• The answer comes back in a shape you can rely on</a:t>
             </a:r>
           </a:p>
         </p:txBody>

--- a/ai101/slides/week-03.pptx
+++ b/ai101/slides/week-03.pptx
@@ -35,6 +35,7 @@
     <p:sldId id="283" r:id="rId34"/>
     <p:sldId id="284" r:id="rId35"/>
     <p:sldId id="285" r:id="rId36"/>
+    <p:sldId id="286" r:id="rId37"/>
   </p:sldIdLst>
   <p:sldSz cx="12191695" cy="6858000" type="screen4x3"/>
   <p:notesSz cx="6858000" cy="9144000"/>
@@ -4284,14 +4285,6 @@
 <file path=ppt/slides/slide17.xml><?xml version="1.0" encoding="utf-8"?>
 <p:sld xmlns:a="http://schemas.openxmlformats.org/drawingml/2006/main" xmlns:p="http://schemas.openxmlformats.org/presentationml/2006/main" xmlns:r="http://schemas.openxmlformats.org/officeDocument/2006/relationships">
   <p:cSld>
-    <p:bg>
-      <p:bgPr>
-        <a:solidFill>
-          <a:srgbClr val="102127"/>
-        </a:solidFill>
-        <a:effectLst/>
-      </p:bgPr>
-    </p:bg>
     <p:spTree>
       <p:nvGrpSpPr>
         <p:cNvPr id="1" name=""/>
@@ -4301,14 +4294,40 @@
       <p:grpSpPr/>
       <p:sp>
         <p:nvSpPr>
-          <p:cNvPr id="2" name="TextBox 1"/>
+          <p:cNvPr id="2" name="Title 1"/>
+          <p:cNvSpPr>
+            <a:spLocks noGrp="1"/>
+          </p:cNvSpPr>
+          <p:nvPr>
+            <p:ph type="title"/>
+          </p:nvPr>
+        </p:nvSpPr>
+        <p:spPr/>
+        <p:txBody>
+          <a:bodyPr/>
+          <a:lstStyle/>
+          <a:p>
+            <a:r>
+              <a:rPr sz="3800" b="1">
+                <a:solidFill>
+                  <a:srgbClr val="1F2A37"/>
+                </a:solidFill>
+              </a:rPr>
+              <a:t>Objects: { }</a:t>
+            </a:r>
+          </a:p>
+        </p:txBody>
+      </p:sp>
+      <p:sp>
+        <p:nvSpPr>
+          <p:cNvPr id="3" name="TextBox 2"/>
           <p:cNvSpPr txBox="1"/>
           <p:nvPr/>
         </p:nvSpPr>
         <p:spPr>
           <a:xfrm>
-            <a:off x="502920" y="274320"/>
-            <a:ext cx="11155680" cy="548640"/>
+            <a:off x="868680" y="502920"/>
+            <a:ext cx="5486400" cy="457200"/>
           </a:xfrm>
           <a:prstGeom prst="rect">
             <a:avLst/>
@@ -4322,26 +4341,26 @@
           <a:lstStyle/>
           <a:p>
             <a:r>
-              <a:rPr sz="2200" b="1">
+              <a:rPr sz="1500" b="1">
                 <a:solidFill>
                   <a:srgbClr val="01AEFD"/>
                 </a:solidFill>
               </a:rPr>
-              <a:t>Type this into script.js   -   line 34</a:t>
-            </a:r>
-          </a:p>
-        </p:txBody>
-      </p:sp>
-      <p:sp>
-        <p:nvSpPr>
-          <p:cNvPr id="3" name="TextBox 2"/>
+              <a:t>JAVASCRIPT</a:t>
+            </a:r>
+          </a:p>
+        </p:txBody>
+      </p:sp>
+      <p:sp>
+        <p:nvSpPr>
+          <p:cNvPr id="4" name="TextBox 3"/>
           <p:cNvSpPr txBox="1"/>
           <p:nvPr/>
         </p:nvSpPr>
         <p:spPr>
           <a:xfrm>
-            <a:off x="502920" y="960120"/>
-            <a:ext cx="11155680" cy="4297680"/>
+            <a:off x="822960" y="1828800"/>
+            <a:ext cx="10515600" cy="4206240"/>
           </a:xfrm>
           <a:prstGeom prst="rect">
             <a:avLst/>
@@ -4349,191 +4368,38 @@
           <a:noFill/>
         </p:spPr>
         <p:txBody>
-          <a:bodyPr wrap="none">
-            <a:spAutoFit/>
-          </a:bodyPr>
-          <a:lstStyle/>
-          <a:p>
-            <a:pPr>
-              <a:spcAft>
-                <a:spcPts val="0"/>
-              </a:spcAft>
-            </a:pPr>
-            <a:r>
-              <a:rPr sz="1800">
-                <a:solidFill>
-                  <a:srgbClr val="6D8C97"/>
-                </a:solidFill>
-                <a:latin typeface="Consolas"/>
-              </a:rPr>
-              <a:t>  29  </a:t>
-            </a:r>
-            <a:r>
-              <a:rPr sz="1800">
-                <a:solidFill>
-                  <a:srgbClr val="6D8C97"/>
-                </a:solidFill>
-                <a:latin typeface="Consolas"/>
-              </a:rPr>
-              <a:t> </a:t>
-            </a:r>
-          </a:p>
-          <a:p>
-            <a:pPr>
-              <a:spcAft>
-                <a:spcPts val="0"/>
-              </a:spcAft>
-            </a:pPr>
-            <a:r>
-              <a:rPr sz="1800">
-                <a:solidFill>
-                  <a:srgbClr val="6D8C97"/>
-                </a:solidFill>
-                <a:latin typeface="Consolas"/>
-              </a:rPr>
-              <a:t>  30  </a:t>
-            </a:r>
-            <a:r>
-              <a:rPr sz="1800">
-                <a:solidFill>
-                  <a:srgbClr val="6D8C97"/>
-                </a:solidFill>
-                <a:latin typeface="Consolas"/>
-              </a:rPr>
-              <a:t>// The smallest useful request: what models does this server have?</a:t>
-            </a:r>
-          </a:p>
-          <a:p>
-            <a:pPr>
-              <a:spcAft>
-                <a:spcPts val="0"/>
-              </a:spcAft>
-            </a:pPr>
-            <a:r>
-              <a:rPr sz="1800">
-                <a:solidFill>
-                  <a:srgbClr val="6D8C97"/>
-                </a:solidFill>
-                <a:latin typeface="Consolas"/>
-              </a:rPr>
-              <a:t>  31  </a:t>
-            </a:r>
-            <a:r>
-              <a:rPr sz="1800">
-                <a:solidFill>
-                  <a:srgbClr val="6D8C97"/>
-                </a:solidFill>
-                <a:latin typeface="Consolas"/>
-              </a:rPr>
-              <a:t>// 'async' means this function does something slow and can be waited for.</a:t>
-            </a:r>
-          </a:p>
-          <a:p>
-            <a:pPr>
-              <a:spcAft>
-                <a:spcPts val="0"/>
-              </a:spcAft>
-            </a:pPr>
-            <a:r>
-              <a:rPr sz="1800">
-                <a:solidFill>
-                  <a:srgbClr val="6D8C97"/>
-                </a:solidFill>
-                <a:latin typeface="Consolas"/>
-              </a:rPr>
-              <a:t>  32  </a:t>
-            </a:r>
-            <a:r>
-              <a:rPr sz="1800">
-                <a:solidFill>
-                  <a:srgbClr val="6D8C97"/>
-                </a:solidFill>
-                <a:latin typeface="Consolas"/>
-              </a:rPr>
-              <a:t>async function listModels() {</a:t>
-            </a:r>
-          </a:p>
-          <a:p>
-            <a:pPr>
-              <a:spcAft>
-                <a:spcPts val="0"/>
-              </a:spcAft>
-            </a:pPr>
-            <a:r>
-              <a:rPr sz="1800">
-                <a:solidFill>
-                  <a:srgbClr val="6D8C97"/>
-                </a:solidFill>
-                <a:latin typeface="Consolas"/>
-              </a:rPr>
-              <a:t>  33  </a:t>
-            </a:r>
-            <a:r>
-              <a:rPr sz="1800">
-                <a:solidFill>
-                  <a:srgbClr val="6D8C97"/>
-                </a:solidFill>
-                <a:latin typeface="Consolas"/>
-              </a:rPr>
-              <a:t>  const res = await fetch(AI_BASE + '/v1/models', {</a:t>
-            </a:r>
-          </a:p>
-          <a:p>
-            <a:pPr>
-              <a:spcAft>
-                <a:spcPts val="0"/>
-              </a:spcAft>
-            </a:pPr>
-            <a:r>
-              <a:rPr sz="1800">
-                <a:solidFill>
-                  <a:srgbClr val="6D8C97"/>
-                </a:solidFill>
-                <a:latin typeface="Consolas"/>
-              </a:rPr>
-              <a:t>  34  </a:t>
-            </a:r>
-            <a:r>
-              <a:rPr sz="1800">
-                <a:solidFill>
-                  <a:srgbClr val="7FE0A0"/>
-                </a:solidFill>
-                <a:latin typeface="Consolas"/>
-              </a:rPr>
-              <a:t>    headers: { 'Authorization': 'Bearer ' + API_KEY }</a:t>
-            </a:r>
-          </a:p>
-        </p:txBody>
-      </p:sp>
-      <p:sp>
-        <p:nvSpPr>
-          <p:cNvPr id="4" name="TextBox 3"/>
-          <p:cNvSpPr txBox="1"/>
-          <p:nvPr/>
-        </p:nvSpPr>
-        <p:spPr>
-          <a:xfrm>
-            <a:off x="548640" y="5623560"/>
-            <a:ext cx="11064240" cy="1051560"/>
-          </a:xfrm>
-          <a:prstGeom prst="rect">
-            <a:avLst/>
-          </a:prstGeom>
-          <a:noFill/>
-        </p:spPr>
-        <p:txBody>
           <a:bodyPr wrap="square">
             <a:spAutoFit/>
           </a:bodyPr>
           <a:lstStyle/>
           <a:p>
-            <a:r>
-              <a:rPr sz="2000">
-                <a:solidFill>
-                  <a:srgbClr val="DCECEF"/>
-                </a:solidFill>
-              </a:rPr>
-              <a:t>The header proves who you are by sending your key as a Bearer token.</a:t>
+            <a:pPr>
+              <a:spcAft>
+                <a:spcPts val="1400"/>
+              </a:spcAft>
+            </a:pPr>
+            <a:r>
+              <a:rPr sz="2400">
+                <a:solidFill>
+                  <a:srgbClr val="1F2A37"/>
+                </a:solidFill>
+              </a:rPr>
+              <a:t>• A bundle of labelled values: { role: 'user', content: '...' }.</a:t>
+            </a:r>
+          </a:p>
+          <a:p>
+            <a:pPr>
+              <a:spcAft>
+                <a:spcPts val="1400"/>
+              </a:spcAft>
+            </a:pPr>
+            <a:r>
+              <a:rPr sz="2400">
+                <a:solidFill>
+                  <a:srgbClr val="1F2A37"/>
+                </a:solidFill>
+              </a:rPr>
+              <a:t>• Each label (a key) points to a value.</a:t>
             </a:r>
           </a:p>
         </p:txBody>
@@ -4592,7 +4458,7 @@
                   <a:srgbClr val="01AEFD"/>
                 </a:solidFill>
               </a:rPr>
-              <a:t>Type this into script.js   -   line 35</a:t>
+              <a:t>Type this into script.js   -   line 34</a:t>
             </a:r>
           </a:p>
         </p:txBody>
@@ -4761,36 +4627,11 @@
             <a:r>
               <a:rPr sz="1800">
                 <a:solidFill>
-                  <a:srgbClr val="6D8C97"/>
+                  <a:srgbClr val="7FE0A0"/>
                 </a:solidFill>
                 <a:latin typeface="Consolas"/>
               </a:rPr>
               <a:t>    headers: { 'Authorization': 'Bearer ' + API_KEY }</a:t>
-            </a:r>
-          </a:p>
-          <a:p>
-            <a:pPr>
-              <a:spcAft>
-                <a:spcPts val="0"/>
-              </a:spcAft>
-            </a:pPr>
-            <a:r>
-              <a:rPr sz="1800">
-                <a:solidFill>
-                  <a:srgbClr val="6D8C97"/>
-                </a:solidFill>
-                <a:latin typeface="Consolas"/>
-              </a:rPr>
-              <a:t>  35  </a:t>
-            </a:r>
-            <a:r>
-              <a:rPr sz="1800">
-                <a:solidFill>
-                  <a:srgbClr val="7FE0A0"/>
-                </a:solidFill>
-                <a:latin typeface="Consolas"/>
-              </a:rPr>
-              <a:t>  });</a:t>
             </a:r>
           </a:p>
         </p:txBody>
@@ -4823,7 +4664,7 @@
                   <a:srgbClr val="DCECEF"/>
                 </a:solidFill>
               </a:rPr>
-              <a:t>Closes the fetch call.</a:t>
+              <a:t>The header proves who you are by sending your key as a Bearer token.</a:t>
             </a:r>
           </a:p>
         </p:txBody>
@@ -4839,6 +4680,14 @@
 <file path=ppt/slides/slide19.xml><?xml version="1.0" encoding="utf-8"?>
 <p:sld xmlns:a="http://schemas.openxmlformats.org/drawingml/2006/main" xmlns:p="http://schemas.openxmlformats.org/presentationml/2006/main" xmlns:r="http://schemas.openxmlformats.org/officeDocument/2006/relationships">
   <p:cSld>
+    <p:bg>
+      <p:bgPr>
+        <a:solidFill>
+          <a:srgbClr val="102127"/>
+        </a:solidFill>
+        <a:effectLst/>
+      </p:bgPr>
+    </p:bg>
     <p:spTree>
       <p:nvGrpSpPr>
         <p:cNvPr id="1" name=""/>
@@ -4848,40 +4697,14 @@
       <p:grpSpPr/>
       <p:sp>
         <p:nvSpPr>
-          <p:cNvPr id="2" name="Title 1"/>
-          <p:cNvSpPr>
-            <a:spLocks noGrp="1"/>
-          </p:cNvSpPr>
-          <p:nvPr>
-            <p:ph type="title"/>
-          </p:nvPr>
-        </p:nvSpPr>
-        <p:spPr/>
-        <p:txBody>
-          <a:bodyPr/>
-          <a:lstStyle/>
-          <a:p>
-            <a:r>
-              <a:rPr sz="3800" b="1">
-                <a:solidFill>
-                  <a:srgbClr val="1F2A37"/>
-                </a:solidFill>
-              </a:rPr>
-              <a:t>res.json()</a:t>
-            </a:r>
-          </a:p>
-        </p:txBody>
-      </p:sp>
-      <p:sp>
-        <p:nvSpPr>
-          <p:cNvPr id="3" name="TextBox 2"/>
+          <p:cNvPr id="2" name="TextBox 1"/>
           <p:cNvSpPr txBox="1"/>
           <p:nvPr/>
         </p:nvSpPr>
         <p:spPr>
           <a:xfrm>
-            <a:off x="868680" y="502920"/>
-            <a:ext cx="5486400" cy="457200"/>
+            <a:off x="502920" y="274320"/>
+            <a:ext cx="11155680" cy="548640"/>
           </a:xfrm>
           <a:prstGeom prst="rect">
             <a:avLst/>
@@ -4895,26 +4718,26 @@
           <a:lstStyle/>
           <a:p>
             <a:r>
-              <a:rPr sz="1500" b="1">
+              <a:rPr sz="2200" b="1">
                 <a:solidFill>
                   <a:srgbClr val="01AEFD"/>
                 </a:solidFill>
               </a:rPr>
-              <a:t>JAVASCRIPT</a:t>
-            </a:r>
-          </a:p>
-        </p:txBody>
-      </p:sp>
-      <p:sp>
-        <p:nvSpPr>
-          <p:cNvPr id="4" name="TextBox 3"/>
+              <a:t>Type this into script.js   -   line 35</a:t>
+            </a:r>
+          </a:p>
+        </p:txBody>
+      </p:sp>
+      <p:sp>
+        <p:nvSpPr>
+          <p:cNvPr id="3" name="TextBox 2"/>
           <p:cNvSpPr txBox="1"/>
           <p:nvPr/>
         </p:nvSpPr>
         <p:spPr>
           <a:xfrm>
-            <a:off x="822960" y="1828800"/>
-            <a:ext cx="10515600" cy="4206240"/>
+            <a:off x="502920" y="960120"/>
+            <a:ext cx="11155680" cy="4297680"/>
           </a:xfrm>
           <a:prstGeom prst="rect">
             <a:avLst/>
@@ -4922,38 +4745,216 @@
           <a:noFill/>
         </p:spPr>
         <p:txBody>
+          <a:bodyPr wrap="none">
+            <a:spAutoFit/>
+          </a:bodyPr>
+          <a:lstStyle/>
+          <a:p>
+            <a:pPr>
+              <a:spcAft>
+                <a:spcPts val="0"/>
+              </a:spcAft>
+            </a:pPr>
+            <a:r>
+              <a:rPr sz="1800">
+                <a:solidFill>
+                  <a:srgbClr val="6D8C97"/>
+                </a:solidFill>
+                <a:latin typeface="Consolas"/>
+              </a:rPr>
+              <a:t>  29  </a:t>
+            </a:r>
+            <a:r>
+              <a:rPr sz="1800">
+                <a:solidFill>
+                  <a:srgbClr val="6D8C97"/>
+                </a:solidFill>
+                <a:latin typeface="Consolas"/>
+              </a:rPr>
+              <a:t> </a:t>
+            </a:r>
+          </a:p>
+          <a:p>
+            <a:pPr>
+              <a:spcAft>
+                <a:spcPts val="0"/>
+              </a:spcAft>
+            </a:pPr>
+            <a:r>
+              <a:rPr sz="1800">
+                <a:solidFill>
+                  <a:srgbClr val="6D8C97"/>
+                </a:solidFill>
+                <a:latin typeface="Consolas"/>
+              </a:rPr>
+              <a:t>  30  </a:t>
+            </a:r>
+            <a:r>
+              <a:rPr sz="1800">
+                <a:solidFill>
+                  <a:srgbClr val="6D8C97"/>
+                </a:solidFill>
+                <a:latin typeface="Consolas"/>
+              </a:rPr>
+              <a:t>// The smallest useful request: what models does this server have?</a:t>
+            </a:r>
+          </a:p>
+          <a:p>
+            <a:pPr>
+              <a:spcAft>
+                <a:spcPts val="0"/>
+              </a:spcAft>
+            </a:pPr>
+            <a:r>
+              <a:rPr sz="1800">
+                <a:solidFill>
+                  <a:srgbClr val="6D8C97"/>
+                </a:solidFill>
+                <a:latin typeface="Consolas"/>
+              </a:rPr>
+              <a:t>  31  </a:t>
+            </a:r>
+            <a:r>
+              <a:rPr sz="1800">
+                <a:solidFill>
+                  <a:srgbClr val="6D8C97"/>
+                </a:solidFill>
+                <a:latin typeface="Consolas"/>
+              </a:rPr>
+              <a:t>// 'async' means this function does something slow and can be waited for.</a:t>
+            </a:r>
+          </a:p>
+          <a:p>
+            <a:pPr>
+              <a:spcAft>
+                <a:spcPts val="0"/>
+              </a:spcAft>
+            </a:pPr>
+            <a:r>
+              <a:rPr sz="1800">
+                <a:solidFill>
+                  <a:srgbClr val="6D8C97"/>
+                </a:solidFill>
+                <a:latin typeface="Consolas"/>
+              </a:rPr>
+              <a:t>  32  </a:t>
+            </a:r>
+            <a:r>
+              <a:rPr sz="1800">
+                <a:solidFill>
+                  <a:srgbClr val="6D8C97"/>
+                </a:solidFill>
+                <a:latin typeface="Consolas"/>
+              </a:rPr>
+              <a:t>async function listModels() {</a:t>
+            </a:r>
+          </a:p>
+          <a:p>
+            <a:pPr>
+              <a:spcAft>
+                <a:spcPts val="0"/>
+              </a:spcAft>
+            </a:pPr>
+            <a:r>
+              <a:rPr sz="1800">
+                <a:solidFill>
+                  <a:srgbClr val="6D8C97"/>
+                </a:solidFill>
+                <a:latin typeface="Consolas"/>
+              </a:rPr>
+              <a:t>  33  </a:t>
+            </a:r>
+            <a:r>
+              <a:rPr sz="1800">
+                <a:solidFill>
+                  <a:srgbClr val="6D8C97"/>
+                </a:solidFill>
+                <a:latin typeface="Consolas"/>
+              </a:rPr>
+              <a:t>  const res = await fetch(AI_BASE + '/v1/models', {</a:t>
+            </a:r>
+          </a:p>
+          <a:p>
+            <a:pPr>
+              <a:spcAft>
+                <a:spcPts val="0"/>
+              </a:spcAft>
+            </a:pPr>
+            <a:r>
+              <a:rPr sz="1800">
+                <a:solidFill>
+                  <a:srgbClr val="6D8C97"/>
+                </a:solidFill>
+                <a:latin typeface="Consolas"/>
+              </a:rPr>
+              <a:t>  34  </a:t>
+            </a:r>
+            <a:r>
+              <a:rPr sz="1800">
+                <a:solidFill>
+                  <a:srgbClr val="6D8C97"/>
+                </a:solidFill>
+                <a:latin typeface="Consolas"/>
+              </a:rPr>
+              <a:t>    headers: { 'Authorization': 'Bearer ' + API_KEY }</a:t>
+            </a:r>
+          </a:p>
+          <a:p>
+            <a:pPr>
+              <a:spcAft>
+                <a:spcPts val="0"/>
+              </a:spcAft>
+            </a:pPr>
+            <a:r>
+              <a:rPr sz="1800">
+                <a:solidFill>
+                  <a:srgbClr val="6D8C97"/>
+                </a:solidFill>
+                <a:latin typeface="Consolas"/>
+              </a:rPr>
+              <a:t>  35  </a:t>
+            </a:r>
+            <a:r>
+              <a:rPr sz="1800">
+                <a:solidFill>
+                  <a:srgbClr val="7FE0A0"/>
+                </a:solidFill>
+                <a:latin typeface="Consolas"/>
+              </a:rPr>
+              <a:t>  });</a:t>
+            </a:r>
+          </a:p>
+        </p:txBody>
+      </p:sp>
+      <p:sp>
+        <p:nvSpPr>
+          <p:cNvPr id="4" name="TextBox 3"/>
+          <p:cNvSpPr txBox="1"/>
+          <p:nvPr/>
+        </p:nvSpPr>
+        <p:spPr>
+          <a:xfrm>
+            <a:off x="548640" y="5623560"/>
+            <a:ext cx="11064240" cy="1051560"/>
+          </a:xfrm>
+          <a:prstGeom prst="rect">
+            <a:avLst/>
+          </a:prstGeom>
+          <a:noFill/>
+        </p:spPr>
+        <p:txBody>
           <a:bodyPr wrap="square">
             <a:spAutoFit/>
           </a:bodyPr>
           <a:lstStyle/>
           <a:p>
-            <a:pPr>
-              <a:spcAft>
-                <a:spcPts val="1400"/>
-              </a:spcAft>
-            </a:pPr>
-            <a:r>
-              <a:rPr sz="2400">
-                <a:solidFill>
-                  <a:srgbClr val="1F2A37"/>
-                </a:solidFill>
-              </a:rPr>
-              <a:t>• The reply arrives as text; .json() turns it into data your code can use.</a:t>
-            </a:r>
-          </a:p>
-          <a:p>
-            <a:pPr>
-              <a:spcAft>
-                <a:spcPts val="1400"/>
-              </a:spcAft>
-            </a:pPr>
-            <a:r>
-              <a:rPr sz="2400">
-                <a:solidFill>
-                  <a:srgbClr val="1F2A37"/>
-                </a:solidFill>
-              </a:rPr>
-              <a:t>• Also slow, so it needs await.</a:t>
+            <a:r>
+              <a:rPr sz="2000">
+                <a:solidFill>
+                  <a:srgbClr val="DCECEF"/>
+                </a:solidFill>
+              </a:rPr>
+              <a:t>Closes the fetch call.</a:t>
             </a:r>
           </a:p>
         </p:txBody>
@@ -5096,14 +5097,6 @@
 <file path=ppt/slides/slide20.xml><?xml version="1.0" encoding="utf-8"?>
 <p:sld xmlns:a="http://schemas.openxmlformats.org/drawingml/2006/main" xmlns:p="http://schemas.openxmlformats.org/presentationml/2006/main" xmlns:r="http://schemas.openxmlformats.org/officeDocument/2006/relationships">
   <p:cSld>
-    <p:bg>
-      <p:bgPr>
-        <a:solidFill>
-          <a:srgbClr val="102127"/>
-        </a:solidFill>
-        <a:effectLst/>
-      </p:bgPr>
-    </p:bg>
     <p:spTree>
       <p:nvGrpSpPr>
         <p:cNvPr id="1" name=""/>
@@ -5113,14 +5106,40 @@
       <p:grpSpPr/>
       <p:sp>
         <p:nvSpPr>
-          <p:cNvPr id="2" name="TextBox 1"/>
+          <p:cNvPr id="2" name="Title 1"/>
+          <p:cNvSpPr>
+            <a:spLocks noGrp="1"/>
+          </p:cNvSpPr>
+          <p:nvPr>
+            <p:ph type="title"/>
+          </p:nvPr>
+        </p:nvSpPr>
+        <p:spPr/>
+        <p:txBody>
+          <a:bodyPr/>
+          <a:lstStyle/>
+          <a:p>
+            <a:r>
+              <a:rPr sz="3800" b="1">
+                <a:solidFill>
+                  <a:srgbClr val="1F2A37"/>
+                </a:solidFill>
+              </a:rPr>
+              <a:t>res.json()</a:t>
+            </a:r>
+          </a:p>
+        </p:txBody>
+      </p:sp>
+      <p:sp>
+        <p:nvSpPr>
+          <p:cNvPr id="3" name="TextBox 2"/>
           <p:cNvSpPr txBox="1"/>
           <p:nvPr/>
         </p:nvSpPr>
         <p:spPr>
           <a:xfrm>
-            <a:off x="502920" y="274320"/>
-            <a:ext cx="11155680" cy="548640"/>
+            <a:off x="868680" y="502920"/>
+            <a:ext cx="5486400" cy="457200"/>
           </a:xfrm>
           <a:prstGeom prst="rect">
             <a:avLst/>
@@ -5134,26 +5153,26 @@
           <a:lstStyle/>
           <a:p>
             <a:r>
-              <a:rPr sz="2200" b="1">
+              <a:rPr sz="1500" b="1">
                 <a:solidFill>
                   <a:srgbClr val="01AEFD"/>
                 </a:solidFill>
               </a:rPr>
-              <a:t>Type this into script.js   -   line 36</a:t>
-            </a:r>
-          </a:p>
-        </p:txBody>
-      </p:sp>
-      <p:sp>
-        <p:nvSpPr>
-          <p:cNvPr id="3" name="TextBox 2"/>
+              <a:t>JAVASCRIPT</a:t>
+            </a:r>
+          </a:p>
+        </p:txBody>
+      </p:sp>
+      <p:sp>
+        <p:nvSpPr>
+          <p:cNvPr id="4" name="TextBox 3"/>
           <p:cNvSpPr txBox="1"/>
           <p:nvPr/>
         </p:nvSpPr>
         <p:spPr>
           <a:xfrm>
-            <a:off x="502920" y="960120"/>
-            <a:ext cx="11155680" cy="4297680"/>
+            <a:off x="822960" y="1828800"/>
+            <a:ext cx="10515600" cy="4206240"/>
           </a:xfrm>
           <a:prstGeom prst="rect">
             <a:avLst/>
@@ -5161,241 +5180,38 @@
           <a:noFill/>
         </p:spPr>
         <p:txBody>
-          <a:bodyPr wrap="none">
-            <a:spAutoFit/>
-          </a:bodyPr>
-          <a:lstStyle/>
-          <a:p>
-            <a:pPr>
-              <a:spcAft>
-                <a:spcPts val="0"/>
-              </a:spcAft>
-            </a:pPr>
-            <a:r>
-              <a:rPr sz="1800">
-                <a:solidFill>
-                  <a:srgbClr val="6D8C97"/>
-                </a:solidFill>
-                <a:latin typeface="Consolas"/>
-              </a:rPr>
-              <a:t>  29  </a:t>
-            </a:r>
-            <a:r>
-              <a:rPr sz="1800">
-                <a:solidFill>
-                  <a:srgbClr val="6D8C97"/>
-                </a:solidFill>
-                <a:latin typeface="Consolas"/>
-              </a:rPr>
-              <a:t> </a:t>
-            </a:r>
-          </a:p>
-          <a:p>
-            <a:pPr>
-              <a:spcAft>
-                <a:spcPts val="0"/>
-              </a:spcAft>
-            </a:pPr>
-            <a:r>
-              <a:rPr sz="1800">
-                <a:solidFill>
-                  <a:srgbClr val="6D8C97"/>
-                </a:solidFill>
-                <a:latin typeface="Consolas"/>
-              </a:rPr>
-              <a:t>  30  </a:t>
-            </a:r>
-            <a:r>
-              <a:rPr sz="1800">
-                <a:solidFill>
-                  <a:srgbClr val="6D8C97"/>
-                </a:solidFill>
-                <a:latin typeface="Consolas"/>
-              </a:rPr>
-              <a:t>// The smallest useful request: what models does this server have?</a:t>
-            </a:r>
-          </a:p>
-          <a:p>
-            <a:pPr>
-              <a:spcAft>
-                <a:spcPts val="0"/>
-              </a:spcAft>
-            </a:pPr>
-            <a:r>
-              <a:rPr sz="1800">
-                <a:solidFill>
-                  <a:srgbClr val="6D8C97"/>
-                </a:solidFill>
-                <a:latin typeface="Consolas"/>
-              </a:rPr>
-              <a:t>  31  </a:t>
-            </a:r>
-            <a:r>
-              <a:rPr sz="1800">
-                <a:solidFill>
-                  <a:srgbClr val="6D8C97"/>
-                </a:solidFill>
-                <a:latin typeface="Consolas"/>
-              </a:rPr>
-              <a:t>// 'async' means this function does something slow and can be waited for.</a:t>
-            </a:r>
-          </a:p>
-          <a:p>
-            <a:pPr>
-              <a:spcAft>
-                <a:spcPts val="0"/>
-              </a:spcAft>
-            </a:pPr>
-            <a:r>
-              <a:rPr sz="1800">
-                <a:solidFill>
-                  <a:srgbClr val="6D8C97"/>
-                </a:solidFill>
-                <a:latin typeface="Consolas"/>
-              </a:rPr>
-              <a:t>  32  </a:t>
-            </a:r>
-            <a:r>
-              <a:rPr sz="1800">
-                <a:solidFill>
-                  <a:srgbClr val="6D8C97"/>
-                </a:solidFill>
-                <a:latin typeface="Consolas"/>
-              </a:rPr>
-              <a:t>async function listModels() {</a:t>
-            </a:r>
-          </a:p>
-          <a:p>
-            <a:pPr>
-              <a:spcAft>
-                <a:spcPts val="0"/>
-              </a:spcAft>
-            </a:pPr>
-            <a:r>
-              <a:rPr sz="1800">
-                <a:solidFill>
-                  <a:srgbClr val="6D8C97"/>
-                </a:solidFill>
-                <a:latin typeface="Consolas"/>
-              </a:rPr>
-              <a:t>  33  </a:t>
-            </a:r>
-            <a:r>
-              <a:rPr sz="1800">
-                <a:solidFill>
-                  <a:srgbClr val="6D8C97"/>
-                </a:solidFill>
-                <a:latin typeface="Consolas"/>
-              </a:rPr>
-              <a:t>  const res = await fetch(AI_BASE + '/v1/models', {</a:t>
-            </a:r>
-          </a:p>
-          <a:p>
-            <a:pPr>
-              <a:spcAft>
-                <a:spcPts val="0"/>
-              </a:spcAft>
-            </a:pPr>
-            <a:r>
-              <a:rPr sz="1800">
-                <a:solidFill>
-                  <a:srgbClr val="6D8C97"/>
-                </a:solidFill>
-                <a:latin typeface="Consolas"/>
-              </a:rPr>
-              <a:t>  34  </a:t>
-            </a:r>
-            <a:r>
-              <a:rPr sz="1800">
-                <a:solidFill>
-                  <a:srgbClr val="6D8C97"/>
-                </a:solidFill>
-                <a:latin typeface="Consolas"/>
-              </a:rPr>
-              <a:t>    headers: { 'Authorization': 'Bearer ' + API_KEY }</a:t>
-            </a:r>
-          </a:p>
-          <a:p>
-            <a:pPr>
-              <a:spcAft>
-                <a:spcPts val="0"/>
-              </a:spcAft>
-            </a:pPr>
-            <a:r>
-              <a:rPr sz="1800">
-                <a:solidFill>
-                  <a:srgbClr val="6D8C97"/>
-                </a:solidFill>
-                <a:latin typeface="Consolas"/>
-              </a:rPr>
-              <a:t>  35  </a:t>
-            </a:r>
-            <a:r>
-              <a:rPr sz="1800">
-                <a:solidFill>
-                  <a:srgbClr val="6D8C97"/>
-                </a:solidFill>
-                <a:latin typeface="Consolas"/>
-              </a:rPr>
-              <a:t>  });</a:t>
-            </a:r>
-          </a:p>
-          <a:p>
-            <a:pPr>
-              <a:spcAft>
-                <a:spcPts val="0"/>
-              </a:spcAft>
-            </a:pPr>
-            <a:r>
-              <a:rPr sz="1800">
-                <a:solidFill>
-                  <a:srgbClr val="6D8C97"/>
-                </a:solidFill>
-                <a:latin typeface="Consolas"/>
-              </a:rPr>
-              <a:t>  36  </a:t>
-            </a:r>
-            <a:r>
-              <a:rPr sz="1800">
-                <a:solidFill>
-                  <a:srgbClr val="7FE0A0"/>
-                </a:solidFill>
-                <a:latin typeface="Consolas"/>
-              </a:rPr>
-              <a:t>  const data = await res.json();   // the answer arrives as text; this reads it</a:t>
-            </a:r>
-          </a:p>
-        </p:txBody>
-      </p:sp>
-      <p:sp>
-        <p:nvSpPr>
-          <p:cNvPr id="4" name="TextBox 3"/>
-          <p:cNvSpPr txBox="1"/>
-          <p:nvPr/>
-        </p:nvSpPr>
-        <p:spPr>
-          <a:xfrm>
-            <a:off x="548640" y="5623560"/>
-            <a:ext cx="11064240" cy="1051560"/>
-          </a:xfrm>
-          <a:prstGeom prst="rect">
-            <a:avLst/>
-          </a:prstGeom>
-          <a:noFill/>
-        </p:spPr>
-        <p:txBody>
           <a:bodyPr wrap="square">
             <a:spAutoFit/>
           </a:bodyPr>
           <a:lstStyle/>
           <a:p>
-            <a:r>
-              <a:rPr sz="2000">
-                <a:solidFill>
-                  <a:srgbClr val="DCECEF"/>
-                </a:solidFill>
-              </a:rPr>
-              <a:t>The reply is text; await res.json() turns it into data you can use.</a:t>
+            <a:pPr>
+              <a:spcAft>
+                <a:spcPts val="1400"/>
+              </a:spcAft>
+            </a:pPr>
+            <a:r>
+              <a:rPr sz="2400">
+                <a:solidFill>
+                  <a:srgbClr val="1F2A37"/>
+                </a:solidFill>
+              </a:rPr>
+              <a:t>• The reply arrives as text; .json() turns it into data your code can use.</a:t>
+            </a:r>
+          </a:p>
+          <a:p>
+            <a:pPr>
+              <a:spcAft>
+                <a:spcPts val="1400"/>
+              </a:spcAft>
+            </a:pPr>
+            <a:r>
+              <a:rPr sz="2400">
+                <a:solidFill>
+                  <a:srgbClr val="1F2A37"/>
+                </a:solidFill>
+              </a:rPr>
+              <a:t>• Also slow, so it needs await.</a:t>
             </a:r>
           </a:p>
         </p:txBody>
@@ -5454,7 +5270,7 @@
                   <a:srgbClr val="01AEFD"/>
                 </a:solidFill>
               </a:rPr>
-              <a:t>Type this into script.js   -   line 37</a:t>
+              <a:t>Type this into script.js   -   line 36</a:t>
             </a:r>
           </a:p>
         </p:txBody>
@@ -5673,36 +5489,11 @@
             <a:r>
               <a:rPr sz="1800">
                 <a:solidFill>
-                  <a:srgbClr val="6D8C97"/>
+                  <a:srgbClr val="7FE0A0"/>
                 </a:solidFill>
                 <a:latin typeface="Consolas"/>
               </a:rPr>
               <a:t>  const data = await res.json();   // the answer arrives as text; this reads it</a:t>
-            </a:r>
-          </a:p>
-          <a:p>
-            <a:pPr>
-              <a:spcAft>
-                <a:spcPts val="0"/>
-              </a:spcAft>
-            </a:pPr>
-            <a:r>
-              <a:rPr sz="1800">
-                <a:solidFill>
-                  <a:srgbClr val="6D8C97"/>
-                </a:solidFill>
-                <a:latin typeface="Consolas"/>
-              </a:rPr>
-              <a:t>  37  </a:t>
-            </a:r>
-            <a:r>
-              <a:rPr sz="1800">
-                <a:solidFill>
-                  <a:srgbClr val="7FE0A0"/>
-                </a:solidFill>
-                <a:latin typeface="Consolas"/>
-              </a:rPr>
-              <a:t>  console.log('The server offers:', data.data);</a:t>
             </a:r>
           </a:p>
         </p:txBody>
@@ -5735,7 +5526,7 @@
                   <a:srgbClr val="DCECEF"/>
                 </a:solidFill>
               </a:rPr>
-              <a:t>Prints the list of models to the console so you can see them.</a:t>
+              <a:t>The reply is text; await res.json() turns it into data you can use.</a:t>
             </a:r>
           </a:p>
         </p:txBody>
@@ -5794,7 +5585,7 @@
                   <a:srgbClr val="01AEFD"/>
                 </a:solidFill>
               </a:rPr>
-              <a:t>Type this into script.js   -   line 38</a:t>
+              <a:t>Type this into script.js   -   line 37</a:t>
             </a:r>
           </a:p>
         </p:txBody>
@@ -6038,36 +5829,11 @@
             <a:r>
               <a:rPr sz="1800">
                 <a:solidFill>
-                  <a:srgbClr val="6D8C97"/>
+                  <a:srgbClr val="7FE0A0"/>
                 </a:solidFill>
                 <a:latin typeface="Consolas"/>
               </a:rPr>
               <a:t>  console.log('The server offers:', data.data);</a:t>
-            </a:r>
-          </a:p>
-          <a:p>
-            <a:pPr>
-              <a:spcAft>
-                <a:spcPts val="0"/>
-              </a:spcAft>
-            </a:pPr>
-            <a:r>
-              <a:rPr sz="1800">
-                <a:solidFill>
-                  <a:srgbClr val="6D8C97"/>
-                </a:solidFill>
-                <a:latin typeface="Consolas"/>
-              </a:rPr>
-              <a:t>  38  </a:t>
-            </a:r>
-            <a:r>
-              <a:rPr sz="1800">
-                <a:solidFill>
-                  <a:srgbClr val="7FE0A0"/>
-                </a:solidFill>
-                <a:latin typeface="Consolas"/>
-              </a:rPr>
-              <a:t>}</a:t>
             </a:r>
           </a:p>
         </p:txBody>
@@ -6100,7 +5866,7 @@
                   <a:srgbClr val="DCECEF"/>
                 </a:solidFill>
               </a:rPr>
-              <a:t>Closes the function.</a:t>
+              <a:t>Prints the list of models to the console so you can see them.</a:t>
             </a:r>
           </a:p>
         </p:txBody>
@@ -6159,7 +5925,7 @@
                   <a:srgbClr val="01AEFD"/>
                 </a:solidFill>
               </a:rPr>
-              <a:t>Type this into script.js   -   line 40</a:t>
+              <a:t>Type this into script.js   -   line 38</a:t>
             </a:r>
           </a:p>
         </p:txBody>
@@ -6192,7 +5958,7 @@
               </a:spcAft>
             </a:pPr>
             <a:r>
-              <a:rPr sz="1300">
+              <a:rPr sz="1800">
                 <a:solidFill>
                   <a:srgbClr val="6D8C97"/>
                 </a:solidFill>
@@ -6201,7 +5967,7 @@
               <a:t>  29  </a:t>
             </a:r>
             <a:r>
-              <a:rPr sz="1300">
+              <a:rPr sz="1800">
                 <a:solidFill>
                   <a:srgbClr val="6D8C97"/>
                 </a:solidFill>
@@ -6217,7 +5983,7 @@
               </a:spcAft>
             </a:pPr>
             <a:r>
-              <a:rPr sz="1300">
+              <a:rPr sz="1800">
                 <a:solidFill>
                   <a:srgbClr val="6D8C97"/>
                 </a:solidFill>
@@ -6226,7 +5992,7 @@
               <a:t>  30  </a:t>
             </a:r>
             <a:r>
-              <a:rPr sz="1300">
+              <a:rPr sz="1800">
                 <a:solidFill>
                   <a:srgbClr val="6D8C97"/>
                 </a:solidFill>
@@ -6242,7 +6008,7 @@
               </a:spcAft>
             </a:pPr>
             <a:r>
-              <a:rPr sz="1300">
+              <a:rPr sz="1800">
                 <a:solidFill>
                   <a:srgbClr val="6D8C97"/>
                 </a:solidFill>
@@ -6251,7 +6017,7 @@
               <a:t>  31  </a:t>
             </a:r>
             <a:r>
-              <a:rPr sz="1300">
+              <a:rPr sz="1800">
                 <a:solidFill>
                   <a:srgbClr val="6D8C97"/>
                 </a:solidFill>
@@ -6267,7 +6033,7 @@
               </a:spcAft>
             </a:pPr>
             <a:r>
-              <a:rPr sz="1300">
+              <a:rPr sz="1800">
                 <a:solidFill>
                   <a:srgbClr val="6D8C97"/>
                 </a:solidFill>
@@ -6276,7 +6042,7 @@
               <a:t>  32  </a:t>
             </a:r>
             <a:r>
-              <a:rPr sz="1300">
+              <a:rPr sz="1800">
                 <a:solidFill>
                   <a:srgbClr val="6D8C97"/>
                 </a:solidFill>
@@ -6292,7 +6058,7 @@
               </a:spcAft>
             </a:pPr>
             <a:r>
-              <a:rPr sz="1300">
+              <a:rPr sz="1800">
                 <a:solidFill>
                   <a:srgbClr val="6D8C97"/>
                 </a:solidFill>
@@ -6301,7 +6067,7 @@
               <a:t>  33  </a:t>
             </a:r>
             <a:r>
-              <a:rPr sz="1300">
+              <a:rPr sz="1800">
                 <a:solidFill>
                   <a:srgbClr val="6D8C97"/>
                 </a:solidFill>
@@ -6317,7 +6083,7 @@
               </a:spcAft>
             </a:pPr>
             <a:r>
-              <a:rPr sz="1300">
+              <a:rPr sz="1800">
                 <a:solidFill>
                   <a:srgbClr val="6D8C97"/>
                 </a:solidFill>
@@ -6326,7 +6092,7 @@
               <a:t>  34  </a:t>
             </a:r>
             <a:r>
-              <a:rPr sz="1300">
+              <a:rPr sz="1800">
                 <a:solidFill>
                   <a:srgbClr val="6D8C97"/>
                 </a:solidFill>
@@ -6342,7 +6108,7 @@
               </a:spcAft>
             </a:pPr>
             <a:r>
-              <a:rPr sz="1300">
+              <a:rPr sz="1800">
                 <a:solidFill>
                   <a:srgbClr val="6D8C97"/>
                 </a:solidFill>
@@ -6351,7 +6117,7 @@
               <a:t>  35  </a:t>
             </a:r>
             <a:r>
-              <a:rPr sz="1300">
+              <a:rPr sz="1800">
                 <a:solidFill>
                   <a:srgbClr val="6D8C97"/>
                 </a:solidFill>
@@ -6367,7 +6133,7 @@
               </a:spcAft>
             </a:pPr>
             <a:r>
-              <a:rPr sz="1300">
+              <a:rPr sz="1800">
                 <a:solidFill>
                   <a:srgbClr val="6D8C97"/>
                 </a:solidFill>
@@ -6376,7 +6142,7 @@
               <a:t>  36  </a:t>
             </a:r>
             <a:r>
-              <a:rPr sz="1300">
+              <a:rPr sz="1800">
                 <a:solidFill>
                   <a:srgbClr val="6D8C97"/>
                 </a:solidFill>
@@ -6392,7 +6158,7 @@
               </a:spcAft>
             </a:pPr>
             <a:r>
-              <a:rPr sz="1300">
+              <a:rPr sz="1800">
                 <a:solidFill>
                   <a:srgbClr val="6D8C97"/>
                 </a:solidFill>
@@ -6401,7 +6167,7 @@
               <a:t>  37  </a:t>
             </a:r>
             <a:r>
-              <a:rPr sz="1300">
+              <a:rPr sz="1800">
                 <a:solidFill>
                   <a:srgbClr val="6D8C97"/>
                 </a:solidFill>
@@ -6417,7 +6183,7 @@
               </a:spcAft>
             </a:pPr>
             <a:r>
-              <a:rPr sz="1300">
+              <a:rPr sz="1800">
                 <a:solidFill>
                   <a:srgbClr val="6D8C97"/>
                 </a:solidFill>
@@ -6426,63 +6192,13 @@
               <a:t>  38  </a:t>
             </a:r>
             <a:r>
-              <a:rPr sz="1300">
-                <a:solidFill>
-                  <a:srgbClr val="6D8C97"/>
+              <a:rPr sz="1800">
+                <a:solidFill>
+                  <a:srgbClr val="7FE0A0"/>
                 </a:solidFill>
                 <a:latin typeface="Consolas"/>
               </a:rPr>
               <a:t>}</a:t>
-            </a:r>
-          </a:p>
-          <a:p>
-            <a:pPr>
-              <a:spcAft>
-                <a:spcPts val="0"/>
-              </a:spcAft>
-            </a:pPr>
-            <a:r>
-              <a:rPr sz="1300">
-                <a:solidFill>
-                  <a:srgbClr val="6D8C97"/>
-                </a:solidFill>
-                <a:latin typeface="Consolas"/>
-              </a:rPr>
-              <a:t>  39  </a:t>
-            </a:r>
-            <a:r>
-              <a:rPr sz="1300">
-                <a:solidFill>
-                  <a:srgbClr val="6D8C97"/>
-                </a:solidFill>
-                <a:latin typeface="Consolas"/>
-              </a:rPr>
-              <a:t> </a:t>
-            </a:r>
-          </a:p>
-          <a:p>
-            <a:pPr>
-              <a:spcAft>
-                <a:spcPts val="0"/>
-              </a:spcAft>
-            </a:pPr>
-            <a:r>
-              <a:rPr sz="1300">
-                <a:solidFill>
-                  <a:srgbClr val="6D8C97"/>
-                </a:solidFill>
-                <a:latin typeface="Consolas"/>
-              </a:rPr>
-              <a:t>  40  </a:t>
-            </a:r>
-            <a:r>
-              <a:rPr sz="1300">
-                <a:solidFill>
-                  <a:srgbClr val="7FE0A0"/>
-                </a:solidFill>
-                <a:latin typeface="Consolas"/>
-              </a:rPr>
-              <a:t>listModels();</a:t>
             </a:r>
           </a:p>
         </p:txBody>
@@ -6515,7 +6231,7 @@
                   <a:srgbClr val="DCECEF"/>
                 </a:solidFill>
               </a:rPr>
-              <a:t>Calls the function so it actually runs when the page loads.</a:t>
+              <a:t>Closes the function.</a:t>
             </a:r>
           </a:p>
         </p:txBody>
@@ -6574,7 +6290,7 @@
                   <a:srgbClr val="01AEFD"/>
                 </a:solidFill>
               </a:rPr>
-              <a:t>All together in script.js</a:t>
+              <a:t>Type this into script.js   -   line 40</a:t>
             </a:r>
           </a:p>
         </p:txBody>
@@ -6618,7 +6334,7 @@
             <a:r>
               <a:rPr sz="1300">
                 <a:solidFill>
-                  <a:srgbClr val="7FE0A0"/>
+                  <a:srgbClr val="6D8C97"/>
                 </a:solidFill>
                 <a:latin typeface="Consolas"/>
               </a:rPr>
@@ -6643,7 +6359,7 @@
             <a:r>
               <a:rPr sz="1300">
                 <a:solidFill>
-                  <a:srgbClr val="7FE0A0"/>
+                  <a:srgbClr val="6D8C97"/>
                 </a:solidFill>
                 <a:latin typeface="Consolas"/>
               </a:rPr>
@@ -6668,7 +6384,7 @@
             <a:r>
               <a:rPr sz="1300">
                 <a:solidFill>
-                  <a:srgbClr val="7FE0A0"/>
+                  <a:srgbClr val="6D8C97"/>
                 </a:solidFill>
                 <a:latin typeface="Consolas"/>
               </a:rPr>
@@ -6693,7 +6409,7 @@
             <a:r>
               <a:rPr sz="1300">
                 <a:solidFill>
-                  <a:srgbClr val="7FE0A0"/>
+                  <a:srgbClr val="6D8C97"/>
                 </a:solidFill>
                 <a:latin typeface="Consolas"/>
               </a:rPr>
@@ -6718,7 +6434,7 @@
             <a:r>
               <a:rPr sz="1300">
                 <a:solidFill>
-                  <a:srgbClr val="7FE0A0"/>
+                  <a:srgbClr val="6D8C97"/>
                 </a:solidFill>
                 <a:latin typeface="Consolas"/>
               </a:rPr>
@@ -6743,7 +6459,7 @@
             <a:r>
               <a:rPr sz="1300">
                 <a:solidFill>
-                  <a:srgbClr val="7FE0A0"/>
+                  <a:srgbClr val="6D8C97"/>
                 </a:solidFill>
                 <a:latin typeface="Consolas"/>
               </a:rPr>
@@ -6768,7 +6484,7 @@
             <a:r>
               <a:rPr sz="1300">
                 <a:solidFill>
-                  <a:srgbClr val="7FE0A0"/>
+                  <a:srgbClr val="6D8C97"/>
                 </a:solidFill>
                 <a:latin typeface="Consolas"/>
               </a:rPr>
@@ -6793,7 +6509,7 @@
             <a:r>
               <a:rPr sz="1300">
                 <a:solidFill>
-                  <a:srgbClr val="7FE0A0"/>
+                  <a:srgbClr val="6D8C97"/>
                 </a:solidFill>
                 <a:latin typeface="Consolas"/>
               </a:rPr>
@@ -6818,7 +6534,7 @@
             <a:r>
               <a:rPr sz="1300">
                 <a:solidFill>
-                  <a:srgbClr val="7FE0A0"/>
+                  <a:srgbClr val="6D8C97"/>
                 </a:solidFill>
                 <a:latin typeface="Consolas"/>
               </a:rPr>
@@ -6843,7 +6559,7 @@
             <a:r>
               <a:rPr sz="1300">
                 <a:solidFill>
-                  <a:srgbClr val="7FE0A0"/>
+                  <a:srgbClr val="6D8C97"/>
                 </a:solidFill>
                 <a:latin typeface="Consolas"/>
               </a:rPr>
@@ -6868,7 +6584,7 @@
             <a:r>
               <a:rPr sz="1300">
                 <a:solidFill>
-                  <a:srgbClr val="7FE0A0"/>
+                  <a:srgbClr val="6D8C97"/>
                 </a:solidFill>
                 <a:latin typeface="Consolas"/>
               </a:rPr>
@@ -6930,7 +6646,7 @@
                   <a:srgbClr val="DCECEF"/>
                 </a:solidFill>
               </a:rPr>
-              <a:t>That is the whole piece. Check yours looks the same before moving on.</a:t>
+              <a:t>Calls the function so it actually runs when the page loads.</a:t>
             </a:r>
           </a:p>
         </p:txBody>
@@ -6946,6 +6662,14 @@
 <file path=ppt/slides/slide25.xml><?xml version="1.0" encoding="utf-8"?>
 <p:sld xmlns:a="http://schemas.openxmlformats.org/drawingml/2006/main" xmlns:p="http://schemas.openxmlformats.org/presentationml/2006/main" xmlns:r="http://schemas.openxmlformats.org/officeDocument/2006/relationships">
   <p:cSld>
+    <p:bg>
+      <p:bgPr>
+        <a:solidFill>
+          <a:srgbClr val="102127"/>
+        </a:solidFill>
+        <a:effectLst/>
+      </p:bgPr>
+    </p:bg>
     <p:spTree>
       <p:nvGrpSpPr>
         <p:cNvPr id="1" name=""/>
@@ -6955,40 +6679,14 @@
       <p:grpSpPr/>
       <p:sp>
         <p:nvSpPr>
-          <p:cNvPr id="2" name="Title 1"/>
-          <p:cNvSpPr>
-            <a:spLocks noGrp="1"/>
-          </p:cNvSpPr>
-          <p:nvPr>
-            <p:ph type="title"/>
-          </p:nvPr>
-        </p:nvSpPr>
-        <p:spPr/>
-        <p:txBody>
-          <a:bodyPr/>
-          <a:lstStyle/>
-          <a:p>
-            <a:r>
-              <a:rPr sz="3800" b="1">
-                <a:solidFill>
-                  <a:srgbClr val="1F2A37"/>
-                </a:solidFill>
-              </a:rPr>
-              <a:t>The internet is slow</a:t>
-            </a:r>
-          </a:p>
-        </p:txBody>
-      </p:sp>
-      <p:sp>
-        <p:nvSpPr>
-          <p:cNvPr id="3" name="TextBox 2"/>
+          <p:cNvPr id="2" name="TextBox 1"/>
           <p:cNvSpPr txBox="1"/>
           <p:nvPr/>
         </p:nvSpPr>
         <p:spPr>
           <a:xfrm>
-            <a:off x="822960" y="1828800"/>
-            <a:ext cx="10515600" cy="4206240"/>
+            <a:off x="502920" y="274320"/>
+            <a:ext cx="11155680" cy="548640"/>
           </a:xfrm>
           <a:prstGeom prst="rect">
             <a:avLst/>
@@ -6996,53 +6694,374 @@
           <a:noFill/>
         </p:spPr>
         <p:txBody>
+          <a:bodyPr wrap="none">
+            <a:spAutoFit/>
+          </a:bodyPr>
+          <a:lstStyle/>
+          <a:p>
+            <a:r>
+              <a:rPr sz="2200" b="1">
+                <a:solidFill>
+                  <a:srgbClr val="01AEFD"/>
+                </a:solidFill>
+              </a:rPr>
+              <a:t>All together in script.js</a:t>
+            </a:r>
+          </a:p>
+        </p:txBody>
+      </p:sp>
+      <p:sp>
+        <p:nvSpPr>
+          <p:cNvPr id="3" name="TextBox 2"/>
+          <p:cNvSpPr txBox="1"/>
+          <p:nvPr/>
+        </p:nvSpPr>
+        <p:spPr>
+          <a:xfrm>
+            <a:off x="502920" y="960120"/>
+            <a:ext cx="11155680" cy="4297680"/>
+          </a:xfrm>
+          <a:prstGeom prst="rect">
+            <a:avLst/>
+          </a:prstGeom>
+          <a:noFill/>
+        </p:spPr>
+        <p:txBody>
+          <a:bodyPr wrap="none">
+            <a:spAutoFit/>
+          </a:bodyPr>
+          <a:lstStyle/>
+          <a:p>
+            <a:pPr>
+              <a:spcAft>
+                <a:spcPts val="0"/>
+              </a:spcAft>
+            </a:pPr>
+            <a:r>
+              <a:rPr sz="1300">
+                <a:solidFill>
+                  <a:srgbClr val="6D8C97"/>
+                </a:solidFill>
+                <a:latin typeface="Consolas"/>
+              </a:rPr>
+              <a:t>  29  </a:t>
+            </a:r>
+            <a:r>
+              <a:rPr sz="1300">
+                <a:solidFill>
+                  <a:srgbClr val="7FE0A0"/>
+                </a:solidFill>
+                <a:latin typeface="Consolas"/>
+              </a:rPr>
+              <a:t> </a:t>
+            </a:r>
+          </a:p>
+          <a:p>
+            <a:pPr>
+              <a:spcAft>
+                <a:spcPts val="0"/>
+              </a:spcAft>
+            </a:pPr>
+            <a:r>
+              <a:rPr sz="1300">
+                <a:solidFill>
+                  <a:srgbClr val="6D8C97"/>
+                </a:solidFill>
+                <a:latin typeface="Consolas"/>
+              </a:rPr>
+              <a:t>  30  </a:t>
+            </a:r>
+            <a:r>
+              <a:rPr sz="1300">
+                <a:solidFill>
+                  <a:srgbClr val="7FE0A0"/>
+                </a:solidFill>
+                <a:latin typeface="Consolas"/>
+              </a:rPr>
+              <a:t>// The smallest useful request: what models does this server have?</a:t>
+            </a:r>
+          </a:p>
+          <a:p>
+            <a:pPr>
+              <a:spcAft>
+                <a:spcPts val="0"/>
+              </a:spcAft>
+            </a:pPr>
+            <a:r>
+              <a:rPr sz="1300">
+                <a:solidFill>
+                  <a:srgbClr val="6D8C97"/>
+                </a:solidFill>
+                <a:latin typeface="Consolas"/>
+              </a:rPr>
+              <a:t>  31  </a:t>
+            </a:r>
+            <a:r>
+              <a:rPr sz="1300">
+                <a:solidFill>
+                  <a:srgbClr val="7FE0A0"/>
+                </a:solidFill>
+                <a:latin typeface="Consolas"/>
+              </a:rPr>
+              <a:t>// 'async' means this function does something slow and can be waited for.</a:t>
+            </a:r>
+          </a:p>
+          <a:p>
+            <a:pPr>
+              <a:spcAft>
+                <a:spcPts val="0"/>
+              </a:spcAft>
+            </a:pPr>
+            <a:r>
+              <a:rPr sz="1300">
+                <a:solidFill>
+                  <a:srgbClr val="6D8C97"/>
+                </a:solidFill>
+                <a:latin typeface="Consolas"/>
+              </a:rPr>
+              <a:t>  32  </a:t>
+            </a:r>
+            <a:r>
+              <a:rPr sz="1300">
+                <a:solidFill>
+                  <a:srgbClr val="7FE0A0"/>
+                </a:solidFill>
+                <a:latin typeface="Consolas"/>
+              </a:rPr>
+              <a:t>async function listModels() {</a:t>
+            </a:r>
+          </a:p>
+          <a:p>
+            <a:pPr>
+              <a:spcAft>
+                <a:spcPts val="0"/>
+              </a:spcAft>
+            </a:pPr>
+            <a:r>
+              <a:rPr sz="1300">
+                <a:solidFill>
+                  <a:srgbClr val="6D8C97"/>
+                </a:solidFill>
+                <a:latin typeface="Consolas"/>
+              </a:rPr>
+              <a:t>  33  </a:t>
+            </a:r>
+            <a:r>
+              <a:rPr sz="1300">
+                <a:solidFill>
+                  <a:srgbClr val="7FE0A0"/>
+                </a:solidFill>
+                <a:latin typeface="Consolas"/>
+              </a:rPr>
+              <a:t>  const res = await fetch(AI_BASE + '/v1/models', {</a:t>
+            </a:r>
+          </a:p>
+          <a:p>
+            <a:pPr>
+              <a:spcAft>
+                <a:spcPts val="0"/>
+              </a:spcAft>
+            </a:pPr>
+            <a:r>
+              <a:rPr sz="1300">
+                <a:solidFill>
+                  <a:srgbClr val="6D8C97"/>
+                </a:solidFill>
+                <a:latin typeface="Consolas"/>
+              </a:rPr>
+              <a:t>  34  </a:t>
+            </a:r>
+            <a:r>
+              <a:rPr sz="1300">
+                <a:solidFill>
+                  <a:srgbClr val="7FE0A0"/>
+                </a:solidFill>
+                <a:latin typeface="Consolas"/>
+              </a:rPr>
+              <a:t>    headers: { 'Authorization': 'Bearer ' + API_KEY }</a:t>
+            </a:r>
+          </a:p>
+          <a:p>
+            <a:pPr>
+              <a:spcAft>
+                <a:spcPts val="0"/>
+              </a:spcAft>
+            </a:pPr>
+            <a:r>
+              <a:rPr sz="1300">
+                <a:solidFill>
+                  <a:srgbClr val="6D8C97"/>
+                </a:solidFill>
+                <a:latin typeface="Consolas"/>
+              </a:rPr>
+              <a:t>  35  </a:t>
+            </a:r>
+            <a:r>
+              <a:rPr sz="1300">
+                <a:solidFill>
+                  <a:srgbClr val="7FE0A0"/>
+                </a:solidFill>
+                <a:latin typeface="Consolas"/>
+              </a:rPr>
+              <a:t>  });</a:t>
+            </a:r>
+          </a:p>
+          <a:p>
+            <a:pPr>
+              <a:spcAft>
+                <a:spcPts val="0"/>
+              </a:spcAft>
+            </a:pPr>
+            <a:r>
+              <a:rPr sz="1300">
+                <a:solidFill>
+                  <a:srgbClr val="6D8C97"/>
+                </a:solidFill>
+                <a:latin typeface="Consolas"/>
+              </a:rPr>
+              <a:t>  36  </a:t>
+            </a:r>
+            <a:r>
+              <a:rPr sz="1300">
+                <a:solidFill>
+                  <a:srgbClr val="7FE0A0"/>
+                </a:solidFill>
+                <a:latin typeface="Consolas"/>
+              </a:rPr>
+              <a:t>  const data = await res.json();   // the answer arrives as text; this reads it</a:t>
+            </a:r>
+          </a:p>
+          <a:p>
+            <a:pPr>
+              <a:spcAft>
+                <a:spcPts val="0"/>
+              </a:spcAft>
+            </a:pPr>
+            <a:r>
+              <a:rPr sz="1300">
+                <a:solidFill>
+                  <a:srgbClr val="6D8C97"/>
+                </a:solidFill>
+                <a:latin typeface="Consolas"/>
+              </a:rPr>
+              <a:t>  37  </a:t>
+            </a:r>
+            <a:r>
+              <a:rPr sz="1300">
+                <a:solidFill>
+                  <a:srgbClr val="7FE0A0"/>
+                </a:solidFill>
+                <a:latin typeface="Consolas"/>
+              </a:rPr>
+              <a:t>  console.log('The server offers:', data.data);</a:t>
+            </a:r>
+          </a:p>
+          <a:p>
+            <a:pPr>
+              <a:spcAft>
+                <a:spcPts val="0"/>
+              </a:spcAft>
+            </a:pPr>
+            <a:r>
+              <a:rPr sz="1300">
+                <a:solidFill>
+                  <a:srgbClr val="6D8C97"/>
+                </a:solidFill>
+                <a:latin typeface="Consolas"/>
+              </a:rPr>
+              <a:t>  38  </a:t>
+            </a:r>
+            <a:r>
+              <a:rPr sz="1300">
+                <a:solidFill>
+                  <a:srgbClr val="7FE0A0"/>
+                </a:solidFill>
+                <a:latin typeface="Consolas"/>
+              </a:rPr>
+              <a:t>}</a:t>
+            </a:r>
+          </a:p>
+          <a:p>
+            <a:pPr>
+              <a:spcAft>
+                <a:spcPts val="0"/>
+              </a:spcAft>
+            </a:pPr>
+            <a:r>
+              <a:rPr sz="1300">
+                <a:solidFill>
+                  <a:srgbClr val="6D8C97"/>
+                </a:solidFill>
+                <a:latin typeface="Consolas"/>
+              </a:rPr>
+              <a:t>  39  </a:t>
+            </a:r>
+            <a:r>
+              <a:rPr sz="1300">
+                <a:solidFill>
+                  <a:srgbClr val="7FE0A0"/>
+                </a:solidFill>
+                <a:latin typeface="Consolas"/>
+              </a:rPr>
+              <a:t> </a:t>
+            </a:r>
+          </a:p>
+          <a:p>
+            <a:pPr>
+              <a:spcAft>
+                <a:spcPts val="0"/>
+              </a:spcAft>
+            </a:pPr>
+            <a:r>
+              <a:rPr sz="1300">
+                <a:solidFill>
+                  <a:srgbClr val="6D8C97"/>
+                </a:solidFill>
+                <a:latin typeface="Consolas"/>
+              </a:rPr>
+              <a:t>  40  </a:t>
+            </a:r>
+            <a:r>
+              <a:rPr sz="1300">
+                <a:solidFill>
+                  <a:srgbClr val="7FE0A0"/>
+                </a:solidFill>
+                <a:latin typeface="Consolas"/>
+              </a:rPr>
+              <a:t>listModels();</a:t>
+            </a:r>
+          </a:p>
+        </p:txBody>
+      </p:sp>
+      <p:sp>
+        <p:nvSpPr>
+          <p:cNvPr id="4" name="TextBox 3"/>
+          <p:cNvSpPr txBox="1"/>
+          <p:nvPr/>
+        </p:nvSpPr>
+        <p:spPr>
+          <a:xfrm>
+            <a:off x="548640" y="5623560"/>
+            <a:ext cx="11064240" cy="1051560"/>
+          </a:xfrm>
+          <a:prstGeom prst="rect">
+            <a:avLst/>
+          </a:prstGeom>
+          <a:noFill/>
+        </p:spPr>
+        <p:txBody>
           <a:bodyPr wrap="square">
             <a:spAutoFit/>
           </a:bodyPr>
           <a:lstStyle/>
           <a:p>
-            <a:pPr>
-              <a:spcAft>
-                <a:spcPts val="1400"/>
-              </a:spcAft>
-            </a:pPr>
-            <a:r>
-              <a:rPr sz="2800">
-                <a:solidFill>
-                  <a:srgbClr val="01AEFD"/>
-                </a:solidFill>
-              </a:rPr>
-              <a:t>await = wait here for the answer</a:t>
-            </a:r>
-          </a:p>
-          <a:p>
-            <a:pPr>
-              <a:spcAft>
-                <a:spcPts val="1400"/>
-              </a:spcAft>
-            </a:pPr>
-            <a:r>
-              <a:rPr sz="2400">
-                <a:solidFill>
-                  <a:srgbClr val="1F2A37"/>
-                </a:solidFill>
-              </a:rPr>
-              <a:t>• Without await you carry on with nothing</a:t>
-            </a:r>
-          </a:p>
-          <a:p>
-            <a:pPr>
-              <a:spcAft>
-                <a:spcPts val="1400"/>
-              </a:spcAft>
-            </a:pPr>
-            <a:r>
-              <a:rPr sz="2400">
-                <a:solidFill>
-                  <a:srgbClr val="1F2A37"/>
-                </a:solidFill>
-              </a:rPr>
-              <a:t>• async marks a function that can be waited for</a:t>
+            <a:r>
+              <a:rPr sz="2000">
+                <a:solidFill>
+                  <a:srgbClr val="DCECEF"/>
+                </a:solidFill>
+              </a:rPr>
+              <a:t>That is the whole piece. Check yours looks the same before moving on.</a:t>
             </a:r>
           </a:p>
         </p:txBody>
@@ -7086,7 +7105,7 @@
                   <a:srgbClr val="1F2A37"/>
                 </a:solidFill>
               </a:rPr>
-              <a:t>This address only works at school</a:t>
+              <a:t>The internet is slow</a:t>
             </a:r>
           </a:p>
         </p:txBody>
@@ -7119,12 +7138,27 @@
               </a:spcAft>
             </a:pPr>
             <a:r>
+              <a:rPr sz="2800">
+                <a:solidFill>
+                  <a:srgbClr val="01AEFD"/>
+                </a:solidFill>
+              </a:rPr>
+              <a:t>await = wait here for the answer</a:t>
+            </a:r>
+          </a:p>
+          <a:p>
+            <a:pPr>
+              <a:spcAft>
+                <a:spcPts val="1400"/>
+              </a:spcAft>
+            </a:pPr>
+            <a:r>
               <a:rPr sz="2400">
                 <a:solidFill>
                   <a:srgbClr val="1F2A37"/>
                 </a:solidFill>
               </a:rPr>
-              <a:t>• That machine is in this building</a:t>
+              <a:t>• Without await you carry on with nothing</a:t>
             </a:r>
           </a:p>
           <a:p>
@@ -7139,22 +7173,7 @@
                   <a:srgbClr val="1F2A37"/>
                 </a:solidFill>
               </a:rPr>
-              <a:t>• At home it will not connect - that is expected</a:t>
-            </a:r>
-          </a:p>
-          <a:p>
-            <a:pPr>
-              <a:spcAft>
-                <a:spcPts val="1400"/>
-              </a:spcAft>
-            </a:pPr>
-            <a:r>
-              <a:rPr sz="2400">
-                <a:solidFill>
-                  <a:srgbClr val="1F2A37"/>
-                </a:solidFill>
-              </a:rPr>
-              <a:t>• But the code is not throwaway</a:t>
+              <a:t>• async marks a function that can be waited for</a:t>
             </a:r>
           </a:p>
         </p:txBody>
@@ -7198,7 +7217,7 @@
                   <a:srgbClr val="1F2A37"/>
                 </a:solidFill>
               </a:rPr>
-              <a:t>Same format as OpenAI</a:t>
+              <a:t>This address only works at school</a:t>
             </a:r>
           </a:p>
         </p:txBody>
@@ -7231,12 +7250,12 @@
               </a:spcAft>
             </a:pPr>
             <a:r>
-              <a:rPr sz="2800">
-                <a:solidFill>
-                  <a:srgbClr val="01AEFD"/>
-                </a:solidFill>
-              </a:rPr>
-              <a:t>On purpose</a:t>
+              <a:rPr sz="2400">
+                <a:solidFill>
+                  <a:srgbClr val="1F2A37"/>
+                </a:solidFill>
+              </a:rPr>
+              <a:t>• That machine is in this building</a:t>
             </a:r>
           </a:p>
           <a:p>
@@ -7251,7 +7270,7 @@
                   <a:srgbClr val="1F2A37"/>
                 </a:solidFill>
               </a:rPr>
-              <a:t>• Got your own OpenAI key? Change AI_BASE</a:t>
+              <a:t>• At home it will not connect - that is expected</a:t>
             </a:r>
           </a:p>
           <a:p>
@@ -7266,37 +7285,7 @@
                   <a:srgbClr val="1F2A37"/>
                 </a:solidFill>
               </a:rPr>
-              <a:t>• Change API_KEY</a:t>
-            </a:r>
-          </a:p>
-          <a:p>
-            <a:pPr>
-              <a:spcAft>
-                <a:spcPts val="1400"/>
-              </a:spcAft>
-            </a:pPr>
-            <a:r>
-              <a:rPr sz="2400">
-                <a:solidFill>
-                  <a:srgbClr val="1F2A37"/>
-                </a:solidFill>
-              </a:rPr>
-              <a:t>• Change the two model names in index.html</a:t>
-            </a:r>
-          </a:p>
-          <a:p>
-            <a:pPr>
-              <a:spcAft>
-                <a:spcPts val="1400"/>
-              </a:spcAft>
-            </a:pPr>
-            <a:r>
-              <a:rPr sz="2400">
-                <a:solidFill>
-                  <a:srgbClr val="1F2A37"/>
-                </a:solidFill>
-              </a:rPr>
-              <a:t>• Nothing else moves</a:t>
+              <a:t>• But the code is not throwaway</a:t>
             </a:r>
           </a:p>
         </p:txBody>
@@ -7340,7 +7329,7 @@
                   <a:srgbClr val="1F2A37"/>
                 </a:solidFill>
               </a:rPr>
-              <a:t>A key in a web page is public</a:t>
+              <a:t>Same format as OpenAI</a:t>
             </a:r>
           </a:p>
         </p:txBody>
@@ -7373,12 +7362,27 @@
               </a:spcAft>
             </a:pPr>
             <a:r>
+              <a:rPr sz="2800">
+                <a:solidFill>
+                  <a:srgbClr val="01AEFD"/>
+                </a:solidFill>
+              </a:rPr>
+              <a:t>On purpose</a:t>
+            </a:r>
+          </a:p>
+          <a:p>
+            <a:pPr>
+              <a:spcAft>
+                <a:spcPts val="1400"/>
+              </a:spcAft>
+            </a:pPr>
+            <a:r>
               <a:rPr sz="2400">
                 <a:solidFill>
                   <a:srgbClr val="1F2A37"/>
                 </a:solidFill>
               </a:rPr>
-              <a:t>• Anyone who opens the page can read it</a:t>
+              <a:t>• Got your own OpenAI key? Change AI_BASE</a:t>
             </a:r>
           </a:p>
           <a:p>
@@ -7393,7 +7397,7 @@
                   <a:srgbClr val="1F2A37"/>
                 </a:solidFill>
               </a:rPr>
-              <a:t>• Fine for a class key: limited, no bill</a:t>
+              <a:t>• Change API_KEY</a:t>
             </a:r>
           </a:p>
           <a:p>
@@ -7408,7 +7412,7 @@
                   <a:srgbClr val="1F2A37"/>
                 </a:solidFill>
               </a:rPr>
-              <a:t>• NOT fine for a personal paid key</a:t>
+              <a:t>• Change the two model names in index.html</a:t>
             </a:r>
           </a:p>
           <a:p>
@@ -7423,7 +7427,7 @@
                   <a:srgbClr val="1F2A37"/>
                 </a:solidFill>
               </a:rPr>
-              <a:t>• Real apps keep the key on a server</a:t>
+              <a:t>• Nothing else moves</a:t>
             </a:r>
           </a:p>
         </p:txBody>
@@ -7467,7 +7471,7 @@
                   <a:srgbClr val="1F2A37"/>
                 </a:solidFill>
               </a:rPr>
-              <a:t>Status codes</a:t>
+              <a:t>A key in a web page is public</a:t>
             </a:r>
           </a:p>
         </p:txBody>
@@ -7505,7 +7509,7 @@
                   <a:srgbClr val="1F2A37"/>
                 </a:solidFill>
               </a:rPr>
-              <a:t>• 200 - fine, here you go</a:t>
+              <a:t>• Anyone who opens the page can read it</a:t>
             </a:r>
           </a:p>
           <a:p>
@@ -7520,7 +7524,7 @@
                   <a:srgbClr val="1F2A37"/>
                 </a:solidFill>
               </a:rPr>
-              <a:t>• 401 - I do not believe who you say you are</a:t>
+              <a:t>• Fine for a class key: limited, no bill</a:t>
             </a:r>
           </a:p>
           <a:p>
@@ -7535,7 +7539,22 @@
                   <a:srgbClr val="1F2A37"/>
                 </a:solidFill>
               </a:rPr>
-              <a:t>• 404 - no such thing here</a:t>
+              <a:t>• NOT fine for a personal paid key</a:t>
+            </a:r>
+          </a:p>
+          <a:p>
+            <a:pPr>
+              <a:spcAft>
+                <a:spcPts val="1400"/>
+              </a:spcAft>
+            </a:pPr>
+            <a:r>
+              <a:rPr sz="2400">
+                <a:solidFill>
+                  <a:srgbClr val="1F2A37"/>
+                </a:solidFill>
+              </a:rPr>
+              <a:t>• Real apps keep the key on a server</a:t>
             </a:r>
           </a:p>
         </p:txBody>
@@ -7714,6 +7733,118 @@
 </file>
 
 <file path=ppt/slides/slide30.xml><?xml version="1.0" encoding="utf-8"?>
+<p:sld xmlns:a="http://schemas.openxmlformats.org/drawingml/2006/main" xmlns:p="http://schemas.openxmlformats.org/presentationml/2006/main" xmlns:r="http://schemas.openxmlformats.org/officeDocument/2006/relationships">
+  <p:cSld>
+    <p:spTree>
+      <p:nvGrpSpPr>
+        <p:cNvPr id="1" name=""/>
+        <p:cNvGrpSpPr/>
+        <p:nvPr/>
+      </p:nvGrpSpPr>
+      <p:grpSpPr/>
+      <p:sp>
+        <p:nvSpPr>
+          <p:cNvPr id="2" name="Title 1"/>
+          <p:cNvSpPr>
+            <a:spLocks noGrp="1"/>
+          </p:cNvSpPr>
+          <p:nvPr>
+            <p:ph type="title"/>
+          </p:nvPr>
+        </p:nvSpPr>
+        <p:spPr/>
+        <p:txBody>
+          <a:bodyPr/>
+          <a:lstStyle/>
+          <a:p>
+            <a:r>
+              <a:rPr sz="3800" b="1">
+                <a:solidFill>
+                  <a:srgbClr val="1F2A37"/>
+                </a:solidFill>
+              </a:rPr>
+              <a:t>Status codes</a:t>
+            </a:r>
+          </a:p>
+        </p:txBody>
+      </p:sp>
+      <p:sp>
+        <p:nvSpPr>
+          <p:cNvPr id="3" name="TextBox 2"/>
+          <p:cNvSpPr txBox="1"/>
+          <p:nvPr/>
+        </p:nvSpPr>
+        <p:spPr>
+          <a:xfrm>
+            <a:off x="822960" y="1828800"/>
+            <a:ext cx="10515600" cy="4206240"/>
+          </a:xfrm>
+          <a:prstGeom prst="rect">
+            <a:avLst/>
+          </a:prstGeom>
+          <a:noFill/>
+        </p:spPr>
+        <p:txBody>
+          <a:bodyPr wrap="square">
+            <a:spAutoFit/>
+          </a:bodyPr>
+          <a:lstStyle/>
+          <a:p>
+            <a:pPr>
+              <a:spcAft>
+                <a:spcPts val="1400"/>
+              </a:spcAft>
+            </a:pPr>
+            <a:r>
+              <a:rPr sz="2400">
+                <a:solidFill>
+                  <a:srgbClr val="1F2A37"/>
+                </a:solidFill>
+              </a:rPr>
+              <a:t>• 200 - fine, here you go</a:t>
+            </a:r>
+          </a:p>
+          <a:p>
+            <a:pPr>
+              <a:spcAft>
+                <a:spcPts val="1400"/>
+              </a:spcAft>
+            </a:pPr>
+            <a:r>
+              <a:rPr sz="2400">
+                <a:solidFill>
+                  <a:srgbClr val="1F2A37"/>
+                </a:solidFill>
+              </a:rPr>
+              <a:t>• 401 - I do not believe who you say you are</a:t>
+            </a:r>
+          </a:p>
+          <a:p>
+            <a:pPr>
+              <a:spcAft>
+                <a:spcPts val="1400"/>
+              </a:spcAft>
+            </a:pPr>
+            <a:r>
+              <a:rPr sz="2400">
+                <a:solidFill>
+                  <a:srgbClr val="1F2A37"/>
+                </a:solidFill>
+              </a:rPr>
+              <a:t>• 404 - no such thing here</a:t>
+            </a:r>
+          </a:p>
+        </p:txBody>
+      </p:sp>
+    </p:spTree>
+  </p:cSld>
+  <p:clrMapOvr>
+    <a:masterClrMapping/>
+  </p:clrMapOvr>
+</p:sld>
+</file>
+
+<file path=ppt/slides/slide31.xml><?xml version="1.0" encoding="utf-8"?>
 <p:sld xmlns:a="http://schemas.openxmlformats.org/drawingml/2006/main" xmlns:p="http://schemas.openxmlformats.org/presentationml/2006/main" xmlns:r="http://schemas.openxmlformats.org/officeDocument/2006/relationships">
   <p:cSld>
     <p:spTree>

--- a/ai101/slides/week-03.pptx
+++ b/ai101/slides/week-03.pptx
@@ -36,6 +36,7 @@
     <p:sldId id="284" r:id="rId35"/>
     <p:sldId id="285" r:id="rId36"/>
     <p:sldId id="286" r:id="rId37"/>
+    <p:sldId id="287" r:id="rId38"/>
   </p:sldIdLst>
   <p:sldSz cx="12191695" cy="6858000" type="screen4x3"/>
   <p:notesSz cx="6858000" cy="9144000"/>
@@ -7845,6 +7846,151 @@
 </file>
 
 <file path=ppt/slides/slide31.xml><?xml version="1.0" encoding="utf-8"?>
+<p:sld xmlns:a="http://schemas.openxmlformats.org/drawingml/2006/main" xmlns:p="http://schemas.openxmlformats.org/presentationml/2006/main" xmlns:r="http://schemas.openxmlformats.org/officeDocument/2006/relationships">
+  <p:cSld>
+    <p:spTree>
+      <p:nvGrpSpPr>
+        <p:cNvPr id="1" name=""/>
+        <p:cNvGrpSpPr/>
+        <p:nvPr/>
+      </p:nvGrpSpPr>
+      <p:grpSpPr/>
+      <p:sp>
+        <p:nvSpPr>
+          <p:cNvPr id="2" name="Title 1"/>
+          <p:cNvSpPr>
+            <a:spLocks noGrp="1"/>
+          </p:cNvSpPr>
+          <p:nvPr>
+            <p:ph type="title"/>
+          </p:nvPr>
+        </p:nvSpPr>
+        <p:spPr/>
+        <p:txBody>
+          <a:bodyPr/>
+          <a:lstStyle/>
+          <a:p>
+            <a:r>
+              <a:rPr sz="3800" b="1">
+                <a:solidFill>
+                  <a:srgbClr val="1F2A37"/>
+                </a:solidFill>
+              </a:rPr>
+              <a:t>Checkpoint: the model list</a:t>
+            </a:r>
+          </a:p>
+        </p:txBody>
+      </p:sp>
+      <p:sp>
+        <p:nvSpPr>
+          <p:cNvPr id="3" name="TextBox 2"/>
+          <p:cNvSpPr txBox="1"/>
+          <p:nvPr/>
+        </p:nvSpPr>
+        <p:spPr>
+          <a:xfrm>
+            <a:off x="868680" y="502920"/>
+            <a:ext cx="5486400" cy="457200"/>
+          </a:xfrm>
+          <a:prstGeom prst="rect">
+            <a:avLst/>
+          </a:prstGeom>
+          <a:noFill/>
+        </p:spPr>
+        <p:txBody>
+          <a:bodyPr wrap="none">
+            <a:spAutoFit/>
+          </a:bodyPr>
+          <a:lstStyle/>
+          <a:p>
+            <a:r>
+              <a:rPr sz="1500" b="1">
+                <a:solidFill>
+                  <a:srgbClr val="01AEFD"/>
+                </a:solidFill>
+              </a:rPr>
+              <a:t>CHECKPOINT - RUN IT</a:t>
+            </a:r>
+          </a:p>
+        </p:txBody>
+      </p:sp>
+      <p:sp>
+        <p:nvSpPr>
+          <p:cNvPr id="4" name="TextBox 3"/>
+          <p:cNvSpPr txBox="1"/>
+          <p:nvPr/>
+        </p:nvSpPr>
+        <p:spPr>
+          <a:xfrm>
+            <a:off x="822960" y="1828800"/>
+            <a:ext cx="10515600" cy="4206240"/>
+          </a:xfrm>
+          <a:prstGeom prst="rect">
+            <a:avLst/>
+          </a:prstGeom>
+          <a:noFill/>
+        </p:spPr>
+        <p:txBody>
+          <a:bodyPr wrap="square">
+            <a:spAutoFit/>
+          </a:bodyPr>
+          <a:lstStyle/>
+          <a:p>
+            <a:pPr>
+              <a:spcAft>
+                <a:spcPts val="1400"/>
+              </a:spcAft>
+            </a:pPr>
+            <a:r>
+              <a:rPr sz="2800">
+                <a:solidFill>
+                  <a:srgbClr val="01AEFD"/>
+                </a:solidFill>
+              </a:rPr>
+              <a:t>Press Run and open the Console panel. You should see the list of models the server offers. That list comes from the school AI, so this one needs the classroom network.</a:t>
+            </a:r>
+          </a:p>
+          <a:p>
+            <a:pPr>
+              <a:spcAft>
+                <a:spcPts val="1400"/>
+              </a:spcAft>
+            </a:pPr>
+            <a:r>
+              <a:rPr sz="2400">
+                <a:solidFill>
+                  <a:srgbClr val="1F2A37"/>
+                </a:solidFill>
+              </a:rPr>
+              <a:t>• Run it in the classroom, or press Show the output in the web deck.</a:t>
+            </a:r>
+          </a:p>
+          <a:p>
+            <a:pPr>
+              <a:spcAft>
+                <a:spcPts val="1400"/>
+              </a:spcAft>
+            </a:pPr>
+            <a:r>
+              <a:rPr sz="2400">
+                <a:solidFill>
+                  <a:srgbClr val="1F2A37"/>
+                </a:solidFill>
+              </a:rPr>
+              <a:t>• Everyone's screen should match this.</a:t>
+            </a:r>
+          </a:p>
+        </p:txBody>
+      </p:sp>
+    </p:spTree>
+  </p:cSld>
+  <p:clrMapOvr>
+    <a:masterClrMapping/>
+  </p:clrMapOvr>
+</p:sld>
+</file>
+
+<file path=ppt/slides/slide32.xml><?xml version="1.0" encoding="utf-8"?>
 <p:sld xmlns:a="http://schemas.openxmlformats.org/drawingml/2006/main" xmlns:p="http://schemas.openxmlformats.org/presentationml/2006/main" xmlns:r="http://schemas.openxmlformats.org/officeDocument/2006/relationships">
   <p:cSld>
     <p:spTree>

--- a/ai101/slides/week-03.pptx
+++ b/ai101/slides/week-03.pptx
@@ -7947,7 +7947,7 @@
                   <a:srgbClr val="01AEFD"/>
                 </a:solidFill>
               </a:rPr>
-              <a:t>Press Run and open the Console panel. You should see the list of models the server offers. That list comes from the school AI, so this one needs the classroom network.</a:t>
+              <a:t>Press Run and open the Console panel. You should see the list of models the server offers. That list comes from the school AI, so this one needs the school network.</a:t>
             </a:r>
           </a:p>
           <a:p>

--- a/ai101/slides/week-03.pptx
+++ b/ai101/slides/week-03.pptx
@@ -37,6 +37,14 @@
     <p:sldId id="285" r:id="rId36"/>
     <p:sldId id="286" r:id="rId37"/>
     <p:sldId id="287" r:id="rId38"/>
+    <p:sldId id="288" r:id="rId39"/>
+    <p:sldId id="289" r:id="rId40"/>
+    <p:sldId id="290" r:id="rId41"/>
+    <p:sldId id="291" r:id="rId42"/>
+    <p:sldId id="292" r:id="rId43"/>
+    <p:sldId id="293" r:id="rId44"/>
+    <p:sldId id="294" r:id="rId45"/>
+    <p:sldId id="295" r:id="rId46"/>
   </p:sldIdLst>
   <p:sldSz cx="12191695" cy="6858000" type="screen4x3"/>
   <p:notesSz cx="6858000" cy="9144000"/>
@@ -7106,7 +7114,7 @@
                   <a:srgbClr val="1F2A37"/>
                 </a:solidFill>
               </a:rPr>
-              <a:t>The internet is slow</a:t>
+              <a:t>What does  fetch(url)  do?</a:t>
             </a:r>
           </a:p>
         </p:txBody>
@@ -7114,6 +7122,39 @@
       <p:sp>
         <p:nvSpPr>
           <p:cNvPr id="3" name="TextBox 2"/>
+          <p:cNvSpPr txBox="1"/>
+          <p:nvPr/>
+        </p:nvSpPr>
+        <p:spPr>
+          <a:xfrm>
+            <a:off x="868680" y="502920"/>
+            <a:ext cx="5486400" cy="457200"/>
+          </a:xfrm>
+          <a:prstGeom prst="rect">
+            <a:avLst/>
+          </a:prstGeom>
+          <a:noFill/>
+        </p:spPr>
+        <p:txBody>
+          <a:bodyPr wrap="none">
+            <a:spAutoFit/>
+          </a:bodyPr>
+          <a:lstStyle/>
+          <a:p>
+            <a:r>
+              <a:rPr sz="1500" b="1">
+                <a:solidFill>
+                  <a:srgbClr val="01AEFD"/>
+                </a:solidFill>
+              </a:rPr>
+              <a:t>QUICK CHECK</a:t>
+            </a:r>
+          </a:p>
+        </p:txBody>
+      </p:sp>
+      <p:sp>
+        <p:nvSpPr>
+          <p:cNvPr id="4" name="TextBox 3"/>
           <p:cNvSpPr txBox="1"/>
           <p:nvPr/>
         </p:nvSpPr>
@@ -7139,12 +7180,12 @@
               </a:spcAft>
             </a:pPr>
             <a:r>
-              <a:rPr sz="2800">
-                <a:solidFill>
-                  <a:srgbClr val="01AEFD"/>
-                </a:solidFill>
-              </a:rPr>
-              <a:t>await = wait here for the answer</a:t>
+              <a:rPr sz="2400">
+                <a:solidFill>
+                  <a:srgbClr val="1F2A37"/>
+                </a:solidFill>
+              </a:rPr>
+              <a:t>• A. Deletes a file</a:t>
             </a:r>
           </a:p>
           <a:p>
@@ -7159,7 +7200,7 @@
                   <a:srgbClr val="1F2A37"/>
                 </a:solidFill>
               </a:rPr>
-              <a:t>• Without await you carry on with nothing</a:t>
+              <a:t>• B. Creates an HTML element</a:t>
             </a:r>
           </a:p>
           <a:p>
@@ -7174,7 +7215,37 @@
                   <a:srgbClr val="1F2A37"/>
                 </a:solidFill>
               </a:rPr>
-              <a:t>• async marks a function that can be waited for</a:t>
+              <a:t>• C. Loops over a list</a:t>
+            </a:r>
+          </a:p>
+          <a:p>
+            <a:pPr>
+              <a:spcAft>
+                <a:spcPts val="1400"/>
+              </a:spcAft>
+            </a:pPr>
+            <a:r>
+              <a:rPr sz="2400">
+                <a:solidFill>
+                  <a:srgbClr val="1F2A37"/>
+                </a:solidFill>
+              </a:rPr>
+              <a:t>• D. Asks a server for something over the network</a:t>
+            </a:r>
+          </a:p>
+          <a:p>
+            <a:pPr>
+              <a:spcAft>
+                <a:spcPts val="1400"/>
+              </a:spcAft>
+            </a:pPr>
+            <a:r>
+              <a:rPr sz="2400">
+                <a:solidFill>
+                  <a:srgbClr val="1F2A37"/>
+                </a:solidFill>
+              </a:rPr>
+              <a:t>• Pick one - the answer is on the next slide.</a:t>
             </a:r>
           </a:p>
         </p:txBody>
@@ -7218,7 +7289,7 @@
                   <a:srgbClr val="1F2A37"/>
                 </a:solidFill>
               </a:rPr>
-              <a:t>This address only works at school</a:t>
+              <a:t>What does  fetch(url)  do?</a:t>
             </a:r>
           </a:p>
         </p:txBody>
@@ -7226,6 +7297,39 @@
       <p:sp>
         <p:nvSpPr>
           <p:cNvPr id="3" name="TextBox 2"/>
+          <p:cNvSpPr txBox="1"/>
+          <p:nvPr/>
+        </p:nvSpPr>
+        <p:spPr>
+          <a:xfrm>
+            <a:off x="868680" y="502920"/>
+            <a:ext cx="5486400" cy="457200"/>
+          </a:xfrm>
+          <a:prstGeom prst="rect">
+            <a:avLst/>
+          </a:prstGeom>
+          <a:noFill/>
+        </p:spPr>
+        <p:txBody>
+          <a:bodyPr wrap="none">
+            <a:spAutoFit/>
+          </a:bodyPr>
+          <a:lstStyle/>
+          <a:p>
+            <a:r>
+              <a:rPr sz="1500" b="1">
+                <a:solidFill>
+                  <a:srgbClr val="01AEFD"/>
+                </a:solidFill>
+              </a:rPr>
+              <a:t>ANSWER</a:t>
+            </a:r>
+          </a:p>
+        </p:txBody>
+      </p:sp>
+      <p:sp>
+        <p:nvSpPr>
+          <p:cNvPr id="4" name="TextBox 3"/>
           <p:cNvSpPr txBox="1"/>
           <p:nvPr/>
         </p:nvSpPr>
@@ -7256,7 +7360,7 @@
                   <a:srgbClr val="1F2A37"/>
                 </a:solidFill>
               </a:rPr>
-              <a:t>• That machine is in this building</a:t>
+              <a:t>• A. Deletes a file</a:t>
             </a:r>
           </a:p>
           <a:p>
@@ -7271,7 +7375,7 @@
                   <a:srgbClr val="1F2A37"/>
                 </a:solidFill>
               </a:rPr>
-              <a:t>• At home it will not connect - that is expected</a:t>
+              <a:t>• B. Creates an HTML element</a:t>
             </a:r>
           </a:p>
           <a:p>
@@ -7286,7 +7390,37 @@
                   <a:srgbClr val="1F2A37"/>
                 </a:solidFill>
               </a:rPr>
-              <a:t>• But the code is not throwaway</a:t>
+              <a:t>• C. Loops over a list</a:t>
+            </a:r>
+          </a:p>
+          <a:p>
+            <a:pPr>
+              <a:spcAft>
+                <a:spcPts val="1400"/>
+              </a:spcAft>
+            </a:pPr>
+            <a:r>
+              <a:rPr sz="2400">
+                <a:solidFill>
+                  <a:srgbClr val="1F2A37"/>
+                </a:solidFill>
+              </a:rPr>
+              <a:t>• D. Asks a server for something over the network (correct)</a:t>
+            </a:r>
+          </a:p>
+          <a:p>
+            <a:pPr>
+              <a:spcAft>
+                <a:spcPts val="1400"/>
+              </a:spcAft>
+            </a:pPr>
+            <a:r>
+              <a:rPr sz="2400">
+                <a:solidFill>
+                  <a:srgbClr val="1F2A37"/>
+                </a:solidFill>
+              </a:rPr>
+              <a:t>• fetch sends a request across the network and comes back with a reply.</a:t>
             </a:r>
           </a:p>
         </p:txBody>
@@ -7330,7 +7464,7 @@
                   <a:srgbClr val="1F2A37"/>
                 </a:solidFill>
               </a:rPr>
-              <a:t>Same format as OpenAI</a:t>
+              <a:t>What does  await  do?</a:t>
             </a:r>
           </a:p>
         </p:txBody>
@@ -7338,6 +7472,39 @@
       <p:sp>
         <p:nvSpPr>
           <p:cNvPr id="3" name="TextBox 2"/>
+          <p:cNvSpPr txBox="1"/>
+          <p:nvPr/>
+        </p:nvSpPr>
+        <p:spPr>
+          <a:xfrm>
+            <a:off x="868680" y="502920"/>
+            <a:ext cx="5486400" cy="457200"/>
+          </a:xfrm>
+          <a:prstGeom prst="rect">
+            <a:avLst/>
+          </a:prstGeom>
+          <a:noFill/>
+        </p:spPr>
+        <p:txBody>
+          <a:bodyPr wrap="none">
+            <a:spAutoFit/>
+          </a:bodyPr>
+          <a:lstStyle/>
+          <a:p>
+            <a:r>
+              <a:rPr sz="1500" b="1">
+                <a:solidFill>
+                  <a:srgbClr val="01AEFD"/>
+                </a:solidFill>
+              </a:rPr>
+              <a:t>QUICK CHECK</a:t>
+            </a:r>
+          </a:p>
+        </p:txBody>
+      </p:sp>
+      <p:sp>
+        <p:nvSpPr>
+          <p:cNvPr id="4" name="TextBox 3"/>
           <p:cNvSpPr txBox="1"/>
           <p:nvPr/>
         </p:nvSpPr>
@@ -7363,12 +7530,12 @@
               </a:spcAft>
             </a:pPr>
             <a:r>
-              <a:rPr sz="2800">
-                <a:solidFill>
-                  <a:srgbClr val="01AEFD"/>
-                </a:solidFill>
-              </a:rPr>
-              <a:t>On purpose</a:t>
+              <a:rPr sz="2400">
+                <a:solidFill>
+                  <a:srgbClr val="1F2A37"/>
+                </a:solidFill>
+              </a:rPr>
+              <a:t>• A. Skips the request</a:t>
             </a:r>
           </a:p>
           <a:p>
@@ -7383,7 +7550,7 @@
                   <a:srgbClr val="1F2A37"/>
                 </a:solidFill>
               </a:rPr>
-              <a:t>• Got your own OpenAI key? Change AI_BASE</a:t>
+              <a:t>• B. Repeats the request</a:t>
             </a:r>
           </a:p>
           <a:p>
@@ -7398,7 +7565,7 @@
                   <a:srgbClr val="1F2A37"/>
                 </a:solidFill>
               </a:rPr>
-              <a:t>• Change API_KEY</a:t>
+              <a:t>• C. Speeds the code up</a:t>
             </a:r>
           </a:p>
           <a:p>
@@ -7413,7 +7580,7 @@
                   <a:srgbClr val="1F2A37"/>
                 </a:solidFill>
               </a:rPr>
-              <a:t>• Change the two model names in index.html</a:t>
+              <a:t>• D. Waits for the reply before the next line runs</a:t>
             </a:r>
           </a:p>
           <a:p>
@@ -7428,7 +7595,7 @@
                   <a:srgbClr val="1F2A37"/>
                 </a:solidFill>
               </a:rPr>
-              <a:t>• Nothing else moves</a:t>
+              <a:t>• Pick one - the answer is on the next slide.</a:t>
             </a:r>
           </a:p>
         </p:txBody>
@@ -7472,7 +7639,7 @@
                   <a:srgbClr val="1F2A37"/>
                 </a:solidFill>
               </a:rPr>
-              <a:t>A key in a web page is public</a:t>
+              <a:t>What does  await  do?</a:t>
             </a:r>
           </a:p>
         </p:txBody>
@@ -7480,6 +7647,39 @@
       <p:sp>
         <p:nvSpPr>
           <p:cNvPr id="3" name="TextBox 2"/>
+          <p:cNvSpPr txBox="1"/>
+          <p:nvPr/>
+        </p:nvSpPr>
+        <p:spPr>
+          <a:xfrm>
+            <a:off x="868680" y="502920"/>
+            <a:ext cx="5486400" cy="457200"/>
+          </a:xfrm>
+          <a:prstGeom prst="rect">
+            <a:avLst/>
+          </a:prstGeom>
+          <a:noFill/>
+        </p:spPr>
+        <p:txBody>
+          <a:bodyPr wrap="none">
+            <a:spAutoFit/>
+          </a:bodyPr>
+          <a:lstStyle/>
+          <a:p>
+            <a:r>
+              <a:rPr sz="1500" b="1">
+                <a:solidFill>
+                  <a:srgbClr val="01AEFD"/>
+                </a:solidFill>
+              </a:rPr>
+              <a:t>ANSWER</a:t>
+            </a:r>
+          </a:p>
+        </p:txBody>
+      </p:sp>
+      <p:sp>
+        <p:nvSpPr>
+          <p:cNvPr id="4" name="TextBox 3"/>
           <p:cNvSpPr txBox="1"/>
           <p:nvPr/>
         </p:nvSpPr>
@@ -7510,7 +7710,7 @@
                   <a:srgbClr val="1F2A37"/>
                 </a:solidFill>
               </a:rPr>
-              <a:t>• Anyone who opens the page can read it</a:t>
+              <a:t>• A. Skips the request</a:t>
             </a:r>
           </a:p>
           <a:p>
@@ -7525,7 +7725,7 @@
                   <a:srgbClr val="1F2A37"/>
                 </a:solidFill>
               </a:rPr>
-              <a:t>• Fine for a class key: limited, no bill</a:t>
+              <a:t>• B. Repeats the request</a:t>
             </a:r>
           </a:p>
           <a:p>
@@ -7540,7 +7740,7 @@
                   <a:srgbClr val="1F2A37"/>
                 </a:solidFill>
               </a:rPr>
-              <a:t>• NOT fine for a personal paid key</a:t>
+              <a:t>• C. Speeds the code up</a:t>
             </a:r>
           </a:p>
           <a:p>
@@ -7555,7 +7755,22 @@
                   <a:srgbClr val="1F2A37"/>
                 </a:solidFill>
               </a:rPr>
-              <a:t>• Real apps keep the key on a server</a:t>
+              <a:t>• D. Waits for the reply before the next line runs (correct)</a:t>
+            </a:r>
+          </a:p>
+          <a:p>
+            <a:pPr>
+              <a:spcAft>
+                <a:spcPts val="1400"/>
+              </a:spcAft>
+            </a:pPr>
+            <a:r>
+              <a:rPr sz="2400">
+                <a:solidFill>
+                  <a:srgbClr val="1F2A37"/>
+                </a:solidFill>
+              </a:rPr>
+              <a:t>• await pauses on that line until the slow thing finishes.</a:t>
             </a:r>
           </a:p>
         </p:txBody>
@@ -7764,7 +7979,7 @@
                   <a:srgbClr val="1F2A37"/>
                 </a:solidFill>
               </a:rPr>
-              <a:t>Status codes</a:t>
+              <a:t>{ role: 'user', content: text }  is a(n)...?</a:t>
             </a:r>
           </a:p>
         </p:txBody>
@@ -7772,6 +7987,39 @@
       <p:sp>
         <p:nvSpPr>
           <p:cNvPr id="3" name="TextBox 2"/>
+          <p:cNvSpPr txBox="1"/>
+          <p:nvPr/>
+        </p:nvSpPr>
+        <p:spPr>
+          <a:xfrm>
+            <a:off x="868680" y="502920"/>
+            <a:ext cx="5486400" cy="457200"/>
+          </a:xfrm>
+          <a:prstGeom prst="rect">
+            <a:avLst/>
+          </a:prstGeom>
+          <a:noFill/>
+        </p:spPr>
+        <p:txBody>
+          <a:bodyPr wrap="none">
+            <a:spAutoFit/>
+          </a:bodyPr>
+          <a:lstStyle/>
+          <a:p>
+            <a:r>
+              <a:rPr sz="1500" b="1">
+                <a:solidFill>
+                  <a:srgbClr val="01AEFD"/>
+                </a:solidFill>
+              </a:rPr>
+              <a:t>QUICK CHECK</a:t>
+            </a:r>
+          </a:p>
+        </p:txBody>
+      </p:sp>
+      <p:sp>
+        <p:nvSpPr>
+          <p:cNvPr id="4" name="TextBox 3"/>
           <p:cNvSpPr txBox="1"/>
           <p:nvPr/>
         </p:nvSpPr>
@@ -7802,7 +8050,7 @@
                   <a:srgbClr val="1F2A37"/>
                 </a:solidFill>
               </a:rPr>
-              <a:t>• 200 - fine, here you go</a:t>
+              <a:t>• A. array</a:t>
             </a:r>
           </a:p>
           <a:p>
@@ -7817,7 +8065,7 @@
                   <a:srgbClr val="1F2A37"/>
                 </a:solidFill>
               </a:rPr>
-              <a:t>• 401 - I do not believe who you say you are</a:t>
+              <a:t>• B. string</a:t>
             </a:r>
           </a:p>
           <a:p>
@@ -7832,7 +8080,37 @@
                   <a:srgbClr val="1F2A37"/>
                 </a:solidFill>
               </a:rPr>
-              <a:t>• 404 - no such thing here</a:t>
+              <a:t>• C. object with named fields</a:t>
+            </a:r>
+          </a:p>
+          <a:p>
+            <a:pPr>
+              <a:spcAft>
+                <a:spcPts val="1400"/>
+              </a:spcAft>
+            </a:pPr>
+            <a:r>
+              <a:rPr sz="2400">
+                <a:solidFill>
+                  <a:srgbClr val="1F2A37"/>
+                </a:solidFill>
+              </a:rPr>
+              <a:t>• D. function</a:t>
+            </a:r>
+          </a:p>
+          <a:p>
+            <a:pPr>
+              <a:spcAft>
+                <a:spcPts val="1400"/>
+              </a:spcAft>
+            </a:pPr>
+            <a:r>
+              <a:rPr sz="2400">
+                <a:solidFill>
+                  <a:srgbClr val="1F2A37"/>
+                </a:solidFill>
+              </a:rPr>
+              <a:t>• Pick one - the answer is on the next slide.</a:t>
             </a:r>
           </a:p>
         </p:txBody>
@@ -7876,7 +8154,7 @@
                   <a:srgbClr val="1F2A37"/>
                 </a:solidFill>
               </a:rPr>
-              <a:t>Checkpoint: the model list</a:t>
+              <a:t>{ role: 'user', content: text }  is a(n)...?</a:t>
             </a:r>
           </a:p>
         </p:txBody>
@@ -7909,7 +8187,7 @@
                   <a:srgbClr val="01AEFD"/>
                 </a:solidFill>
               </a:rPr>
-              <a:t>CHECKPOINT - RUN IT</a:t>
+              <a:t>ANSWER</a:t>
             </a:r>
           </a:p>
         </p:txBody>
@@ -7942,12 +8220,12 @@
               </a:spcAft>
             </a:pPr>
             <a:r>
-              <a:rPr sz="2800">
-                <a:solidFill>
-                  <a:srgbClr val="01AEFD"/>
-                </a:solidFill>
-              </a:rPr>
-              <a:t>Press Run and open the Console panel. You should see the list of models the server offers. That list comes from the school AI, so this one needs the school network.</a:t>
+              <a:rPr sz="2400">
+                <a:solidFill>
+                  <a:srgbClr val="1F2A37"/>
+                </a:solidFill>
+              </a:rPr>
+              <a:t>• A. array</a:t>
             </a:r>
           </a:p>
           <a:p>
@@ -7962,7 +8240,7 @@
                   <a:srgbClr val="1F2A37"/>
                 </a:solidFill>
               </a:rPr>
-              <a:t>• Run it in the classroom, or press Show the output in the web deck.</a:t>
+              <a:t>• B. string</a:t>
             </a:r>
           </a:p>
           <a:p>
@@ -7977,7 +8255,37 @@
                   <a:srgbClr val="1F2A37"/>
                 </a:solidFill>
               </a:rPr>
-              <a:t>• Everyone's screen should match this.</a:t>
+              <a:t>• C. object with named fields (correct)</a:t>
+            </a:r>
+          </a:p>
+          <a:p>
+            <a:pPr>
+              <a:spcAft>
+                <a:spcPts val="1400"/>
+              </a:spcAft>
+            </a:pPr>
+            <a:r>
+              <a:rPr sz="2400">
+                <a:solidFill>
+                  <a:srgbClr val="1F2A37"/>
+                </a:solidFill>
+              </a:rPr>
+              <a:t>• D. function</a:t>
+            </a:r>
+          </a:p>
+          <a:p>
+            <a:pPr>
+              <a:spcAft>
+                <a:spcPts val="1400"/>
+              </a:spcAft>
+            </a:pPr>
+            <a:r>
+              <a:rPr sz="2400">
+                <a:solidFill>
+                  <a:srgbClr val="1F2A37"/>
+                </a:solidFill>
+              </a:rPr>
+              <a:t>• Curly braces with key: value pairs make an object.</a:t>
             </a:r>
           </a:p>
         </p:txBody>
@@ -8021,7 +8329,7 @@
                   <a:srgbClr val="1F2A37"/>
                 </a:solidFill>
               </a:rPr>
-              <a:t>Watch the Console</a:t>
+              <a:t>Why must a function be marked  async  here? (uses week 3 idea)</a:t>
             </a:r>
           </a:p>
         </p:txBody>
@@ -8029,6 +8337,39 @@
       <p:sp>
         <p:nvSpPr>
           <p:cNvPr id="3" name="TextBox 2"/>
+          <p:cNvSpPr txBox="1"/>
+          <p:nvPr/>
+        </p:nvSpPr>
+        <p:spPr>
+          <a:xfrm>
+            <a:off x="868680" y="502920"/>
+            <a:ext cx="5486400" cy="457200"/>
+          </a:xfrm>
+          <a:prstGeom prst="rect">
+            <a:avLst/>
+          </a:prstGeom>
+          <a:noFill/>
+        </p:spPr>
+        <p:txBody>
+          <a:bodyPr wrap="none">
+            <a:spAutoFit/>
+          </a:bodyPr>
+          <a:lstStyle/>
+          <a:p>
+            <a:r>
+              <a:rPr sz="1500" b="1">
+                <a:solidFill>
+                  <a:srgbClr val="01AEFD"/>
+                </a:solidFill>
+              </a:rPr>
+              <a:t>QUICK CHECK</a:t>
+            </a:r>
+          </a:p>
+        </p:txBody>
+      </p:sp>
+      <p:sp>
+        <p:nvSpPr>
+          <p:cNvPr id="4" name="TextBox 3"/>
           <p:cNvSpPr txBox="1"/>
           <p:nvPr/>
         </p:nvSpPr>
@@ -8059,7 +8400,7 @@
                   <a:srgbClr val="1F2A37"/>
                 </a:solidFill>
               </a:rPr>
-              <a:t>• -&gt; GET /v1/models</a:t>
+              <a:t>• A. So it can use await inside</a:t>
             </a:r>
           </a:p>
           <a:p>
@@ -8074,7 +8415,7 @@
                   <a:srgbClr val="1F2A37"/>
                 </a:solidFill>
               </a:rPr>
-              <a:t>• &lt;- 200 in 84 ms</a:t>
+              <a:t>• B. So it runs twice</a:t>
             </a:r>
           </a:p>
           <a:p>
@@ -8089,7 +8430,962 @@
                   <a:srgbClr val="1F2A37"/>
                 </a:solidFill>
               </a:rPr>
-              <a:t>• That is your request leaving and coming back</a:t>
+              <a:t>• C. So it becomes a CSS rule</a:t>
+            </a:r>
+          </a:p>
+          <a:p>
+            <a:pPr>
+              <a:spcAft>
+                <a:spcPts val="1400"/>
+              </a:spcAft>
+            </a:pPr>
+            <a:r>
+              <a:rPr sz="2400">
+                <a:solidFill>
+                  <a:srgbClr val="1F2A37"/>
+                </a:solidFill>
+              </a:rPr>
+              <a:t>• D. So it prints to the console</a:t>
+            </a:r>
+          </a:p>
+          <a:p>
+            <a:pPr>
+              <a:spcAft>
+                <a:spcPts val="1400"/>
+              </a:spcAft>
+            </a:pPr>
+            <a:r>
+              <a:rPr sz="2400">
+                <a:solidFill>
+                  <a:srgbClr val="1F2A37"/>
+                </a:solidFill>
+              </a:rPr>
+              <a:t>• Pick one - the answer is on the next slide.</a:t>
+            </a:r>
+          </a:p>
+        </p:txBody>
+      </p:sp>
+    </p:spTree>
+  </p:cSld>
+  <p:clrMapOvr>
+    <a:masterClrMapping/>
+  </p:clrMapOvr>
+</p:sld>
+</file>
+
+<file path=ppt/slides/slide33.xml><?xml version="1.0" encoding="utf-8"?>
+<p:sld xmlns:a="http://schemas.openxmlformats.org/drawingml/2006/main" xmlns:p="http://schemas.openxmlformats.org/presentationml/2006/main" xmlns:r="http://schemas.openxmlformats.org/officeDocument/2006/relationships">
+  <p:cSld>
+    <p:spTree>
+      <p:nvGrpSpPr>
+        <p:cNvPr id="1" name=""/>
+        <p:cNvGrpSpPr/>
+        <p:nvPr/>
+      </p:nvGrpSpPr>
+      <p:grpSpPr/>
+      <p:sp>
+        <p:nvSpPr>
+          <p:cNvPr id="2" name="Title 1"/>
+          <p:cNvSpPr>
+            <a:spLocks noGrp="1"/>
+          </p:cNvSpPr>
+          <p:nvPr>
+            <p:ph type="title"/>
+          </p:nvPr>
+        </p:nvSpPr>
+        <p:spPr/>
+        <p:txBody>
+          <a:bodyPr/>
+          <a:lstStyle/>
+          <a:p>
+            <a:r>
+              <a:rPr sz="3800" b="1">
+                <a:solidFill>
+                  <a:srgbClr val="1F2A37"/>
+                </a:solidFill>
+              </a:rPr>
+              <a:t>Why must a function be marked  async  here? (uses week 3 idea)</a:t>
+            </a:r>
+          </a:p>
+        </p:txBody>
+      </p:sp>
+      <p:sp>
+        <p:nvSpPr>
+          <p:cNvPr id="3" name="TextBox 2"/>
+          <p:cNvSpPr txBox="1"/>
+          <p:nvPr/>
+        </p:nvSpPr>
+        <p:spPr>
+          <a:xfrm>
+            <a:off x="868680" y="502920"/>
+            <a:ext cx="5486400" cy="457200"/>
+          </a:xfrm>
+          <a:prstGeom prst="rect">
+            <a:avLst/>
+          </a:prstGeom>
+          <a:noFill/>
+        </p:spPr>
+        <p:txBody>
+          <a:bodyPr wrap="none">
+            <a:spAutoFit/>
+          </a:bodyPr>
+          <a:lstStyle/>
+          <a:p>
+            <a:r>
+              <a:rPr sz="1500" b="1">
+                <a:solidFill>
+                  <a:srgbClr val="01AEFD"/>
+                </a:solidFill>
+              </a:rPr>
+              <a:t>ANSWER</a:t>
+            </a:r>
+          </a:p>
+        </p:txBody>
+      </p:sp>
+      <p:sp>
+        <p:nvSpPr>
+          <p:cNvPr id="4" name="TextBox 3"/>
+          <p:cNvSpPr txBox="1"/>
+          <p:nvPr/>
+        </p:nvSpPr>
+        <p:spPr>
+          <a:xfrm>
+            <a:off x="822960" y="1828800"/>
+            <a:ext cx="10515600" cy="4206240"/>
+          </a:xfrm>
+          <a:prstGeom prst="rect">
+            <a:avLst/>
+          </a:prstGeom>
+          <a:noFill/>
+        </p:spPr>
+        <p:txBody>
+          <a:bodyPr wrap="square">
+            <a:spAutoFit/>
+          </a:bodyPr>
+          <a:lstStyle/>
+          <a:p>
+            <a:pPr>
+              <a:spcAft>
+                <a:spcPts val="1400"/>
+              </a:spcAft>
+            </a:pPr>
+            <a:r>
+              <a:rPr sz="2400">
+                <a:solidFill>
+                  <a:srgbClr val="1F2A37"/>
+                </a:solidFill>
+              </a:rPr>
+              <a:t>• A. So it can use await inside (correct)</a:t>
+            </a:r>
+          </a:p>
+          <a:p>
+            <a:pPr>
+              <a:spcAft>
+                <a:spcPts val="1400"/>
+              </a:spcAft>
+            </a:pPr>
+            <a:r>
+              <a:rPr sz="2400">
+                <a:solidFill>
+                  <a:srgbClr val="1F2A37"/>
+                </a:solidFill>
+              </a:rPr>
+              <a:t>• B. So it runs twice</a:t>
+            </a:r>
+          </a:p>
+          <a:p>
+            <a:pPr>
+              <a:spcAft>
+                <a:spcPts val="1400"/>
+              </a:spcAft>
+            </a:pPr>
+            <a:r>
+              <a:rPr sz="2400">
+                <a:solidFill>
+                  <a:srgbClr val="1F2A37"/>
+                </a:solidFill>
+              </a:rPr>
+              <a:t>• C. So it becomes a CSS rule</a:t>
+            </a:r>
+          </a:p>
+          <a:p>
+            <a:pPr>
+              <a:spcAft>
+                <a:spcPts val="1400"/>
+              </a:spcAft>
+            </a:pPr>
+            <a:r>
+              <a:rPr sz="2400">
+                <a:solidFill>
+                  <a:srgbClr val="1F2A37"/>
+                </a:solidFill>
+              </a:rPr>
+              <a:t>• D. So it prints to the console</a:t>
+            </a:r>
+          </a:p>
+          <a:p>
+            <a:pPr>
+              <a:spcAft>
+                <a:spcPts val="1400"/>
+              </a:spcAft>
+            </a:pPr>
+            <a:r>
+              <a:rPr sz="2400">
+                <a:solidFill>
+                  <a:srgbClr val="1F2A37"/>
+                </a:solidFill>
+              </a:rPr>
+              <a:t>• await only works inside a function marked async.</a:t>
+            </a:r>
+          </a:p>
+        </p:txBody>
+      </p:sp>
+    </p:spTree>
+  </p:cSld>
+  <p:clrMapOvr>
+    <a:masterClrMapping/>
+  </p:clrMapOvr>
+</p:sld>
+</file>
+
+<file path=ppt/slides/slide34.xml><?xml version="1.0" encoding="utf-8"?>
+<p:sld xmlns:a="http://schemas.openxmlformats.org/drawingml/2006/main" xmlns:p="http://schemas.openxmlformats.org/presentationml/2006/main" xmlns:r="http://schemas.openxmlformats.org/officeDocument/2006/relationships">
+  <p:cSld>
+    <p:spTree>
+      <p:nvGrpSpPr>
+        <p:cNvPr id="1" name=""/>
+        <p:cNvGrpSpPr/>
+        <p:nvPr/>
+      </p:nvGrpSpPr>
+      <p:grpSpPr/>
+      <p:sp>
+        <p:nvSpPr>
+          <p:cNvPr id="2" name="Title 1"/>
+          <p:cNvSpPr>
+            <a:spLocks noGrp="1"/>
+          </p:cNvSpPr>
+          <p:nvPr>
+            <p:ph type="title"/>
+          </p:nvPr>
+        </p:nvSpPr>
+        <p:spPr/>
+        <p:txBody>
+          <a:bodyPr/>
+          <a:lstStyle/>
+          <a:p>
+            <a:r>
+              <a:rPr sz="3800" b="1">
+                <a:solidFill>
+                  <a:srgbClr val="1F2A37"/>
+                </a:solidFill>
+              </a:rPr>
+              <a:t>The internet is slow</a:t>
+            </a:r>
+          </a:p>
+        </p:txBody>
+      </p:sp>
+      <p:sp>
+        <p:nvSpPr>
+          <p:cNvPr id="3" name="TextBox 2"/>
+          <p:cNvSpPr txBox="1"/>
+          <p:nvPr/>
+        </p:nvSpPr>
+        <p:spPr>
+          <a:xfrm>
+            <a:off x="822960" y="1828800"/>
+            <a:ext cx="10515600" cy="4206240"/>
+          </a:xfrm>
+          <a:prstGeom prst="rect">
+            <a:avLst/>
+          </a:prstGeom>
+          <a:noFill/>
+        </p:spPr>
+        <p:txBody>
+          <a:bodyPr wrap="square">
+            <a:spAutoFit/>
+          </a:bodyPr>
+          <a:lstStyle/>
+          <a:p>
+            <a:pPr>
+              <a:spcAft>
+                <a:spcPts val="1400"/>
+              </a:spcAft>
+            </a:pPr>
+            <a:r>
+              <a:rPr sz="2800">
+                <a:solidFill>
+                  <a:srgbClr val="01AEFD"/>
+                </a:solidFill>
+              </a:rPr>
+              <a:t>await = wait here for the answer</a:t>
+            </a:r>
+          </a:p>
+          <a:p>
+            <a:pPr>
+              <a:spcAft>
+                <a:spcPts val="1400"/>
+              </a:spcAft>
+            </a:pPr>
+            <a:r>
+              <a:rPr sz="2400">
+                <a:solidFill>
+                  <a:srgbClr val="1F2A37"/>
+                </a:solidFill>
+              </a:rPr>
+              <a:t>• Without await you carry on with nothing</a:t>
+            </a:r>
+          </a:p>
+          <a:p>
+            <a:pPr>
+              <a:spcAft>
+                <a:spcPts val="1400"/>
+              </a:spcAft>
+            </a:pPr>
+            <a:r>
+              <a:rPr sz="2400">
+                <a:solidFill>
+                  <a:srgbClr val="1F2A37"/>
+                </a:solidFill>
+              </a:rPr>
+              <a:t>• async marks a function that can be waited for</a:t>
+            </a:r>
+          </a:p>
+        </p:txBody>
+      </p:sp>
+    </p:spTree>
+  </p:cSld>
+  <p:clrMapOvr>
+    <a:masterClrMapping/>
+  </p:clrMapOvr>
+</p:sld>
+</file>
+
+<file path=ppt/slides/slide35.xml><?xml version="1.0" encoding="utf-8"?>
+<p:sld xmlns:a="http://schemas.openxmlformats.org/drawingml/2006/main" xmlns:p="http://schemas.openxmlformats.org/presentationml/2006/main" xmlns:r="http://schemas.openxmlformats.org/officeDocument/2006/relationships">
+  <p:cSld>
+    <p:spTree>
+      <p:nvGrpSpPr>
+        <p:cNvPr id="1" name=""/>
+        <p:cNvGrpSpPr/>
+        <p:nvPr/>
+      </p:nvGrpSpPr>
+      <p:grpSpPr/>
+      <p:sp>
+        <p:nvSpPr>
+          <p:cNvPr id="2" name="Title 1"/>
+          <p:cNvSpPr>
+            <a:spLocks noGrp="1"/>
+          </p:cNvSpPr>
+          <p:nvPr>
+            <p:ph type="title"/>
+          </p:nvPr>
+        </p:nvSpPr>
+        <p:spPr/>
+        <p:txBody>
+          <a:bodyPr/>
+          <a:lstStyle/>
+          <a:p>
+            <a:r>
+              <a:rPr sz="3800" b="1">
+                <a:solidFill>
+                  <a:srgbClr val="1F2A37"/>
+                </a:solidFill>
+              </a:rPr>
+              <a:t>This address only works at school</a:t>
+            </a:r>
+          </a:p>
+        </p:txBody>
+      </p:sp>
+      <p:sp>
+        <p:nvSpPr>
+          <p:cNvPr id="3" name="TextBox 2"/>
+          <p:cNvSpPr txBox="1"/>
+          <p:nvPr/>
+        </p:nvSpPr>
+        <p:spPr>
+          <a:xfrm>
+            <a:off x="822960" y="1828800"/>
+            <a:ext cx="10515600" cy="4206240"/>
+          </a:xfrm>
+          <a:prstGeom prst="rect">
+            <a:avLst/>
+          </a:prstGeom>
+          <a:noFill/>
+        </p:spPr>
+        <p:txBody>
+          <a:bodyPr wrap="square">
+            <a:spAutoFit/>
+          </a:bodyPr>
+          <a:lstStyle/>
+          <a:p>
+            <a:pPr>
+              <a:spcAft>
+                <a:spcPts val="1400"/>
+              </a:spcAft>
+            </a:pPr>
+            <a:r>
+              <a:rPr sz="2400">
+                <a:solidFill>
+                  <a:srgbClr val="1F2A37"/>
+                </a:solidFill>
+              </a:rPr>
+              <a:t>• That machine is in this building</a:t>
+            </a:r>
+          </a:p>
+          <a:p>
+            <a:pPr>
+              <a:spcAft>
+                <a:spcPts val="1400"/>
+              </a:spcAft>
+            </a:pPr>
+            <a:r>
+              <a:rPr sz="2400">
+                <a:solidFill>
+                  <a:srgbClr val="1F2A37"/>
+                </a:solidFill>
+              </a:rPr>
+              <a:t>• At home it will not connect - that is expected</a:t>
+            </a:r>
+          </a:p>
+          <a:p>
+            <a:pPr>
+              <a:spcAft>
+                <a:spcPts val="1400"/>
+              </a:spcAft>
+            </a:pPr>
+            <a:r>
+              <a:rPr sz="2400">
+                <a:solidFill>
+                  <a:srgbClr val="1F2A37"/>
+                </a:solidFill>
+              </a:rPr>
+              <a:t>• But the code is not throwaway</a:t>
+            </a:r>
+          </a:p>
+        </p:txBody>
+      </p:sp>
+    </p:spTree>
+  </p:cSld>
+  <p:clrMapOvr>
+    <a:masterClrMapping/>
+  </p:clrMapOvr>
+</p:sld>
+</file>
+
+<file path=ppt/slides/slide36.xml><?xml version="1.0" encoding="utf-8"?>
+<p:sld xmlns:a="http://schemas.openxmlformats.org/drawingml/2006/main" xmlns:p="http://schemas.openxmlformats.org/presentationml/2006/main" xmlns:r="http://schemas.openxmlformats.org/officeDocument/2006/relationships">
+  <p:cSld>
+    <p:spTree>
+      <p:nvGrpSpPr>
+        <p:cNvPr id="1" name=""/>
+        <p:cNvGrpSpPr/>
+        <p:nvPr/>
+      </p:nvGrpSpPr>
+      <p:grpSpPr/>
+      <p:sp>
+        <p:nvSpPr>
+          <p:cNvPr id="2" name="Title 1"/>
+          <p:cNvSpPr>
+            <a:spLocks noGrp="1"/>
+          </p:cNvSpPr>
+          <p:nvPr>
+            <p:ph type="title"/>
+          </p:nvPr>
+        </p:nvSpPr>
+        <p:spPr/>
+        <p:txBody>
+          <a:bodyPr/>
+          <a:lstStyle/>
+          <a:p>
+            <a:r>
+              <a:rPr sz="3800" b="1">
+                <a:solidFill>
+                  <a:srgbClr val="1F2A37"/>
+                </a:solidFill>
+              </a:rPr>
+              <a:t>Same format as OpenAI</a:t>
+            </a:r>
+          </a:p>
+        </p:txBody>
+      </p:sp>
+      <p:sp>
+        <p:nvSpPr>
+          <p:cNvPr id="3" name="TextBox 2"/>
+          <p:cNvSpPr txBox="1"/>
+          <p:nvPr/>
+        </p:nvSpPr>
+        <p:spPr>
+          <a:xfrm>
+            <a:off x="822960" y="1828800"/>
+            <a:ext cx="10515600" cy="4206240"/>
+          </a:xfrm>
+          <a:prstGeom prst="rect">
+            <a:avLst/>
+          </a:prstGeom>
+          <a:noFill/>
+        </p:spPr>
+        <p:txBody>
+          <a:bodyPr wrap="square">
+            <a:spAutoFit/>
+          </a:bodyPr>
+          <a:lstStyle/>
+          <a:p>
+            <a:pPr>
+              <a:spcAft>
+                <a:spcPts val="1400"/>
+              </a:spcAft>
+            </a:pPr>
+            <a:r>
+              <a:rPr sz="2800">
+                <a:solidFill>
+                  <a:srgbClr val="01AEFD"/>
+                </a:solidFill>
+              </a:rPr>
+              <a:t>On purpose</a:t>
+            </a:r>
+          </a:p>
+          <a:p>
+            <a:pPr>
+              <a:spcAft>
+                <a:spcPts val="1400"/>
+              </a:spcAft>
+            </a:pPr>
+            <a:r>
+              <a:rPr sz="2400">
+                <a:solidFill>
+                  <a:srgbClr val="1F2A37"/>
+                </a:solidFill>
+              </a:rPr>
+              <a:t>• Got your own OpenAI key? Change AI_BASE</a:t>
+            </a:r>
+          </a:p>
+          <a:p>
+            <a:pPr>
+              <a:spcAft>
+                <a:spcPts val="1400"/>
+              </a:spcAft>
+            </a:pPr>
+            <a:r>
+              <a:rPr sz="2400">
+                <a:solidFill>
+                  <a:srgbClr val="1F2A37"/>
+                </a:solidFill>
+              </a:rPr>
+              <a:t>• Change API_KEY</a:t>
+            </a:r>
+          </a:p>
+          <a:p>
+            <a:pPr>
+              <a:spcAft>
+                <a:spcPts val="1400"/>
+              </a:spcAft>
+            </a:pPr>
+            <a:r>
+              <a:rPr sz="2400">
+                <a:solidFill>
+                  <a:srgbClr val="1F2A37"/>
+                </a:solidFill>
+              </a:rPr>
+              <a:t>• Change the two model names in index.html</a:t>
+            </a:r>
+          </a:p>
+          <a:p>
+            <a:pPr>
+              <a:spcAft>
+                <a:spcPts val="1400"/>
+              </a:spcAft>
+            </a:pPr>
+            <a:r>
+              <a:rPr sz="2400">
+                <a:solidFill>
+                  <a:srgbClr val="1F2A37"/>
+                </a:solidFill>
+              </a:rPr>
+              <a:t>• Nothing else moves</a:t>
+            </a:r>
+          </a:p>
+        </p:txBody>
+      </p:sp>
+    </p:spTree>
+  </p:cSld>
+  <p:clrMapOvr>
+    <a:masterClrMapping/>
+  </p:clrMapOvr>
+</p:sld>
+</file>
+
+<file path=ppt/slides/slide37.xml><?xml version="1.0" encoding="utf-8"?>
+<p:sld xmlns:a="http://schemas.openxmlformats.org/drawingml/2006/main" xmlns:p="http://schemas.openxmlformats.org/presentationml/2006/main" xmlns:r="http://schemas.openxmlformats.org/officeDocument/2006/relationships">
+  <p:cSld>
+    <p:spTree>
+      <p:nvGrpSpPr>
+        <p:cNvPr id="1" name=""/>
+        <p:cNvGrpSpPr/>
+        <p:nvPr/>
+      </p:nvGrpSpPr>
+      <p:grpSpPr/>
+      <p:sp>
+        <p:nvSpPr>
+          <p:cNvPr id="2" name="Title 1"/>
+          <p:cNvSpPr>
+            <a:spLocks noGrp="1"/>
+          </p:cNvSpPr>
+          <p:nvPr>
+            <p:ph type="title"/>
+          </p:nvPr>
+        </p:nvSpPr>
+        <p:spPr/>
+        <p:txBody>
+          <a:bodyPr/>
+          <a:lstStyle/>
+          <a:p>
+            <a:r>
+              <a:rPr sz="3800" b="1">
+                <a:solidFill>
+                  <a:srgbClr val="1F2A37"/>
+                </a:solidFill>
+              </a:rPr>
+              <a:t>A key in a web page is public</a:t>
+            </a:r>
+          </a:p>
+        </p:txBody>
+      </p:sp>
+      <p:sp>
+        <p:nvSpPr>
+          <p:cNvPr id="3" name="TextBox 2"/>
+          <p:cNvSpPr txBox="1"/>
+          <p:nvPr/>
+        </p:nvSpPr>
+        <p:spPr>
+          <a:xfrm>
+            <a:off x="822960" y="1828800"/>
+            <a:ext cx="10515600" cy="4206240"/>
+          </a:xfrm>
+          <a:prstGeom prst="rect">
+            <a:avLst/>
+          </a:prstGeom>
+          <a:noFill/>
+        </p:spPr>
+        <p:txBody>
+          <a:bodyPr wrap="square">
+            <a:spAutoFit/>
+          </a:bodyPr>
+          <a:lstStyle/>
+          <a:p>
+            <a:pPr>
+              <a:spcAft>
+                <a:spcPts val="1400"/>
+              </a:spcAft>
+            </a:pPr>
+            <a:r>
+              <a:rPr sz="2400">
+                <a:solidFill>
+                  <a:srgbClr val="1F2A37"/>
+                </a:solidFill>
+              </a:rPr>
+              <a:t>• Anyone who opens the page can read it</a:t>
+            </a:r>
+          </a:p>
+          <a:p>
+            <a:pPr>
+              <a:spcAft>
+                <a:spcPts val="1400"/>
+              </a:spcAft>
+            </a:pPr>
+            <a:r>
+              <a:rPr sz="2400">
+                <a:solidFill>
+                  <a:srgbClr val="1F2A37"/>
+                </a:solidFill>
+              </a:rPr>
+              <a:t>• Fine for a class key: limited, no bill</a:t>
+            </a:r>
+          </a:p>
+          <a:p>
+            <a:pPr>
+              <a:spcAft>
+                <a:spcPts val="1400"/>
+              </a:spcAft>
+            </a:pPr>
+            <a:r>
+              <a:rPr sz="2400">
+                <a:solidFill>
+                  <a:srgbClr val="1F2A37"/>
+                </a:solidFill>
+              </a:rPr>
+              <a:t>• NOT fine for a personal paid key</a:t>
+            </a:r>
+          </a:p>
+          <a:p>
+            <a:pPr>
+              <a:spcAft>
+                <a:spcPts val="1400"/>
+              </a:spcAft>
+            </a:pPr>
+            <a:r>
+              <a:rPr sz="2400">
+                <a:solidFill>
+                  <a:srgbClr val="1F2A37"/>
+                </a:solidFill>
+              </a:rPr>
+              <a:t>• Real apps keep the key on a server</a:t>
+            </a:r>
+          </a:p>
+        </p:txBody>
+      </p:sp>
+    </p:spTree>
+  </p:cSld>
+  <p:clrMapOvr>
+    <a:masterClrMapping/>
+  </p:clrMapOvr>
+</p:sld>
+</file>
+
+<file path=ppt/slides/slide38.xml><?xml version="1.0" encoding="utf-8"?>
+<p:sld xmlns:a="http://schemas.openxmlformats.org/drawingml/2006/main" xmlns:p="http://schemas.openxmlformats.org/presentationml/2006/main" xmlns:r="http://schemas.openxmlformats.org/officeDocument/2006/relationships">
+  <p:cSld>
+    <p:spTree>
+      <p:nvGrpSpPr>
+        <p:cNvPr id="1" name=""/>
+        <p:cNvGrpSpPr/>
+        <p:nvPr/>
+      </p:nvGrpSpPr>
+      <p:grpSpPr/>
+      <p:sp>
+        <p:nvSpPr>
+          <p:cNvPr id="2" name="Title 1"/>
+          <p:cNvSpPr>
+            <a:spLocks noGrp="1"/>
+          </p:cNvSpPr>
+          <p:nvPr>
+            <p:ph type="title"/>
+          </p:nvPr>
+        </p:nvSpPr>
+        <p:spPr/>
+        <p:txBody>
+          <a:bodyPr/>
+          <a:lstStyle/>
+          <a:p>
+            <a:r>
+              <a:rPr sz="3800" b="1">
+                <a:solidFill>
+                  <a:srgbClr val="1F2A37"/>
+                </a:solidFill>
+              </a:rPr>
+              <a:t>Status codes</a:t>
+            </a:r>
+          </a:p>
+        </p:txBody>
+      </p:sp>
+      <p:sp>
+        <p:nvSpPr>
+          <p:cNvPr id="3" name="TextBox 2"/>
+          <p:cNvSpPr txBox="1"/>
+          <p:nvPr/>
+        </p:nvSpPr>
+        <p:spPr>
+          <a:xfrm>
+            <a:off x="822960" y="1828800"/>
+            <a:ext cx="10515600" cy="4206240"/>
+          </a:xfrm>
+          <a:prstGeom prst="rect">
+            <a:avLst/>
+          </a:prstGeom>
+          <a:noFill/>
+        </p:spPr>
+        <p:txBody>
+          <a:bodyPr wrap="square">
+            <a:spAutoFit/>
+          </a:bodyPr>
+          <a:lstStyle/>
+          <a:p>
+            <a:pPr>
+              <a:spcAft>
+                <a:spcPts val="1400"/>
+              </a:spcAft>
+            </a:pPr>
+            <a:r>
+              <a:rPr sz="2400">
+                <a:solidFill>
+                  <a:srgbClr val="1F2A37"/>
+                </a:solidFill>
+              </a:rPr>
+              <a:t>• 200 - fine, here you go</a:t>
+            </a:r>
+          </a:p>
+          <a:p>
+            <a:pPr>
+              <a:spcAft>
+                <a:spcPts val="1400"/>
+              </a:spcAft>
+            </a:pPr>
+            <a:r>
+              <a:rPr sz="2400">
+                <a:solidFill>
+                  <a:srgbClr val="1F2A37"/>
+                </a:solidFill>
+              </a:rPr>
+              <a:t>• 401 - I do not believe who you say you are</a:t>
+            </a:r>
+          </a:p>
+          <a:p>
+            <a:pPr>
+              <a:spcAft>
+                <a:spcPts val="1400"/>
+              </a:spcAft>
+            </a:pPr>
+            <a:r>
+              <a:rPr sz="2400">
+                <a:solidFill>
+                  <a:srgbClr val="1F2A37"/>
+                </a:solidFill>
+              </a:rPr>
+              <a:t>• 404 - no such thing here</a:t>
+            </a:r>
+          </a:p>
+        </p:txBody>
+      </p:sp>
+    </p:spTree>
+  </p:cSld>
+  <p:clrMapOvr>
+    <a:masterClrMapping/>
+  </p:clrMapOvr>
+</p:sld>
+</file>
+
+<file path=ppt/slides/slide39.xml><?xml version="1.0" encoding="utf-8"?>
+<p:sld xmlns:a="http://schemas.openxmlformats.org/drawingml/2006/main" xmlns:p="http://schemas.openxmlformats.org/presentationml/2006/main" xmlns:r="http://schemas.openxmlformats.org/officeDocument/2006/relationships">
+  <p:cSld>
+    <p:spTree>
+      <p:nvGrpSpPr>
+        <p:cNvPr id="1" name=""/>
+        <p:cNvGrpSpPr/>
+        <p:nvPr/>
+      </p:nvGrpSpPr>
+      <p:grpSpPr/>
+      <p:sp>
+        <p:nvSpPr>
+          <p:cNvPr id="2" name="Title 1"/>
+          <p:cNvSpPr>
+            <a:spLocks noGrp="1"/>
+          </p:cNvSpPr>
+          <p:nvPr>
+            <p:ph type="title"/>
+          </p:nvPr>
+        </p:nvSpPr>
+        <p:spPr/>
+        <p:txBody>
+          <a:bodyPr/>
+          <a:lstStyle/>
+          <a:p>
+            <a:r>
+              <a:rPr sz="3800" b="1">
+                <a:solidFill>
+                  <a:srgbClr val="1F2A37"/>
+                </a:solidFill>
+              </a:rPr>
+              <a:t>Checkpoint: the model list</a:t>
+            </a:r>
+          </a:p>
+        </p:txBody>
+      </p:sp>
+      <p:sp>
+        <p:nvSpPr>
+          <p:cNvPr id="3" name="TextBox 2"/>
+          <p:cNvSpPr txBox="1"/>
+          <p:nvPr/>
+        </p:nvSpPr>
+        <p:spPr>
+          <a:xfrm>
+            <a:off x="868680" y="502920"/>
+            <a:ext cx="5486400" cy="457200"/>
+          </a:xfrm>
+          <a:prstGeom prst="rect">
+            <a:avLst/>
+          </a:prstGeom>
+          <a:noFill/>
+        </p:spPr>
+        <p:txBody>
+          <a:bodyPr wrap="none">
+            <a:spAutoFit/>
+          </a:bodyPr>
+          <a:lstStyle/>
+          <a:p>
+            <a:r>
+              <a:rPr sz="1500" b="1">
+                <a:solidFill>
+                  <a:srgbClr val="01AEFD"/>
+                </a:solidFill>
+              </a:rPr>
+              <a:t>CHECKPOINT - RUN IT</a:t>
+            </a:r>
+          </a:p>
+        </p:txBody>
+      </p:sp>
+      <p:sp>
+        <p:nvSpPr>
+          <p:cNvPr id="4" name="TextBox 3"/>
+          <p:cNvSpPr txBox="1"/>
+          <p:nvPr/>
+        </p:nvSpPr>
+        <p:spPr>
+          <a:xfrm>
+            <a:off x="822960" y="1828800"/>
+            <a:ext cx="10515600" cy="4206240"/>
+          </a:xfrm>
+          <a:prstGeom prst="rect">
+            <a:avLst/>
+          </a:prstGeom>
+          <a:noFill/>
+        </p:spPr>
+        <p:txBody>
+          <a:bodyPr wrap="square">
+            <a:spAutoFit/>
+          </a:bodyPr>
+          <a:lstStyle/>
+          <a:p>
+            <a:pPr>
+              <a:spcAft>
+                <a:spcPts val="1400"/>
+              </a:spcAft>
+            </a:pPr>
+            <a:r>
+              <a:rPr sz="2800">
+                <a:solidFill>
+                  <a:srgbClr val="01AEFD"/>
+                </a:solidFill>
+              </a:rPr>
+              <a:t>Press Run and open the Console panel. You should see the list of models the server offers. That list comes from the school AI, so this one needs the school network.</a:t>
+            </a:r>
+          </a:p>
+          <a:p>
+            <a:pPr>
+              <a:spcAft>
+                <a:spcPts val="1400"/>
+              </a:spcAft>
+            </a:pPr>
+            <a:r>
+              <a:rPr sz="2400">
+                <a:solidFill>
+                  <a:srgbClr val="1F2A37"/>
+                </a:solidFill>
+              </a:rPr>
+              <a:t>• Run it in the classroom, or press Show the output in the web deck.</a:t>
+            </a:r>
+          </a:p>
+          <a:p>
+            <a:pPr>
+              <a:spcAft>
+                <a:spcPts val="1400"/>
+              </a:spcAft>
+            </a:pPr>
+            <a:r>
+              <a:rPr sz="2400">
+                <a:solidFill>
+                  <a:srgbClr val="1F2A37"/>
+                </a:solidFill>
+              </a:rPr>
+              <a:t>• Everyone's screen should match this.</a:t>
             </a:r>
           </a:p>
         </p:txBody>
@@ -8280,6 +9576,118 @@
                 </a:solidFill>
               </a:rPr>
               <a:t>Your key is your identity. Two people on one key share one speed limit.</a:t>
+            </a:r>
+          </a:p>
+        </p:txBody>
+      </p:sp>
+    </p:spTree>
+  </p:cSld>
+  <p:clrMapOvr>
+    <a:masterClrMapping/>
+  </p:clrMapOvr>
+</p:sld>
+</file>
+
+<file path=ppt/slides/slide40.xml><?xml version="1.0" encoding="utf-8"?>
+<p:sld xmlns:a="http://schemas.openxmlformats.org/drawingml/2006/main" xmlns:p="http://schemas.openxmlformats.org/presentationml/2006/main" xmlns:r="http://schemas.openxmlformats.org/officeDocument/2006/relationships">
+  <p:cSld>
+    <p:spTree>
+      <p:nvGrpSpPr>
+        <p:cNvPr id="1" name=""/>
+        <p:cNvGrpSpPr/>
+        <p:nvPr/>
+      </p:nvGrpSpPr>
+      <p:grpSpPr/>
+      <p:sp>
+        <p:nvSpPr>
+          <p:cNvPr id="2" name="Title 1"/>
+          <p:cNvSpPr>
+            <a:spLocks noGrp="1"/>
+          </p:cNvSpPr>
+          <p:nvPr>
+            <p:ph type="title"/>
+          </p:nvPr>
+        </p:nvSpPr>
+        <p:spPr/>
+        <p:txBody>
+          <a:bodyPr/>
+          <a:lstStyle/>
+          <a:p>
+            <a:r>
+              <a:rPr sz="3800" b="1">
+                <a:solidFill>
+                  <a:srgbClr val="1F2A37"/>
+                </a:solidFill>
+              </a:rPr>
+              <a:t>Watch the Console</a:t>
+            </a:r>
+          </a:p>
+        </p:txBody>
+      </p:sp>
+      <p:sp>
+        <p:nvSpPr>
+          <p:cNvPr id="3" name="TextBox 2"/>
+          <p:cNvSpPr txBox="1"/>
+          <p:nvPr/>
+        </p:nvSpPr>
+        <p:spPr>
+          <a:xfrm>
+            <a:off x="822960" y="1828800"/>
+            <a:ext cx="10515600" cy="4206240"/>
+          </a:xfrm>
+          <a:prstGeom prst="rect">
+            <a:avLst/>
+          </a:prstGeom>
+          <a:noFill/>
+        </p:spPr>
+        <p:txBody>
+          <a:bodyPr wrap="square">
+            <a:spAutoFit/>
+          </a:bodyPr>
+          <a:lstStyle/>
+          <a:p>
+            <a:pPr>
+              <a:spcAft>
+                <a:spcPts val="1400"/>
+              </a:spcAft>
+            </a:pPr>
+            <a:r>
+              <a:rPr sz="2400">
+                <a:solidFill>
+                  <a:srgbClr val="1F2A37"/>
+                </a:solidFill>
+              </a:rPr>
+              <a:t>• -&gt; GET /v1/models</a:t>
+            </a:r>
+          </a:p>
+          <a:p>
+            <a:pPr>
+              <a:spcAft>
+                <a:spcPts val="1400"/>
+              </a:spcAft>
+            </a:pPr>
+            <a:r>
+              <a:rPr sz="2400">
+                <a:solidFill>
+                  <a:srgbClr val="1F2A37"/>
+                </a:solidFill>
+              </a:rPr>
+              <a:t>• &lt;- 200 in 84 ms</a:t>
+            </a:r>
+          </a:p>
+          <a:p>
+            <a:pPr>
+              <a:spcAft>
+                <a:spcPts val="1400"/>
+              </a:spcAft>
+            </a:pPr>
+            <a:r>
+              <a:rPr sz="2400">
+                <a:solidFill>
+                  <a:srgbClr val="1F2A37"/>
+                </a:solidFill>
+              </a:rPr>
+              <a:t>• That is your request leaving and coming back</a:t>
             </a:r>
           </a:p>
         </p:txBody>
